--- a/ppt/b2g_day1_setup.pptx
+++ b/ppt/b2g_day1_setup.pptx
@@ -3753,137 +3753,32 @@
           </a:p>
         </p:txBody>
       </p:sp>
-      <p:sp>
-        <p:nvSpPr>
-          <p:cNvPr id="6" name="Shape 4"/>
-          <p:cNvSpPr/>
-          <p:nvPr/>
-        </p:nvSpPr>
+      <p:pic>
+        <p:nvPicPr>
+          <p:cNvPr id="6" name="Image 0" descr="/Users/sujinpark/b2b-lecture-note/20260512_inflearn_B2G_dataanalysis/assets/screenshots/day1/before_after_demo.png">    </p:cNvPr>
+          <p:cNvPicPr>
+            <a:picLocks noChangeAspect="1"/>
+          </p:cNvPicPr>
+          <p:nvPr/>
+        </p:nvPicPr>
+        <p:blipFill>
+          <a:blip r:embed="rId1"/>
+          <a:srcRect l="0" r="0" t="0" b="0"/>
+          <a:stretch/>
+        </p:blipFill>
         <p:spPr>
           <a:xfrm>
             <a:off x="2194560" y="2240280"/>
             <a:ext cx="7772400" cy="3657600"/>
           </a:xfrm>
-          <a:prstGeom prst="roundRect">
-            <a:avLst>
-              <a:gd name="adj" fmla="val 3000"/>
-            </a:avLst>
-          </a:prstGeom>
-          <a:solidFill>
-            <a:srgbClr val="F5F7FA"/>
-          </a:solidFill>
-          <a:ln w="12700">
-            <a:solidFill>
-              <a:srgbClr val="CBD5E0"/>
-            </a:solidFill>
-            <a:prstDash val="dash"/>
-          </a:ln>
-        </p:spPr>
-      </p:sp>
-      <p:sp>
-        <p:nvSpPr>
-          <p:cNvPr id="7" name="Text 5"/>
-          <p:cNvSpPr/>
-          <p:nvPr/>
-        </p:nvSpPr>
-        <p:spPr>
-          <a:xfrm>
-            <a:off x="2194560" y="3703320"/>
-            <a:ext cx="7772400" cy="731520"/>
-          </a:xfrm>
-          <a:prstGeom prst="rect">
-            <a:avLst/>
-          </a:prstGeom>
-          <a:noFill/>
-          <a:ln/>
-        </p:spPr>
-        <p:txBody>
-          <a:bodyPr wrap="square" rtlCol="0" anchor="ctr"/>
-          <a:lstStyle/>
-          <a:p>
-            <a:pPr algn="ctr" indent="0" marL="0">
-              <a:lnSpc>
-                <a:spcPct val="140000"/>
-              </a:lnSpc>
-              <a:buNone/>
-            </a:pPr>
-            <a:r>
-              <a:rPr lang="en-US" sz="1400" i="1" dirty="0">
-                <a:solidFill>
-                  <a:srgbClr val="718096"/>
-                </a:solidFill>
-                <a:latin typeface="Noto Sans KR" pitchFamily="34" charset="0"/>
-                <a:ea typeface="Noto Sans KR" pitchFamily="34" charset="-122"/>
-                <a:cs typeface="Noto Sans KR" pitchFamily="34" charset="-120"/>
-              </a:rPr>
-              <a:t>📷  결과 이미지 위치</a:t>
-            </a:r>
-            <a:endParaRPr lang="en-US" sz="1400" dirty="0"/>
-          </a:p>
-          <a:p>
-            <a:pPr algn="ctr" indent="0" marL="0">
-              <a:lnSpc>
-                <a:spcPct val="140000"/>
-              </a:lnSpc>
-              <a:buNone/>
-            </a:pPr>
-            <a:r>
-              <a:rPr lang="en-US" sz="1400" i="1" dirty="0">
-                <a:solidFill>
-                  <a:srgbClr val="718096"/>
-                </a:solidFill>
-                <a:latin typeface="Noto Sans KR" pitchFamily="34" charset="0"/>
-                <a:ea typeface="Noto Sans KR" pitchFamily="34" charset="-122"/>
-                <a:cs typeface="Noto Sans KR" pitchFamily="34" charset="-120"/>
-              </a:rPr>
-              <a:t>(강의 시연 캡처가 들어갈 자리)</a:t>
-            </a:r>
-            <a:endParaRPr lang="en-US" sz="1400" dirty="0"/>
-          </a:p>
-        </p:txBody>
-      </p:sp>
-      <p:sp>
-        <p:nvSpPr>
-          <p:cNvPr id="8" name="Text 6"/>
-          <p:cNvSpPr/>
-          <p:nvPr/>
-        </p:nvSpPr>
-        <p:spPr>
-          <a:xfrm>
-            <a:off x="2194560" y="4983480"/>
-            <a:ext cx="7772400" cy="365760"/>
-          </a:xfrm>
-          <a:prstGeom prst="rect">
-            <a:avLst/>
-          </a:prstGeom>
-          <a:noFill/>
-          <a:ln/>
-        </p:spPr>
-        <p:txBody>
-          <a:bodyPr wrap="square" rtlCol="0" anchor="ctr"/>
-          <a:lstStyle/>
-          <a:p>
-            <a:pPr algn="ctr" indent="0" marL="0">
-              <a:buNone/>
-            </a:pPr>
-            <a:r>
-              <a:rPr lang="en-US" sz="1000" i="1" dirty="0">
-                <a:solidFill>
-                  <a:srgbClr val="718096"/>
-                </a:solidFill>
-                <a:latin typeface="Roboto Mono" pitchFamily="34" charset="0"/>
-                <a:ea typeface="Roboto Mono" pitchFamily="34" charset="-122"/>
-                <a:cs typeface="Roboto Mono" pitchFamily="34" charset="-120"/>
-              </a:rPr>
-              <a:t>screenshots/day1/before_after_demo.png</a:t>
-            </a:r>
-            <a:endParaRPr lang="en-US" sz="1000" dirty="0"/>
-          </a:p>
-        </p:txBody>
-      </p:sp>
-      <p:sp>
-        <p:nvSpPr>
-          <p:cNvPr id="9" name="Text 7"/>
+          <a:prstGeom prst="rect">
+            <a:avLst/>
+          </a:prstGeom>
+        </p:spPr>
+      </p:pic>
+      <p:sp>
+        <p:nvSpPr>
+          <p:cNvPr id="7" name="Text 4"/>
           <p:cNvSpPr/>
           <p:nvPr/>
         </p:nvSpPr>
@@ -3922,7 +3817,7 @@
       </p:sp>
       <p:sp>
         <p:nvSpPr>
-          <p:cNvPr id="10" name="Text 8"/>
+          <p:cNvPr id="8" name="Text 5"/>
           <p:cNvSpPr/>
           <p:nvPr/>
         </p:nvSpPr>
@@ -4447,7 +4342,7 @@
                 <a:ea typeface="Noto Sans KR" pitchFamily="34" charset="-122"/>
                 <a:cs typeface="Noto Sans KR" pitchFamily="34" charset="-120"/>
               </a:rPr>
-              <a:t>1단계 — Claude Desktop 앱 켜기</a:t>
+              <a:t>1단계 — Claude Desktop App 설치하기</a:t>
             </a:r>
             <a:endParaRPr lang="en-US" sz="4200" dirty="0"/>
           </a:p>
@@ -4512,7 +4407,7 @@
                 <a:ea typeface="Noto Sans KR" pitchFamily="34" charset="-122"/>
                 <a:cs typeface="Noto Sans KR" pitchFamily="34" charset="-120"/>
               </a:rPr>
-              <a:t>· 앱 실행 → Pro/Max 계정 로그인</a:t>
+              <a:t>· https://claude.ai/download 에서 본인 OS용 다운로드 → 설치 → 실행</a:t>
             </a:r>
             <a:endParaRPr lang="en-US" sz="1700" dirty="0"/>
           </a:p>
@@ -4532,7 +4427,7 @@
                 <a:ea typeface="Noto Sans KR" pitchFamily="34" charset="-122"/>
                 <a:cs typeface="Noto Sans KR" pitchFamily="34" charset="-120"/>
               </a:rPr>
-              <a:t>· 새 대화 창 열기</a:t>
+              <a:t>· Pro/Max 계정으로 로그인</a:t>
             </a:r>
             <a:endParaRPr lang="en-US" sz="1700" dirty="0"/>
           </a:p>
@@ -4552,36 +4447,7 @@
                 <a:ea typeface="Noto Sans KR" pitchFamily="34" charset="-122"/>
                 <a:cs typeface="Noto Sans KR" pitchFamily="34" charset="-120"/>
               </a:rPr>
-              <a:t>· "이 앱이 우리 작업 파트너입니다. 명령어 외울 필요 없어요."</a:t>
-            </a:r>
-            <a:endParaRPr lang="en-US" sz="1700" dirty="0"/>
-          </a:p>
-          <a:p>
-            <a:pPr indent="0" marL="0">
-              <a:lnSpc>
-                <a:spcPct val="155000"/>
-              </a:lnSpc>
-              <a:buNone/>
-            </a:pPr>
-            <a:endParaRPr lang="en-US" sz="1700" dirty="0"/>
-          </a:p>
-          <a:p>
-            <a:pPr indent="0" marL="0">
-              <a:lnSpc>
-                <a:spcPct val="155000"/>
-              </a:lnSpc>
-              <a:buNone/>
-            </a:pPr>
-            <a:r>
-              <a:rPr lang="en-US" sz="1700" dirty="0">
-                <a:solidFill>
-                  <a:srgbClr val="4A5568"/>
-                </a:solidFill>
-                <a:latin typeface="Noto Sans KR" pitchFamily="34" charset="0"/>
-                <a:ea typeface="Noto Sans KR" pitchFamily="34" charset="-122"/>
-                <a:cs typeface="Noto Sans KR" pitchFamily="34" charset="-120"/>
-              </a:rPr>
-              <a:t>· 사전 준비: claude.ai/download 에서 앱 설치 + Pro/Max 로그인</a:t>
+              <a:t>· 좌측 사이드바에 "Code" 항목이 보이는지 확인 (없으면 앱 업데이트)</a:t>
             </a:r>
             <a:endParaRPr lang="en-US" sz="1700" dirty="0"/>
           </a:p>
@@ -4719,7 +4585,7 @@
         <p:spPr>
           <a:xfrm>
             <a:off x="548640" y="960120"/>
-            <a:ext cx="11091672" cy="292608"/>
+            <a:ext cx="10515600" cy="292608"/>
           </a:xfrm>
           <a:prstGeom prst="rect">
             <a:avLst/>
@@ -4735,7 +4601,7 @@
               <a:buNone/>
             </a:pPr>
             <a:r>
-              <a:rPr lang="en-US" sz="1100" b="1" spc="50" kern="0" dirty="0">
+              <a:rPr lang="en-US" sz="1100" b="1" spc="150" kern="0" dirty="0">
                 <a:solidFill>
                   <a:srgbClr val="4A7BF7"/>
                 </a:solidFill>
@@ -4743,7 +4609,7 @@
                 <a:ea typeface="Noto Sans KR" pitchFamily="34" charset="-122"/>
                 <a:cs typeface="Noto Sans KR" pitchFamily="34" charset="-120"/>
               </a:rPr>
-              <a:t>💬 함께 볼 시연 프롬프트 — 따라 치지 않으셔도 됩니다</a:t>
+              <a:t>섹션 2 / 4</a:t>
             </a:r>
             <a:endParaRPr lang="en-US" sz="1100" dirty="0"/>
           </a:p>
@@ -4758,7 +4624,7 @@
         <p:spPr>
           <a:xfrm>
             <a:off x="548640" y="1508760"/>
-            <a:ext cx="11091672" cy="1005840"/>
+            <a:ext cx="11091672" cy="1371600"/>
           </a:xfrm>
           <a:prstGeom prst="rect">
             <a:avLst/>
@@ -4772,12 +4638,12 @@
           <a:p>
             <a:pPr indent="0" marL="0">
               <a:lnSpc>
-                <a:spcPct val="115000"/>
+                <a:spcPct val="110000"/>
               </a:lnSpc>
               <a:buNone/>
             </a:pPr>
             <a:r>
-              <a:rPr lang="en-US" sz="3400" b="1" spc="-50" kern="0" dirty="0">
+              <a:rPr lang="en-US" sz="4200" b="1" spc="-50" kern="0" dirty="0">
                 <a:solidFill>
                   <a:srgbClr val="1A1F36"/>
                 </a:solidFill>
@@ -4785,9 +4651,9 @@
                 <a:ea typeface="Noto Sans KR" pitchFamily="34" charset="-122"/>
                 <a:cs typeface="Noto Sans KR" pitchFamily="34" charset="-120"/>
               </a:rPr>
-              <a:t>2단계 — Claude Desktop에 자연어로 설치 부탁</a:t>
-            </a:r>
-            <a:endParaRPr lang="en-US" sz="3400" dirty="0"/>
+              <a:t>2단계 — 바탕화면에 작업 폴더 만들기</a:t>
+            </a:r>
+            <a:endParaRPr lang="en-US" sz="4200" dirty="0"/>
           </a:p>
         </p:txBody>
       </p:sp>
@@ -4799,7 +4665,7 @@
         </p:nvSpPr>
         <p:spPr>
           <a:xfrm>
-            <a:off x="548640" y="2606040"/>
+            <a:off x="548640" y="2971800"/>
             <a:ext cx="1828800" cy="0"/>
           </a:xfrm>
           <a:prstGeom prst="line">
@@ -4816,136 +4682,109 @@
       </p:sp>
       <p:sp>
         <p:nvSpPr>
-          <p:cNvPr id="7" name="Shape 5"/>
-          <p:cNvSpPr/>
-          <p:nvPr/>
-        </p:nvSpPr>
-        <p:spPr>
-          <a:xfrm>
-            <a:off x="548640" y="2926080"/>
-            <a:ext cx="11091672" cy="3200400"/>
-          </a:xfrm>
-          <a:prstGeom prst="roundRect">
-            <a:avLst>
-              <a:gd name="adj" fmla="val 1714"/>
-            </a:avLst>
-          </a:prstGeom>
-          <a:solidFill>
-            <a:srgbClr val="F1F5F9"/>
-          </a:solidFill>
-          <a:ln w="6350">
-            <a:solidFill>
-              <a:srgbClr val="E2E8F0"/>
-            </a:solidFill>
-            <a:prstDash val="solid"/>
-          </a:ln>
-        </p:spPr>
+          <p:cNvPr id="7" name="Text 5"/>
+          <p:cNvSpPr/>
+          <p:nvPr/>
+        </p:nvSpPr>
+        <p:spPr>
+          <a:xfrm>
+            <a:off x="548640" y="3200400"/>
+            <a:ext cx="11091672" cy="2788920"/>
+          </a:xfrm>
+          <a:prstGeom prst="rect">
+            <a:avLst/>
+          </a:prstGeom>
+          <a:noFill/>
+          <a:ln/>
+        </p:spPr>
+        <p:txBody>
+          <a:bodyPr wrap="square" rtlCol="0" anchor="t"/>
+          <a:lstStyle/>
+          <a:p>
+            <a:pPr indent="0" marL="0">
+              <a:lnSpc>
+                <a:spcPct val="155000"/>
+              </a:lnSpc>
+              <a:buNone/>
+            </a:pPr>
+            <a:r>
+              <a:rPr lang="en-US" sz="1700" dirty="0">
+                <a:solidFill>
+                  <a:srgbClr val="4A5568"/>
+                </a:solidFill>
+                <a:latin typeface="Noto Sans KR" pitchFamily="34" charset="0"/>
+                <a:ea typeface="Noto Sans KR" pitchFamily="34" charset="-122"/>
+                <a:cs typeface="Noto Sans KR" pitchFamily="34" charset="-120"/>
+              </a:rPr>
+              <a:t>· 폴더 이름: inflearn_ccd_challenge (강의용 통일)</a:t>
+            </a:r>
+            <a:endParaRPr lang="en-US" sz="1700" dirty="0"/>
+          </a:p>
+          <a:p>
+            <a:pPr indent="0" marL="0">
+              <a:lnSpc>
+                <a:spcPct val="155000"/>
+              </a:lnSpc>
+              <a:buNone/>
+            </a:pPr>
+            <a:r>
+              <a:rPr lang="en-US" sz="1700" dirty="0">
+                <a:solidFill>
+                  <a:srgbClr val="4A5568"/>
+                </a:solidFill>
+                <a:latin typeface="Noto Sans KR" pitchFamily="34" charset="0"/>
+                <a:ea typeface="Noto Sans KR" pitchFamily="34" charset="-122"/>
+                <a:cs typeface="Noto Sans KR" pitchFamily="34" charset="-120"/>
+              </a:rPr>
+              <a:t>· 위치: 바탕화면 (찾기 쉬운 곳이면 어디든)</a:t>
+            </a:r>
+            <a:endParaRPr lang="en-US" sz="1700" dirty="0"/>
+          </a:p>
+          <a:p>
+            <a:pPr indent="0" marL="0">
+              <a:lnSpc>
+                <a:spcPct val="155000"/>
+              </a:lnSpc>
+              <a:buNone/>
+            </a:pPr>
+            <a:r>
+              <a:rPr lang="en-US" sz="1700" dirty="0">
+                <a:solidFill>
+                  <a:srgbClr val="4A5568"/>
+                </a:solidFill>
+                <a:latin typeface="Noto Sans KR" pitchFamily="34" charset="0"/>
+                <a:ea typeface="Noto Sans KR" pitchFamily="34" charset="-122"/>
+                <a:cs typeface="Noto Sans KR" pitchFamily="34" charset="-120"/>
+              </a:rPr>
+              <a:t>· 이 폴더 하나가 4회차 내내 작업 폴더</a:t>
+            </a:r>
+            <a:endParaRPr lang="en-US" sz="1700" dirty="0"/>
+          </a:p>
+          <a:p>
+            <a:pPr indent="0" marL="0">
+              <a:lnSpc>
+                <a:spcPct val="155000"/>
+              </a:lnSpc>
+              <a:buNone/>
+            </a:pPr>
+            <a:r>
+              <a:rPr lang="en-US" sz="1700" dirty="0">
+                <a:solidFill>
+                  <a:srgbClr val="4A5568"/>
+                </a:solidFill>
+                <a:latin typeface="Noto Sans KR" pitchFamily="34" charset="0"/>
+                <a:ea typeface="Noto Sans KR" pitchFamily="34" charset="-122"/>
+                <a:cs typeface="Noto Sans KR" pitchFamily="34" charset="-120"/>
+              </a:rPr>
+              <a:t>  — 데이터·CLAUDE.md·산출물 모두 여기</a:t>
+            </a:r>
+            <a:endParaRPr lang="en-US" sz="1700" dirty="0"/>
+          </a:p>
+        </p:txBody>
       </p:sp>
       <p:sp>
         <p:nvSpPr>
           <p:cNvPr id="8" name="Text 6"/>
-          <p:cNvSpPr/>
-          <p:nvPr/>
-        </p:nvSpPr>
-        <p:spPr>
-          <a:xfrm>
-            <a:off x="713232" y="3035808"/>
-            <a:ext cx="10762488" cy="2980944"/>
-          </a:xfrm>
-          <a:prstGeom prst="rect">
-            <a:avLst/>
-          </a:prstGeom>
-          <a:noFill/>
-          <a:ln/>
-        </p:spPr>
-        <p:txBody>
-          <a:bodyPr wrap="square" rtlCol="0" anchor="t"/>
-          <a:lstStyle/>
-          <a:p>
-            <a:pPr indent="0" marL="0">
-              <a:lnSpc>
-                <a:spcPct val="140000"/>
-              </a:lnSpc>
-              <a:buNone/>
-            </a:pPr>
-            <a:r>
-              <a:rPr lang="en-US" sz="1150" dirty="0">
-                <a:solidFill>
-                  <a:srgbClr val="1A1F36"/>
-                </a:solidFill>
-                <a:latin typeface="Roboto Mono" pitchFamily="34" charset="0"/>
-                <a:ea typeface="Roboto Mono" pitchFamily="34" charset="-122"/>
-                <a:cs typeface="Roboto Mono" pitchFamily="34" charset="-120"/>
-              </a:rPr>
-              <a:t>내 노트북에 Claude Code를 설치하고 싶어.</a:t>
-            </a:r>
-            <a:endParaRPr lang="en-US" sz="1150" dirty="0"/>
-          </a:p>
-          <a:p>
-            <a:pPr indent="0" marL="0">
-              <a:lnSpc>
-                <a:spcPct val="140000"/>
-              </a:lnSpc>
-              <a:buNone/>
-            </a:pPr>
-            <a:r>
-              <a:rPr lang="en-US" sz="1150" dirty="0">
-                <a:solidFill>
-                  <a:srgbClr val="1A1F36"/>
-                </a:solidFill>
-                <a:latin typeface="Roboto Mono" pitchFamily="34" charset="0"/>
-                <a:ea typeface="Roboto Mono" pitchFamily="34" charset="-122"/>
-                <a:cs typeface="Roboto Mono" pitchFamily="34" charset="-120"/>
-              </a:rPr>
-              <a:t>필요한 사전 준비(Node.js 등)도 같이 해줘.</a:t>
-            </a:r>
-            <a:endParaRPr lang="en-US" sz="1150" dirty="0"/>
-          </a:p>
-          <a:p>
-            <a:pPr indent="0" marL="0">
-              <a:lnSpc>
-                <a:spcPct val="140000"/>
-              </a:lnSpc>
-              <a:buNone/>
-            </a:pPr>
-            <a:r>
-              <a:rPr lang="en-US" sz="1150" dirty="0">
-                <a:solidFill>
-                  <a:srgbClr val="1A1F36"/>
-                </a:solidFill>
-                <a:latin typeface="Roboto Mono" pitchFamily="34" charset="0"/>
-                <a:ea typeface="Roboto Mono" pitchFamily="34" charset="-122"/>
-                <a:cs typeface="Roboto Mono" pitchFamily="34" charset="-120"/>
-              </a:rPr>
-              <a:t>설치가 끝나면 터미널에서 claude 명령어가 실행되는지 확인해줘.</a:t>
-            </a:r>
-            <a:endParaRPr lang="en-US" sz="1150" dirty="0"/>
-          </a:p>
-          <a:p>
-            <a:pPr indent="0" marL="0">
-              <a:lnSpc>
-                <a:spcPct val="140000"/>
-              </a:lnSpc>
-              <a:buNone/>
-            </a:pPr>
-            <a:r>
-              <a:rPr lang="en-US" sz="1150" dirty="0">
-                <a:solidFill>
-                  <a:srgbClr val="1A1F36"/>
-                </a:solidFill>
-                <a:latin typeface="Roboto Mono" pitchFamily="34" charset="0"/>
-                <a:ea typeface="Roboto Mono" pitchFamily="34" charset="-122"/>
-                <a:cs typeface="Roboto Mono" pitchFamily="34" charset="-120"/>
-              </a:rPr>
-              <a:t>운영체제는 [Mac / Windows] 야.</a:t>
-            </a:r>
-            <a:endParaRPr lang="en-US" sz="1150" dirty="0"/>
-          </a:p>
-        </p:txBody>
-      </p:sp>
-      <p:sp>
-        <p:nvSpPr>
-          <p:cNvPr id="9" name="Text 7"/>
           <p:cNvSpPr/>
           <p:nvPr/>
         </p:nvSpPr>
@@ -5075,7 +4914,7 @@
         <p:spPr>
           <a:xfrm>
             <a:off x="548640" y="960120"/>
-            <a:ext cx="11091672" cy="292608"/>
+            <a:ext cx="10515600" cy="292608"/>
           </a:xfrm>
           <a:prstGeom prst="rect">
             <a:avLst/>
@@ -5091,7 +4930,7 @@
               <a:buNone/>
             </a:pPr>
             <a:r>
-              <a:rPr lang="en-US" sz="1100" b="1" spc="50" kern="0" dirty="0">
+              <a:rPr lang="en-US" sz="1100" b="1" spc="150" kern="0" dirty="0">
                 <a:solidFill>
                   <a:srgbClr val="4A7BF7"/>
                 </a:solidFill>
@@ -5099,7 +4938,7 @@
                 <a:ea typeface="Noto Sans KR" pitchFamily="34" charset="-122"/>
                 <a:cs typeface="Noto Sans KR" pitchFamily="34" charset="-120"/>
               </a:rPr>
-              <a:t>💬 함께 볼 시연 프롬프트 — 따라 치지 않으셔도 됩니다</a:t>
+              <a:t>섹션 3 / 4</a:t>
             </a:r>
             <a:endParaRPr lang="en-US" sz="1100" dirty="0"/>
           </a:p>
@@ -5114,7 +4953,7 @@
         <p:spPr>
           <a:xfrm>
             <a:off x="548640" y="1508760"/>
-            <a:ext cx="11091672" cy="1005840"/>
+            <a:ext cx="11091672" cy="1371600"/>
           </a:xfrm>
           <a:prstGeom prst="rect">
             <a:avLst/>
@@ -5128,12 +4967,12 @@
           <a:p>
             <a:pPr indent="0" marL="0">
               <a:lnSpc>
-                <a:spcPct val="115000"/>
+                <a:spcPct val="110000"/>
               </a:lnSpc>
               <a:buNone/>
             </a:pPr>
             <a:r>
-              <a:rPr lang="en-US" sz="3400" b="1" spc="-50" kern="0" dirty="0">
+              <a:rPr lang="en-US" sz="4200" b="1" spc="-50" kern="0" dirty="0">
                 <a:solidFill>
                   <a:srgbClr val="1A1F36"/>
                 </a:solidFill>
@@ -5141,9 +4980,9 @@
                 <a:ea typeface="Noto Sans KR" pitchFamily="34" charset="-122"/>
                 <a:cs typeface="Noto Sans KR" pitchFamily="34" charset="-120"/>
               </a:rPr>
-              <a:t>3단계 — 작업 폴더 만들고 claude 첫 실행</a:t>
-            </a:r>
-            <a:endParaRPr lang="en-US" sz="3400" dirty="0"/>
+              <a:t>3단계 — 데스크톱 앱에서 Claude Code 설치</a:t>
+            </a:r>
+            <a:endParaRPr lang="en-US" sz="4200" dirty="0"/>
           </a:p>
         </p:txBody>
       </p:sp>
@@ -5155,7 +4994,7 @@
         </p:nvSpPr>
         <p:spPr>
           <a:xfrm>
-            <a:off x="548640" y="2606040"/>
+            <a:off x="548640" y="2971800"/>
             <a:ext cx="1828800" cy="0"/>
           </a:xfrm>
           <a:prstGeom prst="line">
@@ -5172,116 +5011,129 @@
       </p:sp>
       <p:sp>
         <p:nvSpPr>
-          <p:cNvPr id="7" name="Shape 5"/>
-          <p:cNvSpPr/>
-          <p:nvPr/>
-        </p:nvSpPr>
-        <p:spPr>
-          <a:xfrm>
-            <a:off x="548640" y="2926080"/>
-            <a:ext cx="11091672" cy="3200400"/>
-          </a:xfrm>
-          <a:prstGeom prst="roundRect">
-            <a:avLst>
-              <a:gd name="adj" fmla="val 1714"/>
-            </a:avLst>
-          </a:prstGeom>
-          <a:solidFill>
-            <a:srgbClr val="F1F5F9"/>
-          </a:solidFill>
-          <a:ln w="6350">
-            <a:solidFill>
-              <a:srgbClr val="E2E8F0"/>
-            </a:solidFill>
-            <a:prstDash val="solid"/>
-          </a:ln>
-        </p:spPr>
+          <p:cNvPr id="7" name="Text 5"/>
+          <p:cNvSpPr/>
+          <p:nvPr/>
+        </p:nvSpPr>
+        <p:spPr>
+          <a:xfrm>
+            <a:off x="548640" y="3200400"/>
+            <a:ext cx="11091672" cy="2788920"/>
+          </a:xfrm>
+          <a:prstGeom prst="rect">
+            <a:avLst/>
+          </a:prstGeom>
+          <a:noFill/>
+          <a:ln/>
+        </p:spPr>
+        <p:txBody>
+          <a:bodyPr wrap="square" rtlCol="0" anchor="t"/>
+          <a:lstStyle/>
+          <a:p>
+            <a:pPr indent="0" marL="0">
+              <a:lnSpc>
+                <a:spcPct val="155000"/>
+              </a:lnSpc>
+              <a:buNone/>
+            </a:pPr>
+            <a:r>
+              <a:rPr lang="en-US" sz="1700" dirty="0">
+                <a:solidFill>
+                  <a:srgbClr val="4A5568"/>
+                </a:solidFill>
+                <a:latin typeface="Noto Sans KR" pitchFamily="34" charset="0"/>
+                <a:ea typeface="Noto Sans KR" pitchFamily="34" charset="-122"/>
+                <a:cs typeface="Noto Sans KR" pitchFamily="34" charset="-120"/>
+              </a:rPr>
+              <a:t>· Claude Desktop 좌측 메뉴에서 "Code" 클릭</a:t>
+            </a:r>
+            <a:endParaRPr lang="en-US" sz="1700" dirty="0"/>
+          </a:p>
+          <a:p>
+            <a:pPr indent="0" marL="0">
+              <a:lnSpc>
+                <a:spcPct val="155000"/>
+              </a:lnSpc>
+              <a:buNone/>
+            </a:pPr>
+            <a:r>
+              <a:rPr lang="en-US" sz="1700" dirty="0">
+                <a:solidFill>
+                  <a:srgbClr val="4A5568"/>
+                </a:solidFill>
+                <a:latin typeface="Noto Sans KR" pitchFamily="34" charset="0"/>
+                <a:ea typeface="Noto Sans KR" pitchFamily="34" charset="-122"/>
+                <a:cs typeface="Noto Sans KR" pitchFamily="34" charset="-120"/>
+              </a:rPr>
+              <a:t>· 작업 폴더로 inflearn_ccd_challenge 지정</a:t>
+            </a:r>
+            <a:endParaRPr lang="en-US" sz="1700" dirty="0"/>
+          </a:p>
+          <a:p>
+            <a:pPr indent="0" marL="0">
+              <a:lnSpc>
+                <a:spcPct val="155000"/>
+              </a:lnSpc>
+              <a:buNone/>
+            </a:pPr>
+            <a:r>
+              <a:rPr lang="en-US" sz="1700" dirty="0">
+                <a:solidFill>
+                  <a:srgbClr val="4A5568"/>
+                </a:solidFill>
+                <a:latin typeface="Noto Sans KR" pitchFamily="34" charset="0"/>
+                <a:ea typeface="Noto Sans KR" pitchFamily="34" charset="-122"/>
+                <a:cs typeface="Noto Sans KR" pitchFamily="34" charset="-120"/>
+              </a:rPr>
+              <a:t>· 앱 안내에 따라 Claude Code 설치 진행</a:t>
+            </a:r>
+            <a:endParaRPr lang="en-US" sz="1700" dirty="0"/>
+          </a:p>
+          <a:p>
+            <a:pPr indent="0" marL="0">
+              <a:lnSpc>
+                <a:spcPct val="155000"/>
+              </a:lnSpc>
+              <a:buNone/>
+            </a:pPr>
+            <a:r>
+              <a:rPr lang="en-US" sz="1700" dirty="0">
+                <a:solidFill>
+                  <a:srgbClr val="4A5568"/>
+                </a:solidFill>
+                <a:latin typeface="Noto Sans KR" pitchFamily="34" charset="0"/>
+                <a:ea typeface="Noto Sans KR" pitchFamily="34" charset="-122"/>
+                <a:cs typeface="Noto Sans KR" pitchFamily="34" charset="-120"/>
+              </a:rPr>
+              <a:t>  (Node.js 등 사전 준비 자동 처리)</a:t>
+            </a:r>
+            <a:endParaRPr lang="en-US" sz="1700" dirty="0"/>
+          </a:p>
+          <a:p>
+            <a:pPr indent="0" marL="0">
+              <a:lnSpc>
+                <a:spcPct val="155000"/>
+              </a:lnSpc>
+              <a:buNone/>
+            </a:pPr>
+            <a:r>
+              <a:rPr lang="en-US" sz="1700" dirty="0">
+                <a:solidFill>
+                  <a:srgbClr val="4A5568"/>
+                </a:solidFill>
+                <a:latin typeface="Noto Sans KR" pitchFamily="34" charset="0"/>
+                <a:ea typeface="Noto Sans KR" pitchFamily="34" charset="-122"/>
+                <a:cs typeface="Noto Sans KR" pitchFamily="34" charset="-120"/>
+              </a:rPr>
+              <a:t>· 수강생은 터미널 명령어 외우거나 직접 칠 필요 X</a:t>
+            </a:r>
+            <a:endParaRPr lang="en-US" sz="1700" dirty="0"/>
+          </a:p>
+        </p:txBody>
       </p:sp>
       <p:sp>
         <p:nvSpPr>
           <p:cNvPr id="8" name="Text 6"/>
-          <p:cNvSpPr/>
-          <p:nvPr/>
-        </p:nvSpPr>
-        <p:spPr>
-          <a:xfrm>
-            <a:off x="713232" y="3035808"/>
-            <a:ext cx="10762488" cy="2980944"/>
-          </a:xfrm>
-          <a:prstGeom prst="rect">
-            <a:avLst/>
-          </a:prstGeom>
-          <a:noFill/>
-          <a:ln/>
-        </p:spPr>
-        <p:txBody>
-          <a:bodyPr wrap="square" rtlCol="0" anchor="t"/>
-          <a:lstStyle/>
-          <a:p>
-            <a:pPr indent="0" marL="0">
-              <a:lnSpc>
-                <a:spcPct val="140000"/>
-              </a:lnSpc>
-              <a:buNone/>
-            </a:pPr>
-            <a:r>
-              <a:rPr lang="en-US" sz="1150" dirty="0">
-                <a:solidFill>
-                  <a:srgbClr val="1A1F36"/>
-                </a:solidFill>
-                <a:latin typeface="Roboto Mono" pitchFamily="34" charset="0"/>
-                <a:ea typeface="Roboto Mono" pitchFamily="34" charset="-122"/>
-                <a:cs typeface="Roboto Mono" pitchFamily="34" charset="-120"/>
-              </a:rPr>
-              <a:t>바탕화면에 b2g-air-quality 라는 폴더 만들고,</a:t>
-            </a:r>
-            <a:endParaRPr lang="en-US" sz="1150" dirty="0"/>
-          </a:p>
-          <a:p>
-            <a:pPr indent="0" marL="0">
-              <a:lnSpc>
-                <a:spcPct val="140000"/>
-              </a:lnSpc>
-              <a:buNone/>
-            </a:pPr>
-            <a:r>
-              <a:rPr lang="en-US" sz="1150" dirty="0">
-                <a:solidFill>
-                  <a:srgbClr val="1A1F36"/>
-                </a:solidFill>
-                <a:latin typeface="Roboto Mono" pitchFamily="34" charset="0"/>
-                <a:ea typeface="Roboto Mono" pitchFamily="34" charset="-122"/>
-                <a:cs typeface="Roboto Mono" pitchFamily="34" charset="-120"/>
-              </a:rPr>
-              <a:t>그 폴더에서 claude 명령어를 실행해줘.</a:t>
-            </a:r>
-            <a:endParaRPr lang="en-US" sz="1150" dirty="0"/>
-          </a:p>
-          <a:p>
-            <a:pPr indent="0" marL="0">
-              <a:lnSpc>
-                <a:spcPct val="140000"/>
-              </a:lnSpc>
-              <a:buNone/>
-            </a:pPr>
-            <a:r>
-              <a:rPr lang="en-US" sz="1150" dirty="0">
-                <a:solidFill>
-                  <a:srgbClr val="1A1F36"/>
-                </a:solidFill>
-                <a:latin typeface="Roboto Mono" pitchFamily="34" charset="0"/>
-                <a:ea typeface="Roboto Mono" pitchFamily="34" charset="-122"/>
-                <a:cs typeface="Roboto Mono" pitchFamily="34" charset="-120"/>
-              </a:rPr>
-              <a:t>첫 실행이면 인증도 같이 진행해줘.</a:t>
-            </a:r>
-            <a:endParaRPr lang="en-US" sz="1150" dirty="0"/>
-          </a:p>
-        </p:txBody>
-      </p:sp>
-      <p:sp>
-        <p:nvSpPr>
-          <p:cNvPr id="9" name="Text 7"/>
           <p:cNvSpPr/>
           <p:nvPr/>
         </p:nvSpPr>
@@ -5477,7 +5329,7 @@
                 <a:ea typeface="Noto Sans KR" pitchFamily="34" charset="-122"/>
                 <a:cs typeface="Noto Sans KR" pitchFamily="34" charset="-120"/>
               </a:rPr>
-              <a:t>자주 막히는 포인트 — 미리 알아두세요</a:t>
+              <a:t>4단계 — claude 첫 실행 + 인증</a:t>
             </a:r>
             <a:endParaRPr lang="en-US" sz="4200" dirty="0"/>
           </a:p>
@@ -5542,7 +5394,7 @@
                 <a:ea typeface="Noto Sans KR" pitchFamily="34" charset="-122"/>
                 <a:cs typeface="Noto Sans KR" pitchFamily="34" charset="-120"/>
               </a:rPr>
-              <a:t>· "설치 안내만 함" → "직접 명령어 실행해서 설치해줘"라고 한 번 더</a:t>
+              <a:t>· 설치 끝나면 터미널에서 claude 명령어 실행</a:t>
             </a:r>
             <a:endParaRPr lang="en-US" sz="1700" dirty="0"/>
           </a:p>
@@ -5562,7 +5414,7 @@
                 <a:ea typeface="Noto Sans KR" pitchFamily="34" charset="-122"/>
                 <a:cs typeface="Noto Sans KR" pitchFamily="34" charset="-120"/>
               </a:rPr>
-              <a:t>· permission denied (Mac) → "sudo 비밀번호 단계 알려줘" 사전 부탁</a:t>
+              <a:t>· 브라우저로 Anthropic 계정 인증 1회 (Pro/Max 로그인 상태 필요)</a:t>
             </a:r>
             <a:endParaRPr lang="en-US" sz="1700" dirty="0"/>
           </a:p>
@@ -5582,7 +5434,7 @@
                 <a:ea typeface="Noto Sans KR" pitchFamily="34" charset="-122"/>
                 <a:cs typeface="Noto Sans KR" pitchFamily="34" charset="-120"/>
               </a:rPr>
-              <a:t>· claude 무한 로딩 → Pro/Max 미구독·로그인 미완료</a:t>
+              <a:t>· 인증 끝나면 Claude Code 프롬프트 진입</a:t>
             </a:r>
             <a:endParaRPr lang="en-US" sz="1700" dirty="0"/>
           </a:p>
@@ -5602,27 +5454,7 @@
                 <a:ea typeface="Noto Sans KR" pitchFamily="34" charset="-122"/>
                 <a:cs typeface="Noto Sans KR" pitchFamily="34" charset="-120"/>
               </a:rPr>
-              <a:t>· Windows 한글 깨짐 → "터미널 인코딩 UTF-8로" 추가 요청</a:t>
-            </a:r>
-            <a:endParaRPr lang="en-US" sz="1700" dirty="0"/>
-          </a:p>
-          <a:p>
-            <a:pPr indent="0" marL="0">
-              <a:lnSpc>
-                <a:spcPct val="155000"/>
-              </a:lnSpc>
-              <a:buNone/>
-            </a:pPr>
-            <a:r>
-              <a:rPr lang="en-US" sz="1700" dirty="0">
-                <a:solidFill>
-                  <a:srgbClr val="4A5568"/>
-                </a:solidFill>
-                <a:latin typeface="Noto Sans KR" pitchFamily="34" charset="0"/>
-                <a:ea typeface="Noto Sans KR" pitchFamily="34" charset="-122"/>
-                <a:cs typeface="Noto Sans KR" pitchFamily="34" charset="-120"/>
-              </a:rPr>
-              <a:t>· 사내 보안 차단 → 개인 노트북으로 진행 권장</a:t>
+              <a:t>· 이제부터 모든 분석은 여기서</a:t>
             </a:r>
             <a:endParaRPr lang="en-US" sz="1700" dirty="0"/>
           </a:p>
@@ -6993,7 +6825,7 @@
                 <a:ea typeface="Roboto Mono" pitchFamily="34" charset="-122"/>
                 <a:cs typeface="Roboto Mono" pitchFamily="34" charset="-120"/>
               </a:rPr>
-              <a:t>이 폴더의 seoul_air_quality_2024.csv 와 seoul_air_quality_2025.csv 둘 다</a:t>
+              <a:t>이 폴더의 기간별_일평균_대기환경_정보_2024년.csv 와 기간별_일평균_대기환경_정보_2025년.csv 둘 다</a:t>
             </a:r>
             <a:endParaRPr lang="en-US" sz="1150" dirty="0"/>
           </a:p>
@@ -8300,137 +8132,32 @@
           </a:p>
         </p:txBody>
       </p:sp>
-      <p:sp>
-        <p:nvSpPr>
-          <p:cNvPr id="6" name="Shape 4"/>
-          <p:cNvSpPr/>
-          <p:nvPr/>
-        </p:nvSpPr>
+      <p:pic>
+        <p:nvPicPr>
+          <p:cNvPr id="6" name="Image 0" descr="/Users/sujinpark/b2b-lecture-note/20260512_inflearn_B2G_dataanalysis/assets/screenshots/day1/result_step1_summary.png">    </p:cNvPr>
+          <p:cNvPicPr>
+            <a:picLocks noChangeAspect="1"/>
+          </p:cNvPicPr>
+          <p:nvPr/>
+        </p:nvPicPr>
+        <p:blipFill>
+          <a:blip r:embed="rId1"/>
+          <a:srcRect l="0" r="0" t="0" b="0"/>
+          <a:stretch/>
+        </p:blipFill>
         <p:spPr>
           <a:xfrm>
             <a:off x="2194560" y="2240280"/>
             <a:ext cx="7772400" cy="3657600"/>
           </a:xfrm>
-          <a:prstGeom prst="roundRect">
-            <a:avLst>
-              <a:gd name="adj" fmla="val 3000"/>
-            </a:avLst>
-          </a:prstGeom>
-          <a:solidFill>
-            <a:srgbClr val="F5F7FA"/>
-          </a:solidFill>
-          <a:ln w="12700">
-            <a:solidFill>
-              <a:srgbClr val="CBD5E0"/>
-            </a:solidFill>
-            <a:prstDash val="dash"/>
-          </a:ln>
-        </p:spPr>
-      </p:sp>
-      <p:sp>
-        <p:nvSpPr>
-          <p:cNvPr id="7" name="Text 5"/>
-          <p:cNvSpPr/>
-          <p:nvPr/>
-        </p:nvSpPr>
-        <p:spPr>
-          <a:xfrm>
-            <a:off x="2194560" y="3703320"/>
-            <a:ext cx="7772400" cy="731520"/>
-          </a:xfrm>
-          <a:prstGeom prst="rect">
-            <a:avLst/>
-          </a:prstGeom>
-          <a:noFill/>
-          <a:ln/>
-        </p:spPr>
-        <p:txBody>
-          <a:bodyPr wrap="square" rtlCol="0" anchor="ctr"/>
-          <a:lstStyle/>
-          <a:p>
-            <a:pPr algn="ctr" indent="0" marL="0">
-              <a:lnSpc>
-                <a:spcPct val="140000"/>
-              </a:lnSpc>
-              <a:buNone/>
-            </a:pPr>
-            <a:r>
-              <a:rPr lang="en-US" sz="1400" i="1" dirty="0">
-                <a:solidFill>
-                  <a:srgbClr val="718096"/>
-                </a:solidFill>
-                <a:latin typeface="Noto Sans KR" pitchFamily="34" charset="0"/>
-                <a:ea typeface="Noto Sans KR" pitchFamily="34" charset="-122"/>
-                <a:cs typeface="Noto Sans KR" pitchFamily="34" charset="-120"/>
-              </a:rPr>
-              <a:t>📷  결과 이미지 위치</a:t>
-            </a:r>
-            <a:endParaRPr lang="en-US" sz="1400" dirty="0"/>
-          </a:p>
-          <a:p>
-            <a:pPr algn="ctr" indent="0" marL="0">
-              <a:lnSpc>
-                <a:spcPct val="140000"/>
-              </a:lnSpc>
-              <a:buNone/>
-            </a:pPr>
-            <a:r>
-              <a:rPr lang="en-US" sz="1400" i="1" dirty="0">
-                <a:solidFill>
-                  <a:srgbClr val="718096"/>
-                </a:solidFill>
-                <a:latin typeface="Noto Sans KR" pitchFamily="34" charset="0"/>
-                <a:ea typeface="Noto Sans KR" pitchFamily="34" charset="-122"/>
-                <a:cs typeface="Noto Sans KR" pitchFamily="34" charset="-120"/>
-              </a:rPr>
-              <a:t>(강의 시연 캡처가 들어갈 자리)</a:t>
-            </a:r>
-            <a:endParaRPr lang="en-US" sz="1400" dirty="0"/>
-          </a:p>
-        </p:txBody>
-      </p:sp>
-      <p:sp>
-        <p:nvSpPr>
-          <p:cNvPr id="8" name="Text 6"/>
-          <p:cNvSpPr/>
-          <p:nvPr/>
-        </p:nvSpPr>
-        <p:spPr>
-          <a:xfrm>
-            <a:off x="2194560" y="4983480"/>
-            <a:ext cx="7772400" cy="365760"/>
-          </a:xfrm>
-          <a:prstGeom prst="rect">
-            <a:avLst/>
-          </a:prstGeom>
-          <a:noFill/>
-          <a:ln/>
-        </p:spPr>
-        <p:txBody>
-          <a:bodyPr wrap="square" rtlCol="0" anchor="ctr"/>
-          <a:lstStyle/>
-          <a:p>
-            <a:pPr algn="ctr" indent="0" marL="0">
-              <a:buNone/>
-            </a:pPr>
-            <a:r>
-              <a:rPr lang="en-US" sz="1000" i="1" dirty="0">
-                <a:solidFill>
-                  <a:srgbClr val="718096"/>
-                </a:solidFill>
-                <a:latin typeface="Roboto Mono" pitchFamily="34" charset="0"/>
-                <a:ea typeface="Roboto Mono" pitchFamily="34" charset="-122"/>
-                <a:cs typeface="Roboto Mono" pitchFamily="34" charset="-120"/>
-              </a:rPr>
-              <a:t>screenshots/day1/result_step1_summary.png</a:t>
-            </a:r>
-            <a:endParaRPr lang="en-US" sz="1000" dirty="0"/>
-          </a:p>
-        </p:txBody>
-      </p:sp>
-      <p:sp>
-        <p:nvSpPr>
-          <p:cNvPr id="9" name="Text 7"/>
+          <a:prstGeom prst="rect">
+            <a:avLst/>
+          </a:prstGeom>
+        </p:spPr>
+      </p:pic>
+      <p:sp>
+        <p:nvSpPr>
+          <p:cNvPr id="7" name="Text 4"/>
           <p:cNvSpPr/>
           <p:nvPr/>
         </p:nvSpPr>
@@ -8469,7 +8196,7 @@
       </p:sp>
       <p:sp>
         <p:nvSpPr>
-          <p:cNvPr id="10" name="Text 8"/>
+          <p:cNvPr id="8" name="Text 5"/>
           <p:cNvSpPr/>
           <p:nvPr/>
         </p:nvSpPr>
@@ -9024,137 +8751,32 @@
           </a:p>
         </p:txBody>
       </p:sp>
-      <p:sp>
-        <p:nvSpPr>
-          <p:cNvPr id="6" name="Shape 4"/>
-          <p:cNvSpPr/>
-          <p:nvPr/>
-        </p:nvSpPr>
+      <p:pic>
+        <p:nvPicPr>
+          <p:cNvPr id="6" name="Image 0" descr="/Users/sujinpark/b2b-lecture-note/20260512_inflearn_B2G_dataanalysis/assets/screenshots/day1/result_step2_district.png">    </p:cNvPr>
+          <p:cNvPicPr>
+            <a:picLocks noChangeAspect="1"/>
+          </p:cNvPicPr>
+          <p:nvPr/>
+        </p:nvPicPr>
+        <p:blipFill>
+          <a:blip r:embed="rId1"/>
+          <a:srcRect l="0" r="0" t="0" b="0"/>
+          <a:stretch/>
+        </p:blipFill>
         <p:spPr>
           <a:xfrm>
             <a:off x="2194560" y="2240280"/>
             <a:ext cx="7772400" cy="3657600"/>
           </a:xfrm>
-          <a:prstGeom prst="roundRect">
-            <a:avLst>
-              <a:gd name="adj" fmla="val 3000"/>
-            </a:avLst>
-          </a:prstGeom>
-          <a:solidFill>
-            <a:srgbClr val="F5F7FA"/>
-          </a:solidFill>
-          <a:ln w="12700">
-            <a:solidFill>
-              <a:srgbClr val="CBD5E0"/>
-            </a:solidFill>
-            <a:prstDash val="dash"/>
-          </a:ln>
-        </p:spPr>
-      </p:sp>
-      <p:sp>
-        <p:nvSpPr>
-          <p:cNvPr id="7" name="Text 5"/>
-          <p:cNvSpPr/>
-          <p:nvPr/>
-        </p:nvSpPr>
-        <p:spPr>
-          <a:xfrm>
-            <a:off x="2194560" y="3703320"/>
-            <a:ext cx="7772400" cy="731520"/>
-          </a:xfrm>
-          <a:prstGeom prst="rect">
-            <a:avLst/>
-          </a:prstGeom>
-          <a:noFill/>
-          <a:ln/>
-        </p:spPr>
-        <p:txBody>
-          <a:bodyPr wrap="square" rtlCol="0" anchor="ctr"/>
-          <a:lstStyle/>
-          <a:p>
-            <a:pPr algn="ctr" indent="0" marL="0">
-              <a:lnSpc>
-                <a:spcPct val="140000"/>
-              </a:lnSpc>
-              <a:buNone/>
-            </a:pPr>
-            <a:r>
-              <a:rPr lang="en-US" sz="1400" i="1" dirty="0">
-                <a:solidFill>
-                  <a:srgbClr val="718096"/>
-                </a:solidFill>
-                <a:latin typeface="Noto Sans KR" pitchFamily="34" charset="0"/>
-                <a:ea typeface="Noto Sans KR" pitchFamily="34" charset="-122"/>
-                <a:cs typeface="Noto Sans KR" pitchFamily="34" charset="-120"/>
-              </a:rPr>
-              <a:t>📷  결과 이미지 위치</a:t>
-            </a:r>
-            <a:endParaRPr lang="en-US" sz="1400" dirty="0"/>
-          </a:p>
-          <a:p>
-            <a:pPr algn="ctr" indent="0" marL="0">
-              <a:lnSpc>
-                <a:spcPct val="140000"/>
-              </a:lnSpc>
-              <a:buNone/>
-            </a:pPr>
-            <a:r>
-              <a:rPr lang="en-US" sz="1400" i="1" dirty="0">
-                <a:solidFill>
-                  <a:srgbClr val="718096"/>
-                </a:solidFill>
-                <a:latin typeface="Noto Sans KR" pitchFamily="34" charset="0"/>
-                <a:ea typeface="Noto Sans KR" pitchFamily="34" charset="-122"/>
-                <a:cs typeface="Noto Sans KR" pitchFamily="34" charset="-120"/>
-              </a:rPr>
-              <a:t>(강의 시연 캡처가 들어갈 자리)</a:t>
-            </a:r>
-            <a:endParaRPr lang="en-US" sz="1400" dirty="0"/>
-          </a:p>
-        </p:txBody>
-      </p:sp>
-      <p:sp>
-        <p:nvSpPr>
-          <p:cNvPr id="8" name="Text 6"/>
-          <p:cNvSpPr/>
-          <p:nvPr/>
-        </p:nvSpPr>
-        <p:spPr>
-          <a:xfrm>
-            <a:off x="2194560" y="4983480"/>
-            <a:ext cx="7772400" cy="365760"/>
-          </a:xfrm>
-          <a:prstGeom prst="rect">
-            <a:avLst/>
-          </a:prstGeom>
-          <a:noFill/>
-          <a:ln/>
-        </p:spPr>
-        <p:txBody>
-          <a:bodyPr wrap="square" rtlCol="0" anchor="ctr"/>
-          <a:lstStyle/>
-          <a:p>
-            <a:pPr algn="ctr" indent="0" marL="0">
-              <a:buNone/>
-            </a:pPr>
-            <a:r>
-              <a:rPr lang="en-US" sz="1000" i="1" dirty="0">
-                <a:solidFill>
-                  <a:srgbClr val="718096"/>
-                </a:solidFill>
-                <a:latin typeface="Roboto Mono" pitchFamily="34" charset="0"/>
-                <a:ea typeface="Roboto Mono" pitchFamily="34" charset="-122"/>
-                <a:cs typeface="Roboto Mono" pitchFamily="34" charset="-120"/>
-              </a:rPr>
-              <a:t>screenshots/day1/result_step2_district.png</a:t>
-            </a:r>
-            <a:endParaRPr lang="en-US" sz="1000" dirty="0"/>
-          </a:p>
-        </p:txBody>
-      </p:sp>
-      <p:sp>
-        <p:nvSpPr>
-          <p:cNvPr id="9" name="Text 7"/>
+          <a:prstGeom prst="rect">
+            <a:avLst/>
+          </a:prstGeom>
+        </p:spPr>
+      </p:pic>
+      <p:sp>
+        <p:nvSpPr>
+          <p:cNvPr id="7" name="Text 4"/>
           <p:cNvSpPr/>
           <p:nvPr/>
         </p:nvSpPr>
@@ -9193,7 +8815,7 @@
       </p:sp>
       <p:sp>
         <p:nvSpPr>
-          <p:cNvPr id="10" name="Text 8"/>
+          <p:cNvPr id="8" name="Text 5"/>
           <p:cNvSpPr/>
           <p:nvPr/>
         </p:nvSpPr>
@@ -9748,137 +9370,32 @@
           </a:p>
         </p:txBody>
       </p:sp>
-      <p:sp>
-        <p:nvSpPr>
-          <p:cNvPr id="6" name="Shape 4"/>
-          <p:cNvSpPr/>
-          <p:nvPr/>
-        </p:nvSpPr>
+      <p:pic>
+        <p:nvPicPr>
+          <p:cNvPr id="6" name="Image 0" descr="/Users/sujinpark/b2b-lecture-note/20260512_inflearn_B2G_dataanalysis/assets/screenshots/day1/result_step3_monthly.png">    </p:cNvPr>
+          <p:cNvPicPr>
+            <a:picLocks noChangeAspect="1"/>
+          </p:cNvPicPr>
+          <p:nvPr/>
+        </p:nvPicPr>
+        <p:blipFill>
+          <a:blip r:embed="rId1"/>
+          <a:srcRect l="0" r="0" t="0" b="0"/>
+          <a:stretch/>
+        </p:blipFill>
         <p:spPr>
           <a:xfrm>
             <a:off x="2194560" y="2240280"/>
             <a:ext cx="7772400" cy="3657600"/>
           </a:xfrm>
-          <a:prstGeom prst="roundRect">
-            <a:avLst>
-              <a:gd name="adj" fmla="val 3000"/>
-            </a:avLst>
-          </a:prstGeom>
-          <a:solidFill>
-            <a:srgbClr val="F5F7FA"/>
-          </a:solidFill>
-          <a:ln w="12700">
-            <a:solidFill>
-              <a:srgbClr val="CBD5E0"/>
-            </a:solidFill>
-            <a:prstDash val="dash"/>
-          </a:ln>
-        </p:spPr>
-      </p:sp>
-      <p:sp>
-        <p:nvSpPr>
-          <p:cNvPr id="7" name="Text 5"/>
-          <p:cNvSpPr/>
-          <p:nvPr/>
-        </p:nvSpPr>
-        <p:spPr>
-          <a:xfrm>
-            <a:off x="2194560" y="3703320"/>
-            <a:ext cx="7772400" cy="731520"/>
-          </a:xfrm>
-          <a:prstGeom prst="rect">
-            <a:avLst/>
-          </a:prstGeom>
-          <a:noFill/>
-          <a:ln/>
-        </p:spPr>
-        <p:txBody>
-          <a:bodyPr wrap="square" rtlCol="0" anchor="ctr"/>
-          <a:lstStyle/>
-          <a:p>
-            <a:pPr algn="ctr" indent="0" marL="0">
-              <a:lnSpc>
-                <a:spcPct val="140000"/>
-              </a:lnSpc>
-              <a:buNone/>
-            </a:pPr>
-            <a:r>
-              <a:rPr lang="en-US" sz="1400" i="1" dirty="0">
-                <a:solidFill>
-                  <a:srgbClr val="718096"/>
-                </a:solidFill>
-                <a:latin typeface="Noto Sans KR" pitchFamily="34" charset="0"/>
-                <a:ea typeface="Noto Sans KR" pitchFamily="34" charset="-122"/>
-                <a:cs typeface="Noto Sans KR" pitchFamily="34" charset="-120"/>
-              </a:rPr>
-              <a:t>📷  결과 이미지 위치</a:t>
-            </a:r>
-            <a:endParaRPr lang="en-US" sz="1400" dirty="0"/>
-          </a:p>
-          <a:p>
-            <a:pPr algn="ctr" indent="0" marL="0">
-              <a:lnSpc>
-                <a:spcPct val="140000"/>
-              </a:lnSpc>
-              <a:buNone/>
-            </a:pPr>
-            <a:r>
-              <a:rPr lang="en-US" sz="1400" i="1" dirty="0">
-                <a:solidFill>
-                  <a:srgbClr val="718096"/>
-                </a:solidFill>
-                <a:latin typeface="Noto Sans KR" pitchFamily="34" charset="0"/>
-                <a:ea typeface="Noto Sans KR" pitchFamily="34" charset="-122"/>
-                <a:cs typeface="Noto Sans KR" pitchFamily="34" charset="-120"/>
-              </a:rPr>
-              <a:t>(강의 시연 캡처가 들어갈 자리)</a:t>
-            </a:r>
-            <a:endParaRPr lang="en-US" sz="1400" dirty="0"/>
-          </a:p>
-        </p:txBody>
-      </p:sp>
-      <p:sp>
-        <p:nvSpPr>
-          <p:cNvPr id="8" name="Text 6"/>
-          <p:cNvSpPr/>
-          <p:nvPr/>
-        </p:nvSpPr>
-        <p:spPr>
-          <a:xfrm>
-            <a:off x="2194560" y="4983480"/>
-            <a:ext cx="7772400" cy="365760"/>
-          </a:xfrm>
-          <a:prstGeom prst="rect">
-            <a:avLst/>
-          </a:prstGeom>
-          <a:noFill/>
-          <a:ln/>
-        </p:spPr>
-        <p:txBody>
-          <a:bodyPr wrap="square" rtlCol="0" anchor="ctr"/>
-          <a:lstStyle/>
-          <a:p>
-            <a:pPr algn="ctr" indent="0" marL="0">
-              <a:buNone/>
-            </a:pPr>
-            <a:r>
-              <a:rPr lang="en-US" sz="1000" i="1" dirty="0">
-                <a:solidFill>
-                  <a:srgbClr val="718096"/>
-                </a:solidFill>
-                <a:latin typeface="Roboto Mono" pitchFamily="34" charset="0"/>
-                <a:ea typeface="Roboto Mono" pitchFamily="34" charset="-122"/>
-                <a:cs typeface="Roboto Mono" pitchFamily="34" charset="-120"/>
-              </a:rPr>
-              <a:t>screenshots/day1/result_step3_monthly.png</a:t>
-            </a:r>
-            <a:endParaRPr lang="en-US" sz="1000" dirty="0"/>
-          </a:p>
-        </p:txBody>
-      </p:sp>
-      <p:sp>
-        <p:nvSpPr>
-          <p:cNvPr id="9" name="Text 7"/>
+          <a:prstGeom prst="rect">
+            <a:avLst/>
+          </a:prstGeom>
+        </p:spPr>
+      </p:pic>
+      <p:sp>
+        <p:nvSpPr>
+          <p:cNvPr id="7" name="Text 4"/>
           <p:cNvSpPr/>
           <p:nvPr/>
         </p:nvSpPr>
@@ -9917,7 +9434,7 @@
       </p:sp>
       <p:sp>
         <p:nvSpPr>
-          <p:cNvPr id="10" name="Text 8"/>
+          <p:cNvPr id="8" name="Text 5"/>
           <p:cNvSpPr/>
           <p:nvPr/>
         </p:nvSpPr>
@@ -10451,7 +9968,7 @@
                 <a:ea typeface="Noto Sans KR" pitchFamily="34" charset="-122"/>
                 <a:cs typeface="Noto Sans KR" pitchFamily="34" charset="-120"/>
               </a:rPr>
-              <a:t>산출물을 GitHub day1/ 폴더에 푸시</a:t>
+              <a:t>산출물 정리 + 운영 채널 업로드</a:t>
             </a:r>
             <a:endParaRPr lang="en-US" sz="4200" dirty="0"/>
           </a:p>
@@ -10516,7 +10033,7 @@
                 <a:ea typeface="Noto Sans KR" pitchFamily="34" charset="-122"/>
                 <a:cs typeface="Noto Sans KR" pitchFamily="34" charset="-120"/>
               </a:rPr>
-              <a:t>day1/</a:t>
+              <a:t>inflearn_ccd_challenge/</a:t>
             </a:r>
             <a:endParaRPr lang="en-US" sz="1700" dirty="0"/>
           </a:p>
@@ -10556,7 +10073,7 @@
                 <a:ea typeface="Noto Sans KR" pitchFamily="34" charset="-122"/>
                 <a:cs typeface="Noto Sans KR" pitchFamily="34" charset="-120"/>
               </a:rPr>
-              <a:t>├── outputs/</a:t>
+              <a:t>├── 기간별_일평균_대기환경_정보_2024년.csv</a:t>
             </a:r>
             <a:endParaRPr lang="en-US" sz="1700" dirty="0"/>
           </a:p>
@@ -10576,7 +10093,7 @@
                 <a:ea typeface="Noto Sans KR" pitchFamily="34" charset="-122"/>
                 <a:cs typeface="Noto Sans KR" pitchFamily="34" charset="-120"/>
               </a:rPr>
-              <a:t>│   ├── yoy_district_pm25.png</a:t>
+              <a:t>├── 기간별_일평균_대기환경_정보_2025년.csv</a:t>
             </a:r>
             <a:endParaRPr lang="en-US" sz="1700" dirty="0"/>
           </a:p>
@@ -10596,7 +10113,7 @@
                 <a:ea typeface="Noto Sans KR" pitchFamily="34" charset="-122"/>
                 <a:cs typeface="Noto Sans KR" pitchFamily="34" charset="-120"/>
               </a:rPr>
-              <a:t>│   └── yoy_monthly_pm25.png</a:t>
+              <a:t>└── outputs/</a:t>
             </a:r>
             <a:endParaRPr lang="en-US" sz="1700" dirty="0"/>
           </a:p>
@@ -10616,7 +10133,7 @@
                 <a:ea typeface="Noto Sans KR" pitchFamily="34" charset="-122"/>
                 <a:cs typeface="Noto Sans KR" pitchFamily="34" charset="-120"/>
               </a:rPr>
-              <a:t>└── notes.md   (한 줄 소감)</a:t>
+              <a:t>    ├── yoy_district_pm25.png</a:t>
             </a:r>
             <a:endParaRPr lang="en-US" sz="1700" dirty="0"/>
           </a:p>
@@ -10627,6 +10144,17 @@
               </a:lnSpc>
               <a:buNone/>
             </a:pPr>
+            <a:r>
+              <a:rPr lang="en-US" sz="1700" dirty="0">
+                <a:solidFill>
+                  <a:srgbClr val="4A5568"/>
+                </a:solidFill>
+                <a:latin typeface="Noto Sans KR" pitchFamily="34" charset="0"/>
+                <a:ea typeface="Noto Sans KR" pitchFamily="34" charset="-122"/>
+                <a:cs typeface="Noto Sans KR" pitchFamily="34" charset="-120"/>
+              </a:rPr>
+              <a:t>    └── yoy_monthly_pm25.png</a:t>
+            </a:r>
             <a:endParaRPr lang="en-US" sz="1700" dirty="0"/>
           </a:p>
           <a:p>
@@ -10636,17 +10164,6 @@
               </a:lnSpc>
               <a:buNone/>
             </a:pPr>
-            <a:r>
-              <a:rPr lang="en-US" sz="1700" dirty="0">
-                <a:solidFill>
-                  <a:srgbClr val="4A5568"/>
-                </a:solidFill>
-                <a:latin typeface="Noto Sans KR" pitchFamily="34" charset="0"/>
-                <a:ea typeface="Noto Sans KR" pitchFamily="34" charset="-122"/>
-                <a:cs typeface="Noto Sans KR" pitchFamily="34" charset="-120"/>
-              </a:rPr>
-              <a:t>· 다음 회차에 쓸 CLAUDE.md는 그대로 day2/ 폴더에 복사</a:t>
-            </a:r>
             <a:endParaRPr lang="en-US" sz="1700" dirty="0"/>
           </a:p>
           <a:p>
@@ -10665,7 +10182,7 @@
                 <a:ea typeface="Noto Sans KR" pitchFamily="34" charset="-122"/>
                 <a:cs typeface="Noto Sans KR" pitchFamily="34" charset="-120"/>
               </a:rPr>
-              <a:t>· 거기서 추가 규칙을 누적 — 폴더 자체가 히스토리 역할</a:t>
+              <a:t>→ outputs/ PNG · CLAUDE.md 를 인프런/운영 채널에 업로드</a:t>
             </a:r>
             <a:endParaRPr lang="en-US" sz="1700" dirty="0"/>
           </a:p>
@@ -10827,7 +10344,7 @@
                 <a:ea typeface="Noto Sans KR" pitchFamily="34" charset="-122"/>
                 <a:cs typeface="Noto Sans KR" pitchFamily="34" charset="-120"/>
               </a:rPr>
-              <a:t>미세먼지 데이터에 질문 3개 + 결과 캡처 + CLAUDE.md → GitHub day1/ 푸시</a:t>
+              <a:t>미세먼지 데이터에 질문 3개 + 결과 캡처 + CLAUDE.md → 인프런/운영 채널 업로드</a:t>
             </a:r>
             <a:endParaRPr lang="en-US" sz="1400" dirty="0"/>
           </a:p>
@@ -11006,7 +10523,7 @@
                 <a:ea typeface="Noto Sans KR" pitchFamily="34" charset="-122"/>
                 <a:cs typeface="Noto Sans KR" pitchFamily="34" charset="-120"/>
               </a:rPr>
-              <a:t>✅ GitHub 레포 day1/ 폴더에 push</a:t>
+              <a:t>✅ 운영 채널 업로드 (PNG · CLAUDE.md)</a:t>
             </a:r>
             <a:endParaRPr lang="en-US" sz="1300" dirty="0"/>
           </a:p>
@@ -11447,7 +10964,7 @@
                 <a:ea typeface="Noto Sans KR" pitchFamily="34" charset="-122"/>
                 <a:cs typeface="Noto Sans KR" pitchFamily="34" charset="-120"/>
               </a:rPr>
-              <a:t>· 오늘 만든 CLAUDE.md를 그대로 day2/ 폴더로 복사해 오세요</a:t>
+              <a:t>· 오늘 만든 CLAUDE.md는 그대로 두고, 새 규칙은 자연어로 누적합니다</a:t>
             </a:r>
             <a:endParaRPr lang="en-US" sz="1500" dirty="0"/>
           </a:p>
@@ -11742,7 +11259,7 @@
                 <a:ea typeface="Noto Sans KR" pitchFamily="34" charset="-122"/>
                 <a:cs typeface="Noto Sans KR" pitchFamily="34" charset="-120"/>
               </a:rPr>
-              <a:t>1. Claude Desktop 앱에서 자연어로 Claude Code 설치 → claude 실행</a:t>
+              <a:t>1. Claude Desktop 앱에서 Code 메뉴로 Claude Code 설치 → claude 실행</a:t>
             </a:r>
             <a:endParaRPr lang="en-US" sz="1300" dirty="0"/>
           </a:p>
@@ -11811,7 +11328,7 @@
                 <a:ea typeface="Noto Sans KR" pitchFamily="34" charset="-122"/>
                 <a:cs typeface="Noto Sans KR" pitchFamily="34" charset="-120"/>
               </a:rPr>
-              <a:t>4. 본인 프로젝트용 CLAUDE.md 작성 + GitHub day1/ 폴더에 푸시</a:t>
+              <a:t>4. 본인 프로젝트용 CLAUDE.md 작성 → 인프런/운영 채널 업로드</a:t>
             </a:r>
             <a:endParaRPr lang="en-US" sz="1300" dirty="0"/>
           </a:p>
@@ -12006,7 +11523,7 @@
                 <a:ea typeface="Noto Sans KR" pitchFamily="34" charset="-122"/>
                 <a:cs typeface="Noto Sans KR" pitchFamily="34" charset="-120"/>
               </a:rPr>
-              <a:t>· 강의 자료는 GitHub Public 레포에 다 있다 — 매번 찾을 필요 X</a:t>
+              <a:t>· 데이터는 데이터 포털에서 직접 받는다 — 분석가의 일</a:t>
             </a:r>
             <a:endParaRPr lang="en-US" sz="1300" dirty="0"/>
           </a:p>
@@ -12421,7 +11938,7 @@
                           <a:ea typeface="Noto Sans KR" pitchFamily="34" charset="-122"/>
                           <a:cs typeface="Noto Sans KR" pitchFamily="34" charset="-120"/>
                         </a:rPr>
-                        <a:t>강의 컨셉 + GitHub 레포 안내 + 미세먼지 CSV 라이브 시연</a:t>
+                        <a:t>강의 컨셉 + 미세먼지 CSV 라이브 시연</a:t>
                       </a:r>
                       <a:endParaRPr lang="en-US" sz="1100" dirty="0">
                         <a:latin typeface="Noto Sans KR" charset="0"/>
@@ -12680,7 +12197,7 @@
                           <a:ea typeface="Noto Sans KR" pitchFamily="34" charset="-122"/>
                           <a:cs typeface="Noto Sans KR" pitchFamily="34" charset="-120"/>
                         </a:rPr>
-                        <a:t>자연어로 Claude Code 설치 요청 + 트러블슈팅</a:t>
+                        <a:t>Claude Desktop의 Code 메뉴로 Claude Code 설치 + 트러블슈팅</a:t>
                       </a:r>
                       <a:endParaRPr lang="en-US" sz="1100" dirty="0">
                         <a:latin typeface="Noto Sans KR" charset="0"/>
@@ -13074,7 +12591,7 @@
                           <a:ea typeface="Noto Sans KR" pitchFamily="34" charset="-122"/>
                           <a:cs typeface="Noto Sans KR" pitchFamily="34" charset="-120"/>
                         </a:rPr>
-                        <a:t>GitHub day1/ 폴더 푸시 동선</a:t>
+                        <a:t>운영 채널 제출 동선</a:t>
                       </a:r>
                       <a:endParaRPr lang="en-US" sz="1100" dirty="0">
                         <a:latin typeface="Noto Sans KR" charset="0"/>
@@ -13637,7 +13154,7 @@
                 <a:ea typeface="Noto Sans KR" pitchFamily="34" charset="-122"/>
                 <a:cs typeface="Noto Sans KR" pitchFamily="34" charset="-120"/>
               </a:rPr>
-              <a:t>강의 자료는 GitHub Public 레포에</a:t>
+              <a:t>자료·제출 동선</a:t>
             </a:r>
             <a:endParaRPr lang="en-US" sz="4200" dirty="0"/>
           </a:p>
@@ -13702,7 +13219,7 @@
                 <a:ea typeface="Noto Sans KR" pitchFamily="34" charset="-122"/>
                 <a:cs typeface="Noto Sans KR" pitchFamily="34" charset="-120"/>
               </a:rPr>
-              <a:t>· 데이터·프롬프트·PPT·CLAUDE.md·산출물 모두 한 곳에</a:t>
+              <a:t>· 데이터: 강의 중 서울 열린데이터광장에서 직접 다운로드</a:t>
             </a:r>
             <a:endParaRPr lang="en-US" sz="1700" dirty="0"/>
           </a:p>
@@ -13722,7 +13239,7 @@
                 <a:ea typeface="Noto Sans KR" pitchFamily="34" charset="-122"/>
                 <a:cs typeface="Noto Sans KR" pitchFamily="34" charset="-120"/>
               </a:rPr>
-              <a:t>· 본인 GitHub로 fork or clone → 매 회차 day{n}/ 폴더에 산출물 추가</a:t>
+              <a:t>  (분석가의 일이니까 직접 받아보기 — 백업본은 강사가 채널로 안내)</a:t>
             </a:r>
             <a:endParaRPr lang="en-US" sz="1700" dirty="0"/>
           </a:p>
@@ -13742,7 +13259,7 @@
                 <a:ea typeface="Noto Sans KR" pitchFamily="34" charset="-122"/>
                 <a:cs typeface="Noto Sans KR" pitchFamily="34" charset="-120"/>
               </a:rPr>
-              <a:t>· 미션 제출도 본인 fork에 push → 링크 공유</a:t>
+              <a:t>· 시연 프롬프트: PPT 코드 블록을 그대로 복사</a:t>
             </a:r>
             <a:endParaRPr lang="en-US" sz="1700" dirty="0"/>
           </a:p>
@@ -13753,15 +13270,6 @@
               </a:lnSpc>
               <a:buNone/>
             </a:pPr>
-            <a:endParaRPr lang="en-US" sz="1700" dirty="0"/>
-          </a:p>
-          <a:p>
-            <a:pPr indent="0" marL="0">
-              <a:lnSpc>
-                <a:spcPct val="155000"/>
-              </a:lnSpc>
-              <a:buNone/>
-            </a:pPr>
             <a:r>
               <a:rPr lang="en-US" sz="1700" dirty="0">
                 <a:solidFill>
@@ -13771,7 +13279,7 @@
                 <a:ea typeface="Noto Sans KR" pitchFamily="34" charset="-122"/>
                 <a:cs typeface="Noto Sans KR" pitchFamily="34" charset="-120"/>
               </a:rPr>
-              <a:t>· 폴더: data/  prompts/  ppt/  day1/  day2/  day3/  day4/</a:t>
+              <a:t>· 미션 제출: 인프런/운영 채널에 결과(PNG · CLAUDE.md) 업로드</a:t>
             </a:r>
             <a:endParaRPr lang="en-US" sz="1700" dirty="0"/>
           </a:p>
@@ -14705,7 +14213,7 @@
                 <a:ea typeface="Roboto Mono" pitchFamily="34" charset="-122"/>
                 <a:cs typeface="Roboto Mono" pitchFamily="34" charset="-120"/>
               </a:rPr>
-              <a:t>이 폴더에 seoul_air_quality_2024.csv + seoul_air_quality_2025.csv 있어.</a:t>
+              <a:t>이 폴더에 기간별_일평균_대기환경_정보_2024년.csv + 기간별_일평균_대기환경_정보_2025년.csv 있어.</a:t>
             </a:r>
             <a:endParaRPr lang="en-US" sz="1150" dirty="0"/>
           </a:p>

--- a/ppt/b2g_day1_setup.pptx
+++ b/ppt/b2g_day1_setup.pptx
@@ -5792,7 +5792,7 @@
                 <a:ea typeface="Noto Sans KR" pitchFamily="34" charset="-122"/>
                 <a:cs typeface="Noto Sans KR" pitchFamily="34" charset="-120"/>
               </a:rPr>
-              <a:t>· 작업 폴더로 이동 후 이름 통일 (seoul_air_quality_2024/2025.csv)</a:t>
+              <a:t>· 작업 폴더로 이동 (파일명은 받은 그대로 — 기간별_일평균_대기환경_정보_2024/2025년.csv)</a:t>
             </a:r>
             <a:endParaRPr lang="en-US" sz="1700" dirty="0"/>
           </a:p>
@@ -5812,7 +5812,7 @@
                 <a:ea typeface="Noto Sans KR" pitchFamily="34" charset="-122"/>
                 <a:cs typeface="Noto Sans KR" pitchFamily="34" charset="-120"/>
               </a:rPr>
-              <a:t>· 못 받은 분은 강의 GitHub data/seoul_air_quality/ 백업본 사용</a:t>
+              <a:t>· 받기 정말 어려운 분만 운영 채널로 강사에게 요청</a:t>
             </a:r>
             <a:endParaRPr lang="en-US" sz="1700" dirty="0"/>
           </a:p>
@@ -13219,7 +13219,7 @@
                 <a:ea typeface="Noto Sans KR" pitchFamily="34" charset="-122"/>
                 <a:cs typeface="Noto Sans KR" pitchFamily="34" charset="-120"/>
               </a:rPr>
-              <a:t>· 데이터: 강의 중 서울 열린데이터광장에서 직접 다운로드</a:t>
+              <a:t>· 데이터 (원칙): 출처에서 직접 다운로드 — 분석가의 일이니까</a:t>
             </a:r>
             <a:endParaRPr lang="en-US" sz="1700" dirty="0"/>
           </a:p>
@@ -13239,7 +13239,7 @@
                 <a:ea typeface="Noto Sans KR" pitchFamily="34" charset="-122"/>
                 <a:cs typeface="Noto Sans KR" pitchFamily="34" charset="-120"/>
               </a:rPr>
-              <a:t>  (분석가의 일이니까 직접 받아보기 — 백업본은 강사가 채널로 안내)</a:t>
+              <a:t>  미세먼지·따릉이·지하철 → 서울 열린데이터광장</a:t>
             </a:r>
             <a:endParaRPr lang="en-US" sz="1700" dirty="0"/>
           </a:p>
@@ -13259,7 +13259,7 @@
                 <a:ea typeface="Noto Sans KR" pitchFamily="34" charset="-122"/>
                 <a:cs typeface="Noto Sans KR" pitchFamily="34" charset="-120"/>
               </a:rPr>
-              <a:t>· 시연 프롬프트: PPT 코드 블록을 그대로 복사</a:t>
+              <a:t>  날씨 → 기상자료개방포털  ·  검색량 → 네이버 데이터랩·구글 트렌드</a:t>
             </a:r>
             <a:endParaRPr lang="en-US" sz="1700" dirty="0"/>
           </a:p>
@@ -13279,7 +13279,47 @@
                 <a:ea typeface="Noto Sans KR" pitchFamily="34" charset="-122"/>
                 <a:cs typeface="Noto Sans KR" pitchFamily="34" charset="-120"/>
               </a:rPr>
+              <a:t>· 시연 프롬프트: PPT 코드 블록을 그대로 복사</a:t>
+            </a:r>
+            <a:endParaRPr lang="en-US" sz="1700" dirty="0"/>
+          </a:p>
+          <a:p>
+            <a:pPr indent="0" marL="0">
+              <a:lnSpc>
+                <a:spcPct val="155000"/>
+              </a:lnSpc>
+              <a:buNone/>
+            </a:pPr>
+            <a:r>
+              <a:rPr lang="en-US" sz="1700" dirty="0">
+                <a:solidFill>
+                  <a:srgbClr val="4A5568"/>
+                </a:solidFill>
+                <a:latin typeface="Noto Sans KR" pitchFamily="34" charset="0"/>
+                <a:ea typeface="Noto Sans KR" pitchFamily="34" charset="-122"/>
+                <a:cs typeface="Noto Sans KR" pitchFamily="34" charset="-120"/>
+              </a:rPr>
               <a:t>· 미션 제출: 인프런/운영 채널에 결과(PNG · CLAUDE.md) 업로드</a:t>
+            </a:r>
+            <a:endParaRPr lang="en-US" sz="1700" dirty="0"/>
+          </a:p>
+          <a:p>
+            <a:pPr indent="0" marL="0">
+              <a:lnSpc>
+                <a:spcPct val="155000"/>
+              </a:lnSpc>
+              <a:buNone/>
+            </a:pPr>
+            <a:r>
+              <a:rPr lang="en-US" sz="1700" dirty="0">
+                <a:solidFill>
+                  <a:srgbClr val="4A5568"/>
+                </a:solidFill>
+                <a:latin typeface="Noto Sans KR" pitchFamily="34" charset="0"/>
+                <a:ea typeface="Noto Sans KR" pitchFamily="34" charset="-122"/>
+                <a:cs typeface="Noto Sans KR" pitchFamily="34" charset="-120"/>
+              </a:rPr>
+              <a:t>· 받기 정말 어려운 분만 운영 채널로 강사에게 요청</a:t>
             </a:r>
             <a:endParaRPr lang="en-US" sz="1700" dirty="0"/>
           </a:p>

--- a/ppt/b2g_day1_setup.pptx
+++ b/ppt/b2g_day1_setup.pptx
@@ -5723,7 +5723,7 @@
                 <a:ea typeface="Noto Sans KR" pitchFamily="34" charset="-122"/>
                 <a:cs typeface="Noto Sans KR" pitchFamily="34" charset="-120"/>
               </a:rPr>
-              <a:t>· 출처: 서울 열린데이터광장 — 일별 평균 대기환경 정보 (OA-2218)</a:t>
+              <a:t>1) https://data.seoul.go.kr/dataList/OA-2218/S/1/datasetView.do 접속</a:t>
             </a:r>
             <a:endParaRPr lang="en-US" sz="1700" dirty="0"/>
           </a:p>
@@ -5743,7 +5743,7 @@
                 <a:ea typeface="Noto Sans KR" pitchFamily="34" charset="-122"/>
                 <a:cs typeface="Noto Sans KR" pitchFamily="34" charset="-120"/>
               </a:rPr>
-              <a:t>· https://data.seoul.go.kr/dataList/OA-2218/S/1/datasetView.do</a:t>
+              <a:t>2) 페이지 상단 탭 중 "파일" 클릭</a:t>
             </a:r>
             <a:endParaRPr lang="en-US" sz="1700" dirty="0"/>
           </a:p>
@@ -5754,6 +5754,17 @@
               </a:lnSpc>
               <a:buNone/>
             </a:pPr>
+            <a:r>
+              <a:rPr lang="en-US" sz="1700" dirty="0">
+                <a:solidFill>
+                  <a:srgbClr val="4A5568"/>
+                </a:solidFill>
+                <a:latin typeface="Noto Sans KR" pitchFamily="34" charset="0"/>
+                <a:ea typeface="Noto Sans KR" pitchFamily="34" charset="-122"/>
+                <a:cs typeface="Noto Sans KR" pitchFamily="34" charset="-120"/>
+              </a:rPr>
+              <a:t>3) 자료 목록에서 2024년 행 → [다운로드] 클릭</a:t>
+            </a:r>
             <a:endParaRPr lang="en-US" sz="1700" dirty="0"/>
           </a:p>
           <a:p>
@@ -5772,7 +5783,7 @@
                 <a:ea typeface="Noto Sans KR" pitchFamily="34" charset="-122"/>
                 <a:cs typeface="Noto Sans KR" pitchFamily="34" charset="-120"/>
               </a:rPr>
-              <a:t>· 페이지 접속 → "파일" 탭 → 2024 + 2025 두 개 CSV 다운로드</a:t>
+              <a:t>   → 받아지는 파일명: 기간별_일평균_대기환경_정보_2024년.csv</a:t>
             </a:r>
             <a:endParaRPr lang="en-US" sz="1700" dirty="0"/>
           </a:p>
@@ -5792,7 +5803,7 @@
                 <a:ea typeface="Noto Sans KR" pitchFamily="34" charset="-122"/>
                 <a:cs typeface="Noto Sans KR" pitchFamily="34" charset="-120"/>
               </a:rPr>
-              <a:t>· 작업 폴더로 이동 (파일명은 받은 그대로 — 기간별_일평균_대기환경_정보_2024/2025년.csv)</a:t>
+              <a:t>4) 같은 방식으로 2025년 행 다운로드</a:t>
             </a:r>
             <a:endParaRPr lang="en-US" sz="1700" dirty="0"/>
           </a:p>
@@ -5812,7 +5823,56 @@
                 <a:ea typeface="Noto Sans KR" pitchFamily="34" charset="-122"/>
                 <a:cs typeface="Noto Sans KR" pitchFamily="34" charset="-120"/>
               </a:rPr>
-              <a:t>· 받기 정말 어려운 분만 운영 채널로 강사에게 요청</a:t>
+              <a:t>   → 받아지는 파일명: 기간별_일평균_대기환경_정보_2025년.csv</a:t>
+            </a:r>
+            <a:endParaRPr lang="en-US" sz="1700" dirty="0"/>
+          </a:p>
+          <a:p>
+            <a:pPr indent="0" marL="0">
+              <a:lnSpc>
+                <a:spcPct val="155000"/>
+              </a:lnSpc>
+              <a:buNone/>
+            </a:pPr>
+            <a:r>
+              <a:rPr lang="en-US" sz="1700" dirty="0">
+                <a:solidFill>
+                  <a:srgbClr val="4A5568"/>
+                </a:solidFill>
+                <a:latin typeface="Noto Sans KR" pitchFamily="34" charset="0"/>
+                <a:ea typeface="Noto Sans KR" pitchFamily="34" charset="-122"/>
+                <a:cs typeface="Noto Sans KR" pitchFamily="34" charset="-120"/>
+              </a:rPr>
+              <a:t>5) 두 파일을 작업 폴더(inflearn_ccd_challenge)로 이동</a:t>
+            </a:r>
+            <a:endParaRPr lang="en-US" sz="1700" dirty="0"/>
+          </a:p>
+          <a:p>
+            <a:pPr indent="0" marL="0">
+              <a:lnSpc>
+                <a:spcPct val="155000"/>
+              </a:lnSpc>
+              <a:buNone/>
+            </a:pPr>
+            <a:endParaRPr lang="en-US" sz="1700" dirty="0"/>
+          </a:p>
+          <a:p>
+            <a:pPr indent="0" marL="0">
+              <a:lnSpc>
+                <a:spcPct val="155000"/>
+              </a:lnSpc>
+              <a:buNone/>
+            </a:pPr>
+            <a:r>
+              <a:rPr lang="en-US" sz="1700" dirty="0">
+                <a:solidFill>
+                  <a:srgbClr val="4A5568"/>
+                </a:solidFill>
+                <a:latin typeface="Noto Sans KR" pitchFamily="34" charset="0"/>
+                <a:ea typeface="Noto Sans KR" pitchFamily="34" charset="-122"/>
+                <a:cs typeface="Noto Sans KR" pitchFamily="34" charset="-120"/>
+              </a:rPr>
+              <a:t>※ 받기 정말 어려운 분만 운영 채널로 강사에게 요청</a:t>
             </a:r>
             <a:endParaRPr lang="en-US" sz="1700" dirty="0"/>
           </a:p>

--- a/ppt/b2g_day1_setup.pptx
+++ b/ppt/b2g_day1_setup.pptx
@@ -33,9 +33,12 @@
     <p:sldId id="281" r:id="rId27"/>
     <p:sldId id="282" r:id="rId28"/>
     <p:sldId id="283" r:id="rId29"/>
+    <p:sldId id="284" r:id="rId30"/>
+    <p:sldId id="285" r:id="rId31"/>
+    <p:sldId id="286" r:id="rId32"/>
   </p:sldIdLst>
   <p:notesMasterIdLst>
-    <p:notesMasterId r:id="rId30"/>
+    <p:notesMasterId r:id="rId33"/>
   </p:notesMasterIdLst>
   <p:sldSz cx="12192000" cy="6858000"/>
   <p:notesSz cx="6858000" cy="12192000"/>
@@ -2331,6 +2334,94 @@
 </p:notes>
 </file>
 
+<file path=ppt/notesSlides/notesSlide29.xml><?xml version="1.0" encoding="utf-8"?>
+<p:notes xmlns:a="http://schemas.openxmlformats.org/drawingml/2006/main" xmlns:r="http://schemas.openxmlformats.org/officeDocument/2006/relationships" xmlns:p="http://schemas.openxmlformats.org/presentationml/2006/main">
+  <p:cSld>
+    <p:spTree>
+      <p:nvGrpSpPr>
+        <p:cNvPr id="1" name=""/>
+        <p:cNvGrpSpPr/>
+        <p:nvPr/>
+      </p:nvGrpSpPr>
+      <p:grpSpPr>
+        <a:xfrm>
+          <a:off x="0" y="0"/>
+          <a:ext cx="0" cy="0"/>
+          <a:chOff x="0" y="0"/>
+          <a:chExt cx="0" cy="0"/>
+        </a:xfrm>
+      </p:grpSpPr>
+      <p:sp>
+        <p:nvSpPr>
+          <p:cNvPr id="2" name="Slide Image Placeholder 1"/>
+          <p:cNvSpPr>
+            <a:spLocks noGrp="1" noRot="1" noChangeAspect="1"/>
+          </p:cNvSpPr>
+          <p:nvPr>
+            <p:ph type="sldImg"/>
+          </p:nvPr>
+        </p:nvSpPr>
+        <p:spPr/>
+      </p:sp>
+      <p:sp>
+        <p:nvSpPr>
+          <p:cNvPr id="3" name="Notes Placeholder 2"/>
+          <p:cNvSpPr>
+            <a:spLocks noGrp="1"/>
+          </p:cNvSpPr>
+          <p:nvPr>
+            <p:ph type="body" idx="1"/>
+          </p:nvPr>
+        </p:nvSpPr>
+        <p:spPr/>
+        <p:txBody>
+          <a:bodyPr/>
+          <a:lstStyle/>
+          <a:p>
+            <a:r>
+              <a:rPr lang="en-US" dirty="0"/>
+              <a:t/>
+            </a:r>
+            <a:endParaRPr lang="en-US" dirty="0"/>
+          </a:p>
+        </p:txBody>
+      </p:sp>
+      <p:sp>
+        <p:nvSpPr>
+          <p:cNvPr id="4" name="Slide Number Placeholder 3"/>
+          <p:cNvSpPr>
+            <a:spLocks noGrp="1"/>
+          </p:cNvSpPr>
+          <p:nvPr>
+            <p:ph type="sldNum" sz="quarter" idx="10"/>
+          </p:nvPr>
+        </p:nvSpPr>
+        <p:spPr/>
+        <p:txBody>
+          <a:bodyPr/>
+          <a:lstStyle/>
+          <a:p>
+            <a:fld id="{F7021451-1387-4CA6-816F-3879F97B5CBC}" type="slidenum">
+              <a:rPr lang="en-US"/>
+              <a:t>29</a:t>
+            </a:fld>
+            <a:endParaRPr lang="en-US"/>
+          </a:p>
+        </p:txBody>
+      </p:sp>
+    </p:spTree>
+    <p:extLst>
+      <p:ext uri="{BB962C8B-B14F-4D97-AF65-F5344CB8AC3E}">
+        <p14:creationId xmlns:p14="http://schemas.microsoft.com/office/powerpoint/2010/main" val="1024086991"/>
+      </p:ext>
+    </p:extLst>
+  </p:cSld>
+  <p:clrMapOvr>
+    <a:masterClrMapping/>
+  </p:clrMapOvr>
+</p:notes>
+</file>
+
 <file path=ppt/notesSlides/notesSlide3.xml><?xml version="1.0" encoding="utf-8"?>
 <p:notes xmlns:a="http://schemas.openxmlformats.org/drawingml/2006/main" xmlns:r="http://schemas.openxmlformats.org/officeDocument/2006/relationships" xmlns:p="http://schemas.openxmlformats.org/presentationml/2006/main">
   <p:cSld>
@@ -2401,6 +2492,182 @@
             <a:fld id="{F7021451-1387-4CA6-816F-3879F97B5CBC}" type="slidenum">
               <a:rPr lang="en-US"/>
               <a:t>3</a:t>
+            </a:fld>
+            <a:endParaRPr lang="en-US"/>
+          </a:p>
+        </p:txBody>
+      </p:sp>
+    </p:spTree>
+    <p:extLst>
+      <p:ext uri="{BB962C8B-B14F-4D97-AF65-F5344CB8AC3E}">
+        <p14:creationId xmlns:p14="http://schemas.microsoft.com/office/powerpoint/2010/main" val="1024086991"/>
+      </p:ext>
+    </p:extLst>
+  </p:cSld>
+  <p:clrMapOvr>
+    <a:masterClrMapping/>
+  </p:clrMapOvr>
+</p:notes>
+</file>
+
+<file path=ppt/notesSlides/notesSlide30.xml><?xml version="1.0" encoding="utf-8"?>
+<p:notes xmlns:a="http://schemas.openxmlformats.org/drawingml/2006/main" xmlns:r="http://schemas.openxmlformats.org/officeDocument/2006/relationships" xmlns:p="http://schemas.openxmlformats.org/presentationml/2006/main">
+  <p:cSld>
+    <p:spTree>
+      <p:nvGrpSpPr>
+        <p:cNvPr id="1" name=""/>
+        <p:cNvGrpSpPr/>
+        <p:nvPr/>
+      </p:nvGrpSpPr>
+      <p:grpSpPr>
+        <a:xfrm>
+          <a:off x="0" y="0"/>
+          <a:ext cx="0" cy="0"/>
+          <a:chOff x="0" y="0"/>
+          <a:chExt cx="0" cy="0"/>
+        </a:xfrm>
+      </p:grpSpPr>
+      <p:sp>
+        <p:nvSpPr>
+          <p:cNvPr id="2" name="Slide Image Placeholder 1"/>
+          <p:cNvSpPr>
+            <a:spLocks noGrp="1" noRot="1" noChangeAspect="1"/>
+          </p:cNvSpPr>
+          <p:nvPr>
+            <p:ph type="sldImg"/>
+          </p:nvPr>
+        </p:nvSpPr>
+        <p:spPr/>
+      </p:sp>
+      <p:sp>
+        <p:nvSpPr>
+          <p:cNvPr id="3" name="Notes Placeholder 2"/>
+          <p:cNvSpPr>
+            <a:spLocks noGrp="1"/>
+          </p:cNvSpPr>
+          <p:nvPr>
+            <p:ph type="body" idx="1"/>
+          </p:nvPr>
+        </p:nvSpPr>
+        <p:spPr/>
+        <p:txBody>
+          <a:bodyPr/>
+          <a:lstStyle/>
+          <a:p>
+            <a:r>
+              <a:rPr lang="en-US" dirty="0"/>
+              <a:t/>
+            </a:r>
+            <a:endParaRPr lang="en-US" dirty="0"/>
+          </a:p>
+        </p:txBody>
+      </p:sp>
+      <p:sp>
+        <p:nvSpPr>
+          <p:cNvPr id="4" name="Slide Number Placeholder 3"/>
+          <p:cNvSpPr>
+            <a:spLocks noGrp="1"/>
+          </p:cNvSpPr>
+          <p:nvPr>
+            <p:ph type="sldNum" sz="quarter" idx="10"/>
+          </p:nvPr>
+        </p:nvSpPr>
+        <p:spPr/>
+        <p:txBody>
+          <a:bodyPr/>
+          <a:lstStyle/>
+          <a:p>
+            <a:fld id="{F7021451-1387-4CA6-816F-3879F97B5CBC}" type="slidenum">
+              <a:rPr lang="en-US"/>
+              <a:t>30</a:t>
+            </a:fld>
+            <a:endParaRPr lang="en-US"/>
+          </a:p>
+        </p:txBody>
+      </p:sp>
+    </p:spTree>
+    <p:extLst>
+      <p:ext uri="{BB962C8B-B14F-4D97-AF65-F5344CB8AC3E}">
+        <p14:creationId xmlns:p14="http://schemas.microsoft.com/office/powerpoint/2010/main" val="1024086991"/>
+      </p:ext>
+    </p:extLst>
+  </p:cSld>
+  <p:clrMapOvr>
+    <a:masterClrMapping/>
+  </p:clrMapOvr>
+</p:notes>
+</file>
+
+<file path=ppt/notesSlides/notesSlide31.xml><?xml version="1.0" encoding="utf-8"?>
+<p:notes xmlns:a="http://schemas.openxmlformats.org/drawingml/2006/main" xmlns:r="http://schemas.openxmlformats.org/officeDocument/2006/relationships" xmlns:p="http://schemas.openxmlformats.org/presentationml/2006/main">
+  <p:cSld>
+    <p:spTree>
+      <p:nvGrpSpPr>
+        <p:cNvPr id="1" name=""/>
+        <p:cNvGrpSpPr/>
+        <p:nvPr/>
+      </p:nvGrpSpPr>
+      <p:grpSpPr>
+        <a:xfrm>
+          <a:off x="0" y="0"/>
+          <a:ext cx="0" cy="0"/>
+          <a:chOff x="0" y="0"/>
+          <a:chExt cx="0" cy="0"/>
+        </a:xfrm>
+      </p:grpSpPr>
+      <p:sp>
+        <p:nvSpPr>
+          <p:cNvPr id="2" name="Slide Image Placeholder 1"/>
+          <p:cNvSpPr>
+            <a:spLocks noGrp="1" noRot="1" noChangeAspect="1"/>
+          </p:cNvSpPr>
+          <p:nvPr>
+            <p:ph type="sldImg"/>
+          </p:nvPr>
+        </p:nvSpPr>
+        <p:spPr/>
+      </p:sp>
+      <p:sp>
+        <p:nvSpPr>
+          <p:cNvPr id="3" name="Notes Placeholder 2"/>
+          <p:cNvSpPr>
+            <a:spLocks noGrp="1"/>
+          </p:cNvSpPr>
+          <p:nvPr>
+            <p:ph type="body" idx="1"/>
+          </p:nvPr>
+        </p:nvSpPr>
+        <p:spPr/>
+        <p:txBody>
+          <a:bodyPr/>
+          <a:lstStyle/>
+          <a:p>
+            <a:r>
+              <a:rPr lang="en-US" dirty="0"/>
+              <a:t/>
+            </a:r>
+            <a:endParaRPr lang="en-US" dirty="0"/>
+          </a:p>
+        </p:txBody>
+      </p:sp>
+      <p:sp>
+        <p:nvSpPr>
+          <p:cNvPr id="4" name="Slide Number Placeholder 3"/>
+          <p:cNvSpPr>
+            <a:spLocks noGrp="1"/>
+          </p:cNvSpPr>
+          <p:nvPr>
+            <p:ph type="sldNum" sz="quarter" idx="10"/>
+          </p:nvPr>
+        </p:nvSpPr>
+        <p:spPr/>
+        <p:txBody>
+          <a:bodyPr/>
+          <a:lstStyle/>
+          <a:p>
+            <a:fld id="{F7021451-1387-4CA6-816F-3879F97B5CBC}" type="slidenum">
+              <a:rPr lang="en-US"/>
+              <a:t>31</a:t>
             </a:fld>
             <a:endParaRPr lang="en-US"/>
           </a:p>
@@ -3848,7 +4115,7 @@
                 <a:ea typeface="Noto Sans KR" pitchFamily="34" charset="-122"/>
                 <a:cs typeface="Noto Sans KR" pitchFamily="34" charset="-120"/>
               </a:rPr>
-              <a:t>10 / 28</a:t>
+              <a:t>10 / 31</a:t>
             </a:r>
             <a:endParaRPr lang="en-US" sz="900" dirty="0"/>
           </a:p>
@@ -4177,7 +4444,7 @@
                 <a:ea typeface="Noto Sans KR" pitchFamily="34" charset="-122"/>
                 <a:cs typeface="Noto Sans KR" pitchFamily="34" charset="-120"/>
               </a:rPr>
-              <a:t>11 / 28</a:t>
+              <a:t>11 / 31</a:t>
             </a:r>
             <a:endParaRPr lang="en-US" sz="900" dirty="0"/>
           </a:p>
@@ -4300,7 +4567,7 @@
                 <a:ea typeface="Noto Sans KR" pitchFamily="34" charset="-122"/>
                 <a:cs typeface="Noto Sans KR" pitchFamily="34" charset="-120"/>
               </a:rPr>
-              <a:t>섹션 1 / 4</a:t>
+              <a:t>섹션 1 / 5</a:t>
             </a:r>
             <a:endParaRPr lang="en-US" sz="1100" dirty="0"/>
           </a:p>
@@ -4486,7 +4753,7 @@
                 <a:ea typeface="Noto Sans KR" pitchFamily="34" charset="-122"/>
                 <a:cs typeface="Noto Sans KR" pitchFamily="34" charset="-120"/>
               </a:rPr>
-              <a:t>12 / 28</a:t>
+              <a:t>12 / 31</a:t>
             </a:r>
             <a:endParaRPr lang="en-US" sz="900" dirty="0"/>
           </a:p>
@@ -4609,7 +4876,7 @@
                 <a:ea typeface="Noto Sans KR" pitchFamily="34" charset="-122"/>
                 <a:cs typeface="Noto Sans KR" pitchFamily="34" charset="-120"/>
               </a:rPr>
-              <a:t>섹션 2 / 4</a:t>
+              <a:t>섹션 2 / 5</a:t>
             </a:r>
             <a:endParaRPr lang="en-US" sz="1100" dirty="0"/>
           </a:p>
@@ -4815,7 +5082,7 @@
                 <a:ea typeface="Noto Sans KR" pitchFamily="34" charset="-122"/>
                 <a:cs typeface="Noto Sans KR" pitchFamily="34" charset="-120"/>
               </a:rPr>
-              <a:t>13 / 28</a:t>
+              <a:t>13 / 31</a:t>
             </a:r>
             <a:endParaRPr lang="en-US" sz="900" dirty="0"/>
           </a:p>
@@ -4938,7 +5205,7 @@
                 <a:ea typeface="Noto Sans KR" pitchFamily="34" charset="-122"/>
                 <a:cs typeface="Noto Sans KR" pitchFamily="34" charset="-120"/>
               </a:rPr>
-              <a:t>섹션 3 / 4</a:t>
+              <a:t>섹션 3 / 5</a:t>
             </a:r>
             <a:endParaRPr lang="en-US" sz="1100" dirty="0"/>
           </a:p>
@@ -5164,7 +5431,7 @@
                 <a:ea typeface="Noto Sans KR" pitchFamily="34" charset="-122"/>
                 <a:cs typeface="Noto Sans KR" pitchFamily="34" charset="-120"/>
               </a:rPr>
-              <a:t>14 / 28</a:t>
+              <a:t>14 / 31</a:t>
             </a:r>
             <a:endParaRPr lang="en-US" sz="900" dirty="0"/>
           </a:p>
@@ -5287,7 +5554,7 @@
                 <a:ea typeface="Noto Sans KR" pitchFamily="34" charset="-122"/>
                 <a:cs typeface="Noto Sans KR" pitchFamily="34" charset="-120"/>
               </a:rPr>
-              <a:t>섹션 4 / 4</a:t>
+              <a:t>섹션 4 / 5</a:t>
             </a:r>
             <a:endParaRPr lang="en-US" sz="1100" dirty="0"/>
           </a:p>
@@ -5493,7 +5760,7 @@
                 <a:ea typeface="Noto Sans KR" pitchFamily="34" charset="-122"/>
                 <a:cs typeface="Noto Sans KR" pitchFamily="34" charset="-120"/>
               </a:rPr>
-              <a:t>15 / 28</a:t>
+              <a:t>15 / 31</a:t>
             </a:r>
             <a:endParaRPr lang="en-US" sz="900" dirty="0"/>
           </a:p>
@@ -5577,7 +5844,7 @@
                 <a:ea typeface="Noto Sans KR" pitchFamily="34" charset="-122"/>
                 <a:cs typeface="Noto Sans KR" pitchFamily="34" charset="-120"/>
               </a:rPr>
-              <a:t>파트 3. 데이터 다운로드 + 첫 분석 + CLAUDE.md</a:t>
+              <a:t>파트 2. 환경 세팅 (Claude Desktop)</a:t>
             </a:r>
             <a:endParaRPr lang="en-US" sz="1400" dirty="0"/>
           </a:p>
@@ -5616,7 +5883,7 @@
                 <a:ea typeface="Noto Sans KR" pitchFamily="34" charset="-122"/>
                 <a:cs typeface="Noto Sans KR" pitchFamily="34" charset="-120"/>
               </a:rPr>
-              <a:t>섹션 1 / 5</a:t>
+              <a:t>BONUS · ChatGPT 구독자용 (Codex)</a:t>
             </a:r>
             <a:endParaRPr lang="en-US" sz="1100" dirty="0"/>
           </a:p>
@@ -5658,7 +5925,7 @@
                 <a:ea typeface="Noto Sans KR" pitchFamily="34" charset="-122"/>
                 <a:cs typeface="Noto Sans KR" pitchFamily="34" charset="-120"/>
               </a:rPr>
-              <a:t>1단계 — 미세먼지 데이터 다운로드</a:t>
+              <a:t>보너스 — OpenAI Codex 설치</a:t>
             </a:r>
             <a:endParaRPr lang="en-US" sz="4200" dirty="0"/>
           </a:p>
@@ -5723,7 +5990,7 @@
                 <a:ea typeface="Noto Sans KR" pitchFamily="34" charset="-122"/>
                 <a:cs typeface="Noto Sans KR" pitchFamily="34" charset="-120"/>
               </a:rPr>
-              <a:t>1) https://data.seoul.go.kr/dataList/OA-2218/S/1/datasetView.do 접속</a:t>
+              <a:t>Claude 대신 ChatGPT를 쓰시는 분은 같은 흐름을 Codex로:</a:t>
             </a:r>
             <a:endParaRPr lang="en-US" sz="1700" dirty="0"/>
           </a:p>
@@ -5734,17 +6001,6 @@
               </a:lnSpc>
               <a:buNone/>
             </a:pPr>
-            <a:r>
-              <a:rPr lang="en-US" sz="1700" dirty="0">
-                <a:solidFill>
-                  <a:srgbClr val="4A5568"/>
-                </a:solidFill>
-                <a:latin typeface="Noto Sans KR" pitchFamily="34" charset="0"/>
-                <a:ea typeface="Noto Sans KR" pitchFamily="34" charset="-122"/>
-                <a:cs typeface="Noto Sans KR" pitchFamily="34" charset="-120"/>
-              </a:rPr>
-              <a:t>2) 페이지 상단 탭 중 "파일" 클릭</a:t>
-            </a:r>
             <a:endParaRPr lang="en-US" sz="1700" dirty="0"/>
           </a:p>
           <a:p>
@@ -5763,7 +6019,7 @@
                 <a:ea typeface="Noto Sans KR" pitchFamily="34" charset="-122"/>
                 <a:cs typeface="Noto Sans KR" pitchFamily="34" charset="-120"/>
               </a:rPr>
-              <a:t>3) 자료 목록에서 2024년 행 → [다운로드] 클릭</a:t>
+              <a:t>1) Codex 데스크톱 앱 설치</a:t>
             </a:r>
             <a:endParaRPr lang="en-US" sz="1700" dirty="0"/>
           </a:p>
@@ -5783,7 +6039,7 @@
                 <a:ea typeface="Noto Sans KR" pitchFamily="34" charset="-122"/>
                 <a:cs typeface="Noto Sans KR" pitchFamily="34" charset="-120"/>
               </a:rPr>
-              <a:t>   → 받아지는 파일명: 기간별_일평균_대기환경_정보_2024년.csv</a:t>
+              <a:t>   macOS: developers.openai.com/codex/app</a:t>
             </a:r>
             <a:endParaRPr lang="en-US" sz="1700" dirty="0"/>
           </a:p>
@@ -5803,7 +6059,7 @@
                 <a:ea typeface="Noto Sans KR" pitchFamily="34" charset="-122"/>
                 <a:cs typeface="Noto Sans KR" pitchFamily="34" charset="-120"/>
               </a:rPr>
-              <a:t>4) 같은 방식으로 2025년 행 다운로드</a:t>
+              <a:t>   Windows: Microsoft Store에서 "Codex" 검색</a:t>
             </a:r>
             <a:endParaRPr lang="en-US" sz="1700" dirty="0"/>
           </a:p>
@@ -5823,7 +6079,7 @@
                 <a:ea typeface="Noto Sans KR" pitchFamily="34" charset="-122"/>
                 <a:cs typeface="Noto Sans KR" pitchFamily="34" charset="-120"/>
               </a:rPr>
-              <a:t>   → 받아지는 파일명: 기간별_일평균_대기환경_정보_2025년.csv</a:t>
+              <a:t>2) ChatGPT Plus/Pro 계정으로 로그인</a:t>
             </a:r>
             <a:endParaRPr lang="en-US" sz="1700" dirty="0"/>
           </a:p>
@@ -5843,7 +6099,7 @@
                 <a:ea typeface="Noto Sans KR" pitchFamily="34" charset="-122"/>
                 <a:cs typeface="Noto Sans KR" pitchFamily="34" charset="-120"/>
               </a:rPr>
-              <a:t>5) 두 파일을 작업 폴더(inflearn_ccd_challenge)로 이동</a:t>
+              <a:t>3) 터미널에서 CLI 설치: npm install -g @openai/codex</a:t>
             </a:r>
             <a:endParaRPr lang="en-US" sz="1700" dirty="0"/>
           </a:p>
@@ -5854,6 +6110,17 @@
               </a:lnSpc>
               <a:buNone/>
             </a:pPr>
+            <a:r>
+              <a:rPr lang="en-US" sz="1700" dirty="0">
+                <a:solidFill>
+                  <a:srgbClr val="4A5568"/>
+                </a:solidFill>
+                <a:latin typeface="Noto Sans KR" pitchFamily="34" charset="0"/>
+                <a:ea typeface="Noto Sans KR" pitchFamily="34" charset="-122"/>
+                <a:cs typeface="Noto Sans KR" pitchFamily="34" charset="-120"/>
+              </a:rPr>
+              <a:t>   (또는 Homebrew: brew install codex)</a:t>
+            </a:r>
             <a:endParaRPr lang="en-US" sz="1700" dirty="0"/>
           </a:p>
           <a:p>
@@ -5872,7 +6139,56 @@
                 <a:ea typeface="Noto Sans KR" pitchFamily="34" charset="-122"/>
                 <a:cs typeface="Noto Sans KR" pitchFamily="34" charset="-120"/>
               </a:rPr>
-              <a:t>※ 받기 정말 어려운 분만 운영 채널로 강사에게 요청</a:t>
+              <a:t>4) 작업 폴더(inflearn_ccd_challenge)에서 codex 실행</a:t>
+            </a:r>
+            <a:endParaRPr lang="en-US" sz="1700" dirty="0"/>
+          </a:p>
+          <a:p>
+            <a:pPr indent="0" marL="0">
+              <a:lnSpc>
+                <a:spcPct val="155000"/>
+              </a:lnSpc>
+              <a:buNone/>
+            </a:pPr>
+            <a:r>
+              <a:rPr lang="en-US" sz="1700" dirty="0">
+                <a:solidFill>
+                  <a:srgbClr val="4A5568"/>
+                </a:solidFill>
+                <a:latin typeface="Noto Sans KR" pitchFamily="34" charset="0"/>
+                <a:ea typeface="Noto Sans KR" pitchFamily="34" charset="-122"/>
+                <a:cs typeface="Noto Sans KR" pitchFamily="34" charset="-120"/>
+              </a:rPr>
+              <a:t>   → ChatGPT 계정 인증 → 분석 시작</a:t>
+            </a:r>
+            <a:endParaRPr lang="en-US" sz="1700" dirty="0"/>
+          </a:p>
+          <a:p>
+            <a:pPr indent="0" marL="0">
+              <a:lnSpc>
+                <a:spcPct val="155000"/>
+              </a:lnSpc>
+              <a:buNone/>
+            </a:pPr>
+            <a:endParaRPr lang="en-US" sz="1700" dirty="0"/>
+          </a:p>
+          <a:p>
+            <a:pPr indent="0" marL="0">
+              <a:lnSpc>
+                <a:spcPct val="155000"/>
+              </a:lnSpc>
+              <a:buNone/>
+            </a:pPr>
+            <a:r>
+              <a:rPr lang="en-US" sz="1700" dirty="0">
+                <a:solidFill>
+                  <a:srgbClr val="4A5568"/>
+                </a:solidFill>
+                <a:latin typeface="Noto Sans KR" pitchFamily="34" charset="0"/>
+                <a:ea typeface="Noto Sans KR" pitchFamily="34" charset="-122"/>
+                <a:cs typeface="Noto Sans KR" pitchFamily="34" charset="-120"/>
+              </a:rPr>
+              <a:t>· 강의 흐름은 Claude Code와 동일하게 따라갈 수 있음</a:t>
             </a:r>
             <a:endParaRPr lang="en-US" sz="1700" dirty="0"/>
           </a:p>
@@ -5911,7 +6227,7 @@
                 <a:ea typeface="Noto Sans KR" pitchFamily="34" charset="-122"/>
                 <a:cs typeface="Noto Sans KR" pitchFamily="34" charset="-120"/>
               </a:rPr>
-              <a:t>16 / 28</a:t>
+              <a:t>16 / 31</a:t>
             </a:r>
             <a:endParaRPr lang="en-US" sz="900" dirty="0"/>
           </a:p>
@@ -5995,7 +6311,7 @@
                 <a:ea typeface="Noto Sans KR" pitchFamily="34" charset="-122"/>
                 <a:cs typeface="Noto Sans KR" pitchFamily="34" charset="-120"/>
               </a:rPr>
-              <a:t>DAY 1 · DATA SOURCE</a:t>
+              <a:t>파트 2. 환경 세팅 (Claude Desktop)</a:t>
             </a:r>
             <a:endParaRPr lang="en-US" sz="1400" dirty="0"/>
           </a:p>
@@ -6034,7 +6350,7 @@
                 <a:ea typeface="Noto Sans KR" pitchFamily="34" charset="-122"/>
                 <a:cs typeface="Noto Sans KR" pitchFamily="34" charset="-120"/>
               </a:rPr>
-              <a:t>오늘 만든 결과물</a:t>
+              <a:t>섹션 5 / 5</a:t>
             </a:r>
             <a:endParaRPr lang="en-US" sz="1100" dirty="0"/>
           </a:p>
@@ -6048,8 +6364,8 @@
         </p:nvSpPr>
         <p:spPr>
           <a:xfrm>
-            <a:off x="548640" y="1417320"/>
-            <a:ext cx="11091672" cy="640080"/>
+            <a:off x="548640" y="1508760"/>
+            <a:ext cx="11091672" cy="1371600"/>
           </a:xfrm>
           <a:prstGeom prst="rect">
             <a:avLst/>
@@ -6062,10 +6378,13 @@
           <a:lstStyle/>
           <a:p>
             <a:pPr indent="0" marL="0">
-              <a:buNone/>
-            </a:pPr>
-            <a:r>
-              <a:rPr lang="en-US" sz="2800" b="1" spc="-30" kern="0" dirty="0">
+              <a:lnSpc>
+                <a:spcPct val="110000"/>
+              </a:lnSpc>
+              <a:buNone/>
+            </a:pPr>
+            <a:r>
+              <a:rPr lang="en-US" sz="4200" b="1" spc="-50" kern="0" dirty="0">
                 <a:solidFill>
                   <a:srgbClr val="1A1F36"/>
                 </a:solidFill>
@@ -6073,9 +6392,9 @@
                 <a:ea typeface="Noto Sans KR" pitchFamily="34" charset="-122"/>
                 <a:cs typeface="Noto Sans KR" pitchFamily="34" charset="-120"/>
               </a:rPr>
-              <a:t>서울 열린데이터광장 OA-2218 — 다운로드 화면</a:t>
-            </a:r>
-            <a:endParaRPr lang="en-US" sz="2800" dirty="0"/>
+              <a:t>만능 해결법 — 에러는 Claude에게 그대로 보여주세요</a:t>
+            </a:r>
+            <a:endParaRPr lang="en-US" sz="4200" dirty="0"/>
           </a:p>
         </p:txBody>
       </p:sp>
@@ -6087,22 +6406,18 @@
         </p:nvSpPr>
         <p:spPr>
           <a:xfrm>
-            <a:off x="2194560" y="2240280"/>
-            <a:ext cx="7772400" cy="3657600"/>
-          </a:xfrm>
-          <a:prstGeom prst="roundRect">
-            <a:avLst>
-              <a:gd name="adj" fmla="val 3000"/>
-            </a:avLst>
-          </a:prstGeom>
-          <a:solidFill>
-            <a:srgbClr val="F5F7FA"/>
-          </a:solidFill>
-          <a:ln w="12700">
+            <a:off x="548640" y="2971800"/>
+            <a:ext cx="1828800" cy="0"/>
+          </a:xfrm>
+          <a:prstGeom prst="line">
+            <a:avLst/>
+          </a:prstGeom>
+          <a:noFill/>
+          <a:ln w="25400">
             <a:solidFill>
-              <a:srgbClr val="CBD5E0"/>
+              <a:srgbClr val="4A7BF7"/>
             </a:solidFill>
-            <a:prstDash val="dash"/>
+            <a:prstDash val="solid"/>
           </a:ln>
         </p:spPr>
       </p:sp>
@@ -6114,141 +6429,132 @@
         </p:nvSpPr>
         <p:spPr>
           <a:xfrm>
-            <a:off x="2194560" y="3703320"/>
-            <a:ext cx="7772400" cy="731520"/>
-          </a:xfrm>
-          <a:prstGeom prst="rect">
-            <a:avLst/>
-          </a:prstGeom>
-          <a:noFill/>
-          <a:ln/>
-        </p:spPr>
-        <p:txBody>
-          <a:bodyPr wrap="square" rtlCol="0" anchor="ctr"/>
-          <a:lstStyle/>
-          <a:p>
-            <a:pPr algn="ctr" indent="0" marL="0">
+            <a:off x="548640" y="3200400"/>
+            <a:ext cx="11091672" cy="2788920"/>
+          </a:xfrm>
+          <a:prstGeom prst="rect">
+            <a:avLst/>
+          </a:prstGeom>
+          <a:noFill/>
+          <a:ln/>
+        </p:spPr>
+        <p:txBody>
+          <a:bodyPr wrap="square" rtlCol="0" anchor="t"/>
+          <a:lstStyle/>
+          <a:p>
+            <a:pPr indent="0" marL="0">
               <a:lnSpc>
-                <a:spcPct val="140000"/>
+                <a:spcPct val="155000"/>
               </a:lnSpc>
               <a:buNone/>
             </a:pPr>
             <a:r>
-              <a:rPr lang="en-US" sz="1400" i="1" dirty="0">
-                <a:solidFill>
-                  <a:srgbClr val="718096"/>
-                </a:solidFill>
-                <a:latin typeface="Noto Sans KR" pitchFamily="34" charset="0"/>
-                <a:ea typeface="Noto Sans KR" pitchFamily="34" charset="-122"/>
-                <a:cs typeface="Noto Sans KR" pitchFamily="34" charset="-120"/>
-              </a:rPr>
-              <a:t>📷  결과 이미지 위치</a:t>
-            </a:r>
-            <a:endParaRPr lang="en-US" sz="1400" dirty="0"/>
-          </a:p>
-          <a:p>
-            <a:pPr algn="ctr" indent="0" marL="0">
+              <a:rPr lang="en-US" sz="1700" dirty="0">
+                <a:solidFill>
+                  <a:srgbClr val="4A5568"/>
+                </a:solidFill>
+                <a:latin typeface="Noto Sans KR" pitchFamily="34" charset="0"/>
+                <a:ea typeface="Noto Sans KR" pitchFamily="34" charset="-122"/>
+                <a:cs typeface="Noto Sans KR" pitchFamily="34" charset="-120"/>
+              </a:rPr>
+              <a:t>· 어떤 에러든, 어떤 막힘이든 → 에러 메시지를 그대로 복사</a:t>
+            </a:r>
+            <a:endParaRPr lang="en-US" sz="1700" dirty="0"/>
+          </a:p>
+          <a:p>
+            <a:pPr indent="0" marL="0">
               <a:lnSpc>
-                <a:spcPct val="140000"/>
+                <a:spcPct val="155000"/>
               </a:lnSpc>
               <a:buNone/>
             </a:pPr>
             <a:r>
-              <a:rPr lang="en-US" sz="1400" i="1" dirty="0">
-                <a:solidFill>
-                  <a:srgbClr val="718096"/>
-                </a:solidFill>
-                <a:latin typeface="Noto Sans KR" pitchFamily="34" charset="0"/>
-                <a:ea typeface="Noto Sans KR" pitchFamily="34" charset="-122"/>
-                <a:cs typeface="Noto Sans KR" pitchFamily="34" charset="-120"/>
-              </a:rPr>
-              <a:t>(강의 시연 캡처가 들어갈 자리)</a:t>
-            </a:r>
-            <a:endParaRPr lang="en-US" sz="1400" dirty="0"/>
+              <a:rPr lang="en-US" sz="1700" dirty="0">
+                <a:solidFill>
+                  <a:srgbClr val="4A5568"/>
+                </a:solidFill>
+                <a:latin typeface="Noto Sans KR" pitchFamily="34" charset="0"/>
+                <a:ea typeface="Noto Sans KR" pitchFamily="34" charset="-122"/>
+                <a:cs typeface="Noto Sans KR" pitchFamily="34" charset="-120"/>
+              </a:rPr>
+              <a:t>· Claude Desktop 또는 Claude Code에 붙여넣고 "이거 어떻게 해결해?"</a:t>
+            </a:r>
+            <a:endParaRPr lang="en-US" sz="1700" dirty="0"/>
+          </a:p>
+          <a:p>
+            <a:pPr indent="0" marL="0">
+              <a:lnSpc>
+                <a:spcPct val="155000"/>
+              </a:lnSpc>
+              <a:buNone/>
+            </a:pPr>
+            <a:r>
+              <a:rPr lang="en-US" sz="1700" dirty="0">
+                <a:solidFill>
+                  <a:srgbClr val="4A5568"/>
+                </a:solidFill>
+                <a:latin typeface="Noto Sans KR" pitchFamily="34" charset="0"/>
+                <a:ea typeface="Noto Sans KR" pitchFamily="34" charset="-122"/>
+                <a:cs typeface="Noto Sans KR" pitchFamily="34" charset="-120"/>
+              </a:rPr>
+              <a:t>· Claude가 원인 진단 + 직접 고치기까지 한 번에</a:t>
+            </a:r>
+            <a:endParaRPr lang="en-US" sz="1700" dirty="0"/>
+          </a:p>
+          <a:p>
+            <a:pPr indent="0" marL="0">
+              <a:lnSpc>
+                <a:spcPct val="155000"/>
+              </a:lnSpc>
+              <a:buNone/>
+            </a:pPr>
+            <a:r>
+              <a:rPr lang="en-US" sz="1700" dirty="0">
+                <a:solidFill>
+                  <a:srgbClr val="4A5568"/>
+                </a:solidFill>
+                <a:latin typeface="Noto Sans KR" pitchFamily="34" charset="0"/>
+                <a:ea typeface="Noto Sans KR" pitchFamily="34" charset="-122"/>
+                <a:cs typeface="Noto Sans KR" pitchFamily="34" charset="-120"/>
+              </a:rPr>
+              <a:t>· 검색·스택오버플로우 → 더 이상 필요 없음</a:t>
+            </a:r>
+            <a:endParaRPr lang="en-US" sz="1700" dirty="0"/>
+          </a:p>
+          <a:p>
+            <a:pPr indent="0" marL="0">
+              <a:lnSpc>
+                <a:spcPct val="155000"/>
+              </a:lnSpc>
+              <a:buNone/>
+            </a:pPr>
+            <a:endParaRPr lang="en-US" sz="1700" dirty="0"/>
+          </a:p>
+          <a:p>
+            <a:pPr indent="0" marL="0">
+              <a:lnSpc>
+                <a:spcPct val="155000"/>
+              </a:lnSpc>
+              <a:buNone/>
+            </a:pPr>
+            <a:r>
+              <a:rPr lang="en-US" sz="1700" dirty="0">
+                <a:solidFill>
+                  <a:srgbClr val="4A5568"/>
+                </a:solidFill>
+                <a:latin typeface="Noto Sans KR" pitchFamily="34" charset="0"/>
+                <a:ea typeface="Noto Sans KR" pitchFamily="34" charset="-122"/>
+                <a:cs typeface="Noto Sans KR" pitchFamily="34" charset="-120"/>
+              </a:rPr>
+              <a:t>· 머리 싸매지 말고 일단 물어보기 — 라이브 강의 트러블도 이 한 가지로 다 풀립니다</a:t>
+            </a:r>
+            <a:endParaRPr lang="en-US" sz="1700" dirty="0"/>
           </a:p>
         </p:txBody>
       </p:sp>
       <p:sp>
         <p:nvSpPr>
           <p:cNvPr id="8" name="Text 6"/>
-          <p:cNvSpPr/>
-          <p:nvPr/>
-        </p:nvSpPr>
-        <p:spPr>
-          <a:xfrm>
-            <a:off x="2194560" y="4983480"/>
-            <a:ext cx="7772400" cy="365760"/>
-          </a:xfrm>
-          <a:prstGeom prst="rect">
-            <a:avLst/>
-          </a:prstGeom>
-          <a:noFill/>
-          <a:ln/>
-        </p:spPr>
-        <p:txBody>
-          <a:bodyPr wrap="square" rtlCol="0" anchor="ctr"/>
-          <a:lstStyle/>
-          <a:p>
-            <a:pPr algn="ctr" indent="0" marL="0">
-              <a:buNone/>
-            </a:pPr>
-            <a:r>
-              <a:rPr lang="en-US" sz="1000" i="1" dirty="0">
-                <a:solidFill>
-                  <a:srgbClr val="718096"/>
-                </a:solidFill>
-                <a:latin typeface="Roboto Mono" pitchFamily="34" charset="0"/>
-                <a:ea typeface="Roboto Mono" pitchFamily="34" charset="-122"/>
-                <a:cs typeface="Roboto Mono" pitchFamily="34" charset="-120"/>
-              </a:rPr>
-              <a:t>screenshots/day1/seoul_open_data_oa2218.png</a:t>
-            </a:r>
-            <a:endParaRPr lang="en-US" sz="1000" dirty="0"/>
-          </a:p>
-        </p:txBody>
-      </p:sp>
-      <p:sp>
-        <p:nvSpPr>
-          <p:cNvPr id="9" name="Text 7"/>
-          <p:cNvSpPr/>
-          <p:nvPr/>
-        </p:nvSpPr>
-        <p:spPr>
-          <a:xfrm>
-            <a:off x="548640" y="5989320"/>
-            <a:ext cx="11091672" cy="411480"/>
-          </a:xfrm>
-          <a:prstGeom prst="rect">
-            <a:avLst/>
-          </a:prstGeom>
-          <a:noFill/>
-          <a:ln/>
-        </p:spPr>
-        <p:txBody>
-          <a:bodyPr wrap="square" rtlCol="0" anchor="ctr"/>
-          <a:lstStyle/>
-          <a:p>
-            <a:pPr algn="ctr" indent="0" marL="0">
-              <a:buNone/>
-            </a:pPr>
-            <a:r>
-              <a:rPr lang="en-US" sz="1200" i="1" dirty="0">
-                <a:solidFill>
-                  <a:srgbClr val="718096"/>
-                </a:solidFill>
-                <a:latin typeface="Noto Sans KR" pitchFamily="34" charset="0"/>
-                <a:ea typeface="Noto Sans KR" pitchFamily="34" charset="-122"/>
-                <a:cs typeface="Noto Sans KR" pitchFamily="34" charset="-120"/>
-              </a:rPr>
-              <a:t>"파일" 탭에서 2024·2025 두 해 CSV 다운로드</a:t>
-            </a:r>
-            <a:endParaRPr lang="en-US" sz="1200" dirty="0"/>
-          </a:p>
-        </p:txBody>
-      </p:sp>
-      <p:sp>
-        <p:nvSpPr>
-          <p:cNvPr id="10" name="Text 8"/>
           <p:cNvSpPr/>
           <p:nvPr/>
         </p:nvSpPr>
@@ -6279,7 +6585,7 @@
                 <a:ea typeface="Noto Sans KR" pitchFamily="34" charset="-122"/>
                 <a:cs typeface="Noto Sans KR" pitchFamily="34" charset="-120"/>
               </a:rPr>
-              <a:t>17 / 28</a:t>
+              <a:t>17 / 31</a:t>
             </a:r>
             <a:endParaRPr lang="en-US" sz="900" dirty="0"/>
           </a:p>
@@ -6402,7 +6708,7 @@
                 <a:ea typeface="Noto Sans KR" pitchFamily="34" charset="-122"/>
                 <a:cs typeface="Noto Sans KR" pitchFamily="34" charset="-120"/>
               </a:rPr>
-              <a:t>섹션 2 / 5</a:t>
+              <a:t>섹션 1 / 4</a:t>
             </a:r>
             <a:endParaRPr lang="en-US" sz="1100" dirty="0"/>
           </a:p>
@@ -6444,7 +6750,7 @@
                 <a:ea typeface="Noto Sans KR" pitchFamily="34" charset="-122"/>
                 <a:cs typeface="Noto Sans KR" pitchFamily="34" charset="-120"/>
               </a:rPr>
-              <a:t>데이터 한눈에 보기</a:t>
+              <a:t>1단계 — 미세먼지 데이터 다운로드</a:t>
             </a:r>
             <a:endParaRPr lang="en-US" sz="4200" dirty="0"/>
           </a:p>
@@ -6509,7 +6815,7 @@
                 <a:ea typeface="Noto Sans KR" pitchFamily="34" charset="-122"/>
                 <a:cs typeface="Noto Sans KR" pitchFamily="34" charset="-120"/>
               </a:rPr>
-              <a:t>· 규모: 18,275행 (2024: 9,150 + 2025: 9,125)</a:t>
+              <a:t>1) https://data.seoul.go.kr/dataList/OA-2218/S/1/datasetView.do 접속</a:t>
             </a:r>
             <a:endParaRPr lang="en-US" sz="1700" dirty="0"/>
           </a:p>
@@ -6529,7 +6835,7 @@
                 <a:ea typeface="Noto Sans KR" pitchFamily="34" charset="-122"/>
                 <a:cs typeface="Noto Sans KR" pitchFamily="34" charset="-120"/>
               </a:rPr>
-              <a:t>· 컬럼 9개: 측정일시·권역명·측정소명·이산화질소·오존·일산화탄소·아황산가스·미세먼지·초미세먼지</a:t>
+              <a:t>2) 페이지 상단 탭 중 "파일" 클릭</a:t>
             </a:r>
             <a:endParaRPr lang="en-US" sz="1700" dirty="0"/>
           </a:p>
@@ -6549,7 +6855,7 @@
                 <a:ea typeface="Noto Sans KR" pitchFamily="34" charset="-122"/>
                 <a:cs typeface="Noto Sans KR" pitchFamily="34" charset="-120"/>
               </a:rPr>
-              <a:t>· 인코딩: CP949 (한글이 EUC-KR 방식)</a:t>
+              <a:t>3) 자료 목록에서 2024년 행 → [다운로드] 클릭</a:t>
             </a:r>
             <a:endParaRPr lang="en-US" sz="1700" dirty="0"/>
           </a:p>
@@ -6569,7 +6875,7 @@
                 <a:ea typeface="Noto Sans KR" pitchFamily="34" charset="-122"/>
                 <a:cs typeface="Noto Sans KR" pitchFamily="34" charset="-120"/>
               </a:rPr>
-              <a:t>· 컬럼명 살짝 다름: 2024 "미세먼지" vs 2025 "미세먼지농도"</a:t>
+              <a:t>   → 받아지는 파일명: 기간별_일평균_대기환경_정보_2024년.csv</a:t>
             </a:r>
             <a:endParaRPr lang="en-US" sz="1700" dirty="0"/>
           </a:p>
@@ -6589,7 +6895,76 @@
                 <a:ea typeface="Noto Sans KR" pitchFamily="34" charset="-122"/>
                 <a:cs typeface="Noto Sans KR" pitchFamily="34" charset="-120"/>
               </a:rPr>
-              <a:t>· 측정소: 서울 25개 자치구</a:t>
+              <a:t>4) 같은 방식으로 2025년 행 다운로드</a:t>
+            </a:r>
+            <a:endParaRPr lang="en-US" sz="1700" dirty="0"/>
+          </a:p>
+          <a:p>
+            <a:pPr indent="0" marL="0">
+              <a:lnSpc>
+                <a:spcPct val="155000"/>
+              </a:lnSpc>
+              <a:buNone/>
+            </a:pPr>
+            <a:r>
+              <a:rPr lang="en-US" sz="1700" dirty="0">
+                <a:solidFill>
+                  <a:srgbClr val="4A5568"/>
+                </a:solidFill>
+                <a:latin typeface="Noto Sans KR" pitchFamily="34" charset="0"/>
+                <a:ea typeface="Noto Sans KR" pitchFamily="34" charset="-122"/>
+                <a:cs typeface="Noto Sans KR" pitchFamily="34" charset="-120"/>
+              </a:rPr>
+              <a:t>   → 받아지는 파일명: 기간별_일평균_대기환경_정보_2025년.csv</a:t>
+            </a:r>
+            <a:endParaRPr lang="en-US" sz="1700" dirty="0"/>
+          </a:p>
+          <a:p>
+            <a:pPr indent="0" marL="0">
+              <a:lnSpc>
+                <a:spcPct val="155000"/>
+              </a:lnSpc>
+              <a:buNone/>
+            </a:pPr>
+            <a:r>
+              <a:rPr lang="en-US" sz="1700" dirty="0">
+                <a:solidFill>
+                  <a:srgbClr val="4A5568"/>
+                </a:solidFill>
+                <a:latin typeface="Noto Sans KR" pitchFamily="34" charset="0"/>
+                <a:ea typeface="Noto Sans KR" pitchFamily="34" charset="-122"/>
+                <a:cs typeface="Noto Sans KR" pitchFamily="34" charset="-120"/>
+              </a:rPr>
+              <a:t>5) 두 파일을 작업 폴더(inflearn_ccd_challenge)로 이동</a:t>
+            </a:r>
+            <a:endParaRPr lang="en-US" sz="1700" dirty="0"/>
+          </a:p>
+          <a:p>
+            <a:pPr indent="0" marL="0">
+              <a:lnSpc>
+                <a:spcPct val="155000"/>
+              </a:lnSpc>
+              <a:buNone/>
+            </a:pPr>
+            <a:endParaRPr lang="en-US" sz="1700" dirty="0"/>
+          </a:p>
+          <a:p>
+            <a:pPr indent="0" marL="0">
+              <a:lnSpc>
+                <a:spcPct val="155000"/>
+              </a:lnSpc>
+              <a:buNone/>
+            </a:pPr>
+            <a:r>
+              <a:rPr lang="en-US" sz="1700" dirty="0">
+                <a:solidFill>
+                  <a:srgbClr val="4A5568"/>
+                </a:solidFill>
+                <a:latin typeface="Noto Sans KR" pitchFamily="34" charset="0"/>
+                <a:ea typeface="Noto Sans KR" pitchFamily="34" charset="-122"/>
+                <a:cs typeface="Noto Sans KR" pitchFamily="34" charset="-120"/>
+              </a:rPr>
+              <a:t>※ 받기 정말 어려운 분만 운영 채널로 강사에게 요청</a:t>
             </a:r>
             <a:endParaRPr lang="en-US" sz="1700" dirty="0"/>
           </a:p>
@@ -6628,7 +7003,7 @@
                 <a:ea typeface="Noto Sans KR" pitchFamily="34" charset="-122"/>
                 <a:cs typeface="Noto Sans KR" pitchFamily="34" charset="-120"/>
               </a:rPr>
-              <a:t>18 / 28</a:t>
+              <a:t>18 / 31</a:t>
             </a:r>
             <a:endParaRPr lang="en-US" sz="900" dirty="0"/>
           </a:p>
@@ -6712,7 +7087,7 @@
                 <a:ea typeface="Noto Sans KR" pitchFamily="34" charset="-122"/>
                 <a:cs typeface="Noto Sans KR" pitchFamily="34" charset="-120"/>
               </a:rPr>
-              <a:t>파트 3. 데이터 다운로드 + 첫 분석 + CLAUDE.md</a:t>
+              <a:t>DAY 1 · DATA SOURCE</a:t>
             </a:r>
             <a:endParaRPr lang="en-US" sz="1400" dirty="0"/>
           </a:p>
@@ -6727,7 +7102,7 @@
         <p:spPr>
           <a:xfrm>
             <a:off x="548640" y="960120"/>
-            <a:ext cx="11091672" cy="292608"/>
+            <a:ext cx="10515600" cy="292608"/>
           </a:xfrm>
           <a:prstGeom prst="rect">
             <a:avLst/>
@@ -6743,7 +7118,7 @@
               <a:buNone/>
             </a:pPr>
             <a:r>
-              <a:rPr lang="en-US" sz="1100" b="1" spc="50" kern="0" dirty="0">
+              <a:rPr lang="en-US" sz="1100" b="1" spc="150" kern="0" dirty="0">
                 <a:solidFill>
                   <a:srgbClr val="4A7BF7"/>
                 </a:solidFill>
@@ -6751,7 +7126,7 @@
                 <a:ea typeface="Noto Sans KR" pitchFamily="34" charset="-122"/>
                 <a:cs typeface="Noto Sans KR" pitchFamily="34" charset="-120"/>
               </a:rPr>
-              <a:t>💬 함께 볼 시연 프롬프트 — 따라 치지 않으셔도 됩니다</a:t>
+              <a:t>오늘 만든 결과물</a:t>
             </a:r>
             <a:endParaRPr lang="en-US" sz="1100" dirty="0"/>
           </a:p>
@@ -6765,8 +7140,8 @@
         </p:nvSpPr>
         <p:spPr>
           <a:xfrm>
-            <a:off x="548640" y="1508760"/>
-            <a:ext cx="11091672" cy="1005840"/>
+            <a:off x="548640" y="1417320"/>
+            <a:ext cx="11091672" cy="640080"/>
           </a:xfrm>
           <a:prstGeom prst="rect">
             <a:avLst/>
@@ -6779,13 +7154,10 @@
           <a:lstStyle/>
           <a:p>
             <a:pPr indent="0" marL="0">
-              <a:lnSpc>
-                <a:spcPct val="115000"/>
-              </a:lnSpc>
-              <a:buNone/>
-            </a:pPr>
-            <a:r>
-              <a:rPr lang="en-US" sz="3400" b="1" spc="-50" kern="0" dirty="0">
+              <a:buNone/>
+            </a:pPr>
+            <a:r>
+              <a:rPr lang="en-US" sz="2800" b="1" spc="-30" kern="0" dirty="0">
                 <a:solidFill>
                   <a:srgbClr val="1A1F36"/>
                 </a:solidFill>
@@ -6793,9 +7165,9 @@
                 <a:ea typeface="Noto Sans KR" pitchFamily="34" charset="-122"/>
                 <a:cs typeface="Noto Sans KR" pitchFamily="34" charset="-120"/>
               </a:rPr>
-              <a:t>2단계 — 이 데이터, 어떻게 생겼지?</a:t>
-            </a:r>
-            <a:endParaRPr lang="en-US" sz="3400" dirty="0"/>
+              <a:t>서울 열린데이터광장 OA-2218 — 다운로드 화면</a:t>
+            </a:r>
+            <a:endParaRPr lang="en-US" sz="2800" dirty="0"/>
           </a:p>
         </p:txBody>
       </p:sp>
@@ -6807,173 +7179,168 @@
         </p:nvSpPr>
         <p:spPr>
           <a:xfrm>
-            <a:off x="548640" y="2606040"/>
-            <a:ext cx="1828800" cy="0"/>
-          </a:xfrm>
-          <a:prstGeom prst="line">
-            <a:avLst/>
-          </a:prstGeom>
-          <a:noFill/>
-          <a:ln w="25400">
-            <a:solidFill>
-              <a:srgbClr val="4A7BF7"/>
-            </a:solidFill>
-            <a:prstDash val="solid"/>
-          </a:ln>
-        </p:spPr>
-      </p:sp>
-      <p:sp>
-        <p:nvSpPr>
-          <p:cNvPr id="7" name="Shape 5"/>
-          <p:cNvSpPr/>
-          <p:nvPr/>
-        </p:nvSpPr>
-        <p:spPr>
-          <a:xfrm>
-            <a:off x="548640" y="2926080"/>
-            <a:ext cx="11091672" cy="3200400"/>
+            <a:off x="2194560" y="2240280"/>
+            <a:ext cx="7772400" cy="3657600"/>
           </a:xfrm>
           <a:prstGeom prst="roundRect">
             <a:avLst>
-              <a:gd name="adj" fmla="val 1714"/>
+              <a:gd name="adj" fmla="val 3000"/>
             </a:avLst>
           </a:prstGeom>
           <a:solidFill>
-            <a:srgbClr val="F1F5F9"/>
+            <a:srgbClr val="F5F7FA"/>
           </a:solidFill>
-          <a:ln w="6350">
+          <a:ln w="12700">
             <a:solidFill>
-              <a:srgbClr val="E2E8F0"/>
+              <a:srgbClr val="CBD5E0"/>
             </a:solidFill>
-            <a:prstDash val="solid"/>
+            <a:prstDash val="dash"/>
           </a:ln>
         </p:spPr>
       </p:sp>
       <p:sp>
         <p:nvSpPr>
-          <p:cNvPr id="8" name="Text 6"/>
-          <p:cNvSpPr/>
-          <p:nvPr/>
-        </p:nvSpPr>
-        <p:spPr>
-          <a:xfrm>
-            <a:off x="713232" y="3035808"/>
-            <a:ext cx="10762488" cy="2980944"/>
-          </a:xfrm>
-          <a:prstGeom prst="rect">
-            <a:avLst/>
-          </a:prstGeom>
-          <a:noFill/>
-          <a:ln/>
-        </p:spPr>
-        <p:txBody>
-          <a:bodyPr wrap="square" rtlCol="0" anchor="t"/>
-          <a:lstStyle/>
-          <a:p>
-            <a:pPr indent="0" marL="0">
+          <p:cNvPr id="7" name="Text 5"/>
+          <p:cNvSpPr/>
+          <p:nvPr/>
+        </p:nvSpPr>
+        <p:spPr>
+          <a:xfrm>
+            <a:off x="2194560" y="3703320"/>
+            <a:ext cx="7772400" cy="731520"/>
+          </a:xfrm>
+          <a:prstGeom prst="rect">
+            <a:avLst/>
+          </a:prstGeom>
+          <a:noFill/>
+          <a:ln/>
+        </p:spPr>
+        <p:txBody>
+          <a:bodyPr wrap="square" rtlCol="0" anchor="ctr"/>
+          <a:lstStyle/>
+          <a:p>
+            <a:pPr algn="ctr" indent="0" marL="0">
               <a:lnSpc>
                 <a:spcPct val="140000"/>
               </a:lnSpc>
               <a:buNone/>
             </a:pPr>
             <a:r>
-              <a:rPr lang="en-US" sz="1150" dirty="0">
-                <a:solidFill>
-                  <a:srgbClr val="1A1F36"/>
+              <a:rPr lang="en-US" sz="1400" i="1" dirty="0">
+                <a:solidFill>
+                  <a:srgbClr val="718096"/>
+                </a:solidFill>
+                <a:latin typeface="Noto Sans KR" pitchFamily="34" charset="0"/>
+                <a:ea typeface="Noto Sans KR" pitchFamily="34" charset="-122"/>
+                <a:cs typeface="Noto Sans KR" pitchFamily="34" charset="-120"/>
+              </a:rPr>
+              <a:t>📷  결과 이미지 위치</a:t>
+            </a:r>
+            <a:endParaRPr lang="en-US" sz="1400" dirty="0"/>
+          </a:p>
+          <a:p>
+            <a:pPr algn="ctr" indent="0" marL="0">
+              <a:lnSpc>
+                <a:spcPct val="140000"/>
+              </a:lnSpc>
+              <a:buNone/>
+            </a:pPr>
+            <a:r>
+              <a:rPr lang="en-US" sz="1400" i="1" dirty="0">
+                <a:solidFill>
+                  <a:srgbClr val="718096"/>
+                </a:solidFill>
+                <a:latin typeface="Noto Sans KR" pitchFamily="34" charset="0"/>
+                <a:ea typeface="Noto Sans KR" pitchFamily="34" charset="-122"/>
+                <a:cs typeface="Noto Sans KR" pitchFamily="34" charset="-120"/>
+              </a:rPr>
+              <a:t>(강의 시연 캡처가 들어갈 자리)</a:t>
+            </a:r>
+            <a:endParaRPr lang="en-US" sz="1400" dirty="0"/>
+          </a:p>
+        </p:txBody>
+      </p:sp>
+      <p:sp>
+        <p:nvSpPr>
+          <p:cNvPr id="8" name="Text 6"/>
+          <p:cNvSpPr/>
+          <p:nvPr/>
+        </p:nvSpPr>
+        <p:spPr>
+          <a:xfrm>
+            <a:off x="2194560" y="4983480"/>
+            <a:ext cx="7772400" cy="365760"/>
+          </a:xfrm>
+          <a:prstGeom prst="rect">
+            <a:avLst/>
+          </a:prstGeom>
+          <a:noFill/>
+          <a:ln/>
+        </p:spPr>
+        <p:txBody>
+          <a:bodyPr wrap="square" rtlCol="0" anchor="ctr"/>
+          <a:lstStyle/>
+          <a:p>
+            <a:pPr algn="ctr" indent="0" marL="0">
+              <a:buNone/>
+            </a:pPr>
+            <a:r>
+              <a:rPr lang="en-US" sz="1000" i="1" dirty="0">
+                <a:solidFill>
+                  <a:srgbClr val="718096"/>
                 </a:solidFill>
                 <a:latin typeface="Roboto Mono" pitchFamily="34" charset="0"/>
                 <a:ea typeface="Roboto Mono" pitchFamily="34" charset="-122"/>
                 <a:cs typeface="Roboto Mono" pitchFamily="34" charset="-120"/>
               </a:rPr>
-              <a:t>이 폴더의 기간별_일평균_대기환경_정보_2024년.csv 와 기간별_일평균_대기환경_정보_2025년.csv 둘 다</a:t>
-            </a:r>
-            <a:endParaRPr lang="en-US" sz="1150" dirty="0"/>
-          </a:p>
-          <a:p>
-            <a:pPr indent="0" marL="0">
-              <a:lnSpc>
-                <a:spcPct val="140000"/>
-              </a:lnSpc>
-              <a:buNone/>
-            </a:pPr>
-            <a:r>
-              <a:rPr lang="en-US" sz="1150" dirty="0">
-                <a:solidFill>
-                  <a:srgbClr val="1A1F36"/>
-                </a:solidFill>
-                <a:latin typeface="Roboto Mono" pitchFamily="34" charset="0"/>
-                <a:ea typeface="Roboto Mono" pitchFamily="34" charset="-122"/>
-                <a:cs typeface="Roboto Mono" pitchFamily="34" charset="-120"/>
-              </a:rPr>
-              <a:t>읽어서 어떤 데이터인지 요약해줘. 둘 다 인코딩은 CP949야.</a:t>
-            </a:r>
-            <a:endParaRPr lang="en-US" sz="1150" dirty="0"/>
-          </a:p>
-          <a:p>
-            <a:pPr indent="0" marL="0">
-              <a:lnSpc>
-                <a:spcPct val="140000"/>
-              </a:lnSpc>
-              <a:buNone/>
-            </a:pPr>
-            <a:r>
-              <a:rPr lang="en-US" sz="1150" dirty="0">
-                <a:solidFill>
-                  <a:srgbClr val="1A1F36"/>
-                </a:solidFill>
-                <a:latin typeface="Roboto Mono" pitchFamily="34" charset="0"/>
-                <a:ea typeface="Roboto Mono" pitchFamily="34" charset="-122"/>
-                <a:cs typeface="Roboto Mono" pitchFamily="34" charset="-120"/>
-              </a:rPr>
-              <a:t>원본 9개 컬럼(측정일시·권역명·측정소명·이산화질소·오존·일산화탄소·</a:t>
-            </a:r>
-            <a:endParaRPr lang="en-US" sz="1150" dirty="0"/>
-          </a:p>
-          <a:p>
-            <a:pPr indent="0" marL="0">
-              <a:lnSpc>
-                <a:spcPct val="140000"/>
-              </a:lnSpc>
-              <a:buNone/>
-            </a:pPr>
-            <a:r>
-              <a:rPr lang="en-US" sz="1150" dirty="0">
-                <a:solidFill>
-                  <a:srgbClr val="1A1F36"/>
-                </a:solidFill>
-                <a:latin typeface="Roboto Mono" pitchFamily="34" charset="0"/>
-                <a:ea typeface="Roboto Mono" pitchFamily="34" charset="-122"/>
-                <a:cs typeface="Roboto Mono" pitchFamily="34" charset="-120"/>
-              </a:rPr>
-              <a:t>아황산가스·미세먼지·초미세먼지) 그대로 보여주고, 컬럼명 통일해주고,</a:t>
-            </a:r>
-            <a:endParaRPr lang="en-US" sz="1150" dirty="0"/>
-          </a:p>
-          <a:p>
-            <a:pPr indent="0" marL="0">
-              <a:lnSpc>
-                <a:spcPct val="140000"/>
-              </a:lnSpc>
-              <a:buNone/>
-            </a:pPr>
-            <a:r>
-              <a:rPr lang="en-US" sz="1150" dirty="0">
-                <a:solidFill>
-                  <a:srgbClr val="1A1F36"/>
-                </a:solidFill>
-                <a:latin typeface="Roboto Mono" pitchFamily="34" charset="0"/>
-                <a:ea typeface="Roboto Mono" pitchFamily="34" charset="-122"/>
-                <a:cs typeface="Roboto Mono" pitchFamily="34" charset="-120"/>
-              </a:rPr>
-              <a:t>연도별 행 수·결측 비율·날짜 범위 알려줘.</a:t>
-            </a:r>
-            <a:endParaRPr lang="en-US" sz="1150" dirty="0"/>
+              <a:t>screenshots/day1/seoul_open_data_oa2218.png</a:t>
+            </a:r>
+            <a:endParaRPr lang="en-US" sz="1000" dirty="0"/>
           </a:p>
         </p:txBody>
       </p:sp>
       <p:sp>
         <p:nvSpPr>
           <p:cNvPr id="9" name="Text 7"/>
+          <p:cNvSpPr/>
+          <p:nvPr/>
+        </p:nvSpPr>
+        <p:spPr>
+          <a:xfrm>
+            <a:off x="548640" y="5989320"/>
+            <a:ext cx="11091672" cy="411480"/>
+          </a:xfrm>
+          <a:prstGeom prst="rect">
+            <a:avLst/>
+          </a:prstGeom>
+          <a:noFill/>
+          <a:ln/>
+        </p:spPr>
+        <p:txBody>
+          <a:bodyPr wrap="square" rtlCol="0" anchor="ctr"/>
+          <a:lstStyle/>
+          <a:p>
+            <a:pPr algn="ctr" indent="0" marL="0">
+              <a:buNone/>
+            </a:pPr>
+            <a:r>
+              <a:rPr lang="en-US" sz="1200" i="1" dirty="0">
+                <a:solidFill>
+                  <a:srgbClr val="718096"/>
+                </a:solidFill>
+                <a:latin typeface="Noto Sans KR" pitchFamily="34" charset="0"/>
+                <a:ea typeface="Noto Sans KR" pitchFamily="34" charset="-122"/>
+                <a:cs typeface="Noto Sans KR" pitchFamily="34" charset="-120"/>
+              </a:rPr>
+              <a:t>"파일" 탭에서 2024·2025 두 해 CSV 다운로드</a:t>
+            </a:r>
+            <a:endParaRPr lang="en-US" sz="1200" dirty="0"/>
+          </a:p>
+        </p:txBody>
+      </p:sp>
+      <p:sp>
+        <p:nvSpPr>
+          <p:cNvPr id="10" name="Text 8"/>
           <p:cNvSpPr/>
           <p:nvPr/>
         </p:nvSpPr>
@@ -7004,7 +7371,7 @@
                 <a:ea typeface="Noto Sans KR" pitchFamily="34" charset="-122"/>
                 <a:cs typeface="Noto Sans KR" pitchFamily="34" charset="-120"/>
               </a:rPr>
-              <a:t>19 / 28</a:t>
+              <a:t>19 / 31</a:t>
             </a:r>
             <a:endParaRPr lang="en-US" sz="900" dirty="0"/>
           </a:p>
@@ -8024,7 +8391,7 @@
                 <a:ea typeface="Noto Sans KR" pitchFamily="34" charset="-122"/>
                 <a:cs typeface="Noto Sans KR" pitchFamily="34" charset="-120"/>
               </a:rPr>
-              <a:t>2 / 28</a:t>
+              <a:t>2 / 31</a:t>
             </a:r>
             <a:endParaRPr lang="en-US" sz="900" dirty="0"/>
           </a:p>
@@ -8108,7 +8475,7 @@
                 <a:ea typeface="Noto Sans KR" pitchFamily="34" charset="-122"/>
                 <a:cs typeface="Noto Sans KR" pitchFamily="34" charset="-120"/>
               </a:rPr>
-              <a:t>DAY 1 · STEP 2</a:t>
+              <a:t>파트 3. 데이터 다운로드 + 첫 분석 + CLAUDE.md</a:t>
             </a:r>
             <a:endParaRPr lang="en-US" sz="1400" dirty="0"/>
           </a:p>
@@ -8147,7 +8514,7 @@
                 <a:ea typeface="Noto Sans KR" pitchFamily="34" charset="-122"/>
                 <a:cs typeface="Noto Sans KR" pitchFamily="34" charset="-120"/>
               </a:rPr>
-              <a:t>오늘 만든 결과물</a:t>
+              <a:t>섹션 2 / 4</a:t>
             </a:r>
             <a:endParaRPr lang="en-US" sz="1100" dirty="0"/>
           </a:p>
@@ -8161,8 +8528,8 @@
         </p:nvSpPr>
         <p:spPr>
           <a:xfrm>
-            <a:off x="548640" y="1417320"/>
-            <a:ext cx="11091672" cy="640080"/>
+            <a:off x="548640" y="1508760"/>
+            <a:ext cx="11091672" cy="1371600"/>
           </a:xfrm>
           <a:prstGeom prst="rect">
             <a:avLst/>
@@ -8175,10 +8542,13 @@
           <a:lstStyle/>
           <a:p>
             <a:pPr indent="0" marL="0">
-              <a:buNone/>
-            </a:pPr>
-            <a:r>
-              <a:rPr lang="en-US" sz="2800" b="1" spc="-30" kern="0" dirty="0">
+              <a:lnSpc>
+                <a:spcPct val="110000"/>
+              </a:lnSpc>
+              <a:buNone/>
+            </a:pPr>
+            <a:r>
+              <a:rPr lang="en-US" sz="4200" b="1" spc="-50" kern="0" dirty="0">
                 <a:solidFill>
                   <a:srgbClr val="1A1F36"/>
                 </a:solidFill>
@@ -8186,77 +8556,160 @@
                 <a:ea typeface="Noto Sans KR" pitchFamily="34" charset="-122"/>
                 <a:cs typeface="Noto Sans KR" pitchFamily="34" charset="-120"/>
               </a:rPr>
-              <a:t>2단계 결과 — 데이터 요약</a:t>
-            </a:r>
-            <a:endParaRPr lang="en-US" sz="2800" dirty="0"/>
-          </a:p>
-        </p:txBody>
-      </p:sp>
-      <p:pic>
-        <p:nvPicPr>
-          <p:cNvPr id="6" name="Image 0" descr="/Users/sujinpark/b2b-lecture-note/20260512_inflearn_B2G_dataanalysis/assets/screenshots/day1/result_step1_summary.png">    </p:cNvPr>
-          <p:cNvPicPr>
-            <a:picLocks noChangeAspect="1"/>
-          </p:cNvPicPr>
-          <p:nvPr/>
-        </p:nvPicPr>
-        <p:blipFill>
-          <a:blip r:embed="rId1"/>
-          <a:srcRect l="0" r="0" t="0" b="0"/>
-          <a:stretch/>
-        </p:blipFill>
-        <p:spPr>
-          <a:xfrm>
-            <a:off x="2194560" y="2240280"/>
-            <a:ext cx="7772400" cy="3657600"/>
-          </a:xfrm>
-          <a:prstGeom prst="rect">
-            <a:avLst/>
-          </a:prstGeom>
-        </p:spPr>
-      </p:pic>
-      <p:sp>
-        <p:nvSpPr>
-          <p:cNvPr id="7" name="Text 4"/>
-          <p:cNvSpPr/>
-          <p:nvPr/>
-        </p:nvSpPr>
-        <p:spPr>
-          <a:xfrm>
-            <a:off x="548640" y="5989320"/>
-            <a:ext cx="11091672" cy="411480"/>
-          </a:xfrm>
-          <a:prstGeom prst="rect">
-            <a:avLst/>
-          </a:prstGeom>
-          <a:noFill/>
-          <a:ln/>
-        </p:spPr>
-        <p:txBody>
-          <a:bodyPr wrap="square" rtlCol="0" anchor="ctr"/>
-          <a:lstStyle/>
-          <a:p>
-            <a:pPr algn="ctr" indent="0" marL="0">
-              <a:buNone/>
-            </a:pPr>
-            <a:r>
-              <a:rPr lang="en-US" sz="1200" i="1" dirty="0">
-                <a:solidFill>
-                  <a:srgbClr val="718096"/>
-                </a:solidFill>
-                <a:latin typeface="Noto Sans KR" pitchFamily="34" charset="0"/>
-                <a:ea typeface="Noto Sans KR" pitchFamily="34" charset="-122"/>
-                <a:cs typeface="Noto Sans KR" pitchFamily="34" charset="-120"/>
-              </a:rPr>
-              <a:t>shape · dtypes · 결측 비율 · 날짜 범위</a:t>
-            </a:r>
-            <a:endParaRPr lang="en-US" sz="1200" dirty="0"/>
-          </a:p>
-        </p:txBody>
-      </p:sp>
-      <p:sp>
-        <p:nvSpPr>
-          <p:cNvPr id="8" name="Text 5"/>
+              <a:t>데이터 한눈에 보기</a:t>
+            </a:r>
+            <a:endParaRPr lang="en-US" sz="4200" dirty="0"/>
+          </a:p>
+        </p:txBody>
+      </p:sp>
+      <p:sp>
+        <p:nvSpPr>
+          <p:cNvPr id="6" name="Shape 4"/>
+          <p:cNvSpPr/>
+          <p:nvPr/>
+        </p:nvSpPr>
+        <p:spPr>
+          <a:xfrm>
+            <a:off x="548640" y="2971800"/>
+            <a:ext cx="1828800" cy="0"/>
+          </a:xfrm>
+          <a:prstGeom prst="line">
+            <a:avLst/>
+          </a:prstGeom>
+          <a:noFill/>
+          <a:ln w="25400">
+            <a:solidFill>
+              <a:srgbClr val="4A7BF7"/>
+            </a:solidFill>
+            <a:prstDash val="solid"/>
+          </a:ln>
+        </p:spPr>
+      </p:sp>
+      <p:sp>
+        <p:nvSpPr>
+          <p:cNvPr id="7" name="Text 5"/>
+          <p:cNvSpPr/>
+          <p:nvPr/>
+        </p:nvSpPr>
+        <p:spPr>
+          <a:xfrm>
+            <a:off x="548640" y="3200400"/>
+            <a:ext cx="11091672" cy="2788920"/>
+          </a:xfrm>
+          <a:prstGeom prst="rect">
+            <a:avLst/>
+          </a:prstGeom>
+          <a:noFill/>
+          <a:ln/>
+        </p:spPr>
+        <p:txBody>
+          <a:bodyPr wrap="square" rtlCol="0" anchor="t"/>
+          <a:lstStyle/>
+          <a:p>
+            <a:pPr indent="0" marL="0">
+              <a:lnSpc>
+                <a:spcPct val="155000"/>
+              </a:lnSpc>
+              <a:buNone/>
+            </a:pPr>
+            <a:r>
+              <a:rPr lang="en-US" sz="1700" dirty="0">
+                <a:solidFill>
+                  <a:srgbClr val="4A5568"/>
+                </a:solidFill>
+                <a:latin typeface="Noto Sans KR" pitchFamily="34" charset="0"/>
+                <a:ea typeface="Noto Sans KR" pitchFamily="34" charset="-122"/>
+                <a:cs typeface="Noto Sans KR" pitchFamily="34" charset="-120"/>
+              </a:rPr>
+              <a:t>· 규모: 18,275행 (2024: 9,150 + 2025: 9,125)</a:t>
+            </a:r>
+            <a:endParaRPr lang="en-US" sz="1700" dirty="0"/>
+          </a:p>
+          <a:p>
+            <a:pPr indent="0" marL="0">
+              <a:lnSpc>
+                <a:spcPct val="155000"/>
+              </a:lnSpc>
+              <a:buNone/>
+            </a:pPr>
+            <a:r>
+              <a:rPr lang="en-US" sz="1700" dirty="0">
+                <a:solidFill>
+                  <a:srgbClr val="4A5568"/>
+                </a:solidFill>
+                <a:latin typeface="Noto Sans KR" pitchFamily="34" charset="0"/>
+                <a:ea typeface="Noto Sans KR" pitchFamily="34" charset="-122"/>
+                <a:cs typeface="Noto Sans KR" pitchFamily="34" charset="-120"/>
+              </a:rPr>
+              <a:t>· 컬럼 9개: 측정일시·권역명·측정소명·이산화질소·오존·일산화탄소·아황산가스·미세먼지·초미세먼지</a:t>
+            </a:r>
+            <a:endParaRPr lang="en-US" sz="1700" dirty="0"/>
+          </a:p>
+          <a:p>
+            <a:pPr indent="0" marL="0">
+              <a:lnSpc>
+                <a:spcPct val="155000"/>
+              </a:lnSpc>
+              <a:buNone/>
+            </a:pPr>
+            <a:r>
+              <a:rPr lang="en-US" sz="1700" dirty="0">
+                <a:solidFill>
+                  <a:srgbClr val="4A5568"/>
+                </a:solidFill>
+                <a:latin typeface="Noto Sans KR" pitchFamily="34" charset="0"/>
+                <a:ea typeface="Noto Sans KR" pitchFamily="34" charset="-122"/>
+                <a:cs typeface="Noto Sans KR" pitchFamily="34" charset="-120"/>
+              </a:rPr>
+              <a:t>· 인코딩: CP949 (한글이 EUC-KR 방식)</a:t>
+            </a:r>
+            <a:endParaRPr lang="en-US" sz="1700" dirty="0"/>
+          </a:p>
+          <a:p>
+            <a:pPr indent="0" marL="0">
+              <a:lnSpc>
+                <a:spcPct val="155000"/>
+              </a:lnSpc>
+              <a:buNone/>
+            </a:pPr>
+            <a:r>
+              <a:rPr lang="en-US" sz="1700" dirty="0">
+                <a:solidFill>
+                  <a:srgbClr val="4A5568"/>
+                </a:solidFill>
+                <a:latin typeface="Noto Sans KR" pitchFamily="34" charset="0"/>
+                <a:ea typeface="Noto Sans KR" pitchFamily="34" charset="-122"/>
+                <a:cs typeface="Noto Sans KR" pitchFamily="34" charset="-120"/>
+              </a:rPr>
+              <a:t>· 컬럼명 살짝 다름: 2024 "미세먼지" vs 2025 "미세먼지농도"</a:t>
+            </a:r>
+            <a:endParaRPr lang="en-US" sz="1700" dirty="0"/>
+          </a:p>
+          <a:p>
+            <a:pPr indent="0" marL="0">
+              <a:lnSpc>
+                <a:spcPct val="155000"/>
+              </a:lnSpc>
+              <a:buNone/>
+            </a:pPr>
+            <a:r>
+              <a:rPr lang="en-US" sz="1700" dirty="0">
+                <a:solidFill>
+                  <a:srgbClr val="4A5568"/>
+                </a:solidFill>
+                <a:latin typeface="Noto Sans KR" pitchFamily="34" charset="0"/>
+                <a:ea typeface="Noto Sans KR" pitchFamily="34" charset="-122"/>
+                <a:cs typeface="Noto Sans KR" pitchFamily="34" charset="-120"/>
+              </a:rPr>
+              <a:t>· 측정소: 서울 25개 자치구</a:t>
+            </a:r>
+            <a:endParaRPr lang="en-US" sz="1700" dirty="0"/>
+          </a:p>
+        </p:txBody>
+      </p:sp>
+      <p:sp>
+        <p:nvSpPr>
+          <p:cNvPr id="8" name="Text 6"/>
           <p:cNvSpPr/>
           <p:nvPr/>
         </p:nvSpPr>
@@ -8287,7 +8740,7 @@
                 <a:ea typeface="Noto Sans KR" pitchFamily="34" charset="-122"/>
                 <a:cs typeface="Noto Sans KR" pitchFamily="34" charset="-120"/>
               </a:rPr>
-              <a:t>20 / 28</a:t>
+              <a:t>20 / 31</a:t>
             </a:r>
             <a:endParaRPr lang="en-US" sz="900" dirty="0"/>
           </a:p>
@@ -8410,7 +8863,7 @@
                 <a:ea typeface="Noto Sans KR" pitchFamily="34" charset="-122"/>
                 <a:cs typeface="Noto Sans KR" pitchFamily="34" charset="-120"/>
               </a:rPr>
-              <a:t>💬 함께 볼 시연 프롬프트 — 따라 치지 않으셔도 됩니다</a:t>
+              <a:t>👉 직접 따라쳐보세요 — 본인 Claude Code에 그대로 붙여넣기</a:t>
             </a:r>
             <a:endParaRPr lang="en-US" sz="1100" dirty="0"/>
           </a:p>
@@ -8452,7 +8905,7 @@
                 <a:ea typeface="Noto Sans KR" pitchFamily="34" charset="-122"/>
                 <a:cs typeface="Noto Sans KR" pitchFamily="34" charset="-120"/>
               </a:rPr>
-              <a:t>3단계 — 자치구별 PM2.5 연평균 (2024 vs 2025)</a:t>
+              <a:t>2단계 — 이 데이터, 어떻게 생겼지?</a:t>
             </a:r>
             <a:endParaRPr lang="en-US" sz="3400" dirty="0"/>
           </a:p>
@@ -8544,7 +8997,7 @@
                 <a:ea typeface="Roboto Mono" pitchFamily="34" charset="-122"/>
                 <a:cs typeface="Roboto Mono" pitchFamily="34" charset="-120"/>
               </a:rPr>
-              <a:t>자치구별 PM2.5 연평균을 2024와 2025 두 해 비교 막대그래프로,</a:t>
+              <a:t>이 폴더의 기간별_일평균_대기환경_정보_2024년.csv 와 기간별_일평균_대기환경_정보_2025년.csv 둘 다</a:t>
             </a:r>
             <a:endParaRPr lang="en-US" sz="1150" dirty="0"/>
           </a:p>
@@ -8564,7 +9017,7 @@
                 <a:ea typeface="Roboto Mono" pitchFamily="34" charset="-122"/>
                 <a:cs typeface="Roboto Mono" pitchFamily="34" charset="-120"/>
               </a:rPr>
-              <a:t>한글 폰트 안 깨지게 그려줘.</a:t>
+              <a:t>읽어서 어떤 데이터인지 요약해줘. 둘 다 인코딩은 CP949야.</a:t>
             </a:r>
             <a:endParaRPr lang="en-US" sz="1150" dirty="0"/>
           </a:p>
@@ -8584,7 +9037,7 @@
                 <a:ea typeface="Roboto Mono" pitchFamily="34" charset="-122"/>
                 <a:cs typeface="Roboto Mono" pitchFamily="34" charset="-120"/>
               </a:rPr>
-              <a:t>같은 자치구가 가로축에서 두 해 막대로 나란히 보이게.</a:t>
+              <a:t>원본 9개 컬럼(측정일시·권역명·측정소명·이산화질소·오존·일산화탄소·</a:t>
             </a:r>
             <a:endParaRPr lang="en-US" sz="1150" dirty="0"/>
           </a:p>
@@ -8604,7 +9057,27 @@
                 <a:ea typeface="Roboto Mono" pitchFamily="34" charset="-122"/>
                 <a:cs typeface="Roboto Mono" pitchFamily="34" charset="-120"/>
               </a:rPr>
-              <a:t>yoy_district_pm25.png 로 저장.</a:t>
+              <a:t>아황산가스·미세먼지·초미세먼지) 그대로 보여주고, 컬럼명 통일해주고,</a:t>
+            </a:r>
+            <a:endParaRPr lang="en-US" sz="1150" dirty="0"/>
+          </a:p>
+          <a:p>
+            <a:pPr indent="0" marL="0">
+              <a:lnSpc>
+                <a:spcPct val="140000"/>
+              </a:lnSpc>
+              <a:buNone/>
+            </a:pPr>
+            <a:r>
+              <a:rPr lang="en-US" sz="1150" dirty="0">
+                <a:solidFill>
+                  <a:srgbClr val="1A1F36"/>
+                </a:solidFill>
+                <a:latin typeface="Roboto Mono" pitchFamily="34" charset="0"/>
+                <a:ea typeface="Roboto Mono" pitchFamily="34" charset="-122"/>
+                <a:cs typeface="Roboto Mono" pitchFamily="34" charset="-120"/>
+              </a:rPr>
+              <a:t>연도별 행 수·결측 비율·날짜 범위 알려줘.</a:t>
             </a:r>
             <a:endParaRPr lang="en-US" sz="1150" dirty="0"/>
           </a:p>
@@ -8643,7 +9116,7 @@
                 <a:ea typeface="Noto Sans KR" pitchFamily="34" charset="-122"/>
                 <a:cs typeface="Noto Sans KR" pitchFamily="34" charset="-120"/>
               </a:rPr>
-              <a:t>21 / 28</a:t>
+              <a:t>21 / 31</a:t>
             </a:r>
             <a:endParaRPr lang="en-US" sz="900" dirty="0"/>
           </a:p>
@@ -8727,7 +9200,7 @@
                 <a:ea typeface="Noto Sans KR" pitchFamily="34" charset="-122"/>
                 <a:cs typeface="Noto Sans KR" pitchFamily="34" charset="-120"/>
               </a:rPr>
-              <a:t>DAY 1 · STEP 3</a:t>
+              <a:t>DAY 1 · STEP 2</a:t>
             </a:r>
             <a:endParaRPr lang="en-US" sz="1400" dirty="0"/>
           </a:p>
@@ -8805,7 +9278,7 @@
                 <a:ea typeface="Noto Sans KR" pitchFamily="34" charset="-122"/>
                 <a:cs typeface="Noto Sans KR" pitchFamily="34" charset="-120"/>
               </a:rPr>
-              <a:t>3단계 결과 — 자치구별 PM2.5 비교</a:t>
+              <a:t>2단계 결과 — 데이터 요약</a:t>
             </a:r>
             <a:endParaRPr lang="en-US" sz="2800" dirty="0"/>
           </a:p>
@@ -8813,7 +9286,7 @@
       </p:sp>
       <p:pic>
         <p:nvPicPr>
-          <p:cNvPr id="6" name="Image 0" descr="/Users/sujinpark/b2b-lecture-note/20260512_inflearn_B2G_dataanalysis/assets/screenshots/day1/result_step2_district.png">    </p:cNvPr>
+          <p:cNvPr id="6" name="Image 0" descr="/Users/sujinpark/b2b-lecture-note/20260512_inflearn_B2G_dataanalysis/assets/screenshots/day1/result_step1_summary.png">    </p:cNvPr>
           <p:cNvPicPr>
             <a:picLocks noChangeAspect="1"/>
           </p:cNvPicPr>
@@ -8867,7 +9340,7 @@
                 <a:ea typeface="Noto Sans KR" pitchFamily="34" charset="-122"/>
                 <a:cs typeface="Noto Sans KR" pitchFamily="34" charset="-120"/>
               </a:rPr>
-              <a:t>25개 자치구 × 2개 연도 막대그래프</a:t>
+              <a:t>shape · dtypes · 결측 비율 · 날짜 범위</a:t>
             </a:r>
             <a:endParaRPr lang="en-US" sz="1200" dirty="0"/>
           </a:p>
@@ -8906,7 +9379,7 @@
                 <a:ea typeface="Noto Sans KR" pitchFamily="34" charset="-122"/>
                 <a:cs typeface="Noto Sans KR" pitchFamily="34" charset="-120"/>
               </a:rPr>
-              <a:t>22 / 28</a:t>
+              <a:t>22 / 31</a:t>
             </a:r>
             <a:endParaRPr lang="en-US" sz="900" dirty="0"/>
           </a:p>
@@ -9029,7 +9502,7 @@
                 <a:ea typeface="Noto Sans KR" pitchFamily="34" charset="-122"/>
                 <a:cs typeface="Noto Sans KR" pitchFamily="34" charset="-120"/>
               </a:rPr>
-              <a:t>💬 함께 볼 시연 프롬프트 — 따라 치지 않으셔도 됩니다</a:t>
+              <a:t>👉 직접 따라쳐보세요 — 본인 Claude Code에 그대로 붙여넣기</a:t>
             </a:r>
             <a:endParaRPr lang="en-US" sz="1100" dirty="0"/>
           </a:p>
@@ -9071,7 +9544,7 @@
                 <a:ea typeface="Noto Sans KR" pitchFamily="34" charset="-122"/>
                 <a:cs typeface="Noto Sans KR" pitchFamily="34" charset="-120"/>
               </a:rPr>
-              <a:t>4단계 — 월별 추이 + 황사 시즌</a:t>
+              <a:t>3단계 — 자치구별 PM2.5 연평균 (2024 vs 2025)</a:t>
             </a:r>
             <a:endParaRPr lang="en-US" sz="3400" dirty="0"/>
           </a:p>
@@ -9163,7 +9636,7 @@
                 <a:ea typeface="Roboto Mono" pitchFamily="34" charset="-122"/>
                 <a:cs typeface="Roboto Mono" pitchFamily="34" charset="-120"/>
               </a:rPr>
-              <a:t>월별 PM2.5 추이를 2024와 2025 두 해 라인차트로 같이 그려줘.</a:t>
+              <a:t>자치구별 PM2.5 연평균을 2024와 2025 두 해 비교 막대그래프로,</a:t>
             </a:r>
             <a:endParaRPr lang="en-US" sz="1150" dirty="0"/>
           </a:p>
@@ -9183,7 +9656,7 @@
                 <a:ea typeface="Roboto Mono" pitchFamily="34" charset="-122"/>
                 <a:cs typeface="Roboto Mono" pitchFamily="34" charset="-120"/>
               </a:rPr>
-              <a:t>황사 시즌(3~5월) 영역을 음영 처리하고,</a:t>
+              <a:t>한글 폰트 안 깨지게 그려줘.</a:t>
             </a:r>
             <a:endParaRPr lang="en-US" sz="1150" dirty="0"/>
           </a:p>
@@ -9203,7 +9676,7 @@
                 <a:ea typeface="Roboto Mono" pitchFamily="34" charset="-122"/>
                 <a:cs typeface="Roboto Mono" pitchFamily="34" charset="-120"/>
               </a:rPr>
-              <a:t>2025 황사 시즌이 작년 대비 강해졌는지 한 줄로 해석.</a:t>
+              <a:t>같은 자치구가 가로축에서 두 해 막대로 나란히 보이게.</a:t>
             </a:r>
             <a:endParaRPr lang="en-US" sz="1150" dirty="0"/>
           </a:p>
@@ -9223,7 +9696,7 @@
                 <a:ea typeface="Roboto Mono" pitchFamily="34" charset="-122"/>
                 <a:cs typeface="Roboto Mono" pitchFamily="34" charset="-120"/>
               </a:rPr>
-              <a:t>yoy_monthly_pm25.png 로 저장.</a:t>
+              <a:t>yoy_district_pm25.png 로 저장.</a:t>
             </a:r>
             <a:endParaRPr lang="en-US" sz="1150" dirty="0"/>
           </a:p>
@@ -9262,7 +9735,7 @@
                 <a:ea typeface="Noto Sans KR" pitchFamily="34" charset="-122"/>
                 <a:cs typeface="Noto Sans KR" pitchFamily="34" charset="-120"/>
               </a:rPr>
-              <a:t>23 / 28</a:t>
+              <a:t>23 / 31</a:t>
             </a:r>
             <a:endParaRPr lang="en-US" sz="900" dirty="0"/>
           </a:p>
@@ -9346,7 +9819,7 @@
                 <a:ea typeface="Noto Sans KR" pitchFamily="34" charset="-122"/>
                 <a:cs typeface="Noto Sans KR" pitchFamily="34" charset="-120"/>
               </a:rPr>
-              <a:t>DAY 1 · STEP 4</a:t>
+              <a:t>DAY 1 · STEP 3</a:t>
             </a:r>
             <a:endParaRPr lang="en-US" sz="1400" dirty="0"/>
           </a:p>
@@ -9424,7 +9897,7 @@
                 <a:ea typeface="Noto Sans KR" pitchFamily="34" charset="-122"/>
                 <a:cs typeface="Noto Sans KR" pitchFamily="34" charset="-120"/>
               </a:rPr>
-              <a:t>4단계 결과 — 월별 추이 + 황사 시즌</a:t>
+              <a:t>3단계 결과 — 자치구별 PM2.5 비교</a:t>
             </a:r>
             <a:endParaRPr lang="en-US" sz="2800" dirty="0"/>
           </a:p>
@@ -9432,7 +9905,7 @@
       </p:sp>
       <p:pic>
         <p:nvPicPr>
-          <p:cNvPr id="6" name="Image 0" descr="/Users/sujinpark/b2b-lecture-note/20260512_inflearn_B2G_dataanalysis/assets/screenshots/day1/result_step3_monthly.png">    </p:cNvPr>
+          <p:cNvPr id="6" name="Image 0" descr="/Users/sujinpark/b2b-lecture-note/20260512_inflearn_B2G_dataanalysis/assets/screenshots/day1/result_step2_district.png">    </p:cNvPr>
           <p:cNvPicPr>
             <a:picLocks noChangeAspect="1"/>
           </p:cNvPicPr>
@@ -9486,7 +9959,7 @@
                 <a:ea typeface="Noto Sans KR" pitchFamily="34" charset="-122"/>
                 <a:cs typeface="Noto Sans KR" pitchFamily="34" charset="-120"/>
               </a:rPr>
-              <a:t>월별 PM2.5 (2024 vs 2025) + 황사 시즌 음영</a:t>
+              <a:t>25개 자치구 × 2개 연도 막대그래프</a:t>
             </a:r>
             <a:endParaRPr lang="en-US" sz="1200" dirty="0"/>
           </a:p>
@@ -9525,7 +9998,7 @@
                 <a:ea typeface="Noto Sans KR" pitchFamily="34" charset="-122"/>
                 <a:cs typeface="Noto Sans KR" pitchFamily="34" charset="-120"/>
               </a:rPr>
-              <a:t>24 / 28</a:t>
+              <a:t>24 / 31</a:t>
             </a:r>
             <a:endParaRPr lang="en-US" sz="900" dirty="0"/>
           </a:p>
@@ -9624,7 +10097,7 @@
         <p:spPr>
           <a:xfrm>
             <a:off x="548640" y="960120"/>
-            <a:ext cx="10515600" cy="292608"/>
+            <a:ext cx="11091672" cy="292608"/>
           </a:xfrm>
           <a:prstGeom prst="rect">
             <a:avLst/>
@@ -9640,7 +10113,7 @@
               <a:buNone/>
             </a:pPr>
             <a:r>
-              <a:rPr lang="en-US" sz="1100" b="1" spc="150" kern="0" dirty="0">
+              <a:rPr lang="en-US" sz="1100" b="1" spc="50" kern="0" dirty="0">
                 <a:solidFill>
                   <a:srgbClr val="4A7BF7"/>
                 </a:solidFill>
@@ -9648,7 +10121,7 @@
                 <a:ea typeface="Noto Sans KR" pitchFamily="34" charset="-122"/>
                 <a:cs typeface="Noto Sans KR" pitchFamily="34" charset="-120"/>
               </a:rPr>
-              <a:t>섹션 4 / 5</a:t>
+              <a:t>👉 직접 따라쳐보세요 — 본인 Claude Code에 그대로 붙여넣기</a:t>
             </a:r>
             <a:endParaRPr lang="en-US" sz="1100" dirty="0"/>
           </a:p>
@@ -9663,7 +10136,7 @@
         <p:spPr>
           <a:xfrm>
             <a:off x="548640" y="1508760"/>
-            <a:ext cx="11091672" cy="1371600"/>
+            <a:ext cx="11091672" cy="1005840"/>
           </a:xfrm>
           <a:prstGeom prst="rect">
             <a:avLst/>
@@ -9677,12 +10150,12 @@
           <a:p>
             <a:pPr indent="0" marL="0">
               <a:lnSpc>
-                <a:spcPct val="110000"/>
+                <a:spcPct val="115000"/>
               </a:lnSpc>
               <a:buNone/>
             </a:pPr>
             <a:r>
-              <a:rPr lang="en-US" sz="4200" b="1" spc="-50" kern="0" dirty="0">
+              <a:rPr lang="en-US" sz="3400" b="1" spc="-50" kern="0" dirty="0">
                 <a:solidFill>
                   <a:srgbClr val="1A1F36"/>
                 </a:solidFill>
@@ -9690,9 +10163,9 @@
                 <a:ea typeface="Noto Sans KR" pitchFamily="34" charset="-122"/>
                 <a:cs typeface="Noto Sans KR" pitchFamily="34" charset="-120"/>
               </a:rPr>
-              <a:t>CLAUDE.md 작성 — 매번 설명 안 하려고</a:t>
-            </a:r>
-            <a:endParaRPr lang="en-US" sz="4200" dirty="0"/>
+              <a:t>4단계 — 월별 추이 + 황사 시즌</a:t>
+            </a:r>
+            <a:endParaRPr lang="en-US" sz="3400" dirty="0"/>
           </a:p>
         </p:txBody>
       </p:sp>
@@ -9704,7 +10177,7 @@
         </p:nvSpPr>
         <p:spPr>
           <a:xfrm>
-            <a:off x="548640" y="2971800"/>
+            <a:off x="548640" y="2606040"/>
             <a:ext cx="1828800" cy="0"/>
           </a:xfrm>
           <a:prstGeom prst="line">
@@ -9721,14 +10194,41 @@
       </p:sp>
       <p:sp>
         <p:nvSpPr>
-          <p:cNvPr id="7" name="Text 5"/>
-          <p:cNvSpPr/>
-          <p:nvPr/>
-        </p:nvSpPr>
-        <p:spPr>
-          <a:xfrm>
-            <a:off x="548640" y="3200400"/>
-            <a:ext cx="11091672" cy="2788920"/>
+          <p:cNvPr id="7" name="Shape 5"/>
+          <p:cNvSpPr/>
+          <p:nvPr/>
+        </p:nvSpPr>
+        <p:spPr>
+          <a:xfrm>
+            <a:off x="548640" y="2926080"/>
+            <a:ext cx="11091672" cy="3200400"/>
+          </a:xfrm>
+          <a:prstGeom prst="roundRect">
+            <a:avLst>
+              <a:gd name="adj" fmla="val 1714"/>
+            </a:avLst>
+          </a:prstGeom>
+          <a:solidFill>
+            <a:srgbClr val="F1F5F9"/>
+          </a:solidFill>
+          <a:ln w="6350">
+            <a:solidFill>
+              <a:srgbClr val="E2E8F0"/>
+            </a:solidFill>
+            <a:prstDash val="solid"/>
+          </a:ln>
+        </p:spPr>
+      </p:sp>
+      <p:sp>
+        <p:nvSpPr>
+          <p:cNvPr id="8" name="Text 6"/>
+          <p:cNvSpPr/>
+          <p:nvPr/>
+        </p:nvSpPr>
+        <p:spPr>
+          <a:xfrm>
+            <a:off x="713232" y="3035808"/>
+            <a:ext cx="10762488" cy="2980944"/>
           </a:xfrm>
           <a:prstGeom prst="rect">
             <a:avLst/>
@@ -9742,97 +10242,88 @@
           <a:p>
             <a:pPr indent="0" marL="0">
               <a:lnSpc>
-                <a:spcPct val="155000"/>
+                <a:spcPct val="140000"/>
               </a:lnSpc>
               <a:buNone/>
             </a:pPr>
             <a:r>
-              <a:rPr lang="en-US" sz="1700" dirty="0">
-                <a:solidFill>
-                  <a:srgbClr val="4A5568"/>
-                </a:solidFill>
-                <a:latin typeface="Noto Sans KR" pitchFamily="34" charset="0"/>
-                <a:ea typeface="Noto Sans KR" pitchFamily="34" charset="-122"/>
-                <a:cs typeface="Noto Sans KR" pitchFamily="34" charset="-120"/>
-              </a:rPr>
-              <a:t>· Claude Code 작업 폴더에 두는 "프로젝트 컨텍스트 메모"</a:t>
-            </a:r>
-            <a:endParaRPr lang="en-US" sz="1700" dirty="0"/>
+              <a:rPr lang="en-US" sz="1150" dirty="0">
+                <a:solidFill>
+                  <a:srgbClr val="1A1F36"/>
+                </a:solidFill>
+                <a:latin typeface="Roboto Mono" pitchFamily="34" charset="0"/>
+                <a:ea typeface="Roboto Mono" pitchFamily="34" charset="-122"/>
+                <a:cs typeface="Roboto Mono" pitchFamily="34" charset="-120"/>
+              </a:rPr>
+              <a:t>월별 PM2.5 추이를 2024와 2025 두 해 라인차트로 같이 그려줘.</a:t>
+            </a:r>
+            <a:endParaRPr lang="en-US" sz="1150" dirty="0"/>
           </a:p>
           <a:p>
             <a:pPr indent="0" marL="0">
               <a:lnSpc>
-                <a:spcPct val="155000"/>
+                <a:spcPct val="140000"/>
               </a:lnSpc>
               <a:buNone/>
             </a:pPr>
             <a:r>
-              <a:rPr lang="en-US" sz="1700" dirty="0">
-                <a:solidFill>
-                  <a:srgbClr val="4A5568"/>
-                </a:solidFill>
-                <a:latin typeface="Noto Sans KR" pitchFamily="34" charset="0"/>
-                <a:ea typeface="Noto Sans KR" pitchFamily="34" charset="-122"/>
-                <a:cs typeface="Noto Sans KR" pitchFamily="34" charset="-120"/>
-              </a:rPr>
-              <a:t>· 인코딩·폰트·출력 언어·데이터 위치 같은 기본 전제를 한 번에</a:t>
-            </a:r>
-            <a:endParaRPr lang="en-US" sz="1700" dirty="0"/>
+              <a:rPr lang="en-US" sz="1150" dirty="0">
+                <a:solidFill>
+                  <a:srgbClr val="1A1F36"/>
+                </a:solidFill>
+                <a:latin typeface="Roboto Mono" pitchFamily="34" charset="0"/>
+                <a:ea typeface="Roboto Mono" pitchFamily="34" charset="-122"/>
+                <a:cs typeface="Roboto Mono" pitchFamily="34" charset="-120"/>
+              </a:rPr>
+              <a:t>황사 시즌(3~5월) 영역을 음영 처리하고,</a:t>
+            </a:r>
+            <a:endParaRPr lang="en-US" sz="1150" dirty="0"/>
           </a:p>
           <a:p>
             <a:pPr indent="0" marL="0">
               <a:lnSpc>
-                <a:spcPct val="155000"/>
+                <a:spcPct val="140000"/>
               </a:lnSpc>
               <a:buNone/>
             </a:pPr>
             <a:r>
-              <a:rPr lang="en-US" sz="1700" dirty="0">
-                <a:solidFill>
-                  <a:srgbClr val="4A5568"/>
-                </a:solidFill>
-                <a:latin typeface="Noto Sans KR" pitchFamily="34" charset="0"/>
-                <a:ea typeface="Noto Sans KR" pitchFamily="34" charset="-122"/>
-                <a:cs typeface="Noto Sans KR" pitchFamily="34" charset="-120"/>
-              </a:rPr>
-              <a:t>· 한 번 적어두면 다음 분석부터 한 문장 명령으로 끝</a:t>
-            </a:r>
-            <a:endParaRPr lang="en-US" sz="1700" dirty="0"/>
+              <a:rPr lang="en-US" sz="1150" dirty="0">
+                <a:solidFill>
+                  <a:srgbClr val="1A1F36"/>
+                </a:solidFill>
+                <a:latin typeface="Roboto Mono" pitchFamily="34" charset="0"/>
+                <a:ea typeface="Roboto Mono" pitchFamily="34" charset="-122"/>
+                <a:cs typeface="Roboto Mono" pitchFamily="34" charset="-120"/>
+              </a:rPr>
+              <a:t>2025 황사 시즌이 작년 대비 강해졌는지 한 줄로 해석.</a:t>
+            </a:r>
+            <a:endParaRPr lang="en-US" sz="1150" dirty="0"/>
           </a:p>
           <a:p>
             <a:pPr indent="0" marL="0">
               <a:lnSpc>
-                <a:spcPct val="155000"/>
+                <a:spcPct val="140000"/>
               </a:lnSpc>
               <a:buNone/>
             </a:pPr>
-            <a:endParaRPr lang="en-US" sz="1700" dirty="0"/>
-          </a:p>
-          <a:p>
-            <a:pPr indent="0" marL="0">
-              <a:lnSpc>
-                <a:spcPct val="155000"/>
-              </a:lnSpc>
-              <a:buNone/>
-            </a:pPr>
-            <a:r>
-              <a:rPr lang="en-US" sz="1700" dirty="0">
-                <a:solidFill>
-                  <a:srgbClr val="4A5568"/>
-                </a:solidFill>
-                <a:latin typeface="Noto Sans KR" pitchFamily="34" charset="0"/>
-                <a:ea typeface="Noto Sans KR" pitchFamily="34" charset="-122"/>
-                <a:cs typeface="Noto Sans KR" pitchFamily="34" charset="-120"/>
-              </a:rPr>
-              <a:t>· 버전 구분(v1/v2) 안 함 — 폴더(day1/, day2/)로 히스토리 관리</a:t>
-            </a:r>
-            <a:endParaRPr lang="en-US" sz="1700" dirty="0"/>
-          </a:p>
-        </p:txBody>
-      </p:sp>
-      <p:sp>
-        <p:nvSpPr>
-          <p:cNvPr id="8" name="Text 6"/>
+            <a:r>
+              <a:rPr lang="en-US" sz="1150" dirty="0">
+                <a:solidFill>
+                  <a:srgbClr val="1A1F36"/>
+                </a:solidFill>
+                <a:latin typeface="Roboto Mono" pitchFamily="34" charset="0"/>
+                <a:ea typeface="Roboto Mono" pitchFamily="34" charset="-122"/>
+                <a:cs typeface="Roboto Mono" pitchFamily="34" charset="-120"/>
+              </a:rPr>
+              <a:t>yoy_monthly_pm25.png 로 저장.</a:t>
+            </a:r>
+            <a:endParaRPr lang="en-US" sz="1150" dirty="0"/>
+          </a:p>
+        </p:txBody>
+      </p:sp>
+      <p:sp>
+        <p:nvSpPr>
+          <p:cNvPr id="9" name="Text 7"/>
           <p:cNvSpPr/>
           <p:nvPr/>
         </p:nvSpPr>
@@ -9863,7 +10354,7 @@
                 <a:ea typeface="Noto Sans KR" pitchFamily="34" charset="-122"/>
                 <a:cs typeface="Noto Sans KR" pitchFamily="34" charset="-120"/>
               </a:rPr>
-              <a:t>25 / 28</a:t>
+              <a:t>25 / 31</a:t>
             </a:r>
             <a:endParaRPr lang="en-US" sz="900" dirty="0"/>
           </a:p>
@@ -9947,7 +10438,7 @@
                 <a:ea typeface="Noto Sans KR" pitchFamily="34" charset="-122"/>
                 <a:cs typeface="Noto Sans KR" pitchFamily="34" charset="-120"/>
               </a:rPr>
-              <a:t>파트 3. 데이터 다운로드 + 첫 분석 + CLAUDE.md</a:t>
+              <a:t>DAY 1 · STEP 4</a:t>
             </a:r>
             <a:endParaRPr lang="en-US" sz="1400" dirty="0"/>
           </a:p>
@@ -9986,7 +10477,7 @@
                 <a:ea typeface="Noto Sans KR" pitchFamily="34" charset="-122"/>
                 <a:cs typeface="Noto Sans KR" pitchFamily="34" charset="-120"/>
               </a:rPr>
-              <a:t>섹션 5 / 5</a:t>
+              <a:t>오늘 만든 결과물</a:t>
             </a:r>
             <a:endParaRPr lang="en-US" sz="1100" dirty="0"/>
           </a:p>
@@ -10000,8 +10491,8 @@
         </p:nvSpPr>
         <p:spPr>
           <a:xfrm>
-            <a:off x="548640" y="1508760"/>
-            <a:ext cx="11091672" cy="1371600"/>
+            <a:off x="548640" y="1417320"/>
+            <a:ext cx="11091672" cy="640080"/>
           </a:xfrm>
           <a:prstGeom prst="rect">
             <a:avLst/>
@@ -10014,13 +10505,10 @@
           <a:lstStyle/>
           <a:p>
             <a:pPr indent="0" marL="0">
-              <a:lnSpc>
-                <a:spcPct val="110000"/>
-              </a:lnSpc>
-              <a:buNone/>
-            </a:pPr>
-            <a:r>
-              <a:rPr lang="en-US" sz="4200" b="1" spc="-50" kern="0" dirty="0">
+              <a:buNone/>
+            </a:pPr>
+            <a:r>
+              <a:rPr lang="en-US" sz="2800" b="1" spc="-30" kern="0" dirty="0">
                 <a:solidFill>
                   <a:srgbClr val="1A1F36"/>
                 </a:solidFill>
@@ -10028,229 +10516,77 @@
                 <a:ea typeface="Noto Sans KR" pitchFamily="34" charset="-122"/>
                 <a:cs typeface="Noto Sans KR" pitchFamily="34" charset="-120"/>
               </a:rPr>
-              <a:t>산출물 정리 + 운영 채널 업로드</a:t>
-            </a:r>
-            <a:endParaRPr lang="en-US" sz="4200" dirty="0"/>
-          </a:p>
-        </p:txBody>
-      </p:sp>
-      <p:sp>
-        <p:nvSpPr>
-          <p:cNvPr id="6" name="Shape 4"/>
-          <p:cNvSpPr/>
-          <p:nvPr/>
-        </p:nvSpPr>
-        <p:spPr>
-          <a:xfrm>
-            <a:off x="548640" y="2971800"/>
-            <a:ext cx="1828800" cy="0"/>
-          </a:xfrm>
-          <a:prstGeom prst="line">
-            <a:avLst/>
-          </a:prstGeom>
-          <a:noFill/>
-          <a:ln w="25400">
-            <a:solidFill>
-              <a:srgbClr val="4A7BF7"/>
-            </a:solidFill>
-            <a:prstDash val="solid"/>
-          </a:ln>
-        </p:spPr>
-      </p:sp>
-      <p:sp>
-        <p:nvSpPr>
-          <p:cNvPr id="7" name="Text 5"/>
-          <p:cNvSpPr/>
-          <p:nvPr/>
-        </p:nvSpPr>
-        <p:spPr>
-          <a:xfrm>
-            <a:off x="548640" y="3200400"/>
-            <a:ext cx="11091672" cy="2788920"/>
-          </a:xfrm>
-          <a:prstGeom prst="rect">
-            <a:avLst/>
-          </a:prstGeom>
-          <a:noFill/>
-          <a:ln/>
-        </p:spPr>
-        <p:txBody>
-          <a:bodyPr wrap="square" rtlCol="0" anchor="t"/>
-          <a:lstStyle/>
-          <a:p>
-            <a:pPr indent="0" marL="0">
-              <a:lnSpc>
-                <a:spcPct val="155000"/>
-              </a:lnSpc>
-              <a:buNone/>
-            </a:pPr>
-            <a:r>
-              <a:rPr lang="en-US" sz="1700" dirty="0">
-                <a:solidFill>
-                  <a:srgbClr val="4A5568"/>
-                </a:solidFill>
-                <a:latin typeface="Noto Sans KR" pitchFamily="34" charset="0"/>
-                <a:ea typeface="Noto Sans KR" pitchFamily="34" charset="-122"/>
-                <a:cs typeface="Noto Sans KR" pitchFamily="34" charset="-120"/>
-              </a:rPr>
-              <a:t>inflearn_ccd_challenge/</a:t>
-            </a:r>
-            <a:endParaRPr lang="en-US" sz="1700" dirty="0"/>
-          </a:p>
-          <a:p>
-            <a:pPr indent="0" marL="0">
-              <a:lnSpc>
-                <a:spcPct val="155000"/>
-              </a:lnSpc>
-              <a:buNone/>
-            </a:pPr>
-            <a:r>
-              <a:rPr lang="en-US" sz="1700" dirty="0">
-                <a:solidFill>
-                  <a:srgbClr val="4A5568"/>
-                </a:solidFill>
-                <a:latin typeface="Noto Sans KR" pitchFamily="34" charset="0"/>
-                <a:ea typeface="Noto Sans KR" pitchFamily="34" charset="-122"/>
-                <a:cs typeface="Noto Sans KR" pitchFamily="34" charset="-120"/>
-              </a:rPr>
-              <a:t>├── CLAUDE.md</a:t>
-            </a:r>
-            <a:endParaRPr lang="en-US" sz="1700" dirty="0"/>
-          </a:p>
-          <a:p>
-            <a:pPr indent="0" marL="0">
-              <a:lnSpc>
-                <a:spcPct val="155000"/>
-              </a:lnSpc>
-              <a:buNone/>
-            </a:pPr>
-            <a:r>
-              <a:rPr lang="en-US" sz="1700" dirty="0">
-                <a:solidFill>
-                  <a:srgbClr val="4A5568"/>
-                </a:solidFill>
-                <a:latin typeface="Noto Sans KR" pitchFamily="34" charset="0"/>
-                <a:ea typeface="Noto Sans KR" pitchFamily="34" charset="-122"/>
-                <a:cs typeface="Noto Sans KR" pitchFamily="34" charset="-120"/>
-              </a:rPr>
-              <a:t>├── 기간별_일평균_대기환경_정보_2024년.csv</a:t>
-            </a:r>
-            <a:endParaRPr lang="en-US" sz="1700" dirty="0"/>
-          </a:p>
-          <a:p>
-            <a:pPr indent="0" marL="0">
-              <a:lnSpc>
-                <a:spcPct val="155000"/>
-              </a:lnSpc>
-              <a:buNone/>
-            </a:pPr>
-            <a:r>
-              <a:rPr lang="en-US" sz="1700" dirty="0">
-                <a:solidFill>
-                  <a:srgbClr val="4A5568"/>
-                </a:solidFill>
-                <a:latin typeface="Noto Sans KR" pitchFamily="34" charset="0"/>
-                <a:ea typeface="Noto Sans KR" pitchFamily="34" charset="-122"/>
-                <a:cs typeface="Noto Sans KR" pitchFamily="34" charset="-120"/>
-              </a:rPr>
-              <a:t>├── 기간별_일평균_대기환경_정보_2025년.csv</a:t>
-            </a:r>
-            <a:endParaRPr lang="en-US" sz="1700" dirty="0"/>
-          </a:p>
-          <a:p>
-            <a:pPr indent="0" marL="0">
-              <a:lnSpc>
-                <a:spcPct val="155000"/>
-              </a:lnSpc>
-              <a:buNone/>
-            </a:pPr>
-            <a:r>
-              <a:rPr lang="en-US" sz="1700" dirty="0">
-                <a:solidFill>
-                  <a:srgbClr val="4A5568"/>
-                </a:solidFill>
-                <a:latin typeface="Noto Sans KR" pitchFamily="34" charset="0"/>
-                <a:ea typeface="Noto Sans KR" pitchFamily="34" charset="-122"/>
-                <a:cs typeface="Noto Sans KR" pitchFamily="34" charset="-120"/>
-              </a:rPr>
-              <a:t>└── outputs/</a:t>
-            </a:r>
-            <a:endParaRPr lang="en-US" sz="1700" dirty="0"/>
-          </a:p>
-          <a:p>
-            <a:pPr indent="0" marL="0">
-              <a:lnSpc>
-                <a:spcPct val="155000"/>
-              </a:lnSpc>
-              <a:buNone/>
-            </a:pPr>
-            <a:r>
-              <a:rPr lang="en-US" sz="1700" dirty="0">
-                <a:solidFill>
-                  <a:srgbClr val="4A5568"/>
-                </a:solidFill>
-                <a:latin typeface="Noto Sans KR" pitchFamily="34" charset="0"/>
-                <a:ea typeface="Noto Sans KR" pitchFamily="34" charset="-122"/>
-                <a:cs typeface="Noto Sans KR" pitchFamily="34" charset="-120"/>
-              </a:rPr>
-              <a:t>    ├── yoy_district_pm25.png</a:t>
-            </a:r>
-            <a:endParaRPr lang="en-US" sz="1700" dirty="0"/>
-          </a:p>
-          <a:p>
-            <a:pPr indent="0" marL="0">
-              <a:lnSpc>
-                <a:spcPct val="155000"/>
-              </a:lnSpc>
-              <a:buNone/>
-            </a:pPr>
-            <a:r>
-              <a:rPr lang="en-US" sz="1700" dirty="0">
-                <a:solidFill>
-                  <a:srgbClr val="4A5568"/>
-                </a:solidFill>
-                <a:latin typeface="Noto Sans KR" pitchFamily="34" charset="0"/>
-                <a:ea typeface="Noto Sans KR" pitchFamily="34" charset="-122"/>
-                <a:cs typeface="Noto Sans KR" pitchFamily="34" charset="-120"/>
-              </a:rPr>
-              <a:t>    └── yoy_monthly_pm25.png</a:t>
-            </a:r>
-            <a:endParaRPr lang="en-US" sz="1700" dirty="0"/>
-          </a:p>
-          <a:p>
-            <a:pPr indent="0" marL="0">
-              <a:lnSpc>
-                <a:spcPct val="155000"/>
-              </a:lnSpc>
-              <a:buNone/>
-            </a:pPr>
-            <a:endParaRPr lang="en-US" sz="1700" dirty="0"/>
-          </a:p>
-          <a:p>
-            <a:pPr indent="0" marL="0">
-              <a:lnSpc>
-                <a:spcPct val="155000"/>
-              </a:lnSpc>
-              <a:buNone/>
-            </a:pPr>
-            <a:r>
-              <a:rPr lang="en-US" sz="1700" dirty="0">
-                <a:solidFill>
-                  <a:srgbClr val="4A5568"/>
-                </a:solidFill>
-                <a:latin typeface="Noto Sans KR" pitchFamily="34" charset="0"/>
-                <a:ea typeface="Noto Sans KR" pitchFamily="34" charset="-122"/>
-                <a:cs typeface="Noto Sans KR" pitchFamily="34" charset="-120"/>
-              </a:rPr>
-              <a:t>→ outputs/ PNG · CLAUDE.md 를 인프런/운영 채널에 업로드</a:t>
-            </a:r>
-            <a:endParaRPr lang="en-US" sz="1700" dirty="0"/>
-          </a:p>
-        </p:txBody>
-      </p:sp>
-      <p:sp>
-        <p:nvSpPr>
-          <p:cNvPr id="8" name="Text 6"/>
+              <a:t>4단계 결과 — 월별 추이 + 황사 시즌</a:t>
+            </a:r>
+            <a:endParaRPr lang="en-US" sz="2800" dirty="0"/>
+          </a:p>
+        </p:txBody>
+      </p:sp>
+      <p:pic>
+        <p:nvPicPr>
+          <p:cNvPr id="6" name="Image 0" descr="/Users/sujinpark/b2b-lecture-note/20260512_inflearn_B2G_dataanalysis/assets/screenshots/day1/result_step3_monthly.png">    </p:cNvPr>
+          <p:cNvPicPr>
+            <a:picLocks noChangeAspect="1"/>
+          </p:cNvPicPr>
+          <p:nvPr/>
+        </p:nvPicPr>
+        <p:blipFill>
+          <a:blip r:embed="rId1"/>
+          <a:srcRect l="0" r="0" t="0" b="0"/>
+          <a:stretch/>
+        </p:blipFill>
+        <p:spPr>
+          <a:xfrm>
+            <a:off x="2194560" y="2240280"/>
+            <a:ext cx="7772400" cy="3657600"/>
+          </a:xfrm>
+          <a:prstGeom prst="rect">
+            <a:avLst/>
+          </a:prstGeom>
+        </p:spPr>
+      </p:pic>
+      <p:sp>
+        <p:nvSpPr>
+          <p:cNvPr id="7" name="Text 4"/>
+          <p:cNvSpPr/>
+          <p:nvPr/>
+        </p:nvSpPr>
+        <p:spPr>
+          <a:xfrm>
+            <a:off x="548640" y="5989320"/>
+            <a:ext cx="11091672" cy="411480"/>
+          </a:xfrm>
+          <a:prstGeom prst="rect">
+            <a:avLst/>
+          </a:prstGeom>
+          <a:noFill/>
+          <a:ln/>
+        </p:spPr>
+        <p:txBody>
+          <a:bodyPr wrap="square" rtlCol="0" anchor="ctr"/>
+          <a:lstStyle/>
+          <a:p>
+            <a:pPr algn="ctr" indent="0" marL="0">
+              <a:buNone/>
+            </a:pPr>
+            <a:r>
+              <a:rPr lang="en-US" sz="1200" i="1" dirty="0">
+                <a:solidFill>
+                  <a:srgbClr val="718096"/>
+                </a:solidFill>
+                <a:latin typeface="Noto Sans KR" pitchFamily="34" charset="0"/>
+                <a:ea typeface="Noto Sans KR" pitchFamily="34" charset="-122"/>
+                <a:cs typeface="Noto Sans KR" pitchFamily="34" charset="-120"/>
+              </a:rPr>
+              <a:t>월별 PM2.5 (2024 vs 2025) + 황사 시즌 음영</a:t>
+            </a:r>
+            <a:endParaRPr lang="en-US" sz="1200" dirty="0"/>
+          </a:p>
+        </p:txBody>
+      </p:sp>
+      <p:sp>
+        <p:nvSpPr>
+          <p:cNvPr id="8" name="Text 5"/>
           <p:cNvSpPr/>
           <p:nvPr/>
         </p:nvSpPr>
@@ -10281,7 +10617,7 @@
                 <a:ea typeface="Noto Sans KR" pitchFamily="34" charset="-122"/>
                 <a:cs typeface="Noto Sans KR" pitchFamily="34" charset="-120"/>
               </a:rPr>
-              <a:t>26 / 28</a:t>
+              <a:t>26 / 31</a:t>
             </a:r>
             <a:endParaRPr lang="en-US" sz="900" dirty="0"/>
           </a:p>
@@ -10341,7 +10677,7 @@
         <p:spPr>
           <a:xfrm>
             <a:off x="548640" y="530352"/>
-            <a:ext cx="10515600" cy="502920"/>
+            <a:ext cx="10515600" cy="411480"/>
           </a:xfrm>
           <a:prstGeom prst="rect">
             <a:avLst/>
@@ -10357,7 +10693,88 @@
               <a:buNone/>
             </a:pPr>
             <a:r>
-              <a:rPr lang="en-US" sz="2600" b="1" spc="-30" kern="0" dirty="0">
+              <a:rPr lang="en-US" sz="1400" b="1" spc="50" kern="0" dirty="0">
+                <a:solidFill>
+                  <a:srgbClr val="718096"/>
+                </a:solidFill>
+                <a:latin typeface="Noto Sans KR" pitchFamily="34" charset="0"/>
+                <a:ea typeface="Noto Sans KR" pitchFamily="34" charset="-122"/>
+                <a:cs typeface="Noto Sans KR" pitchFamily="34" charset="-120"/>
+              </a:rPr>
+              <a:t>파트 3. 데이터 다운로드 + 첫 분석 + CLAUDE.md</a:t>
+            </a:r>
+            <a:endParaRPr lang="en-US" sz="1400" dirty="0"/>
+          </a:p>
+        </p:txBody>
+      </p:sp>
+      <p:sp>
+        <p:nvSpPr>
+          <p:cNvPr id="4" name="Text 2"/>
+          <p:cNvSpPr/>
+          <p:nvPr/>
+        </p:nvSpPr>
+        <p:spPr>
+          <a:xfrm>
+            <a:off x="548640" y="960120"/>
+            <a:ext cx="10515600" cy="292608"/>
+          </a:xfrm>
+          <a:prstGeom prst="rect">
+            <a:avLst/>
+          </a:prstGeom>
+          <a:noFill/>
+          <a:ln/>
+        </p:spPr>
+        <p:txBody>
+          <a:bodyPr wrap="square" rtlCol="0" anchor="ctr"/>
+          <a:lstStyle/>
+          <a:p>
+            <a:pPr indent="0" marL="0">
+              <a:buNone/>
+            </a:pPr>
+            <a:r>
+              <a:rPr lang="en-US" sz="1100" b="1" spc="150" kern="0" dirty="0">
+                <a:solidFill>
+                  <a:srgbClr val="4A7BF7"/>
+                </a:solidFill>
+                <a:latin typeface="Noto Sans KR" pitchFamily="34" charset="0"/>
+                <a:ea typeface="Noto Sans KR" pitchFamily="34" charset="-122"/>
+                <a:cs typeface="Noto Sans KR" pitchFamily="34" charset="-120"/>
+              </a:rPr>
+              <a:t>섹션 3 / 4</a:t>
+            </a:r>
+            <a:endParaRPr lang="en-US" sz="1100" dirty="0"/>
+          </a:p>
+        </p:txBody>
+      </p:sp>
+      <p:sp>
+        <p:nvSpPr>
+          <p:cNvPr id="5" name="Text 3"/>
+          <p:cNvSpPr/>
+          <p:nvPr/>
+        </p:nvSpPr>
+        <p:spPr>
+          <a:xfrm>
+            <a:off x="548640" y="1508760"/>
+            <a:ext cx="11091672" cy="1371600"/>
+          </a:xfrm>
+          <a:prstGeom prst="rect">
+            <a:avLst/>
+          </a:prstGeom>
+          <a:noFill/>
+          <a:ln/>
+        </p:spPr>
+        <p:txBody>
+          <a:bodyPr wrap="square" rtlCol="0" anchor="t"/>
+          <a:lstStyle/>
+          <a:p>
+            <a:pPr indent="0" marL="0">
+              <a:lnSpc>
+                <a:spcPct val="110000"/>
+              </a:lnSpc>
+              <a:buNone/>
+            </a:pPr>
+            <a:r>
+              <a:rPr lang="en-US" sz="4200" b="1" spc="-50" kern="0" dirty="0">
                 <a:solidFill>
                   <a:srgbClr val="1A1F36"/>
                 </a:solidFill>
@@ -10365,79 +10782,11 @@
                 <a:ea typeface="Noto Sans KR" pitchFamily="34" charset="-122"/>
                 <a:cs typeface="Noto Sans KR" pitchFamily="34" charset="-120"/>
               </a:rPr>
-              <a:t>🎯 미션 1 — 첫 분석 + CLAUDE.md</a:t>
-            </a:r>
-            <a:endParaRPr lang="en-US" sz="2600" dirty="0"/>
-          </a:p>
-        </p:txBody>
-      </p:sp>
-      <p:sp>
-        <p:nvSpPr>
-          <p:cNvPr id="4" name="Text 2"/>
-          <p:cNvSpPr/>
-          <p:nvPr/>
-        </p:nvSpPr>
-        <p:spPr>
-          <a:xfrm>
-            <a:off x="548640" y="1051560"/>
-            <a:ext cx="10515600" cy="347472"/>
-          </a:xfrm>
-          <a:prstGeom prst="rect">
-            <a:avLst/>
-          </a:prstGeom>
-          <a:noFill/>
-          <a:ln/>
-        </p:spPr>
-        <p:txBody>
-          <a:bodyPr wrap="square" rtlCol="0" anchor="ctr"/>
-          <a:lstStyle/>
-          <a:p>
-            <a:pPr indent="0" marL="0">
-              <a:buNone/>
-            </a:pPr>
-            <a:r>
-              <a:rPr lang="en-US" sz="1400" dirty="0">
-                <a:solidFill>
-                  <a:srgbClr val="718096"/>
-                </a:solidFill>
-                <a:latin typeface="Noto Sans KR" pitchFamily="34" charset="0"/>
-                <a:ea typeface="Noto Sans KR" pitchFamily="34" charset="-122"/>
-                <a:cs typeface="Noto Sans KR" pitchFamily="34" charset="-120"/>
-              </a:rPr>
-              <a:t>미세먼지 데이터에 질문 3개 + 결과 캡처 + CLAUDE.md → 인프런/운영 채널 업로드</a:t>
-            </a:r>
-            <a:endParaRPr lang="en-US" sz="1400" dirty="0"/>
-          </a:p>
-        </p:txBody>
-      </p:sp>
-      <p:sp>
-        <p:nvSpPr>
-          <p:cNvPr id="5" name="Shape 3"/>
-          <p:cNvSpPr/>
-          <p:nvPr/>
-        </p:nvSpPr>
-        <p:spPr>
-          <a:xfrm>
-            <a:off x="548640" y="1554480"/>
-            <a:ext cx="5669280" cy="4572000"/>
-          </a:xfrm>
-          <a:prstGeom prst="roundRect">
-            <a:avLst>
-              <a:gd name="adj" fmla="val 2000"/>
-            </a:avLst>
-          </a:prstGeom>
-          <a:solidFill>
-            <a:srgbClr val="FFFFFF"/>
-          </a:solidFill>
-          <a:ln/>
-          <a:effectLst>
-            <a:outerShdw sx="100000" sy="100000" kx="0" ky="0" algn="bl" rotWithShape="0" blurRad="76200" dist="25400" dir="16200000">
-              <a:srgbClr val="000000">
-                <a:alpha val="8000"/>
-              </a:srgbClr>
-            </a:outerShdw>
-          </a:effectLst>
-        </p:spPr>
+              <a:t>CLAUDE.md — 같은 결과를 매번 재현</a:t>
+            </a:r>
+            <a:endParaRPr lang="en-US" sz="4200" dirty="0"/>
+          </a:p>
+        </p:txBody>
       </p:sp>
       <p:sp>
         <p:nvSpPr>
@@ -10447,170 +10796,16 @@
         </p:nvSpPr>
         <p:spPr>
           <a:xfrm>
-            <a:off x="548640" y="1554480"/>
-            <a:ext cx="5669280" cy="64008"/>
-          </a:xfrm>
-          <a:prstGeom prst="rect">
-            <a:avLst/>
-          </a:prstGeom>
-          <a:solidFill>
-            <a:srgbClr val="4A7BF7"/>
-          </a:solidFill>
-          <a:ln/>
-        </p:spPr>
-      </p:sp>
-      <p:sp>
-        <p:nvSpPr>
-          <p:cNvPr id="7" name="Text 5"/>
-          <p:cNvSpPr/>
-          <p:nvPr/>
-        </p:nvSpPr>
-        <p:spPr>
-          <a:xfrm>
-            <a:off x="777240" y="1691640"/>
-            <a:ext cx="5212080" cy="365760"/>
-          </a:xfrm>
-          <a:prstGeom prst="rect">
-            <a:avLst/>
-          </a:prstGeom>
-          <a:noFill/>
-          <a:ln/>
-        </p:spPr>
-        <p:txBody>
-          <a:bodyPr wrap="square" rtlCol="0" anchor="ctr"/>
-          <a:lstStyle/>
-          <a:p>
-            <a:pPr indent="0" marL="0">
-              <a:buNone/>
-            </a:pPr>
-            <a:r>
-              <a:rPr lang="en-US" sz="1500" b="1" dirty="0">
-                <a:solidFill>
-                  <a:srgbClr val="1A1F36"/>
-                </a:solidFill>
-                <a:latin typeface="Noto Sans KR" pitchFamily="34" charset="0"/>
-                <a:ea typeface="Noto Sans KR" pitchFamily="34" charset="-122"/>
-                <a:cs typeface="Noto Sans KR" pitchFamily="34" charset="-120"/>
-              </a:rPr>
-              <a:t>필수 제출</a:t>
-            </a:r>
-            <a:endParaRPr lang="en-US" sz="1500" dirty="0"/>
-          </a:p>
-        </p:txBody>
-      </p:sp>
-      <p:sp>
-        <p:nvSpPr>
-          <p:cNvPr id="8" name="Text 6"/>
-          <p:cNvSpPr/>
-          <p:nvPr/>
-        </p:nvSpPr>
-        <p:spPr>
-          <a:xfrm>
-            <a:off x="777240" y="2148840"/>
-            <a:ext cx="5212080" cy="3840480"/>
-          </a:xfrm>
-          <a:prstGeom prst="rect">
-            <a:avLst/>
-          </a:prstGeom>
-          <a:noFill/>
-          <a:ln/>
-        </p:spPr>
-        <p:txBody>
-          <a:bodyPr wrap="square" rtlCol="0" anchor="t"/>
-          <a:lstStyle/>
-          <a:p>
-            <a:pPr indent="0" marL="0">
-              <a:lnSpc>
-                <a:spcPct val="150000"/>
-              </a:lnSpc>
-              <a:spcAft>
-                <a:spcPts val="1000"/>
-              </a:spcAft>
-              <a:buNone/>
-            </a:pPr>
-            <a:r>
-              <a:rPr lang="en-US" sz="1300" dirty="0">
-                <a:solidFill>
-                  <a:srgbClr val="4A5568"/>
-                </a:solidFill>
-                <a:latin typeface="Noto Sans KR" pitchFamily="34" charset="0"/>
-                <a:ea typeface="Noto Sans KR" pitchFamily="34" charset="-122"/>
-                <a:cs typeface="Noto Sans KR" pitchFamily="34" charset="-120"/>
-              </a:rPr>
-              <a:t>✅ 질문 3개 + 결과 캡처 (PNG)</a:t>
-            </a:r>
-            <a:endParaRPr lang="en-US" sz="1300" dirty="0"/>
-          </a:p>
-          <a:p>
-            <a:pPr indent="0" marL="0">
-              <a:lnSpc>
-                <a:spcPct val="150000"/>
-              </a:lnSpc>
-              <a:spcAft>
-                <a:spcPts val="1000"/>
-              </a:spcAft>
-              <a:buNone/>
-            </a:pPr>
-            <a:r>
-              <a:rPr lang="en-US" sz="1300" dirty="0">
-                <a:solidFill>
-                  <a:srgbClr val="4A5568"/>
-                </a:solidFill>
-                <a:latin typeface="Noto Sans KR" pitchFamily="34" charset="0"/>
-                <a:ea typeface="Noto Sans KR" pitchFamily="34" charset="-122"/>
-                <a:cs typeface="Noto Sans KR" pitchFamily="34" charset="-120"/>
-              </a:rPr>
-              <a:t>✅ CLAUDE.md (분석 규칙 5개 이상)</a:t>
-            </a:r>
-            <a:endParaRPr lang="en-US" sz="1300" dirty="0"/>
-          </a:p>
-          <a:p>
-            <a:pPr indent="0" marL="0">
-              <a:lnSpc>
-                <a:spcPct val="150000"/>
-              </a:lnSpc>
-              <a:spcAft>
-                <a:spcPts val="1000"/>
-              </a:spcAft>
-              <a:buNone/>
-            </a:pPr>
-            <a:r>
-              <a:rPr lang="en-US" sz="1300" dirty="0">
-                <a:solidFill>
-                  <a:srgbClr val="4A5568"/>
-                </a:solidFill>
-                <a:latin typeface="Noto Sans KR" pitchFamily="34" charset="0"/>
-                <a:ea typeface="Noto Sans KR" pitchFamily="34" charset="-122"/>
-                <a:cs typeface="Noto Sans KR" pitchFamily="34" charset="-120"/>
-              </a:rPr>
-              <a:t>✅ 운영 채널 업로드 (PNG · CLAUDE.md)</a:t>
-            </a:r>
-            <a:endParaRPr lang="en-US" sz="1300" dirty="0"/>
-          </a:p>
-        </p:txBody>
-      </p:sp>
-      <p:sp>
-        <p:nvSpPr>
-          <p:cNvPr id="9" name="Shape 7"/>
-          <p:cNvSpPr/>
-          <p:nvPr/>
-        </p:nvSpPr>
-        <p:spPr>
-          <a:xfrm>
-            <a:off x="6400800" y="1554480"/>
-            <a:ext cx="5212080" cy="4572000"/>
-          </a:xfrm>
-          <a:prstGeom prst="roundRect">
-            <a:avLst>
-              <a:gd name="adj" fmla="val 2000"/>
-            </a:avLst>
-          </a:prstGeom>
-          <a:solidFill>
-            <a:srgbClr val="F5F7FA"/>
-          </a:solidFill>
-          <a:ln w="6350">
+            <a:off x="548640" y="2971800"/>
+            <a:ext cx="1828800" cy="0"/>
+          </a:xfrm>
+          <a:prstGeom prst="line">
+            <a:avLst/>
+          </a:prstGeom>
+          <a:noFill/>
+          <a:ln w="25400">
             <a:solidFill>
-              <a:srgbClr val="E2E8F0"/>
+              <a:srgbClr val="4A7BF7"/>
             </a:solidFill>
             <a:prstDash val="solid"/>
           </a:ln>
@@ -10618,73 +10813,14 @@
       </p:sp>
       <p:sp>
         <p:nvSpPr>
-          <p:cNvPr id="10" name="Shape 8"/>
-          <p:cNvSpPr/>
-          <p:nvPr/>
-        </p:nvSpPr>
-        <p:spPr>
-          <a:xfrm>
-            <a:off x="6400800" y="1554480"/>
-            <a:ext cx="5212080" cy="64008"/>
-          </a:xfrm>
-          <a:prstGeom prst="rect">
-            <a:avLst/>
-          </a:prstGeom>
-          <a:solidFill>
-            <a:srgbClr val="4A7BF7"/>
-          </a:solidFill>
-          <a:ln/>
-        </p:spPr>
-      </p:sp>
-      <p:sp>
-        <p:nvSpPr>
-          <p:cNvPr id="11" name="Text 9"/>
-          <p:cNvSpPr/>
-          <p:nvPr/>
-        </p:nvSpPr>
-        <p:spPr>
-          <a:xfrm>
-            <a:off x="6629400" y="1691640"/>
-            <a:ext cx="4754880" cy="365760"/>
-          </a:xfrm>
-          <a:prstGeom prst="rect">
-            <a:avLst/>
-          </a:prstGeom>
-          <a:noFill/>
-          <a:ln/>
-        </p:spPr>
-        <p:txBody>
-          <a:bodyPr wrap="square" rtlCol="0" anchor="ctr"/>
-          <a:lstStyle/>
-          <a:p>
-            <a:pPr indent="0" marL="0">
-              <a:buNone/>
-            </a:pPr>
-            <a:r>
-              <a:rPr lang="en-US" sz="1500" b="1" dirty="0">
-                <a:solidFill>
-                  <a:srgbClr val="1A1F36"/>
-                </a:solidFill>
-                <a:latin typeface="Noto Sans KR" pitchFamily="34" charset="0"/>
-                <a:ea typeface="Noto Sans KR" pitchFamily="34" charset="-122"/>
-                <a:cs typeface="Noto Sans KR" pitchFamily="34" charset="-120"/>
-              </a:rPr>
-              <a:t>선택 (보너스)</a:t>
-            </a:r>
-            <a:endParaRPr lang="en-US" sz="1500" dirty="0"/>
-          </a:p>
-        </p:txBody>
-      </p:sp>
-      <p:sp>
-        <p:nvSpPr>
-          <p:cNvPr id="12" name="Text 10"/>
-          <p:cNvSpPr/>
-          <p:nvPr/>
-        </p:nvSpPr>
-        <p:spPr>
-          <a:xfrm>
-            <a:off x="6629400" y="2148840"/>
-            <a:ext cx="4754880" cy="3840480"/>
+          <p:cNvPr id="7" name="Text 5"/>
+          <p:cNvSpPr/>
+          <p:nvPr/>
+        </p:nvSpPr>
+        <p:spPr>
+          <a:xfrm>
+            <a:off x="548640" y="3200400"/>
+            <a:ext cx="11091672" cy="2788920"/>
           </a:xfrm>
           <a:prstGeom prst="rect">
             <a:avLst/>
@@ -10698,15 +10834,12 @@
           <a:p>
             <a:pPr indent="0" marL="0">
               <a:lnSpc>
-                <a:spcPct val="150000"/>
+                <a:spcPct val="155000"/>
               </a:lnSpc>
-              <a:spcAft>
-                <a:spcPts val="1000"/>
-              </a:spcAft>
-              <a:buNone/>
-            </a:pPr>
-            <a:r>
-              <a:rPr lang="en-US" sz="1300" dirty="0">
+              <a:buNone/>
+            </a:pPr>
+            <a:r>
+              <a:rPr lang="en-US" sz="1700" dirty="0">
                 <a:solidFill>
                   <a:srgbClr val="4A5568"/>
                 </a:solidFill>
@@ -10714,22 +10847,19 @@
                 <a:ea typeface="Noto Sans KR" pitchFamily="34" charset="-122"/>
                 <a:cs typeface="Noto Sans KR" pitchFamily="34" charset="-120"/>
               </a:rPr>
-              <a:t>⭐ "평소 같으면 얼마나 걸렸을까?" 한 줄 소감</a:t>
-            </a:r>
-            <a:endParaRPr lang="en-US" sz="1300" dirty="0"/>
+              <a:t>· 작업 폴더 루트에 두는 "프로젝트 컨텍스트 메모"</a:t>
+            </a:r>
+            <a:endParaRPr lang="en-US" sz="1700" dirty="0"/>
           </a:p>
           <a:p>
             <a:pPr indent="0" marL="0">
               <a:lnSpc>
-                <a:spcPct val="150000"/>
+                <a:spcPct val="155000"/>
               </a:lnSpc>
-              <a:spcAft>
-                <a:spcPts val="1000"/>
-              </a:spcAft>
-              <a:buNone/>
-            </a:pPr>
-            <a:r>
-              <a:rPr lang="en-US" sz="1300" dirty="0">
+              <a:buNone/>
+            </a:pPr>
+            <a:r>
+              <a:rPr lang="en-US" sz="1700" dirty="0">
                 <a:solidFill>
                   <a:srgbClr val="4A5568"/>
                 </a:solidFill>
@@ -10737,15 +10867,95 @@
                 <a:ea typeface="Noto Sans KR" pitchFamily="34" charset="-122"/>
                 <a:cs typeface="Noto Sans KR" pitchFamily="34" charset="-120"/>
               </a:rPr>
-              <a:t>⭐ 본인 회사 데이터로 시도해본 결과</a:t>
-            </a:r>
-            <a:endParaRPr lang="en-US" sz="1300" dirty="0"/>
-          </a:p>
-        </p:txBody>
-      </p:sp>
-      <p:sp>
-        <p:nvSpPr>
-          <p:cNvPr id="13" name="Text 11"/>
+              <a:t>· 인코딩·폰트·임계값·차트 저장 경로·파일명 규칙까지 명시</a:t>
+            </a:r>
+            <a:endParaRPr lang="en-US" sz="1700" dirty="0"/>
+          </a:p>
+          <a:p>
+            <a:pPr indent="0" marL="0">
+              <a:lnSpc>
+                <a:spcPct val="155000"/>
+              </a:lnSpc>
+              <a:buNone/>
+            </a:pPr>
+            <a:r>
+              <a:rPr lang="en-US" sz="1700" dirty="0">
+                <a:solidFill>
+                  <a:srgbClr val="4A5568"/>
+                </a:solidFill>
+                <a:latin typeface="Noto Sans KR" pitchFamily="34" charset="0"/>
+                <a:ea typeface="Noto Sans KR" pitchFamily="34" charset="-122"/>
+                <a:cs typeface="Noto Sans KR" pitchFamily="34" charset="-120"/>
+              </a:rPr>
+              <a:t>· 한 번 적어두면 다음 분석부터 같은 결과가 재현됨</a:t>
+            </a:r>
+            <a:endParaRPr lang="en-US" sz="1700" dirty="0"/>
+          </a:p>
+          <a:p>
+            <a:pPr indent="0" marL="0">
+              <a:lnSpc>
+                <a:spcPct val="155000"/>
+              </a:lnSpc>
+              <a:buNone/>
+            </a:pPr>
+            <a:r>
+              <a:rPr lang="en-US" sz="1700" dirty="0">
+                <a:solidFill>
+                  <a:srgbClr val="4A5568"/>
+                </a:solidFill>
+                <a:latin typeface="Noto Sans KR" pitchFamily="34" charset="0"/>
+                <a:ea typeface="Noto Sans KR" pitchFamily="34" charset="-122"/>
+                <a:cs typeface="Noto Sans KR" pitchFamily="34" charset="-120"/>
+              </a:rPr>
+              <a:t>  (강사 시연 → 수강생 → 본인 회사 데이터에서도 동일하게)</a:t>
+            </a:r>
+            <a:endParaRPr lang="en-US" sz="1700" dirty="0"/>
+          </a:p>
+          <a:p>
+            <a:pPr indent="0" marL="0">
+              <a:lnSpc>
+                <a:spcPct val="155000"/>
+              </a:lnSpc>
+              <a:buNone/>
+            </a:pPr>
+            <a:r>
+              <a:rPr lang="en-US" sz="1700" dirty="0">
+                <a:solidFill>
+                  <a:srgbClr val="4A5568"/>
+                </a:solidFill>
+                <a:latin typeface="Noto Sans KR" pitchFamily="34" charset="0"/>
+                <a:ea typeface="Noto Sans KR" pitchFamily="34" charset="-122"/>
+                <a:cs typeface="Noto Sans KR" pitchFamily="34" charset="-120"/>
+              </a:rPr>
+              <a:t>· 추가 규칙은 자연어로 부탁 — "이 규칙 추가해줘"</a:t>
+            </a:r>
+            <a:endParaRPr lang="en-US" sz="1700" dirty="0"/>
+          </a:p>
+          <a:p>
+            <a:pPr indent="0" marL="0">
+              <a:lnSpc>
+                <a:spcPct val="155000"/>
+              </a:lnSpc>
+              <a:buNone/>
+            </a:pPr>
+            <a:r>
+              <a:rPr lang="en-US" sz="1700" dirty="0">
+                <a:solidFill>
+                  <a:srgbClr val="4A5568"/>
+                </a:solidFill>
+                <a:latin typeface="Noto Sans KR" pitchFamily="34" charset="0"/>
+                <a:ea typeface="Noto Sans KR" pitchFamily="34" charset="-122"/>
+                <a:cs typeface="Noto Sans KR" pitchFamily="34" charset="-120"/>
+              </a:rPr>
+              <a:t>· 버전 구분(v1/v2) 안 함 — 폴더(day1/, day2/)로 히스토리 관리</a:t>
+            </a:r>
+            <a:endParaRPr lang="en-US" sz="1700" dirty="0"/>
+          </a:p>
+        </p:txBody>
+      </p:sp>
+      <p:sp>
+        <p:nvSpPr>
+          <p:cNvPr id="8" name="Text 6"/>
           <p:cNvSpPr/>
           <p:nvPr/>
         </p:nvSpPr>
@@ -10776,7 +10986,7 @@
                 <a:ea typeface="Noto Sans KR" pitchFamily="34" charset="-122"/>
                 <a:cs typeface="Noto Sans KR" pitchFamily="34" charset="-120"/>
               </a:rPr>
-              <a:t>27 / 28</a:t>
+              <a:t>27 / 31</a:t>
             </a:r>
             <a:endParaRPr lang="en-US" sz="900" dirty="0"/>
           </a:p>
@@ -10815,28 +11025,8 @@
         </p:nvSpPr>
         <p:spPr>
           <a:xfrm>
-            <a:off x="0" y="0"/>
-            <a:ext cx="12192000" cy="6858000"/>
-          </a:xfrm>
-          <a:prstGeom prst="rect">
-            <a:avLst/>
-          </a:prstGeom>
-          <a:solidFill>
-            <a:srgbClr val="1A1F36"/>
-          </a:solidFill>
-          <a:ln/>
-        </p:spPr>
-      </p:sp>
-      <p:sp>
-        <p:nvSpPr>
-          <p:cNvPr id="3" name="Shape 1"/>
-          <p:cNvSpPr/>
-          <p:nvPr/>
-        </p:nvSpPr>
-        <p:spPr>
-          <a:xfrm>
-            <a:off x="0" y="0"/>
-            <a:ext cx="12192000" cy="548640"/>
+            <a:off x="548640" y="384048"/>
+            <a:ext cx="914400" cy="54864"/>
           </a:xfrm>
           <a:prstGeom prst="rect">
             <a:avLst/>
@@ -10849,14 +11039,53 @@
       </p:sp>
       <p:sp>
         <p:nvSpPr>
+          <p:cNvPr id="3" name="Text 1"/>
+          <p:cNvSpPr/>
+          <p:nvPr/>
+        </p:nvSpPr>
+        <p:spPr>
+          <a:xfrm>
+            <a:off x="548640" y="530352"/>
+            <a:ext cx="10515600" cy="411480"/>
+          </a:xfrm>
+          <a:prstGeom prst="rect">
+            <a:avLst/>
+          </a:prstGeom>
+          <a:noFill/>
+          <a:ln/>
+        </p:spPr>
+        <p:txBody>
+          <a:bodyPr wrap="square" rtlCol="0" anchor="ctr"/>
+          <a:lstStyle/>
+          <a:p>
+            <a:pPr indent="0" marL="0">
+              <a:buNone/>
+            </a:pPr>
+            <a:r>
+              <a:rPr lang="en-US" sz="1400" b="1" spc="50" kern="0" dirty="0">
+                <a:solidFill>
+                  <a:srgbClr val="718096"/>
+                </a:solidFill>
+                <a:latin typeface="Noto Sans KR" pitchFamily="34" charset="0"/>
+                <a:ea typeface="Noto Sans KR" pitchFamily="34" charset="-122"/>
+                <a:cs typeface="Noto Sans KR" pitchFamily="34" charset="-120"/>
+              </a:rPr>
+              <a:t>DAY 1 · CLAUDE.md</a:t>
+            </a:r>
+            <a:endParaRPr lang="en-US" sz="1400" dirty="0"/>
+          </a:p>
+        </p:txBody>
+      </p:sp>
+      <p:sp>
+        <p:nvSpPr>
           <p:cNvPr id="4" name="Text 2"/>
           <p:cNvSpPr/>
           <p:nvPr/>
         </p:nvSpPr>
         <p:spPr>
           <a:xfrm>
-            <a:off x="731520" y="1645920"/>
-            <a:ext cx="10515600" cy="457200"/>
+            <a:off x="548640" y="960120"/>
+            <a:ext cx="10515600" cy="292608"/>
           </a:xfrm>
           <a:prstGeom prst="rect">
             <a:avLst/>
@@ -10872,7 +11101,7 @@
               <a:buNone/>
             </a:pPr>
             <a:r>
-              <a:rPr lang="en-US" sz="1400" b="1" spc="250" kern="0" dirty="0">
+              <a:rPr lang="en-US" sz="1100" b="1" spc="150" kern="0" dirty="0">
                 <a:solidFill>
                   <a:srgbClr val="4A7BF7"/>
                 </a:solidFill>
@@ -10880,9 +11109,9 @@
                 <a:ea typeface="Noto Sans KR" pitchFamily="34" charset="-122"/>
                 <a:cs typeface="Noto Sans KR" pitchFamily="34" charset="-120"/>
               </a:rPr>
-              <a:t>다음 회차 사전 안내</a:t>
-            </a:r>
-            <a:endParaRPr lang="en-US" sz="1400" dirty="0"/>
+              <a:t>오늘 만든 결과물</a:t>
+            </a:r>
+            <a:endParaRPr lang="en-US" sz="1100" dirty="0"/>
           </a:p>
         </p:txBody>
       </p:sp>
@@ -10894,8 +11123,70 @@
         </p:nvSpPr>
         <p:spPr>
           <a:xfrm>
-            <a:off x="731520" y="2194560"/>
-            <a:ext cx="10515600" cy="1371600"/>
+            <a:off x="548640" y="1417320"/>
+            <a:ext cx="11091672" cy="640080"/>
+          </a:xfrm>
+          <a:prstGeom prst="rect">
+            <a:avLst/>
+          </a:prstGeom>
+          <a:noFill/>
+          <a:ln/>
+        </p:spPr>
+        <p:txBody>
+          <a:bodyPr wrap="square" rtlCol="0" anchor="t"/>
+          <a:lstStyle/>
+          <a:p>
+            <a:pPr indent="0" marL="0">
+              <a:buNone/>
+            </a:pPr>
+            <a:r>
+              <a:rPr lang="en-US" sz="2800" b="1" spc="-30" kern="0" dirty="0">
+                <a:solidFill>
+                  <a:srgbClr val="1A1F36"/>
+                </a:solidFill>
+                <a:latin typeface="Noto Sans KR" pitchFamily="34" charset="0"/>
+                <a:ea typeface="Noto Sans KR" pitchFamily="34" charset="-122"/>
+                <a:cs typeface="Noto Sans KR" pitchFamily="34" charset="-120"/>
+              </a:rPr>
+              <a:t>CLAUDE.md 예시 — 그대로 복사해서 쓰세요</a:t>
+            </a:r>
+            <a:endParaRPr lang="en-US" sz="2800" dirty="0"/>
+          </a:p>
+        </p:txBody>
+      </p:sp>
+      <p:pic>
+        <p:nvPicPr>
+          <p:cNvPr id="6" name="Image 0" descr="/Users/sujinpark/b2b-lecture-note/20260512_inflearn_B2G_dataanalysis/assets/screenshots/day1/claude_md_example.png">    </p:cNvPr>
+          <p:cNvPicPr>
+            <a:picLocks noChangeAspect="1"/>
+          </p:cNvPicPr>
+          <p:nvPr/>
+        </p:nvPicPr>
+        <p:blipFill>
+          <a:blip r:embed="rId1"/>
+          <a:srcRect l="0" r="0" t="0" b="0"/>
+          <a:stretch/>
+        </p:blipFill>
+        <p:spPr>
+          <a:xfrm>
+            <a:off x="2194560" y="2240280"/>
+            <a:ext cx="7772400" cy="3657600"/>
+          </a:xfrm>
+          <a:prstGeom prst="rect">
+            <a:avLst/>
+          </a:prstGeom>
+        </p:spPr>
+      </p:pic>
+      <p:sp>
+        <p:nvSpPr>
+          <p:cNvPr id="7" name="Text 4"/>
+          <p:cNvSpPr/>
+          <p:nvPr/>
+        </p:nvSpPr>
+        <p:spPr>
+          <a:xfrm>
+            <a:off x="548640" y="5989320"/>
+            <a:ext cx="11091672" cy="411480"/>
           </a:xfrm>
           <a:prstGeom prst="rect">
             <a:avLst/>
@@ -10907,132 +11198,27 @@
           <a:bodyPr wrap="square" rtlCol="0" anchor="ctr"/>
           <a:lstStyle/>
           <a:p>
-            <a:pPr indent="0" marL="0">
-              <a:lnSpc>
-                <a:spcPct val="115000"/>
-              </a:lnSpc>
-              <a:buNone/>
-            </a:pPr>
-            <a:r>
-              <a:rPr lang="en-US" sz="3800" b="1" spc="-50" kern="0" dirty="0">
-                <a:solidFill>
-                  <a:srgbClr val="FFFFFF"/>
-                </a:solidFill>
-                <a:latin typeface="Noto Sans KR" pitchFamily="34" charset="0"/>
-                <a:ea typeface="Noto Sans KR" pitchFamily="34" charset="-122"/>
-                <a:cs typeface="Noto Sans KR" pitchFamily="34" charset="-120"/>
-              </a:rPr>
-              <a:t>Day 2 — EDA + 결합 데이터</a:t>
-            </a:r>
-            <a:endParaRPr lang="en-US" sz="3800" dirty="0"/>
-          </a:p>
-        </p:txBody>
-      </p:sp>
-      <p:sp>
-        <p:nvSpPr>
-          <p:cNvPr id="6" name="Text 4"/>
-          <p:cNvSpPr/>
-          <p:nvPr/>
-        </p:nvSpPr>
-        <p:spPr>
-          <a:xfrm>
-            <a:off x="731520" y="4114800"/>
-            <a:ext cx="10515600" cy="1828800"/>
-          </a:xfrm>
-          <a:prstGeom prst="rect">
-            <a:avLst/>
-          </a:prstGeom>
-          <a:noFill/>
-          <a:ln/>
-        </p:spPr>
-        <p:txBody>
-          <a:bodyPr wrap="square" rtlCol="0" anchor="ctr"/>
-          <a:lstStyle/>
-          <a:p>
-            <a:pPr indent="0" marL="0">
-              <a:lnSpc>
-                <a:spcPct val="170000"/>
-              </a:lnSpc>
-              <a:buNone/>
-            </a:pPr>
-            <a:r>
-              <a:rPr lang="en-US" sz="1500" dirty="0">
-                <a:solidFill>
-                  <a:srgbClr val="A0AEC0"/>
-                </a:solidFill>
-                <a:latin typeface="Noto Sans KR" pitchFamily="34" charset="0"/>
-                <a:ea typeface="Noto Sans KR" pitchFamily="34" charset="-122"/>
-                <a:cs typeface="Noto Sans KR" pitchFamily="34" charset="-120"/>
-              </a:rPr>
-              <a:t>· 분석 질문을 잔뜩 던지고, 답 가능한 것부터 풀기</a:t>
-            </a:r>
-            <a:endParaRPr lang="en-US" sz="1500" dirty="0"/>
-          </a:p>
-          <a:p>
-            <a:pPr indent="0" marL="0">
-              <a:lnSpc>
-                <a:spcPct val="170000"/>
-              </a:lnSpc>
-              <a:buNone/>
-            </a:pPr>
-            <a:r>
-              <a:rPr lang="en-US" sz="1500" dirty="0">
-                <a:solidFill>
-                  <a:srgbClr val="A0AEC0"/>
-                </a:solidFill>
-                <a:latin typeface="Noto Sans KR" pitchFamily="34" charset="0"/>
-                <a:ea typeface="Noto Sans KR" pitchFamily="34" charset="-122"/>
-                <a:cs typeface="Noto Sans KR" pitchFamily="34" charset="-120"/>
-              </a:rPr>
-              <a:t>· 단독 분석으로 부족하면 결합 (따릉이·지하철·날씨·언급량·쇼핑)</a:t>
-            </a:r>
-            <a:endParaRPr lang="en-US" sz="1500" dirty="0"/>
-          </a:p>
-          <a:p>
-            <a:pPr indent="0" marL="0">
-              <a:lnSpc>
-                <a:spcPct val="170000"/>
-              </a:lnSpc>
-              <a:buNone/>
-            </a:pPr>
-            <a:r>
-              <a:rPr lang="en-US" sz="1500" dirty="0">
-                <a:solidFill>
-                  <a:srgbClr val="A0AEC0"/>
-                </a:solidFill>
-                <a:latin typeface="Noto Sans KR" pitchFamily="34" charset="0"/>
-                <a:ea typeface="Noto Sans KR" pitchFamily="34" charset="-122"/>
-                <a:cs typeface="Noto Sans KR" pitchFamily="34" charset="-120"/>
-              </a:rPr>
-              <a:t>· Colab에서 코드 직접 만지기</a:t>
-            </a:r>
-            <a:endParaRPr lang="en-US" sz="1500" dirty="0"/>
-          </a:p>
-          <a:p>
-            <a:pPr indent="0" marL="0">
-              <a:lnSpc>
-                <a:spcPct val="170000"/>
-              </a:lnSpc>
-              <a:buNone/>
-            </a:pPr>
-            <a:r>
-              <a:rPr lang="en-US" sz="1500" dirty="0">
-                <a:solidFill>
-                  <a:srgbClr val="A0AEC0"/>
-                </a:solidFill>
-                <a:latin typeface="Noto Sans KR" pitchFamily="34" charset="0"/>
-                <a:ea typeface="Noto Sans KR" pitchFamily="34" charset="-122"/>
-                <a:cs typeface="Noto Sans KR" pitchFamily="34" charset="-120"/>
-              </a:rPr>
-              <a:t>· 오늘 만든 CLAUDE.md는 그대로 두고, 새 규칙은 자연어로 누적합니다</a:t>
-            </a:r>
-            <a:endParaRPr lang="en-US" sz="1500" dirty="0"/>
-          </a:p>
-        </p:txBody>
-      </p:sp>
-      <p:sp>
-        <p:nvSpPr>
-          <p:cNvPr id="7" name="Text 5"/>
+            <a:pPr algn="ctr" indent="0" marL="0">
+              <a:buNone/>
+            </a:pPr>
+            <a:r>
+              <a:rPr lang="en-US" sz="1200" i="1" dirty="0">
+                <a:solidFill>
+                  <a:srgbClr val="718096"/>
+                </a:solidFill>
+                <a:latin typeface="Noto Sans KR" pitchFamily="34" charset="0"/>
+                <a:ea typeface="Noto Sans KR" pitchFamily="34" charset="-122"/>
+                <a:cs typeface="Noto Sans KR" pitchFamily="34" charset="-120"/>
+              </a:rPr>
+              <a:t>이 CLAUDE.md를 그대로 두면 다음 분석부터 같은 결과가 재현됩니다</a:t>
+            </a:r>
+            <a:endParaRPr lang="en-US" sz="1200" dirty="0"/>
+          </a:p>
+        </p:txBody>
+      </p:sp>
+      <p:sp>
+        <p:nvSpPr>
+          <p:cNvPr id="8" name="Text 5"/>
           <p:cNvSpPr/>
           <p:nvPr/>
         </p:nvSpPr>
@@ -11063,7 +11249,425 @@
                 <a:ea typeface="Noto Sans KR" pitchFamily="34" charset="-122"/>
                 <a:cs typeface="Noto Sans KR" pitchFamily="34" charset="-120"/>
               </a:rPr>
-              <a:t>28 / 28</a:t>
+              <a:t>28 / 31</a:t>
+            </a:r>
+            <a:endParaRPr lang="en-US" sz="900" dirty="0"/>
+          </a:p>
+        </p:txBody>
+      </p:sp>
+    </p:spTree>
+  </p:cSld>
+  <p:clrMapOvr>
+    <a:masterClrMapping/>
+  </p:clrMapOvr>
+</p:sld>
+</file>
+
+<file path=ppt/slides/slide29.xml><?xml version="1.0" encoding="utf-8"?>
+<p:sld xmlns:a="http://schemas.openxmlformats.org/drawingml/2006/main" xmlns:r="http://schemas.openxmlformats.org/officeDocument/2006/relationships" xmlns:p="http://schemas.openxmlformats.org/presentationml/2006/main">
+  <p:cSld name="Slide 29">
+    <p:spTree>
+      <p:nvGrpSpPr>
+        <p:cNvPr id="1" name=""/>
+        <p:cNvGrpSpPr/>
+        <p:nvPr/>
+      </p:nvGrpSpPr>
+      <p:grpSpPr>
+        <a:xfrm>
+          <a:off x="0" y="0"/>
+          <a:ext cx="0" cy="0"/>
+          <a:chOff x="0" y="0"/>
+          <a:chExt cx="0" cy="0"/>
+        </a:xfrm>
+      </p:grpSpPr>
+      <p:sp>
+        <p:nvSpPr>
+          <p:cNvPr id="2" name="Shape 0"/>
+          <p:cNvSpPr/>
+          <p:nvPr/>
+        </p:nvSpPr>
+        <p:spPr>
+          <a:xfrm>
+            <a:off x="548640" y="384048"/>
+            <a:ext cx="914400" cy="54864"/>
+          </a:xfrm>
+          <a:prstGeom prst="rect">
+            <a:avLst/>
+          </a:prstGeom>
+          <a:solidFill>
+            <a:srgbClr val="4A7BF7"/>
+          </a:solidFill>
+          <a:ln/>
+        </p:spPr>
+      </p:sp>
+      <p:sp>
+        <p:nvSpPr>
+          <p:cNvPr id="3" name="Text 1"/>
+          <p:cNvSpPr/>
+          <p:nvPr/>
+        </p:nvSpPr>
+        <p:spPr>
+          <a:xfrm>
+            <a:off x="548640" y="530352"/>
+            <a:ext cx="10515600" cy="411480"/>
+          </a:xfrm>
+          <a:prstGeom prst="rect">
+            <a:avLst/>
+          </a:prstGeom>
+          <a:noFill/>
+          <a:ln/>
+        </p:spPr>
+        <p:txBody>
+          <a:bodyPr wrap="square" rtlCol="0" anchor="ctr"/>
+          <a:lstStyle/>
+          <a:p>
+            <a:pPr indent="0" marL="0">
+              <a:buNone/>
+            </a:pPr>
+            <a:r>
+              <a:rPr lang="en-US" sz="1400" b="1" spc="50" kern="0" dirty="0">
+                <a:solidFill>
+                  <a:srgbClr val="718096"/>
+                </a:solidFill>
+                <a:latin typeface="Noto Sans KR" pitchFamily="34" charset="0"/>
+                <a:ea typeface="Noto Sans KR" pitchFamily="34" charset="-122"/>
+                <a:cs typeface="Noto Sans KR" pitchFamily="34" charset="-120"/>
+              </a:rPr>
+              <a:t>파트 3. 데이터 다운로드 + 첫 분석 + CLAUDE.md</a:t>
+            </a:r>
+            <a:endParaRPr lang="en-US" sz="1400" dirty="0"/>
+          </a:p>
+        </p:txBody>
+      </p:sp>
+      <p:sp>
+        <p:nvSpPr>
+          <p:cNvPr id="4" name="Text 2"/>
+          <p:cNvSpPr/>
+          <p:nvPr/>
+        </p:nvSpPr>
+        <p:spPr>
+          <a:xfrm>
+            <a:off x="548640" y="960120"/>
+            <a:ext cx="10515600" cy="292608"/>
+          </a:xfrm>
+          <a:prstGeom prst="rect">
+            <a:avLst/>
+          </a:prstGeom>
+          <a:noFill/>
+          <a:ln/>
+        </p:spPr>
+        <p:txBody>
+          <a:bodyPr wrap="square" rtlCol="0" anchor="ctr"/>
+          <a:lstStyle/>
+          <a:p>
+            <a:pPr indent="0" marL="0">
+              <a:buNone/>
+            </a:pPr>
+            <a:r>
+              <a:rPr lang="en-US" sz="1100" b="1" spc="150" kern="0" dirty="0">
+                <a:solidFill>
+                  <a:srgbClr val="4A7BF7"/>
+                </a:solidFill>
+                <a:latin typeface="Noto Sans KR" pitchFamily="34" charset="0"/>
+                <a:ea typeface="Noto Sans KR" pitchFamily="34" charset="-122"/>
+                <a:cs typeface="Noto Sans KR" pitchFamily="34" charset="-120"/>
+              </a:rPr>
+              <a:t>섹션 4 / 4</a:t>
+            </a:r>
+            <a:endParaRPr lang="en-US" sz="1100" dirty="0"/>
+          </a:p>
+        </p:txBody>
+      </p:sp>
+      <p:sp>
+        <p:nvSpPr>
+          <p:cNvPr id="5" name="Text 3"/>
+          <p:cNvSpPr/>
+          <p:nvPr/>
+        </p:nvSpPr>
+        <p:spPr>
+          <a:xfrm>
+            <a:off x="548640" y="1508760"/>
+            <a:ext cx="11091672" cy="1371600"/>
+          </a:xfrm>
+          <a:prstGeom prst="rect">
+            <a:avLst/>
+          </a:prstGeom>
+          <a:noFill/>
+          <a:ln/>
+        </p:spPr>
+        <p:txBody>
+          <a:bodyPr wrap="square" rtlCol="0" anchor="t"/>
+          <a:lstStyle/>
+          <a:p>
+            <a:pPr indent="0" marL="0">
+              <a:lnSpc>
+                <a:spcPct val="110000"/>
+              </a:lnSpc>
+              <a:buNone/>
+            </a:pPr>
+            <a:r>
+              <a:rPr lang="en-US" sz="4200" b="1" spc="-50" kern="0" dirty="0">
+                <a:solidFill>
+                  <a:srgbClr val="1A1F36"/>
+                </a:solidFill>
+                <a:latin typeface="Noto Sans KR" pitchFamily="34" charset="0"/>
+                <a:ea typeface="Noto Sans KR" pitchFamily="34" charset="-122"/>
+                <a:cs typeface="Noto Sans KR" pitchFamily="34" charset="-120"/>
+              </a:rPr>
+              <a:t>산출물 정리 + 운영 채널 업로드</a:t>
+            </a:r>
+            <a:endParaRPr lang="en-US" sz="4200" dirty="0"/>
+          </a:p>
+        </p:txBody>
+      </p:sp>
+      <p:sp>
+        <p:nvSpPr>
+          <p:cNvPr id="6" name="Shape 4"/>
+          <p:cNvSpPr/>
+          <p:nvPr/>
+        </p:nvSpPr>
+        <p:spPr>
+          <a:xfrm>
+            <a:off x="548640" y="2971800"/>
+            <a:ext cx="1828800" cy="0"/>
+          </a:xfrm>
+          <a:prstGeom prst="line">
+            <a:avLst/>
+          </a:prstGeom>
+          <a:noFill/>
+          <a:ln w="25400">
+            <a:solidFill>
+              <a:srgbClr val="4A7BF7"/>
+            </a:solidFill>
+            <a:prstDash val="solid"/>
+          </a:ln>
+        </p:spPr>
+      </p:sp>
+      <p:sp>
+        <p:nvSpPr>
+          <p:cNvPr id="7" name="Text 5"/>
+          <p:cNvSpPr/>
+          <p:nvPr/>
+        </p:nvSpPr>
+        <p:spPr>
+          <a:xfrm>
+            <a:off x="548640" y="3200400"/>
+            <a:ext cx="11091672" cy="2788920"/>
+          </a:xfrm>
+          <a:prstGeom prst="rect">
+            <a:avLst/>
+          </a:prstGeom>
+          <a:noFill/>
+          <a:ln/>
+        </p:spPr>
+        <p:txBody>
+          <a:bodyPr wrap="square" rtlCol="0" anchor="t"/>
+          <a:lstStyle/>
+          <a:p>
+            <a:pPr indent="0" marL="0">
+              <a:lnSpc>
+                <a:spcPct val="155000"/>
+              </a:lnSpc>
+              <a:buNone/>
+            </a:pPr>
+            <a:r>
+              <a:rPr lang="en-US" sz="1700" dirty="0">
+                <a:solidFill>
+                  <a:srgbClr val="4A5568"/>
+                </a:solidFill>
+                <a:latin typeface="Noto Sans KR" pitchFamily="34" charset="0"/>
+                <a:ea typeface="Noto Sans KR" pitchFamily="34" charset="-122"/>
+                <a:cs typeface="Noto Sans KR" pitchFamily="34" charset="-120"/>
+              </a:rPr>
+              <a:t>inflearn_ccd_challenge/</a:t>
+            </a:r>
+            <a:endParaRPr lang="en-US" sz="1700" dirty="0"/>
+          </a:p>
+          <a:p>
+            <a:pPr indent="0" marL="0">
+              <a:lnSpc>
+                <a:spcPct val="155000"/>
+              </a:lnSpc>
+              <a:buNone/>
+            </a:pPr>
+            <a:r>
+              <a:rPr lang="en-US" sz="1700" dirty="0">
+                <a:solidFill>
+                  <a:srgbClr val="4A5568"/>
+                </a:solidFill>
+                <a:latin typeface="Noto Sans KR" pitchFamily="34" charset="0"/>
+                <a:ea typeface="Noto Sans KR" pitchFamily="34" charset="-122"/>
+                <a:cs typeface="Noto Sans KR" pitchFamily="34" charset="-120"/>
+              </a:rPr>
+              <a:t>├── CLAUDE.md</a:t>
+            </a:r>
+            <a:endParaRPr lang="en-US" sz="1700" dirty="0"/>
+          </a:p>
+          <a:p>
+            <a:pPr indent="0" marL="0">
+              <a:lnSpc>
+                <a:spcPct val="155000"/>
+              </a:lnSpc>
+              <a:buNone/>
+            </a:pPr>
+            <a:r>
+              <a:rPr lang="en-US" sz="1700" dirty="0">
+                <a:solidFill>
+                  <a:srgbClr val="4A5568"/>
+                </a:solidFill>
+                <a:latin typeface="Noto Sans KR" pitchFamily="34" charset="0"/>
+                <a:ea typeface="Noto Sans KR" pitchFamily="34" charset="-122"/>
+                <a:cs typeface="Noto Sans KR" pitchFamily="34" charset="-120"/>
+              </a:rPr>
+              <a:t>├── 기간별_일평균_대기환경_정보_2024년.csv</a:t>
+            </a:r>
+            <a:endParaRPr lang="en-US" sz="1700" dirty="0"/>
+          </a:p>
+          <a:p>
+            <a:pPr indent="0" marL="0">
+              <a:lnSpc>
+                <a:spcPct val="155000"/>
+              </a:lnSpc>
+              <a:buNone/>
+            </a:pPr>
+            <a:r>
+              <a:rPr lang="en-US" sz="1700" dirty="0">
+                <a:solidFill>
+                  <a:srgbClr val="4A5568"/>
+                </a:solidFill>
+                <a:latin typeface="Noto Sans KR" pitchFamily="34" charset="0"/>
+                <a:ea typeface="Noto Sans KR" pitchFamily="34" charset="-122"/>
+                <a:cs typeface="Noto Sans KR" pitchFamily="34" charset="-120"/>
+              </a:rPr>
+              <a:t>├── 기간별_일평균_대기환경_정보_2025년.csv</a:t>
+            </a:r>
+            <a:endParaRPr lang="en-US" sz="1700" dirty="0"/>
+          </a:p>
+          <a:p>
+            <a:pPr indent="0" marL="0">
+              <a:lnSpc>
+                <a:spcPct val="155000"/>
+              </a:lnSpc>
+              <a:buNone/>
+            </a:pPr>
+            <a:r>
+              <a:rPr lang="en-US" sz="1700" dirty="0">
+                <a:solidFill>
+                  <a:srgbClr val="4A5568"/>
+                </a:solidFill>
+                <a:latin typeface="Noto Sans KR" pitchFamily="34" charset="0"/>
+                <a:ea typeface="Noto Sans KR" pitchFamily="34" charset="-122"/>
+                <a:cs typeface="Noto Sans KR" pitchFamily="34" charset="-120"/>
+              </a:rPr>
+              <a:t>└── outputs/</a:t>
+            </a:r>
+            <a:endParaRPr lang="en-US" sz="1700" dirty="0"/>
+          </a:p>
+          <a:p>
+            <a:pPr indent="0" marL="0">
+              <a:lnSpc>
+                <a:spcPct val="155000"/>
+              </a:lnSpc>
+              <a:buNone/>
+            </a:pPr>
+            <a:r>
+              <a:rPr lang="en-US" sz="1700" dirty="0">
+                <a:solidFill>
+                  <a:srgbClr val="4A5568"/>
+                </a:solidFill>
+                <a:latin typeface="Noto Sans KR" pitchFamily="34" charset="0"/>
+                <a:ea typeface="Noto Sans KR" pitchFamily="34" charset="-122"/>
+                <a:cs typeface="Noto Sans KR" pitchFamily="34" charset="-120"/>
+              </a:rPr>
+              <a:t>    ├── yoy_district_pm25.png</a:t>
+            </a:r>
+            <a:endParaRPr lang="en-US" sz="1700" dirty="0"/>
+          </a:p>
+          <a:p>
+            <a:pPr indent="0" marL="0">
+              <a:lnSpc>
+                <a:spcPct val="155000"/>
+              </a:lnSpc>
+              <a:buNone/>
+            </a:pPr>
+            <a:r>
+              <a:rPr lang="en-US" sz="1700" dirty="0">
+                <a:solidFill>
+                  <a:srgbClr val="4A5568"/>
+                </a:solidFill>
+                <a:latin typeface="Noto Sans KR" pitchFamily="34" charset="0"/>
+                <a:ea typeface="Noto Sans KR" pitchFamily="34" charset="-122"/>
+                <a:cs typeface="Noto Sans KR" pitchFamily="34" charset="-120"/>
+              </a:rPr>
+              <a:t>    └── yoy_monthly_pm25.png</a:t>
+            </a:r>
+            <a:endParaRPr lang="en-US" sz="1700" dirty="0"/>
+          </a:p>
+          <a:p>
+            <a:pPr indent="0" marL="0">
+              <a:lnSpc>
+                <a:spcPct val="155000"/>
+              </a:lnSpc>
+              <a:buNone/>
+            </a:pPr>
+            <a:endParaRPr lang="en-US" sz="1700" dirty="0"/>
+          </a:p>
+          <a:p>
+            <a:pPr indent="0" marL="0">
+              <a:lnSpc>
+                <a:spcPct val="155000"/>
+              </a:lnSpc>
+              <a:buNone/>
+            </a:pPr>
+            <a:r>
+              <a:rPr lang="en-US" sz="1700" dirty="0">
+                <a:solidFill>
+                  <a:srgbClr val="4A5568"/>
+                </a:solidFill>
+                <a:latin typeface="Noto Sans KR" pitchFamily="34" charset="0"/>
+                <a:ea typeface="Noto Sans KR" pitchFamily="34" charset="-122"/>
+                <a:cs typeface="Noto Sans KR" pitchFamily="34" charset="-120"/>
+              </a:rPr>
+              <a:t>→ outputs/ PNG · CLAUDE.md 를 인프런/운영 채널에 업로드</a:t>
+            </a:r>
+            <a:endParaRPr lang="en-US" sz="1700" dirty="0"/>
+          </a:p>
+        </p:txBody>
+      </p:sp>
+      <p:sp>
+        <p:nvSpPr>
+          <p:cNvPr id="8" name="Text 6"/>
+          <p:cNvSpPr/>
+          <p:nvPr/>
+        </p:nvSpPr>
+        <p:spPr>
+          <a:xfrm>
+            <a:off x="10972800" y="6446520"/>
+            <a:ext cx="1005840" cy="256032"/>
+          </a:xfrm>
+          <a:prstGeom prst="rect">
+            <a:avLst/>
+          </a:prstGeom>
+          <a:noFill/>
+          <a:ln/>
+        </p:spPr>
+        <p:txBody>
+          <a:bodyPr wrap="square" rtlCol="0" anchor="ctr"/>
+          <a:lstStyle/>
+          <a:p>
+            <a:pPr algn="r" indent="0" marL="0">
+              <a:buNone/>
+            </a:pPr>
+            <a:r>
+              <a:rPr lang="en-US" sz="900" dirty="0">
+                <a:solidFill>
+                  <a:srgbClr val="718096"/>
+                </a:solidFill>
+                <a:latin typeface="Noto Sans KR" pitchFamily="34" charset="0"/>
+                <a:ea typeface="Noto Sans KR" pitchFamily="34" charset="-122"/>
+                <a:cs typeface="Noto Sans KR" pitchFamily="34" charset="-120"/>
+              </a:rPr>
+              <a:t>29 / 31</a:t>
             </a:r>
             <a:endParaRPr lang="en-US" sz="900" dirty="0"/>
           </a:p>
@@ -11622,7 +12226,789 @@
                 <a:ea typeface="Noto Sans KR" pitchFamily="34" charset="-122"/>
                 <a:cs typeface="Noto Sans KR" pitchFamily="34" charset="-120"/>
               </a:rPr>
-              <a:t>3 / 28</a:t>
+              <a:t>3 / 31</a:t>
+            </a:r>
+            <a:endParaRPr lang="en-US" sz="900" dirty="0"/>
+          </a:p>
+        </p:txBody>
+      </p:sp>
+    </p:spTree>
+  </p:cSld>
+  <p:clrMapOvr>
+    <a:masterClrMapping/>
+  </p:clrMapOvr>
+</p:sld>
+</file>
+
+<file path=ppt/slides/slide30.xml><?xml version="1.0" encoding="utf-8"?>
+<p:sld xmlns:a="http://schemas.openxmlformats.org/drawingml/2006/main" xmlns:r="http://schemas.openxmlformats.org/officeDocument/2006/relationships" xmlns:p="http://schemas.openxmlformats.org/presentationml/2006/main">
+  <p:cSld name="Slide 30">
+    <p:spTree>
+      <p:nvGrpSpPr>
+        <p:cNvPr id="1" name=""/>
+        <p:cNvGrpSpPr/>
+        <p:nvPr/>
+      </p:nvGrpSpPr>
+      <p:grpSpPr>
+        <a:xfrm>
+          <a:off x="0" y="0"/>
+          <a:ext cx="0" cy="0"/>
+          <a:chOff x="0" y="0"/>
+          <a:chExt cx="0" cy="0"/>
+        </a:xfrm>
+      </p:grpSpPr>
+      <p:sp>
+        <p:nvSpPr>
+          <p:cNvPr id="2" name="Shape 0"/>
+          <p:cNvSpPr/>
+          <p:nvPr/>
+        </p:nvSpPr>
+        <p:spPr>
+          <a:xfrm>
+            <a:off x="548640" y="384048"/>
+            <a:ext cx="914400" cy="54864"/>
+          </a:xfrm>
+          <a:prstGeom prst="rect">
+            <a:avLst/>
+          </a:prstGeom>
+          <a:solidFill>
+            <a:srgbClr val="4A7BF7"/>
+          </a:solidFill>
+          <a:ln/>
+        </p:spPr>
+      </p:sp>
+      <p:sp>
+        <p:nvSpPr>
+          <p:cNvPr id="3" name="Text 1"/>
+          <p:cNvSpPr/>
+          <p:nvPr/>
+        </p:nvSpPr>
+        <p:spPr>
+          <a:xfrm>
+            <a:off x="548640" y="530352"/>
+            <a:ext cx="10515600" cy="502920"/>
+          </a:xfrm>
+          <a:prstGeom prst="rect">
+            <a:avLst/>
+          </a:prstGeom>
+          <a:noFill/>
+          <a:ln/>
+        </p:spPr>
+        <p:txBody>
+          <a:bodyPr wrap="square" rtlCol="0" anchor="ctr"/>
+          <a:lstStyle/>
+          <a:p>
+            <a:pPr indent="0" marL="0">
+              <a:buNone/>
+            </a:pPr>
+            <a:r>
+              <a:rPr lang="en-US" sz="2600" b="1" spc="-30" kern="0" dirty="0">
+                <a:solidFill>
+                  <a:srgbClr val="1A1F36"/>
+                </a:solidFill>
+                <a:latin typeface="Noto Sans KR" pitchFamily="34" charset="0"/>
+                <a:ea typeface="Noto Sans KR" pitchFamily="34" charset="-122"/>
+                <a:cs typeface="Noto Sans KR" pitchFamily="34" charset="-120"/>
+              </a:rPr>
+              <a:t>🎯 미션 1 — 첫 분석 + CLAUDE.md</a:t>
+            </a:r>
+            <a:endParaRPr lang="en-US" sz="2600" dirty="0"/>
+          </a:p>
+        </p:txBody>
+      </p:sp>
+      <p:sp>
+        <p:nvSpPr>
+          <p:cNvPr id="4" name="Text 2"/>
+          <p:cNvSpPr/>
+          <p:nvPr/>
+        </p:nvSpPr>
+        <p:spPr>
+          <a:xfrm>
+            <a:off x="548640" y="1051560"/>
+            <a:ext cx="10515600" cy="347472"/>
+          </a:xfrm>
+          <a:prstGeom prst="rect">
+            <a:avLst/>
+          </a:prstGeom>
+          <a:noFill/>
+          <a:ln/>
+        </p:spPr>
+        <p:txBody>
+          <a:bodyPr wrap="square" rtlCol="0" anchor="ctr"/>
+          <a:lstStyle/>
+          <a:p>
+            <a:pPr indent="0" marL="0">
+              <a:buNone/>
+            </a:pPr>
+            <a:r>
+              <a:rPr lang="en-US" sz="1400" dirty="0">
+                <a:solidFill>
+                  <a:srgbClr val="718096"/>
+                </a:solidFill>
+                <a:latin typeface="Noto Sans KR" pitchFamily="34" charset="0"/>
+                <a:ea typeface="Noto Sans KR" pitchFamily="34" charset="-122"/>
+                <a:cs typeface="Noto Sans KR" pitchFamily="34" charset="-120"/>
+              </a:rPr>
+              <a:t>미세먼지 데이터에 질문 3개 + 결과 캡처 + CLAUDE.md → 인프런/운영 채널 업로드</a:t>
+            </a:r>
+            <a:endParaRPr lang="en-US" sz="1400" dirty="0"/>
+          </a:p>
+        </p:txBody>
+      </p:sp>
+      <p:sp>
+        <p:nvSpPr>
+          <p:cNvPr id="5" name="Shape 3"/>
+          <p:cNvSpPr/>
+          <p:nvPr/>
+        </p:nvSpPr>
+        <p:spPr>
+          <a:xfrm>
+            <a:off x="548640" y="1554480"/>
+            <a:ext cx="5669280" cy="4572000"/>
+          </a:xfrm>
+          <a:prstGeom prst="roundRect">
+            <a:avLst>
+              <a:gd name="adj" fmla="val 2000"/>
+            </a:avLst>
+          </a:prstGeom>
+          <a:solidFill>
+            <a:srgbClr val="FFFFFF"/>
+          </a:solidFill>
+          <a:ln/>
+          <a:effectLst>
+            <a:outerShdw sx="100000" sy="100000" kx="0" ky="0" algn="bl" rotWithShape="0" blurRad="76200" dist="25400" dir="16200000">
+              <a:srgbClr val="000000">
+                <a:alpha val="8000"/>
+              </a:srgbClr>
+            </a:outerShdw>
+          </a:effectLst>
+        </p:spPr>
+      </p:sp>
+      <p:sp>
+        <p:nvSpPr>
+          <p:cNvPr id="6" name="Shape 4"/>
+          <p:cNvSpPr/>
+          <p:nvPr/>
+        </p:nvSpPr>
+        <p:spPr>
+          <a:xfrm>
+            <a:off x="548640" y="1554480"/>
+            <a:ext cx="5669280" cy="64008"/>
+          </a:xfrm>
+          <a:prstGeom prst="rect">
+            <a:avLst/>
+          </a:prstGeom>
+          <a:solidFill>
+            <a:srgbClr val="4A7BF7"/>
+          </a:solidFill>
+          <a:ln/>
+        </p:spPr>
+      </p:sp>
+      <p:sp>
+        <p:nvSpPr>
+          <p:cNvPr id="7" name="Text 5"/>
+          <p:cNvSpPr/>
+          <p:nvPr/>
+        </p:nvSpPr>
+        <p:spPr>
+          <a:xfrm>
+            <a:off x="777240" y="1691640"/>
+            <a:ext cx="5212080" cy="365760"/>
+          </a:xfrm>
+          <a:prstGeom prst="rect">
+            <a:avLst/>
+          </a:prstGeom>
+          <a:noFill/>
+          <a:ln/>
+        </p:spPr>
+        <p:txBody>
+          <a:bodyPr wrap="square" rtlCol="0" anchor="ctr"/>
+          <a:lstStyle/>
+          <a:p>
+            <a:pPr indent="0" marL="0">
+              <a:buNone/>
+            </a:pPr>
+            <a:r>
+              <a:rPr lang="en-US" sz="1500" b="1" dirty="0">
+                <a:solidFill>
+                  <a:srgbClr val="1A1F36"/>
+                </a:solidFill>
+                <a:latin typeface="Noto Sans KR" pitchFamily="34" charset="0"/>
+                <a:ea typeface="Noto Sans KR" pitchFamily="34" charset="-122"/>
+                <a:cs typeface="Noto Sans KR" pitchFamily="34" charset="-120"/>
+              </a:rPr>
+              <a:t>필수 제출</a:t>
+            </a:r>
+            <a:endParaRPr lang="en-US" sz="1500" dirty="0"/>
+          </a:p>
+        </p:txBody>
+      </p:sp>
+      <p:sp>
+        <p:nvSpPr>
+          <p:cNvPr id="8" name="Text 6"/>
+          <p:cNvSpPr/>
+          <p:nvPr/>
+        </p:nvSpPr>
+        <p:spPr>
+          <a:xfrm>
+            <a:off x="777240" y="2148840"/>
+            <a:ext cx="5212080" cy="3840480"/>
+          </a:xfrm>
+          <a:prstGeom prst="rect">
+            <a:avLst/>
+          </a:prstGeom>
+          <a:noFill/>
+          <a:ln/>
+        </p:spPr>
+        <p:txBody>
+          <a:bodyPr wrap="square" rtlCol="0" anchor="t"/>
+          <a:lstStyle/>
+          <a:p>
+            <a:pPr indent="0" marL="0">
+              <a:lnSpc>
+                <a:spcPct val="150000"/>
+              </a:lnSpc>
+              <a:spcAft>
+                <a:spcPts val="1000"/>
+              </a:spcAft>
+              <a:buNone/>
+            </a:pPr>
+            <a:r>
+              <a:rPr lang="en-US" sz="1300" dirty="0">
+                <a:solidFill>
+                  <a:srgbClr val="4A5568"/>
+                </a:solidFill>
+                <a:latin typeface="Noto Sans KR" pitchFamily="34" charset="0"/>
+                <a:ea typeface="Noto Sans KR" pitchFamily="34" charset="-122"/>
+                <a:cs typeface="Noto Sans KR" pitchFamily="34" charset="-120"/>
+              </a:rPr>
+              <a:t>✅ 질문 3개 + 결과 캡처 (PNG)</a:t>
+            </a:r>
+            <a:endParaRPr lang="en-US" sz="1300" dirty="0"/>
+          </a:p>
+          <a:p>
+            <a:pPr indent="0" marL="0">
+              <a:lnSpc>
+                <a:spcPct val="150000"/>
+              </a:lnSpc>
+              <a:spcAft>
+                <a:spcPts val="1000"/>
+              </a:spcAft>
+              <a:buNone/>
+            </a:pPr>
+            <a:r>
+              <a:rPr lang="en-US" sz="1300" dirty="0">
+                <a:solidFill>
+                  <a:srgbClr val="4A5568"/>
+                </a:solidFill>
+                <a:latin typeface="Noto Sans KR" pitchFamily="34" charset="0"/>
+                <a:ea typeface="Noto Sans KR" pitchFamily="34" charset="-122"/>
+                <a:cs typeface="Noto Sans KR" pitchFamily="34" charset="-120"/>
+              </a:rPr>
+              <a:t>✅ CLAUDE.md (분석 규칙 5개 이상)</a:t>
+            </a:r>
+            <a:endParaRPr lang="en-US" sz="1300" dirty="0"/>
+          </a:p>
+          <a:p>
+            <a:pPr indent="0" marL="0">
+              <a:lnSpc>
+                <a:spcPct val="150000"/>
+              </a:lnSpc>
+              <a:spcAft>
+                <a:spcPts val="1000"/>
+              </a:spcAft>
+              <a:buNone/>
+            </a:pPr>
+            <a:r>
+              <a:rPr lang="en-US" sz="1300" dirty="0">
+                <a:solidFill>
+                  <a:srgbClr val="4A5568"/>
+                </a:solidFill>
+                <a:latin typeface="Noto Sans KR" pitchFamily="34" charset="0"/>
+                <a:ea typeface="Noto Sans KR" pitchFamily="34" charset="-122"/>
+                <a:cs typeface="Noto Sans KR" pitchFamily="34" charset="-120"/>
+              </a:rPr>
+              <a:t>✅ 운영 채널 업로드 (PNG · CLAUDE.md)</a:t>
+            </a:r>
+            <a:endParaRPr lang="en-US" sz="1300" dirty="0"/>
+          </a:p>
+        </p:txBody>
+      </p:sp>
+      <p:sp>
+        <p:nvSpPr>
+          <p:cNvPr id="9" name="Shape 7"/>
+          <p:cNvSpPr/>
+          <p:nvPr/>
+        </p:nvSpPr>
+        <p:spPr>
+          <a:xfrm>
+            <a:off x="6400800" y="1554480"/>
+            <a:ext cx="5212080" cy="4572000"/>
+          </a:xfrm>
+          <a:prstGeom prst="roundRect">
+            <a:avLst>
+              <a:gd name="adj" fmla="val 2000"/>
+            </a:avLst>
+          </a:prstGeom>
+          <a:solidFill>
+            <a:srgbClr val="F5F7FA"/>
+          </a:solidFill>
+          <a:ln w="6350">
+            <a:solidFill>
+              <a:srgbClr val="E2E8F0"/>
+            </a:solidFill>
+            <a:prstDash val="solid"/>
+          </a:ln>
+        </p:spPr>
+      </p:sp>
+      <p:sp>
+        <p:nvSpPr>
+          <p:cNvPr id="10" name="Shape 8"/>
+          <p:cNvSpPr/>
+          <p:nvPr/>
+        </p:nvSpPr>
+        <p:spPr>
+          <a:xfrm>
+            <a:off x="6400800" y="1554480"/>
+            <a:ext cx="5212080" cy="64008"/>
+          </a:xfrm>
+          <a:prstGeom prst="rect">
+            <a:avLst/>
+          </a:prstGeom>
+          <a:solidFill>
+            <a:srgbClr val="4A7BF7"/>
+          </a:solidFill>
+          <a:ln/>
+        </p:spPr>
+      </p:sp>
+      <p:sp>
+        <p:nvSpPr>
+          <p:cNvPr id="11" name="Text 9"/>
+          <p:cNvSpPr/>
+          <p:nvPr/>
+        </p:nvSpPr>
+        <p:spPr>
+          <a:xfrm>
+            <a:off x="6629400" y="1691640"/>
+            <a:ext cx="4754880" cy="365760"/>
+          </a:xfrm>
+          <a:prstGeom prst="rect">
+            <a:avLst/>
+          </a:prstGeom>
+          <a:noFill/>
+          <a:ln/>
+        </p:spPr>
+        <p:txBody>
+          <a:bodyPr wrap="square" rtlCol="0" anchor="ctr"/>
+          <a:lstStyle/>
+          <a:p>
+            <a:pPr indent="0" marL="0">
+              <a:buNone/>
+            </a:pPr>
+            <a:r>
+              <a:rPr lang="en-US" sz="1500" b="1" dirty="0">
+                <a:solidFill>
+                  <a:srgbClr val="1A1F36"/>
+                </a:solidFill>
+                <a:latin typeface="Noto Sans KR" pitchFamily="34" charset="0"/>
+                <a:ea typeface="Noto Sans KR" pitchFamily="34" charset="-122"/>
+                <a:cs typeface="Noto Sans KR" pitchFamily="34" charset="-120"/>
+              </a:rPr>
+              <a:t>선택 (보너스)</a:t>
+            </a:r>
+            <a:endParaRPr lang="en-US" sz="1500" dirty="0"/>
+          </a:p>
+        </p:txBody>
+      </p:sp>
+      <p:sp>
+        <p:nvSpPr>
+          <p:cNvPr id="12" name="Text 10"/>
+          <p:cNvSpPr/>
+          <p:nvPr/>
+        </p:nvSpPr>
+        <p:spPr>
+          <a:xfrm>
+            <a:off x="6629400" y="2148840"/>
+            <a:ext cx="4754880" cy="3840480"/>
+          </a:xfrm>
+          <a:prstGeom prst="rect">
+            <a:avLst/>
+          </a:prstGeom>
+          <a:noFill/>
+          <a:ln/>
+        </p:spPr>
+        <p:txBody>
+          <a:bodyPr wrap="square" rtlCol="0" anchor="t"/>
+          <a:lstStyle/>
+          <a:p>
+            <a:pPr indent="0" marL="0">
+              <a:lnSpc>
+                <a:spcPct val="150000"/>
+              </a:lnSpc>
+              <a:spcAft>
+                <a:spcPts val="1000"/>
+              </a:spcAft>
+              <a:buNone/>
+            </a:pPr>
+            <a:r>
+              <a:rPr lang="en-US" sz="1300" dirty="0">
+                <a:solidFill>
+                  <a:srgbClr val="4A5568"/>
+                </a:solidFill>
+                <a:latin typeface="Noto Sans KR" pitchFamily="34" charset="0"/>
+                <a:ea typeface="Noto Sans KR" pitchFamily="34" charset="-122"/>
+                <a:cs typeface="Noto Sans KR" pitchFamily="34" charset="-120"/>
+              </a:rPr>
+              <a:t>⭐ "평소 같으면 얼마나 걸렸을까?" 한 줄 소감</a:t>
+            </a:r>
+            <a:endParaRPr lang="en-US" sz="1300" dirty="0"/>
+          </a:p>
+          <a:p>
+            <a:pPr indent="0" marL="0">
+              <a:lnSpc>
+                <a:spcPct val="150000"/>
+              </a:lnSpc>
+              <a:spcAft>
+                <a:spcPts val="1000"/>
+              </a:spcAft>
+              <a:buNone/>
+            </a:pPr>
+            <a:r>
+              <a:rPr lang="en-US" sz="1300" dirty="0">
+                <a:solidFill>
+                  <a:srgbClr val="4A5568"/>
+                </a:solidFill>
+                <a:latin typeface="Noto Sans KR" pitchFamily="34" charset="0"/>
+                <a:ea typeface="Noto Sans KR" pitchFamily="34" charset="-122"/>
+                <a:cs typeface="Noto Sans KR" pitchFamily="34" charset="-120"/>
+              </a:rPr>
+              <a:t>⭐ 본인 회사 데이터로 시도해본 결과</a:t>
+            </a:r>
+            <a:endParaRPr lang="en-US" sz="1300" dirty="0"/>
+          </a:p>
+        </p:txBody>
+      </p:sp>
+      <p:sp>
+        <p:nvSpPr>
+          <p:cNvPr id="13" name="Text 11"/>
+          <p:cNvSpPr/>
+          <p:nvPr/>
+        </p:nvSpPr>
+        <p:spPr>
+          <a:xfrm>
+            <a:off x="10972800" y="6446520"/>
+            <a:ext cx="1005840" cy="256032"/>
+          </a:xfrm>
+          <a:prstGeom prst="rect">
+            <a:avLst/>
+          </a:prstGeom>
+          <a:noFill/>
+          <a:ln/>
+        </p:spPr>
+        <p:txBody>
+          <a:bodyPr wrap="square" rtlCol="0" anchor="ctr"/>
+          <a:lstStyle/>
+          <a:p>
+            <a:pPr algn="r" indent="0" marL="0">
+              <a:buNone/>
+            </a:pPr>
+            <a:r>
+              <a:rPr lang="en-US" sz="900" dirty="0">
+                <a:solidFill>
+                  <a:srgbClr val="718096"/>
+                </a:solidFill>
+                <a:latin typeface="Noto Sans KR" pitchFamily="34" charset="0"/>
+                <a:ea typeface="Noto Sans KR" pitchFamily="34" charset="-122"/>
+                <a:cs typeface="Noto Sans KR" pitchFamily="34" charset="-120"/>
+              </a:rPr>
+              <a:t>30 / 31</a:t>
+            </a:r>
+            <a:endParaRPr lang="en-US" sz="900" dirty="0"/>
+          </a:p>
+        </p:txBody>
+      </p:sp>
+    </p:spTree>
+  </p:cSld>
+  <p:clrMapOvr>
+    <a:masterClrMapping/>
+  </p:clrMapOvr>
+</p:sld>
+</file>
+
+<file path=ppt/slides/slide31.xml><?xml version="1.0" encoding="utf-8"?>
+<p:sld xmlns:a="http://schemas.openxmlformats.org/drawingml/2006/main" xmlns:r="http://schemas.openxmlformats.org/officeDocument/2006/relationships" xmlns:p="http://schemas.openxmlformats.org/presentationml/2006/main">
+  <p:cSld name="Slide 31">
+    <p:spTree>
+      <p:nvGrpSpPr>
+        <p:cNvPr id="1" name=""/>
+        <p:cNvGrpSpPr/>
+        <p:nvPr/>
+      </p:nvGrpSpPr>
+      <p:grpSpPr>
+        <a:xfrm>
+          <a:off x="0" y="0"/>
+          <a:ext cx="0" cy="0"/>
+          <a:chOff x="0" y="0"/>
+          <a:chExt cx="0" cy="0"/>
+        </a:xfrm>
+      </p:grpSpPr>
+      <p:sp>
+        <p:nvSpPr>
+          <p:cNvPr id="2" name="Shape 0"/>
+          <p:cNvSpPr/>
+          <p:nvPr/>
+        </p:nvSpPr>
+        <p:spPr>
+          <a:xfrm>
+            <a:off x="0" y="0"/>
+            <a:ext cx="12192000" cy="6858000"/>
+          </a:xfrm>
+          <a:prstGeom prst="rect">
+            <a:avLst/>
+          </a:prstGeom>
+          <a:solidFill>
+            <a:srgbClr val="1A1F36"/>
+          </a:solidFill>
+          <a:ln/>
+        </p:spPr>
+      </p:sp>
+      <p:sp>
+        <p:nvSpPr>
+          <p:cNvPr id="3" name="Shape 1"/>
+          <p:cNvSpPr/>
+          <p:nvPr/>
+        </p:nvSpPr>
+        <p:spPr>
+          <a:xfrm>
+            <a:off x="0" y="0"/>
+            <a:ext cx="12192000" cy="548640"/>
+          </a:xfrm>
+          <a:prstGeom prst="rect">
+            <a:avLst/>
+          </a:prstGeom>
+          <a:solidFill>
+            <a:srgbClr val="4A7BF7"/>
+          </a:solidFill>
+          <a:ln/>
+        </p:spPr>
+      </p:sp>
+      <p:sp>
+        <p:nvSpPr>
+          <p:cNvPr id="4" name="Text 2"/>
+          <p:cNvSpPr/>
+          <p:nvPr/>
+        </p:nvSpPr>
+        <p:spPr>
+          <a:xfrm>
+            <a:off x="731520" y="1645920"/>
+            <a:ext cx="10515600" cy="457200"/>
+          </a:xfrm>
+          <a:prstGeom prst="rect">
+            <a:avLst/>
+          </a:prstGeom>
+          <a:noFill/>
+          <a:ln/>
+        </p:spPr>
+        <p:txBody>
+          <a:bodyPr wrap="square" rtlCol="0" anchor="ctr"/>
+          <a:lstStyle/>
+          <a:p>
+            <a:pPr indent="0" marL="0">
+              <a:buNone/>
+            </a:pPr>
+            <a:r>
+              <a:rPr lang="en-US" sz="1400" b="1" spc="250" kern="0" dirty="0">
+                <a:solidFill>
+                  <a:srgbClr val="4A7BF7"/>
+                </a:solidFill>
+                <a:latin typeface="Noto Sans KR" pitchFamily="34" charset="0"/>
+                <a:ea typeface="Noto Sans KR" pitchFamily="34" charset="-122"/>
+                <a:cs typeface="Noto Sans KR" pitchFamily="34" charset="-120"/>
+              </a:rPr>
+              <a:t>다음 회차 사전 안내</a:t>
+            </a:r>
+            <a:endParaRPr lang="en-US" sz="1400" dirty="0"/>
+          </a:p>
+        </p:txBody>
+      </p:sp>
+      <p:sp>
+        <p:nvSpPr>
+          <p:cNvPr id="5" name="Text 3"/>
+          <p:cNvSpPr/>
+          <p:nvPr/>
+        </p:nvSpPr>
+        <p:spPr>
+          <a:xfrm>
+            <a:off x="731520" y="2194560"/>
+            <a:ext cx="10515600" cy="1371600"/>
+          </a:xfrm>
+          <a:prstGeom prst="rect">
+            <a:avLst/>
+          </a:prstGeom>
+          <a:noFill/>
+          <a:ln/>
+        </p:spPr>
+        <p:txBody>
+          <a:bodyPr wrap="square" rtlCol="0" anchor="ctr"/>
+          <a:lstStyle/>
+          <a:p>
+            <a:pPr indent="0" marL="0">
+              <a:lnSpc>
+                <a:spcPct val="115000"/>
+              </a:lnSpc>
+              <a:buNone/>
+            </a:pPr>
+            <a:r>
+              <a:rPr lang="en-US" sz="3800" b="1" spc="-50" kern="0" dirty="0">
+                <a:solidFill>
+                  <a:srgbClr val="FFFFFF"/>
+                </a:solidFill>
+                <a:latin typeface="Noto Sans KR" pitchFamily="34" charset="0"/>
+                <a:ea typeface="Noto Sans KR" pitchFamily="34" charset="-122"/>
+                <a:cs typeface="Noto Sans KR" pitchFamily="34" charset="-120"/>
+              </a:rPr>
+              <a:t>Day 2 — EDA + 결합 데이터</a:t>
+            </a:r>
+            <a:endParaRPr lang="en-US" sz="3800" dirty="0"/>
+          </a:p>
+        </p:txBody>
+      </p:sp>
+      <p:sp>
+        <p:nvSpPr>
+          <p:cNvPr id="6" name="Text 4"/>
+          <p:cNvSpPr/>
+          <p:nvPr/>
+        </p:nvSpPr>
+        <p:spPr>
+          <a:xfrm>
+            <a:off x="731520" y="4114800"/>
+            <a:ext cx="10515600" cy="1828800"/>
+          </a:xfrm>
+          <a:prstGeom prst="rect">
+            <a:avLst/>
+          </a:prstGeom>
+          <a:noFill/>
+          <a:ln/>
+        </p:spPr>
+        <p:txBody>
+          <a:bodyPr wrap="square" rtlCol="0" anchor="ctr"/>
+          <a:lstStyle/>
+          <a:p>
+            <a:pPr indent="0" marL="0">
+              <a:lnSpc>
+                <a:spcPct val="170000"/>
+              </a:lnSpc>
+              <a:buNone/>
+            </a:pPr>
+            <a:r>
+              <a:rPr lang="en-US" sz="1500" dirty="0">
+                <a:solidFill>
+                  <a:srgbClr val="A0AEC0"/>
+                </a:solidFill>
+                <a:latin typeface="Noto Sans KR" pitchFamily="34" charset="0"/>
+                <a:ea typeface="Noto Sans KR" pitchFamily="34" charset="-122"/>
+                <a:cs typeface="Noto Sans KR" pitchFamily="34" charset="-120"/>
+              </a:rPr>
+              <a:t>· 분석 질문을 잔뜩 던지고, 답 가능한 것부터 풀기</a:t>
+            </a:r>
+            <a:endParaRPr lang="en-US" sz="1500" dirty="0"/>
+          </a:p>
+          <a:p>
+            <a:pPr indent="0" marL="0">
+              <a:lnSpc>
+                <a:spcPct val="170000"/>
+              </a:lnSpc>
+              <a:buNone/>
+            </a:pPr>
+            <a:r>
+              <a:rPr lang="en-US" sz="1500" dirty="0">
+                <a:solidFill>
+                  <a:srgbClr val="A0AEC0"/>
+                </a:solidFill>
+                <a:latin typeface="Noto Sans KR" pitchFamily="34" charset="0"/>
+                <a:ea typeface="Noto Sans KR" pitchFamily="34" charset="-122"/>
+                <a:cs typeface="Noto Sans KR" pitchFamily="34" charset="-120"/>
+              </a:rPr>
+              <a:t>· 단독 분석으로 부족하면 결합 (따릉이·지하철·날씨·언급량·쇼핑)</a:t>
+            </a:r>
+            <a:endParaRPr lang="en-US" sz="1500" dirty="0"/>
+          </a:p>
+          <a:p>
+            <a:pPr indent="0" marL="0">
+              <a:lnSpc>
+                <a:spcPct val="170000"/>
+              </a:lnSpc>
+              <a:buNone/>
+            </a:pPr>
+            <a:r>
+              <a:rPr lang="en-US" sz="1500" dirty="0">
+                <a:solidFill>
+                  <a:srgbClr val="A0AEC0"/>
+                </a:solidFill>
+                <a:latin typeface="Noto Sans KR" pitchFamily="34" charset="0"/>
+                <a:ea typeface="Noto Sans KR" pitchFamily="34" charset="-122"/>
+                <a:cs typeface="Noto Sans KR" pitchFamily="34" charset="-120"/>
+              </a:rPr>
+              <a:t>· Colab에서 코드 직접 만지기</a:t>
+            </a:r>
+            <a:endParaRPr lang="en-US" sz="1500" dirty="0"/>
+          </a:p>
+          <a:p>
+            <a:pPr indent="0" marL="0">
+              <a:lnSpc>
+                <a:spcPct val="170000"/>
+              </a:lnSpc>
+              <a:buNone/>
+            </a:pPr>
+            <a:r>
+              <a:rPr lang="en-US" sz="1500" dirty="0">
+                <a:solidFill>
+                  <a:srgbClr val="A0AEC0"/>
+                </a:solidFill>
+                <a:latin typeface="Noto Sans KR" pitchFamily="34" charset="0"/>
+                <a:ea typeface="Noto Sans KR" pitchFamily="34" charset="-122"/>
+                <a:cs typeface="Noto Sans KR" pitchFamily="34" charset="-120"/>
+              </a:rPr>
+              <a:t>· 오늘 만든 CLAUDE.md는 그대로 두고, 새 규칙은 자연어로 누적합니다</a:t>
+            </a:r>
+            <a:endParaRPr lang="en-US" sz="1500" dirty="0"/>
+          </a:p>
+        </p:txBody>
+      </p:sp>
+      <p:sp>
+        <p:nvSpPr>
+          <p:cNvPr id="7" name="Text 5"/>
+          <p:cNvSpPr/>
+          <p:nvPr/>
+        </p:nvSpPr>
+        <p:spPr>
+          <a:xfrm>
+            <a:off x="10972800" y="6446520"/>
+            <a:ext cx="1005840" cy="256032"/>
+          </a:xfrm>
+          <a:prstGeom prst="rect">
+            <a:avLst/>
+          </a:prstGeom>
+          <a:noFill/>
+          <a:ln/>
+        </p:spPr>
+        <p:txBody>
+          <a:bodyPr wrap="square" rtlCol="0" anchor="ctr"/>
+          <a:lstStyle/>
+          <a:p>
+            <a:pPr algn="r" indent="0" marL="0">
+              <a:buNone/>
+            </a:pPr>
+            <a:r>
+              <a:rPr lang="en-US" sz="900" dirty="0">
+                <a:solidFill>
+                  <a:srgbClr val="718096"/>
+                </a:solidFill>
+                <a:latin typeface="Noto Sans KR" pitchFamily="34" charset="0"/>
+                <a:ea typeface="Noto Sans KR" pitchFamily="34" charset="-122"/>
+                <a:cs typeface="Noto Sans KR" pitchFamily="34" charset="-120"/>
+              </a:rPr>
+              <a:t>31 / 31</a:t>
             </a:r>
             <a:endParaRPr lang="en-US" sz="900" dirty="0"/>
           </a:p>
@@ -12740,7 +14126,7 @@
                 <a:ea typeface="Noto Sans KR" pitchFamily="34" charset="-122"/>
                 <a:cs typeface="Noto Sans KR" pitchFamily="34" charset="-120"/>
               </a:rPr>
-              <a:t>4 / 28</a:t>
+              <a:t>4 / 31</a:t>
             </a:r>
             <a:endParaRPr lang="en-US" sz="900" dirty="0"/>
           </a:p>
@@ -13010,7 +14396,7 @@
                 <a:ea typeface="Noto Sans KR" pitchFamily="34" charset="-122"/>
                 <a:cs typeface="Noto Sans KR" pitchFamily="34" charset="-120"/>
               </a:rPr>
-              <a:t>· 한 데이터(서울 미세먼지)로 4회차를 끝까지 끌고 갑니다</a:t>
+              <a:t>· 서울 미세먼지로 4회차를 끝까지 끌고 갑니다. (+추가 결합 데이터)</a:t>
             </a:r>
             <a:endParaRPr lang="en-US" sz="1700" dirty="0"/>
           </a:p>
@@ -13049,7 +14435,7 @@
                 <a:ea typeface="Noto Sans KR" pitchFamily="34" charset="-122"/>
                 <a:cs typeface="Noto Sans KR" pitchFamily="34" charset="-120"/>
               </a:rPr>
-              <a:t>5 / 28</a:t>
+              <a:t>5 / 31</a:t>
             </a:r>
             <a:endParaRPr lang="en-US" sz="900" dirty="0"/>
           </a:p>
@@ -13214,7 +14600,7 @@
                 <a:ea typeface="Noto Sans KR" pitchFamily="34" charset="-122"/>
                 <a:cs typeface="Noto Sans KR" pitchFamily="34" charset="-120"/>
               </a:rPr>
-              <a:t>자료·제출 동선</a:t>
+              <a:t>자료 수집·미션 제출 방법</a:t>
             </a:r>
             <a:endParaRPr lang="en-US" sz="4200" dirty="0"/>
           </a:p>
@@ -13279,7 +14665,7 @@
                 <a:ea typeface="Noto Sans KR" pitchFamily="34" charset="-122"/>
                 <a:cs typeface="Noto Sans KR" pitchFamily="34" charset="-120"/>
               </a:rPr>
-              <a:t>· 데이터 (원칙): 출처에서 직접 다운로드 — 분석가의 일이니까</a:t>
+              <a:t>· 데이터 : 출처에서 직접 다운로드</a:t>
             </a:r>
             <a:endParaRPr lang="en-US" sz="1700" dirty="0"/>
           </a:p>
@@ -13299,7 +14685,7 @@
                 <a:ea typeface="Noto Sans KR" pitchFamily="34" charset="-122"/>
                 <a:cs typeface="Noto Sans KR" pitchFamily="34" charset="-120"/>
               </a:rPr>
-              <a:t>  미세먼지·따릉이·지하철 → 서울 열린데이터광장</a:t>
+              <a:t>  - 미세먼지·따릉이·지하철 → 서울 열린데이터광장</a:t>
             </a:r>
             <a:endParaRPr lang="en-US" sz="1700" dirty="0"/>
           </a:p>
@@ -13319,7 +14705,7 @@
                 <a:ea typeface="Noto Sans KR" pitchFamily="34" charset="-122"/>
                 <a:cs typeface="Noto Sans KR" pitchFamily="34" charset="-120"/>
               </a:rPr>
-              <a:t>  날씨 → 기상자료개방포털  ·  검색량 → 네이버 데이터랩·구글 트렌드</a:t>
+              <a:t>  - 날씨 → 기상자료개방포털  ·  검색량 → 네이버 데이터랩·구글 트렌드</a:t>
             </a:r>
             <a:endParaRPr lang="en-US" sz="1700" dirty="0"/>
           </a:p>
@@ -13363,26 +14749,6 @@
             </a:r>
             <a:endParaRPr lang="en-US" sz="1700" dirty="0"/>
           </a:p>
-          <a:p>
-            <a:pPr indent="0" marL="0">
-              <a:lnSpc>
-                <a:spcPct val="155000"/>
-              </a:lnSpc>
-              <a:buNone/>
-            </a:pPr>
-            <a:r>
-              <a:rPr lang="en-US" sz="1700" dirty="0">
-                <a:solidFill>
-                  <a:srgbClr val="4A5568"/>
-                </a:solidFill>
-                <a:latin typeface="Noto Sans KR" pitchFamily="34" charset="0"/>
-                <a:ea typeface="Noto Sans KR" pitchFamily="34" charset="-122"/>
-                <a:cs typeface="Noto Sans KR" pitchFamily="34" charset="-120"/>
-              </a:rPr>
-              <a:t>· 받기 정말 어려운 분만 운영 채널로 강사에게 요청</a:t>
-            </a:r>
-            <a:endParaRPr lang="en-US" sz="1700" dirty="0"/>
-          </a:p>
         </p:txBody>
       </p:sp>
       <p:sp>
@@ -13418,7 +14784,7 @@
                 <a:ea typeface="Noto Sans KR" pitchFamily="34" charset="-122"/>
                 <a:cs typeface="Noto Sans KR" pitchFamily="34" charset="-120"/>
               </a:rPr>
-              <a:t>6 / 28</a:t>
+              <a:t>6 / 31</a:t>
             </a:r>
             <a:endParaRPr lang="en-US" sz="900" dirty="0"/>
           </a:p>
@@ -13747,7 +15113,7 @@
                 <a:ea typeface="Noto Sans KR" pitchFamily="34" charset="-122"/>
                 <a:cs typeface="Noto Sans KR" pitchFamily="34" charset="-120"/>
               </a:rPr>
-              <a:t>7 / 28</a:t>
+              <a:t>7 / 31</a:t>
             </a:r>
             <a:endParaRPr lang="en-US" sz="900" dirty="0"/>
           </a:p>
@@ -14056,7 +15422,7 @@
                 <a:ea typeface="Noto Sans KR" pitchFamily="34" charset="-122"/>
                 <a:cs typeface="Noto Sans KR" pitchFamily="34" charset="-120"/>
               </a:rPr>
-              <a:t>8 / 28</a:t>
+              <a:t>8 / 31</a:t>
             </a:r>
             <a:endParaRPr lang="en-US" sz="900" dirty="0"/>
           </a:p>
@@ -14179,7 +15545,7 @@
                 <a:ea typeface="Noto Sans KR" pitchFamily="34" charset="-122"/>
                 <a:cs typeface="Noto Sans KR" pitchFamily="34" charset="-120"/>
               </a:rPr>
-              <a:t>💬 함께 볼 시연 프롬프트 — 따라 치지 않으셔도 됩니다</a:t>
+              <a:t>💬 함께 볼 시연 프롬프트 — 안 따라쳐도 OK (보기만 해도 됩니다)</a:t>
             </a:r>
             <a:endParaRPr lang="en-US" sz="1100" dirty="0"/>
           </a:p>
@@ -14392,7 +15758,7 @@
                 <a:ea typeface="Noto Sans KR" pitchFamily="34" charset="-122"/>
                 <a:cs typeface="Noto Sans KR" pitchFamily="34" charset="-120"/>
               </a:rPr>
-              <a:t>9 / 28</a:t>
+              <a:t>9 / 31</a:t>
             </a:r>
             <a:endParaRPr lang="en-US" sz="900" dirty="0"/>
           </a:p>

--- a/ppt/b2g_day1_setup.pptx
+++ b/ppt/b2g_day1_setup.pptx
@@ -36,9 +36,12 @@
     <p:sldId id="284" r:id="rId30"/>
     <p:sldId id="285" r:id="rId31"/>
     <p:sldId id="286" r:id="rId32"/>
+    <p:sldId id="287" r:id="rId33"/>
+    <p:sldId id="288" r:id="rId34"/>
+    <p:sldId id="289" r:id="rId35"/>
   </p:sldIdLst>
   <p:notesMasterIdLst>
-    <p:notesMasterId r:id="rId33"/>
+    <p:notesMasterId r:id="rId36"/>
   </p:notesMasterIdLst>
   <p:sldSz cx="12192000" cy="6858000"/>
   <p:notesSz cx="6858000" cy="12192000"/>
@@ -2668,6 +2671,270 @@
             <a:fld id="{F7021451-1387-4CA6-816F-3879F97B5CBC}" type="slidenum">
               <a:rPr lang="en-US"/>
               <a:t>31</a:t>
+            </a:fld>
+            <a:endParaRPr lang="en-US"/>
+          </a:p>
+        </p:txBody>
+      </p:sp>
+    </p:spTree>
+    <p:extLst>
+      <p:ext uri="{BB962C8B-B14F-4D97-AF65-F5344CB8AC3E}">
+        <p14:creationId xmlns:p14="http://schemas.microsoft.com/office/powerpoint/2010/main" val="1024086991"/>
+      </p:ext>
+    </p:extLst>
+  </p:cSld>
+  <p:clrMapOvr>
+    <a:masterClrMapping/>
+  </p:clrMapOvr>
+</p:notes>
+</file>
+
+<file path=ppt/notesSlides/notesSlide32.xml><?xml version="1.0" encoding="utf-8"?>
+<p:notes xmlns:a="http://schemas.openxmlformats.org/drawingml/2006/main" xmlns:r="http://schemas.openxmlformats.org/officeDocument/2006/relationships" xmlns:p="http://schemas.openxmlformats.org/presentationml/2006/main">
+  <p:cSld>
+    <p:spTree>
+      <p:nvGrpSpPr>
+        <p:cNvPr id="1" name=""/>
+        <p:cNvGrpSpPr/>
+        <p:nvPr/>
+      </p:nvGrpSpPr>
+      <p:grpSpPr>
+        <a:xfrm>
+          <a:off x="0" y="0"/>
+          <a:ext cx="0" cy="0"/>
+          <a:chOff x="0" y="0"/>
+          <a:chExt cx="0" cy="0"/>
+        </a:xfrm>
+      </p:grpSpPr>
+      <p:sp>
+        <p:nvSpPr>
+          <p:cNvPr id="2" name="Slide Image Placeholder 1"/>
+          <p:cNvSpPr>
+            <a:spLocks noGrp="1" noRot="1" noChangeAspect="1"/>
+          </p:cNvSpPr>
+          <p:nvPr>
+            <p:ph type="sldImg"/>
+          </p:nvPr>
+        </p:nvSpPr>
+        <p:spPr/>
+      </p:sp>
+      <p:sp>
+        <p:nvSpPr>
+          <p:cNvPr id="3" name="Notes Placeholder 2"/>
+          <p:cNvSpPr>
+            <a:spLocks noGrp="1"/>
+          </p:cNvSpPr>
+          <p:nvPr>
+            <p:ph type="body" idx="1"/>
+          </p:nvPr>
+        </p:nvSpPr>
+        <p:spPr/>
+        <p:txBody>
+          <a:bodyPr/>
+          <a:lstStyle/>
+          <a:p>
+            <a:r>
+              <a:rPr lang="en-US" dirty="0"/>
+              <a:t/>
+            </a:r>
+            <a:endParaRPr lang="en-US" dirty="0"/>
+          </a:p>
+        </p:txBody>
+      </p:sp>
+      <p:sp>
+        <p:nvSpPr>
+          <p:cNvPr id="4" name="Slide Number Placeholder 3"/>
+          <p:cNvSpPr>
+            <a:spLocks noGrp="1"/>
+          </p:cNvSpPr>
+          <p:nvPr>
+            <p:ph type="sldNum" sz="quarter" idx="10"/>
+          </p:nvPr>
+        </p:nvSpPr>
+        <p:spPr/>
+        <p:txBody>
+          <a:bodyPr/>
+          <a:lstStyle/>
+          <a:p>
+            <a:fld id="{F7021451-1387-4CA6-816F-3879F97B5CBC}" type="slidenum">
+              <a:rPr lang="en-US"/>
+              <a:t>32</a:t>
+            </a:fld>
+            <a:endParaRPr lang="en-US"/>
+          </a:p>
+        </p:txBody>
+      </p:sp>
+    </p:spTree>
+    <p:extLst>
+      <p:ext uri="{BB962C8B-B14F-4D97-AF65-F5344CB8AC3E}">
+        <p14:creationId xmlns:p14="http://schemas.microsoft.com/office/powerpoint/2010/main" val="1024086991"/>
+      </p:ext>
+    </p:extLst>
+  </p:cSld>
+  <p:clrMapOvr>
+    <a:masterClrMapping/>
+  </p:clrMapOvr>
+</p:notes>
+</file>
+
+<file path=ppt/notesSlides/notesSlide33.xml><?xml version="1.0" encoding="utf-8"?>
+<p:notes xmlns:a="http://schemas.openxmlformats.org/drawingml/2006/main" xmlns:r="http://schemas.openxmlformats.org/officeDocument/2006/relationships" xmlns:p="http://schemas.openxmlformats.org/presentationml/2006/main">
+  <p:cSld>
+    <p:spTree>
+      <p:nvGrpSpPr>
+        <p:cNvPr id="1" name=""/>
+        <p:cNvGrpSpPr/>
+        <p:nvPr/>
+      </p:nvGrpSpPr>
+      <p:grpSpPr>
+        <a:xfrm>
+          <a:off x="0" y="0"/>
+          <a:ext cx="0" cy="0"/>
+          <a:chOff x="0" y="0"/>
+          <a:chExt cx="0" cy="0"/>
+        </a:xfrm>
+      </p:grpSpPr>
+      <p:sp>
+        <p:nvSpPr>
+          <p:cNvPr id="2" name="Slide Image Placeholder 1"/>
+          <p:cNvSpPr>
+            <a:spLocks noGrp="1" noRot="1" noChangeAspect="1"/>
+          </p:cNvSpPr>
+          <p:nvPr>
+            <p:ph type="sldImg"/>
+          </p:nvPr>
+        </p:nvSpPr>
+        <p:spPr/>
+      </p:sp>
+      <p:sp>
+        <p:nvSpPr>
+          <p:cNvPr id="3" name="Notes Placeholder 2"/>
+          <p:cNvSpPr>
+            <a:spLocks noGrp="1"/>
+          </p:cNvSpPr>
+          <p:nvPr>
+            <p:ph type="body" idx="1"/>
+          </p:nvPr>
+        </p:nvSpPr>
+        <p:spPr/>
+        <p:txBody>
+          <a:bodyPr/>
+          <a:lstStyle/>
+          <a:p>
+            <a:r>
+              <a:rPr lang="en-US" dirty="0"/>
+              <a:t/>
+            </a:r>
+            <a:endParaRPr lang="en-US" dirty="0"/>
+          </a:p>
+        </p:txBody>
+      </p:sp>
+      <p:sp>
+        <p:nvSpPr>
+          <p:cNvPr id="4" name="Slide Number Placeholder 3"/>
+          <p:cNvSpPr>
+            <a:spLocks noGrp="1"/>
+          </p:cNvSpPr>
+          <p:nvPr>
+            <p:ph type="sldNum" sz="quarter" idx="10"/>
+          </p:nvPr>
+        </p:nvSpPr>
+        <p:spPr/>
+        <p:txBody>
+          <a:bodyPr/>
+          <a:lstStyle/>
+          <a:p>
+            <a:fld id="{F7021451-1387-4CA6-816F-3879F97B5CBC}" type="slidenum">
+              <a:rPr lang="en-US"/>
+              <a:t>33</a:t>
+            </a:fld>
+            <a:endParaRPr lang="en-US"/>
+          </a:p>
+        </p:txBody>
+      </p:sp>
+    </p:spTree>
+    <p:extLst>
+      <p:ext uri="{BB962C8B-B14F-4D97-AF65-F5344CB8AC3E}">
+        <p14:creationId xmlns:p14="http://schemas.microsoft.com/office/powerpoint/2010/main" val="1024086991"/>
+      </p:ext>
+    </p:extLst>
+  </p:cSld>
+  <p:clrMapOvr>
+    <a:masterClrMapping/>
+  </p:clrMapOvr>
+</p:notes>
+</file>
+
+<file path=ppt/notesSlides/notesSlide34.xml><?xml version="1.0" encoding="utf-8"?>
+<p:notes xmlns:a="http://schemas.openxmlformats.org/drawingml/2006/main" xmlns:r="http://schemas.openxmlformats.org/officeDocument/2006/relationships" xmlns:p="http://schemas.openxmlformats.org/presentationml/2006/main">
+  <p:cSld>
+    <p:spTree>
+      <p:nvGrpSpPr>
+        <p:cNvPr id="1" name=""/>
+        <p:cNvGrpSpPr/>
+        <p:nvPr/>
+      </p:nvGrpSpPr>
+      <p:grpSpPr>
+        <a:xfrm>
+          <a:off x="0" y="0"/>
+          <a:ext cx="0" cy="0"/>
+          <a:chOff x="0" y="0"/>
+          <a:chExt cx="0" cy="0"/>
+        </a:xfrm>
+      </p:grpSpPr>
+      <p:sp>
+        <p:nvSpPr>
+          <p:cNvPr id="2" name="Slide Image Placeholder 1"/>
+          <p:cNvSpPr>
+            <a:spLocks noGrp="1" noRot="1" noChangeAspect="1"/>
+          </p:cNvSpPr>
+          <p:nvPr>
+            <p:ph type="sldImg"/>
+          </p:nvPr>
+        </p:nvSpPr>
+        <p:spPr/>
+      </p:sp>
+      <p:sp>
+        <p:nvSpPr>
+          <p:cNvPr id="3" name="Notes Placeholder 2"/>
+          <p:cNvSpPr>
+            <a:spLocks noGrp="1"/>
+          </p:cNvSpPr>
+          <p:nvPr>
+            <p:ph type="body" idx="1"/>
+          </p:nvPr>
+        </p:nvSpPr>
+        <p:spPr/>
+        <p:txBody>
+          <a:bodyPr/>
+          <a:lstStyle/>
+          <a:p>
+            <a:r>
+              <a:rPr lang="en-US" dirty="0"/>
+              <a:t/>
+            </a:r>
+            <a:endParaRPr lang="en-US" dirty="0"/>
+          </a:p>
+        </p:txBody>
+      </p:sp>
+      <p:sp>
+        <p:nvSpPr>
+          <p:cNvPr id="4" name="Slide Number Placeholder 3"/>
+          <p:cNvSpPr>
+            <a:spLocks noGrp="1"/>
+          </p:cNvSpPr>
+          <p:nvPr>
+            <p:ph type="sldNum" sz="quarter" idx="10"/>
+          </p:nvPr>
+        </p:nvSpPr>
+        <p:spPr/>
+        <p:txBody>
+          <a:bodyPr/>
+          <a:lstStyle/>
+          <a:p>
+            <a:fld id="{F7021451-1387-4CA6-816F-3879F97B5CBC}" type="slidenum">
+              <a:rPr lang="en-US"/>
+              <a:t>34</a:t>
             </a:fld>
             <a:endParaRPr lang="en-US"/>
           </a:p>
@@ -3936,7 +4203,7 @@
                 <a:ea typeface="Noto Sans KR" pitchFamily="34" charset="-122"/>
                 <a:cs typeface="Noto Sans KR" pitchFamily="34" charset="-120"/>
               </a:rPr>
-              <a:t>DAY 1 · BEFORE/AFTER DEMO</a:t>
+              <a:t>파트 1. 오프닝 + Before/After 시연</a:t>
             </a:r>
             <a:endParaRPr lang="en-US" sz="1400" dirty="0"/>
           </a:p>
@@ -3951,7 +4218,7 @@
         <p:spPr>
           <a:xfrm>
             <a:off x="548640" y="960120"/>
-            <a:ext cx="10515600" cy="292608"/>
+            <a:ext cx="11091672" cy="292608"/>
           </a:xfrm>
           <a:prstGeom prst="rect">
             <a:avLst/>
@@ -3967,7 +4234,7 @@
               <a:buNone/>
             </a:pPr>
             <a:r>
-              <a:rPr lang="en-US" sz="1100" b="1" spc="150" kern="0" dirty="0">
+              <a:rPr lang="en-US" sz="1100" b="1" spc="50" kern="0" dirty="0">
                 <a:solidFill>
                   <a:srgbClr val="4A7BF7"/>
                 </a:solidFill>
@@ -3975,7 +4242,7 @@
                 <a:ea typeface="Noto Sans KR" pitchFamily="34" charset="-122"/>
                 <a:cs typeface="Noto Sans KR" pitchFamily="34" charset="-120"/>
               </a:rPr>
-              <a:t>오늘 만든 결과물</a:t>
+              <a:t>💬 함께 볼 시연 프롬프트 — 안 따라쳐도 OK (보기만 해도 됩니다)</a:t>
             </a:r>
             <a:endParaRPr lang="en-US" sz="1100" dirty="0"/>
           </a:p>
@@ -3989,8 +4256,8 @@
         </p:nvSpPr>
         <p:spPr>
           <a:xfrm>
-            <a:off x="548640" y="1417320"/>
-            <a:ext cx="11091672" cy="640080"/>
+            <a:off x="548640" y="1508760"/>
+            <a:ext cx="11091672" cy="1005840"/>
           </a:xfrm>
           <a:prstGeom prst="rect">
             <a:avLst/>
@@ -4003,10 +4270,13 @@
           <a:lstStyle/>
           <a:p>
             <a:pPr indent="0" marL="0">
-              <a:buNone/>
-            </a:pPr>
-            <a:r>
-              <a:rPr lang="en-US" sz="2800" b="1" spc="-30" kern="0" dirty="0">
+              <a:lnSpc>
+                <a:spcPct val="115000"/>
+              </a:lnSpc>
+              <a:buNone/>
+            </a:pPr>
+            <a:r>
+              <a:rPr lang="en-US" sz="3400" b="1" spc="-50" kern="0" dirty="0">
                 <a:solidFill>
                   <a:srgbClr val="1A1F36"/>
                 </a:solidFill>
@@ -4014,77 +4284,147 @@
                 <a:ea typeface="Noto Sans KR" pitchFamily="34" charset="-122"/>
                 <a:cs typeface="Noto Sans KR" pitchFamily="34" charset="-120"/>
               </a:rPr>
-              <a:t>시연 결과 — "한 문장으로 5분이면 끝"</a:t>
-            </a:r>
-            <a:endParaRPr lang="en-US" sz="2800" dirty="0"/>
-          </a:p>
-        </p:txBody>
-      </p:sp>
-      <p:pic>
-        <p:nvPicPr>
-          <p:cNvPr id="6" name="Image 0" descr="/Users/sujinpark/b2b-lecture-note/20260512_inflearn_B2G_dataanalysis/assets/screenshots/day1/before_after_demo.png">    </p:cNvPr>
-          <p:cNvPicPr>
-            <a:picLocks noChangeAspect="1"/>
-          </p:cNvPicPr>
-          <p:nvPr/>
-        </p:nvPicPr>
-        <p:blipFill>
-          <a:blip r:embed="rId1"/>
-          <a:srcRect l="0" r="0" t="0" b="0"/>
-          <a:stretch/>
-        </p:blipFill>
-        <p:spPr>
-          <a:xfrm>
-            <a:off x="2194560" y="2240280"/>
-            <a:ext cx="7772400" cy="3657600"/>
-          </a:xfrm>
-          <a:prstGeom prst="rect">
-            <a:avLst/>
-          </a:prstGeom>
-        </p:spPr>
-      </p:pic>
-      <p:sp>
-        <p:nvSpPr>
-          <p:cNvPr id="7" name="Text 4"/>
-          <p:cNvSpPr/>
-          <p:nvPr/>
-        </p:nvSpPr>
-        <p:spPr>
-          <a:xfrm>
-            <a:off x="548640" y="5989320"/>
-            <a:ext cx="11091672" cy="411480"/>
-          </a:xfrm>
-          <a:prstGeom prst="rect">
-            <a:avLst/>
-          </a:prstGeom>
-          <a:noFill/>
-          <a:ln/>
-        </p:spPr>
-        <p:txBody>
-          <a:bodyPr wrap="square" rtlCol="0" anchor="ctr"/>
-          <a:lstStyle/>
-          <a:p>
-            <a:pPr algn="ctr" indent="0" marL="0">
-              <a:buNone/>
-            </a:pPr>
-            <a:r>
-              <a:rPr lang="en-US" sz="1200" i="1" dirty="0">
-                <a:solidFill>
-                  <a:srgbClr val="718096"/>
-                </a:solidFill>
-                <a:latin typeface="Noto Sans KR" pitchFamily="34" charset="0"/>
-                <a:ea typeface="Noto Sans KR" pitchFamily="34" charset="-122"/>
-                <a:cs typeface="Noto Sans KR" pitchFamily="34" charset="-120"/>
-              </a:rPr>
-              <a:t>자치구별 PM2.5 연평균 2024 vs 2025 막대그래프</a:t>
-            </a:r>
-            <a:endParaRPr lang="en-US" sz="1200" dirty="0"/>
-          </a:p>
-        </p:txBody>
-      </p:sp>
-      <p:sp>
-        <p:nvSpPr>
-          <p:cNvPr id="8" name="Text 5"/>
+              <a:t>두 해 통합 PM2.5 자치구별 비교를 한 문장으로</a:t>
+            </a:r>
+            <a:endParaRPr lang="en-US" sz="3400" dirty="0"/>
+          </a:p>
+        </p:txBody>
+      </p:sp>
+      <p:sp>
+        <p:nvSpPr>
+          <p:cNvPr id="6" name="Shape 4"/>
+          <p:cNvSpPr/>
+          <p:nvPr/>
+        </p:nvSpPr>
+        <p:spPr>
+          <a:xfrm>
+            <a:off x="548640" y="2606040"/>
+            <a:ext cx="1828800" cy="0"/>
+          </a:xfrm>
+          <a:prstGeom prst="line">
+            <a:avLst/>
+          </a:prstGeom>
+          <a:noFill/>
+          <a:ln w="25400">
+            <a:solidFill>
+              <a:srgbClr val="4A7BF7"/>
+            </a:solidFill>
+            <a:prstDash val="solid"/>
+          </a:ln>
+        </p:spPr>
+      </p:sp>
+      <p:sp>
+        <p:nvSpPr>
+          <p:cNvPr id="7" name="Shape 5"/>
+          <p:cNvSpPr/>
+          <p:nvPr/>
+        </p:nvSpPr>
+        <p:spPr>
+          <a:xfrm>
+            <a:off x="548640" y="2926080"/>
+            <a:ext cx="11091672" cy="3200400"/>
+          </a:xfrm>
+          <a:prstGeom prst="roundRect">
+            <a:avLst>
+              <a:gd name="adj" fmla="val 1714"/>
+            </a:avLst>
+          </a:prstGeom>
+          <a:solidFill>
+            <a:srgbClr val="F1F5F9"/>
+          </a:solidFill>
+          <a:ln w="6350">
+            <a:solidFill>
+              <a:srgbClr val="E2E8F0"/>
+            </a:solidFill>
+            <a:prstDash val="solid"/>
+          </a:ln>
+        </p:spPr>
+      </p:sp>
+      <p:sp>
+        <p:nvSpPr>
+          <p:cNvPr id="8" name="Text 6"/>
+          <p:cNvSpPr/>
+          <p:nvPr/>
+        </p:nvSpPr>
+        <p:spPr>
+          <a:xfrm>
+            <a:off x="713232" y="3035808"/>
+            <a:ext cx="10762488" cy="2980944"/>
+          </a:xfrm>
+          <a:prstGeom prst="rect">
+            <a:avLst/>
+          </a:prstGeom>
+          <a:noFill/>
+          <a:ln/>
+        </p:spPr>
+        <p:txBody>
+          <a:bodyPr wrap="square" rtlCol="0" anchor="t"/>
+          <a:lstStyle/>
+          <a:p>
+            <a:pPr indent="0" marL="0">
+              <a:lnSpc>
+                <a:spcPct val="140000"/>
+              </a:lnSpc>
+              <a:buNone/>
+            </a:pPr>
+            <a:r>
+              <a:rPr lang="en-US" sz="1150" dirty="0">
+                <a:solidFill>
+                  <a:srgbClr val="1A1F36"/>
+                </a:solidFill>
+                <a:latin typeface="Roboto Mono" pitchFamily="34" charset="0"/>
+                <a:ea typeface="Roboto Mono" pitchFamily="34" charset="-122"/>
+                <a:cs typeface="Roboto Mono" pitchFamily="34" charset="-120"/>
+              </a:rPr>
+              <a:t>이 폴더에 기간별_일평균_대기환경_정보_2024년.csv + 기간별_일평균_대기환경_정보_2025년.csv 있어.</a:t>
+            </a:r>
+            <a:endParaRPr lang="en-US" sz="1150" dirty="0"/>
+          </a:p>
+          <a:p>
+            <a:pPr indent="0" marL="0">
+              <a:lnSpc>
+                <a:spcPct val="140000"/>
+              </a:lnSpc>
+              <a:buNone/>
+            </a:pPr>
+            <a:r>
+              <a:rPr lang="en-US" sz="1150" dirty="0">
+                <a:solidFill>
+                  <a:srgbClr val="1A1F36"/>
+                </a:solidFill>
+                <a:latin typeface="Roboto Mono" pitchFamily="34" charset="0"/>
+                <a:ea typeface="Roboto Mono" pitchFamily="34" charset="-122"/>
+                <a:cs typeface="Roboto Mono" pitchFamily="34" charset="-120"/>
+              </a:rPr>
+              <a:t>두 파일 모두 인코딩은 CP949(EUC-KR 호환)야. 통합해서 자치구별 PM2.5 연평균을</a:t>
+            </a:r>
+            <a:endParaRPr lang="en-US" sz="1150" dirty="0"/>
+          </a:p>
+          <a:p>
+            <a:pPr indent="0" marL="0">
+              <a:lnSpc>
+                <a:spcPct val="140000"/>
+              </a:lnSpc>
+              <a:buNone/>
+            </a:pPr>
+            <a:r>
+              <a:rPr lang="en-US" sz="1150" dirty="0">
+                <a:solidFill>
+                  <a:srgbClr val="1A1F36"/>
+                </a:solidFill>
+                <a:latin typeface="Roboto Mono" pitchFamily="34" charset="0"/>
+                <a:ea typeface="Roboto Mono" pitchFamily="34" charset="-122"/>
+                <a:cs typeface="Roboto Mono" pitchFamily="34" charset="-120"/>
+              </a:rPr>
+              <a:t>2024 vs 2025 비교 막대그래프로, 한글 폰트 깨지지 않게 그려줘.</a:t>
+            </a:r>
+            <a:endParaRPr lang="en-US" sz="1150" dirty="0"/>
+          </a:p>
+        </p:txBody>
+      </p:sp>
+      <p:sp>
+        <p:nvSpPr>
+          <p:cNvPr id="9" name="Text 7"/>
           <p:cNvSpPr/>
           <p:nvPr/>
         </p:nvSpPr>
@@ -4115,7 +4455,7 @@
                 <a:ea typeface="Noto Sans KR" pitchFamily="34" charset="-122"/>
                 <a:cs typeface="Noto Sans KR" pitchFamily="34" charset="-120"/>
               </a:rPr>
-              <a:t>10 / 31</a:t>
+              <a:t>10 / 34</a:t>
             </a:r>
             <a:endParaRPr lang="en-US" sz="900" dirty="0"/>
           </a:p>
@@ -4199,7 +4539,7 @@
                 <a:ea typeface="Noto Sans KR" pitchFamily="34" charset="-122"/>
                 <a:cs typeface="Noto Sans KR" pitchFamily="34" charset="-120"/>
               </a:rPr>
-              <a:t>파트 1. 오프닝 + Before/After 시연</a:t>
+              <a:t>DAY 1 · BEFORE/AFTER DEMO</a:t>
             </a:r>
             <a:endParaRPr lang="en-US" sz="1400" dirty="0"/>
           </a:p>
@@ -4238,7 +4578,7 @@
                 <a:ea typeface="Noto Sans KR" pitchFamily="34" charset="-122"/>
                 <a:cs typeface="Noto Sans KR" pitchFamily="34" charset="-120"/>
               </a:rPr>
-              <a:t>섹션 5 / 5</a:t>
+              <a:t>오늘 만든 결과물</a:t>
             </a:r>
             <a:endParaRPr lang="en-US" sz="1100" dirty="0"/>
           </a:p>
@@ -4252,8 +4592,8 @@
         </p:nvSpPr>
         <p:spPr>
           <a:xfrm>
-            <a:off x="548640" y="1508760"/>
-            <a:ext cx="11091672" cy="1371600"/>
+            <a:off x="548640" y="1417320"/>
+            <a:ext cx="11091672" cy="640080"/>
           </a:xfrm>
           <a:prstGeom prst="rect">
             <a:avLst/>
@@ -4266,13 +4606,10 @@
           <a:lstStyle/>
           <a:p>
             <a:pPr indent="0" marL="0">
-              <a:lnSpc>
-                <a:spcPct val="110000"/>
-              </a:lnSpc>
-              <a:buNone/>
-            </a:pPr>
-            <a:r>
-              <a:rPr lang="en-US" sz="4200" b="1" spc="-50" kern="0" dirty="0">
+              <a:buNone/>
+            </a:pPr>
+            <a:r>
+              <a:rPr lang="en-US" sz="2800" b="1" spc="-30" kern="0" dirty="0">
                 <a:solidFill>
                   <a:srgbClr val="1A1F36"/>
                 </a:solidFill>
@@ -4280,140 +4617,77 @@
                 <a:ea typeface="Noto Sans KR" pitchFamily="34" charset="-122"/>
                 <a:cs typeface="Noto Sans KR" pitchFamily="34" charset="-120"/>
               </a:rPr>
-              <a:t>답 안 되는 질문도 분석가의 일</a:t>
-            </a:r>
-            <a:endParaRPr lang="en-US" sz="4200" dirty="0"/>
-          </a:p>
-        </p:txBody>
-      </p:sp>
-      <p:sp>
-        <p:nvSpPr>
-          <p:cNvPr id="6" name="Shape 4"/>
-          <p:cNvSpPr/>
-          <p:nvPr/>
-        </p:nvSpPr>
-        <p:spPr>
-          <a:xfrm>
-            <a:off x="548640" y="2971800"/>
-            <a:ext cx="1828800" cy="0"/>
-          </a:xfrm>
-          <a:prstGeom prst="line">
-            <a:avLst/>
-          </a:prstGeom>
-          <a:noFill/>
-          <a:ln w="25400">
-            <a:solidFill>
-              <a:srgbClr val="4A7BF7"/>
-            </a:solidFill>
-            <a:prstDash val="solid"/>
-          </a:ln>
-        </p:spPr>
-      </p:sp>
-      <p:sp>
-        <p:nvSpPr>
-          <p:cNvPr id="7" name="Text 5"/>
-          <p:cNvSpPr/>
-          <p:nvPr/>
-        </p:nvSpPr>
-        <p:spPr>
-          <a:xfrm>
-            <a:off x="548640" y="3200400"/>
-            <a:ext cx="11091672" cy="2788920"/>
-          </a:xfrm>
-          <a:prstGeom prst="rect">
-            <a:avLst/>
-          </a:prstGeom>
-          <a:noFill/>
-          <a:ln/>
-        </p:spPr>
-        <p:txBody>
-          <a:bodyPr wrap="square" rtlCol="0" anchor="t"/>
-          <a:lstStyle/>
-          <a:p>
-            <a:pPr indent="0" marL="0">
-              <a:lnSpc>
-                <a:spcPct val="155000"/>
-              </a:lnSpc>
-              <a:buNone/>
-            </a:pPr>
-            <a:r>
-              <a:rPr lang="en-US" sz="1700" dirty="0">
-                <a:solidFill>
-                  <a:srgbClr val="4A5568"/>
-                </a:solidFill>
-                <a:latin typeface="Noto Sans KR" pitchFamily="34" charset="0"/>
-                <a:ea typeface="Noto Sans KR" pitchFamily="34" charset="-122"/>
-                <a:cs typeface="Noto Sans KR" pitchFamily="34" charset="-120"/>
-              </a:rPr>
-              <a:t>· 좋은 질문이지만 현재 데이터로는 답 안 되는 것들도 있다</a:t>
-            </a:r>
-            <a:endParaRPr lang="en-US" sz="1700" dirty="0"/>
-          </a:p>
-          <a:p>
-            <a:pPr indent="0" marL="0">
-              <a:lnSpc>
-                <a:spcPct val="155000"/>
-              </a:lnSpc>
-              <a:buNone/>
-            </a:pPr>
-            <a:r>
-              <a:rPr lang="en-US" sz="1700" dirty="0">
-                <a:solidFill>
-                  <a:srgbClr val="4A5568"/>
-                </a:solidFill>
-                <a:latin typeface="Noto Sans KR" pitchFamily="34" charset="0"/>
-                <a:ea typeface="Noto Sans KR" pitchFamily="34" charset="-122"/>
-                <a:cs typeface="Noto Sans KR" pitchFamily="34" charset="-120"/>
-              </a:rPr>
-              <a:t>· 예: "코로나 봉쇄 전후" — 배포본은 2024+2025 → 답 불가</a:t>
-            </a:r>
-            <a:endParaRPr lang="en-US" sz="1700" dirty="0"/>
-          </a:p>
-          <a:p>
-            <a:pPr indent="0" marL="0">
-              <a:lnSpc>
-                <a:spcPct val="155000"/>
-              </a:lnSpc>
-              <a:buNone/>
-            </a:pPr>
-            <a:r>
-              <a:rPr lang="en-US" sz="1700" dirty="0">
-                <a:solidFill>
-                  <a:srgbClr val="4A5568"/>
-                </a:solidFill>
-                <a:latin typeface="Noto Sans KR" pitchFamily="34" charset="0"/>
-                <a:ea typeface="Noto Sans KR" pitchFamily="34" charset="-122"/>
-                <a:cs typeface="Noto Sans KR" pitchFamily="34" charset="-120"/>
-              </a:rPr>
-              <a:t>· 예: "출근시간 7~9시 PM" — 일별 데이터 → 시간대 분석 불가</a:t>
-            </a:r>
-            <a:endParaRPr lang="en-US" sz="1700" dirty="0"/>
-          </a:p>
-          <a:p>
-            <a:pPr indent="0" marL="0">
-              <a:lnSpc>
-                <a:spcPct val="155000"/>
-              </a:lnSpc>
-              <a:buNone/>
-            </a:pPr>
-            <a:r>
-              <a:rPr lang="en-US" sz="1700" dirty="0">
-                <a:solidFill>
-                  <a:srgbClr val="4A5568"/>
-                </a:solidFill>
-                <a:latin typeface="Noto Sans KR" pitchFamily="34" charset="0"/>
-                <a:ea typeface="Noto Sans KR" pitchFamily="34" charset="-122"/>
-                <a:cs typeface="Noto Sans KR" pitchFamily="34" charset="-120"/>
-              </a:rPr>
-              <a:t>· "데이터를 더 받거나 다른 후보로" 라는 의사결정으로 연결</a:t>
-            </a:r>
-            <a:endParaRPr lang="en-US" sz="1700" dirty="0"/>
-          </a:p>
-        </p:txBody>
-      </p:sp>
-      <p:sp>
-        <p:nvSpPr>
-          <p:cNvPr id="8" name="Text 6"/>
+              <a:t>시연 결과 — "한 문장으로 5분이면 끝"</a:t>
+            </a:r>
+            <a:endParaRPr lang="en-US" sz="2800" dirty="0"/>
+          </a:p>
+        </p:txBody>
+      </p:sp>
+      <p:pic>
+        <p:nvPicPr>
+          <p:cNvPr id="6" name="Image 0" descr="/Users/sujinpark/b2b-lecture-note/20260512_inflearn_B2G_dataanalysis/assets/screenshots/day1/before_after_demo.png">    </p:cNvPr>
+          <p:cNvPicPr>
+            <a:picLocks noChangeAspect="1"/>
+          </p:cNvPicPr>
+          <p:nvPr/>
+        </p:nvPicPr>
+        <p:blipFill>
+          <a:blip r:embed="rId1"/>
+          <a:srcRect l="0" r="0" t="0" b="0"/>
+          <a:stretch/>
+        </p:blipFill>
+        <p:spPr>
+          <a:xfrm>
+            <a:off x="2194560" y="2240280"/>
+            <a:ext cx="7772400" cy="3657600"/>
+          </a:xfrm>
+          <a:prstGeom prst="rect">
+            <a:avLst/>
+          </a:prstGeom>
+        </p:spPr>
+      </p:pic>
+      <p:sp>
+        <p:nvSpPr>
+          <p:cNvPr id="7" name="Text 4"/>
+          <p:cNvSpPr/>
+          <p:nvPr/>
+        </p:nvSpPr>
+        <p:spPr>
+          <a:xfrm>
+            <a:off x="548640" y="5989320"/>
+            <a:ext cx="11091672" cy="411480"/>
+          </a:xfrm>
+          <a:prstGeom prst="rect">
+            <a:avLst/>
+          </a:prstGeom>
+          <a:noFill/>
+          <a:ln/>
+        </p:spPr>
+        <p:txBody>
+          <a:bodyPr wrap="square" rtlCol="0" anchor="ctr"/>
+          <a:lstStyle/>
+          <a:p>
+            <a:pPr algn="ctr" indent="0" marL="0">
+              <a:buNone/>
+            </a:pPr>
+            <a:r>
+              <a:rPr lang="en-US" sz="1200" i="1" dirty="0">
+                <a:solidFill>
+                  <a:srgbClr val="718096"/>
+                </a:solidFill>
+                <a:latin typeface="Noto Sans KR" pitchFamily="34" charset="0"/>
+                <a:ea typeface="Noto Sans KR" pitchFamily="34" charset="-122"/>
+                <a:cs typeface="Noto Sans KR" pitchFamily="34" charset="-120"/>
+              </a:rPr>
+              <a:t>자치구별 PM2.5 연평균 2024 vs 2025 막대그래프</a:t>
+            </a:r>
+            <a:endParaRPr lang="en-US" sz="1200" dirty="0"/>
+          </a:p>
+        </p:txBody>
+      </p:sp>
+      <p:sp>
+        <p:nvSpPr>
+          <p:cNvPr id="8" name="Text 5"/>
           <p:cNvSpPr/>
           <p:nvPr/>
         </p:nvSpPr>
@@ -4444,7 +4718,7 @@
                 <a:ea typeface="Noto Sans KR" pitchFamily="34" charset="-122"/>
                 <a:cs typeface="Noto Sans KR" pitchFamily="34" charset="-120"/>
               </a:rPr>
-              <a:t>11 / 31</a:t>
+              <a:t>11 / 34</a:t>
             </a:r>
             <a:endParaRPr lang="en-US" sz="900" dirty="0"/>
           </a:p>
@@ -4528,7 +4802,7 @@
                 <a:ea typeface="Noto Sans KR" pitchFamily="34" charset="-122"/>
                 <a:cs typeface="Noto Sans KR" pitchFamily="34" charset="-120"/>
               </a:rPr>
-              <a:t>파트 2. 환경 세팅 (Claude Desktop)</a:t>
+              <a:t>파트 1. 오프닝 + Before/After 시연</a:t>
             </a:r>
             <a:endParaRPr lang="en-US" sz="1400" dirty="0"/>
           </a:p>
@@ -4567,7 +4841,7 @@
                 <a:ea typeface="Noto Sans KR" pitchFamily="34" charset="-122"/>
                 <a:cs typeface="Noto Sans KR" pitchFamily="34" charset="-120"/>
               </a:rPr>
-              <a:t>섹션 1 / 5</a:t>
+              <a:t>섹션 5 / 5</a:t>
             </a:r>
             <a:endParaRPr lang="en-US" sz="1100" dirty="0"/>
           </a:p>
@@ -4609,7 +4883,7 @@
                 <a:ea typeface="Noto Sans KR" pitchFamily="34" charset="-122"/>
                 <a:cs typeface="Noto Sans KR" pitchFamily="34" charset="-120"/>
               </a:rPr>
-              <a:t>1단계 — Claude Desktop App 설치하기</a:t>
+              <a:t>답 안 되는 질문도 분석가의 일</a:t>
             </a:r>
             <a:endParaRPr lang="en-US" sz="4200" dirty="0"/>
           </a:p>
@@ -4674,7 +4948,7 @@
                 <a:ea typeface="Noto Sans KR" pitchFamily="34" charset="-122"/>
                 <a:cs typeface="Noto Sans KR" pitchFamily="34" charset="-120"/>
               </a:rPr>
-              <a:t>· https://claude.ai/download 에서 본인 OS용 다운로드 → 설치 → 실행</a:t>
+              <a:t>· 좋은 질문이지만 현재 데이터로는 답 안 되는 것들도 있다</a:t>
             </a:r>
             <a:endParaRPr lang="en-US" sz="1700" dirty="0"/>
           </a:p>
@@ -4694,7 +4968,7 @@
                 <a:ea typeface="Noto Sans KR" pitchFamily="34" charset="-122"/>
                 <a:cs typeface="Noto Sans KR" pitchFamily="34" charset="-120"/>
               </a:rPr>
-              <a:t>· Pro/Max 계정으로 로그인</a:t>
+              <a:t>· 예: "코로나 봉쇄 전후" — 배포본은 2024+2025 → 답 불가</a:t>
             </a:r>
             <a:endParaRPr lang="en-US" sz="1700" dirty="0"/>
           </a:p>
@@ -4714,7 +4988,27 @@
                 <a:ea typeface="Noto Sans KR" pitchFamily="34" charset="-122"/>
                 <a:cs typeface="Noto Sans KR" pitchFamily="34" charset="-120"/>
               </a:rPr>
-              <a:t>· 좌측 사이드바에 "Code" 항목이 보이는지 확인 (없으면 앱 업데이트)</a:t>
+              <a:t>· 예: "출근시간 7~9시 PM" — 일별 데이터 → 시간대 분석 불가</a:t>
+            </a:r>
+            <a:endParaRPr lang="en-US" sz="1700" dirty="0"/>
+          </a:p>
+          <a:p>
+            <a:pPr indent="0" marL="0">
+              <a:lnSpc>
+                <a:spcPct val="155000"/>
+              </a:lnSpc>
+              <a:buNone/>
+            </a:pPr>
+            <a:r>
+              <a:rPr lang="en-US" sz="1700" dirty="0">
+                <a:solidFill>
+                  <a:srgbClr val="4A5568"/>
+                </a:solidFill>
+                <a:latin typeface="Noto Sans KR" pitchFamily="34" charset="0"/>
+                <a:ea typeface="Noto Sans KR" pitchFamily="34" charset="-122"/>
+                <a:cs typeface="Noto Sans KR" pitchFamily="34" charset="-120"/>
+              </a:rPr>
+              <a:t>· "데이터를 더 받거나 다른 후보로" 라는 의사결정으로 연결</a:t>
             </a:r>
             <a:endParaRPr lang="en-US" sz="1700" dirty="0"/>
           </a:p>
@@ -4753,7 +5047,7 @@
                 <a:ea typeface="Noto Sans KR" pitchFamily="34" charset="-122"/>
                 <a:cs typeface="Noto Sans KR" pitchFamily="34" charset="-120"/>
               </a:rPr>
-              <a:t>12 / 31</a:t>
+              <a:t>12 / 34</a:t>
             </a:r>
             <a:endParaRPr lang="en-US" sz="900" dirty="0"/>
           </a:p>
@@ -4792,8 +5086,28 @@
         </p:nvSpPr>
         <p:spPr>
           <a:xfrm>
-            <a:off x="548640" y="384048"/>
-            <a:ext cx="914400" cy="54864"/>
+            <a:off x="0" y="0"/>
+            <a:ext cx="12192000" cy="6858000"/>
+          </a:xfrm>
+          <a:prstGeom prst="rect">
+            <a:avLst/>
+          </a:prstGeom>
+          <a:solidFill>
+            <a:srgbClr val="1A1F36"/>
+          </a:solidFill>
+          <a:ln/>
+        </p:spPr>
+      </p:sp>
+      <p:sp>
+        <p:nvSpPr>
+          <p:cNvPr id="3" name="Shape 1"/>
+          <p:cNvSpPr/>
+          <p:nvPr/>
+        </p:nvSpPr>
+        <p:spPr>
+          <a:xfrm>
+            <a:off x="9875520" y="0"/>
+            <a:ext cx="2313432" cy="6858000"/>
           </a:xfrm>
           <a:prstGeom prst="rect">
             <a:avLst/>
@@ -4806,14 +5120,14 @@
       </p:sp>
       <p:sp>
         <p:nvSpPr>
-          <p:cNvPr id="3" name="Text 1"/>
-          <p:cNvSpPr/>
-          <p:nvPr/>
-        </p:nvSpPr>
-        <p:spPr>
-          <a:xfrm>
-            <a:off x="548640" y="530352"/>
-            <a:ext cx="10515600" cy="411480"/>
+          <p:cNvPr id="4" name="Text 2"/>
+          <p:cNvSpPr/>
+          <p:nvPr/>
+        </p:nvSpPr>
+        <p:spPr>
+          <a:xfrm>
+            <a:off x="731520" y="1828800"/>
+            <a:ext cx="10515600" cy="457200"/>
           </a:xfrm>
           <a:prstGeom prst="rect">
             <a:avLst/>
@@ -4829,15 +5143,15 @@
               <a:buNone/>
             </a:pPr>
             <a:r>
-              <a:rPr lang="en-US" sz="1400" b="1" spc="50" kern="0" dirty="0">
-                <a:solidFill>
-                  <a:srgbClr val="718096"/>
-                </a:solidFill>
-                <a:latin typeface="Noto Sans KR" pitchFamily="34" charset="0"/>
-                <a:ea typeface="Noto Sans KR" pitchFamily="34" charset="-122"/>
-                <a:cs typeface="Noto Sans KR" pitchFamily="34" charset="-120"/>
-              </a:rPr>
-              <a:t>파트 2. 환경 세팅 (Claude Desktop)</a:t>
+              <a:rPr lang="en-US" sz="1400" b="1" spc="500" kern="0" dirty="0">
+                <a:solidFill>
+                  <a:srgbClr val="4A7BF7"/>
+                </a:solidFill>
+                <a:latin typeface="Noto Sans KR" pitchFamily="34" charset="0"/>
+                <a:ea typeface="Noto Sans KR" pitchFamily="34" charset="-122"/>
+                <a:cs typeface="Noto Sans KR" pitchFamily="34" charset="-120"/>
+              </a:rPr>
+              <a:t>PART 2</a:t>
             </a:r>
             <a:endParaRPr lang="en-US" sz="1400" dirty="0"/>
           </a:p>
@@ -4845,14 +5159,14 @@
       </p:sp>
       <p:sp>
         <p:nvSpPr>
-          <p:cNvPr id="4" name="Text 2"/>
-          <p:cNvSpPr/>
-          <p:nvPr/>
-        </p:nvSpPr>
-        <p:spPr>
-          <a:xfrm>
-            <a:off x="548640" y="960120"/>
-            <a:ext cx="10515600" cy="292608"/>
+          <p:cNvPr id="5" name="Text 3"/>
+          <p:cNvSpPr/>
+          <p:nvPr/>
+        </p:nvSpPr>
+        <p:spPr>
+          <a:xfrm>
+            <a:off x="731520" y="2468880"/>
+            <a:ext cx="10515600" cy="1645920"/>
           </a:xfrm>
           <a:prstGeom prst="rect">
             <a:avLst/>
@@ -4865,62 +5179,43 @@
           <a:lstStyle/>
           <a:p>
             <a:pPr indent="0" marL="0">
-              <a:buNone/>
-            </a:pPr>
-            <a:r>
-              <a:rPr lang="en-US" sz="1100" b="1" spc="150" kern="0" dirty="0">
-                <a:solidFill>
-                  <a:srgbClr val="4A7BF7"/>
-                </a:solidFill>
-                <a:latin typeface="Noto Sans KR" pitchFamily="34" charset="0"/>
-                <a:ea typeface="Noto Sans KR" pitchFamily="34" charset="-122"/>
-                <a:cs typeface="Noto Sans KR" pitchFamily="34" charset="-120"/>
-              </a:rPr>
-              <a:t>섹션 2 / 5</a:t>
-            </a:r>
-            <a:endParaRPr lang="en-US" sz="1100" dirty="0"/>
-          </a:p>
-        </p:txBody>
-      </p:sp>
-      <p:sp>
-        <p:nvSpPr>
-          <p:cNvPr id="5" name="Text 3"/>
-          <p:cNvSpPr/>
-          <p:nvPr/>
-        </p:nvSpPr>
-        <p:spPr>
-          <a:xfrm>
-            <a:off x="548640" y="1508760"/>
-            <a:ext cx="11091672" cy="1371600"/>
-          </a:xfrm>
-          <a:prstGeom prst="rect">
-            <a:avLst/>
-          </a:prstGeom>
-          <a:noFill/>
-          <a:ln/>
-        </p:spPr>
-        <p:txBody>
-          <a:bodyPr wrap="square" rtlCol="0" anchor="t"/>
-          <a:lstStyle/>
-          <a:p>
-            <a:pPr indent="0" marL="0">
               <a:lnSpc>
-                <a:spcPct val="110000"/>
+                <a:spcPct val="115000"/>
               </a:lnSpc>
               <a:buNone/>
             </a:pPr>
             <a:r>
-              <a:rPr lang="en-US" sz="4200" b="1" spc="-50" kern="0" dirty="0">
-                <a:solidFill>
-                  <a:srgbClr val="1A1F36"/>
-                </a:solidFill>
-                <a:latin typeface="Noto Sans KR" pitchFamily="34" charset="0"/>
-                <a:ea typeface="Noto Sans KR" pitchFamily="34" charset="-122"/>
-                <a:cs typeface="Noto Sans KR" pitchFamily="34" charset="-120"/>
-              </a:rPr>
-              <a:t>2단계 — 바탕화면에 작업 폴더 만들기</a:t>
-            </a:r>
-            <a:endParaRPr lang="en-US" sz="4200" dirty="0"/>
+              <a:rPr lang="en-US" sz="5400" b="1" spc="-50" kern="0" dirty="0">
+                <a:solidFill>
+                  <a:srgbClr val="FFFFFF"/>
+                </a:solidFill>
+                <a:latin typeface="Noto Sans KR" pitchFamily="34" charset="0"/>
+                <a:ea typeface="Noto Sans KR" pitchFamily="34" charset="-122"/>
+                <a:cs typeface="Noto Sans KR" pitchFamily="34" charset="-120"/>
+              </a:rPr>
+              <a:t>환경 세팅</a:t>
+            </a:r>
+            <a:endParaRPr lang="en-US" sz="5400" dirty="0"/>
+          </a:p>
+          <a:p>
+            <a:pPr indent="0" marL="0">
+              <a:lnSpc>
+                <a:spcPct val="115000"/>
+              </a:lnSpc>
+              <a:buNone/>
+            </a:pPr>
+            <a:r>
+              <a:rPr lang="en-US" sz="5400" b="1" spc="-50" kern="0" dirty="0">
+                <a:solidFill>
+                  <a:srgbClr val="FFFFFF"/>
+                </a:solidFill>
+                <a:latin typeface="Noto Sans KR" pitchFamily="34" charset="0"/>
+                <a:ea typeface="Noto Sans KR" pitchFamily="34" charset="-122"/>
+                <a:cs typeface="Noto Sans KR" pitchFamily="34" charset="-120"/>
+              </a:rPr>
+              <a:t>(Claude Desktop)</a:t>
+            </a:r>
+            <a:endParaRPr lang="en-US" sz="5400" dirty="0"/>
           </a:p>
         </p:txBody>
       </p:sp>
@@ -4932,14 +5227,14 @@
         </p:nvSpPr>
         <p:spPr>
           <a:xfrm>
-            <a:off x="548640" y="2971800"/>
-            <a:ext cx="1828800" cy="0"/>
+            <a:off x="731520" y="4297680"/>
+            <a:ext cx="3200400" cy="0"/>
           </a:xfrm>
           <a:prstGeom prst="line">
             <a:avLst/>
           </a:prstGeom>
           <a:noFill/>
-          <a:ln w="25400">
+          <a:ln w="19050">
             <a:solidFill>
               <a:srgbClr val="4A7BF7"/>
             </a:solidFill>
@@ -4955,97 +5250,37 @@
         </p:nvSpPr>
         <p:spPr>
           <a:xfrm>
-            <a:off x="548640" y="3200400"/>
-            <a:ext cx="11091672" cy="2788920"/>
-          </a:xfrm>
-          <a:prstGeom prst="rect">
-            <a:avLst/>
-          </a:prstGeom>
-          <a:noFill/>
-          <a:ln/>
-        </p:spPr>
-        <p:txBody>
-          <a:bodyPr wrap="square" rtlCol="0" anchor="t"/>
+            <a:off x="731520" y="4526280"/>
+            <a:ext cx="10515600" cy="548640"/>
+          </a:xfrm>
+          <a:prstGeom prst="rect">
+            <a:avLst/>
+          </a:prstGeom>
+          <a:noFill/>
+          <a:ln/>
+        </p:spPr>
+        <p:txBody>
+          <a:bodyPr wrap="square" rtlCol="0" anchor="ctr"/>
           <a:lstStyle/>
           <a:p>
             <a:pPr indent="0" marL="0">
               <a:lnSpc>
-                <a:spcPct val="155000"/>
+                <a:spcPct val="150000"/>
               </a:lnSpc>
               <a:buNone/>
             </a:pPr>
             <a:r>
-              <a:rPr lang="en-US" sz="1700" dirty="0">
-                <a:solidFill>
-                  <a:srgbClr val="4A5568"/>
-                </a:solidFill>
-                <a:latin typeface="Noto Sans KR" pitchFamily="34" charset="0"/>
-                <a:ea typeface="Noto Sans KR" pitchFamily="34" charset="-122"/>
-                <a:cs typeface="Noto Sans KR" pitchFamily="34" charset="-120"/>
-              </a:rPr>
-              <a:t>· 폴더 이름: inflearn_ccd_challenge (강의용 통일)</a:t>
-            </a:r>
-            <a:endParaRPr lang="en-US" sz="1700" dirty="0"/>
-          </a:p>
-          <a:p>
-            <a:pPr indent="0" marL="0">
-              <a:lnSpc>
-                <a:spcPct val="155000"/>
-              </a:lnSpc>
-              <a:buNone/>
-            </a:pPr>
-            <a:r>
-              <a:rPr lang="en-US" sz="1700" dirty="0">
-                <a:solidFill>
-                  <a:srgbClr val="4A5568"/>
-                </a:solidFill>
-                <a:latin typeface="Noto Sans KR" pitchFamily="34" charset="0"/>
-                <a:ea typeface="Noto Sans KR" pitchFamily="34" charset="-122"/>
-                <a:cs typeface="Noto Sans KR" pitchFamily="34" charset="-120"/>
-              </a:rPr>
-              <a:t>· 위치: 바탕화면 (찾기 쉬운 곳이면 어디든)</a:t>
-            </a:r>
-            <a:endParaRPr lang="en-US" sz="1700" dirty="0"/>
-          </a:p>
-          <a:p>
-            <a:pPr indent="0" marL="0">
-              <a:lnSpc>
-                <a:spcPct val="155000"/>
-              </a:lnSpc>
-              <a:buNone/>
-            </a:pPr>
-            <a:r>
-              <a:rPr lang="en-US" sz="1700" dirty="0">
-                <a:solidFill>
-                  <a:srgbClr val="4A5568"/>
-                </a:solidFill>
-                <a:latin typeface="Noto Sans KR" pitchFamily="34" charset="0"/>
-                <a:ea typeface="Noto Sans KR" pitchFamily="34" charset="-122"/>
-                <a:cs typeface="Noto Sans KR" pitchFamily="34" charset="-120"/>
-              </a:rPr>
-              <a:t>· 이 폴더 하나가 4회차 내내 작업 폴더</a:t>
-            </a:r>
-            <a:endParaRPr lang="en-US" sz="1700" dirty="0"/>
-          </a:p>
-          <a:p>
-            <a:pPr indent="0" marL="0">
-              <a:lnSpc>
-                <a:spcPct val="155000"/>
-              </a:lnSpc>
-              <a:buNone/>
-            </a:pPr>
-            <a:r>
-              <a:rPr lang="en-US" sz="1700" dirty="0">
-                <a:solidFill>
-                  <a:srgbClr val="4A5568"/>
-                </a:solidFill>
-                <a:latin typeface="Noto Sans KR" pitchFamily="34" charset="0"/>
-                <a:ea typeface="Noto Sans KR" pitchFamily="34" charset="-122"/>
-                <a:cs typeface="Noto Sans KR" pitchFamily="34" charset="-120"/>
-              </a:rPr>
-              <a:t>  — 데이터·CLAUDE.md·산출물 모두 여기</a:t>
-            </a:r>
-            <a:endParaRPr lang="en-US" sz="1700" dirty="0"/>
+              <a:rPr lang="en-US" sz="1600" dirty="0">
+                <a:solidFill>
+                  <a:srgbClr val="A0AEC0"/>
+                </a:solidFill>
+                <a:latin typeface="Noto Sans KR" pitchFamily="34" charset="0"/>
+                <a:ea typeface="Noto Sans KR" pitchFamily="34" charset="-122"/>
+                <a:cs typeface="Noto Sans KR" pitchFamily="34" charset="-120"/>
+              </a:rPr>
+              <a:t>본인 노트북에서 직접 — 50분 안에 다 같이 진입</a:t>
+            </a:r>
+            <a:endParaRPr lang="en-US" sz="1600" dirty="0"/>
           </a:p>
         </p:txBody>
       </p:sp>
@@ -5082,7 +5317,7 @@
                 <a:ea typeface="Noto Sans KR" pitchFamily="34" charset="-122"/>
                 <a:cs typeface="Noto Sans KR" pitchFamily="34" charset="-120"/>
               </a:rPr>
-              <a:t>13 / 31</a:t>
+              <a:t>13 / 34</a:t>
             </a:r>
             <a:endParaRPr lang="en-US" sz="900" dirty="0"/>
           </a:p>
@@ -5205,7 +5440,7 @@
                 <a:ea typeface="Noto Sans KR" pitchFamily="34" charset="-122"/>
                 <a:cs typeface="Noto Sans KR" pitchFamily="34" charset="-120"/>
               </a:rPr>
-              <a:t>섹션 3 / 5</a:t>
+              <a:t>섹션 1 / 5</a:t>
             </a:r>
             <a:endParaRPr lang="en-US" sz="1100" dirty="0"/>
           </a:p>
@@ -5247,7 +5482,7 @@
                 <a:ea typeface="Noto Sans KR" pitchFamily="34" charset="-122"/>
                 <a:cs typeface="Noto Sans KR" pitchFamily="34" charset="-120"/>
               </a:rPr>
-              <a:t>3단계 — 데스크톱 앱에서 Claude Code 설치</a:t>
+              <a:t>1단계 — Claude Desktop App 설치하기</a:t>
             </a:r>
             <a:endParaRPr lang="en-US" sz="4200" dirty="0"/>
           </a:p>
@@ -5312,7 +5547,7 @@
                 <a:ea typeface="Noto Sans KR" pitchFamily="34" charset="-122"/>
                 <a:cs typeface="Noto Sans KR" pitchFamily="34" charset="-120"/>
               </a:rPr>
-              <a:t>· Claude Desktop 좌측 메뉴에서 "Code" 클릭</a:t>
+              <a:t>· https://claude.ai/download 에서 본인 OS용 다운로드 → 설치 → 실행</a:t>
             </a:r>
             <a:endParaRPr lang="en-US" sz="1700" dirty="0"/>
           </a:p>
@@ -5332,7 +5567,7 @@
                 <a:ea typeface="Noto Sans KR" pitchFamily="34" charset="-122"/>
                 <a:cs typeface="Noto Sans KR" pitchFamily="34" charset="-120"/>
               </a:rPr>
-              <a:t>· 작업 폴더로 inflearn_ccd_challenge 지정</a:t>
+              <a:t>· Pro/Max 계정으로 로그인</a:t>
             </a:r>
             <a:endParaRPr lang="en-US" sz="1700" dirty="0"/>
           </a:p>
@@ -5352,47 +5587,7 @@
                 <a:ea typeface="Noto Sans KR" pitchFamily="34" charset="-122"/>
                 <a:cs typeface="Noto Sans KR" pitchFamily="34" charset="-120"/>
               </a:rPr>
-              <a:t>· 앱 안내에 따라 Claude Code 설치 진행</a:t>
-            </a:r>
-            <a:endParaRPr lang="en-US" sz="1700" dirty="0"/>
-          </a:p>
-          <a:p>
-            <a:pPr indent="0" marL="0">
-              <a:lnSpc>
-                <a:spcPct val="155000"/>
-              </a:lnSpc>
-              <a:buNone/>
-            </a:pPr>
-            <a:r>
-              <a:rPr lang="en-US" sz="1700" dirty="0">
-                <a:solidFill>
-                  <a:srgbClr val="4A5568"/>
-                </a:solidFill>
-                <a:latin typeface="Noto Sans KR" pitchFamily="34" charset="0"/>
-                <a:ea typeface="Noto Sans KR" pitchFamily="34" charset="-122"/>
-                <a:cs typeface="Noto Sans KR" pitchFamily="34" charset="-120"/>
-              </a:rPr>
-              <a:t>  (Node.js 등 사전 준비 자동 처리)</a:t>
-            </a:r>
-            <a:endParaRPr lang="en-US" sz="1700" dirty="0"/>
-          </a:p>
-          <a:p>
-            <a:pPr indent="0" marL="0">
-              <a:lnSpc>
-                <a:spcPct val="155000"/>
-              </a:lnSpc>
-              <a:buNone/>
-            </a:pPr>
-            <a:r>
-              <a:rPr lang="en-US" sz="1700" dirty="0">
-                <a:solidFill>
-                  <a:srgbClr val="4A5568"/>
-                </a:solidFill>
-                <a:latin typeface="Noto Sans KR" pitchFamily="34" charset="0"/>
-                <a:ea typeface="Noto Sans KR" pitchFamily="34" charset="-122"/>
-                <a:cs typeface="Noto Sans KR" pitchFamily="34" charset="-120"/>
-              </a:rPr>
-              <a:t>· 수강생은 터미널 명령어 외우거나 직접 칠 필요 X</a:t>
+              <a:t>· 좌측 사이드바에 "Code" 항목이 보이는지 확인 (없으면 앱 업데이트)</a:t>
             </a:r>
             <a:endParaRPr lang="en-US" sz="1700" dirty="0"/>
           </a:p>
@@ -5431,7 +5626,7 @@
                 <a:ea typeface="Noto Sans KR" pitchFamily="34" charset="-122"/>
                 <a:cs typeface="Noto Sans KR" pitchFamily="34" charset="-120"/>
               </a:rPr>
-              <a:t>14 / 31</a:t>
+              <a:t>14 / 34</a:t>
             </a:r>
             <a:endParaRPr lang="en-US" sz="900" dirty="0"/>
           </a:p>
@@ -5554,7 +5749,7 @@
                 <a:ea typeface="Noto Sans KR" pitchFamily="34" charset="-122"/>
                 <a:cs typeface="Noto Sans KR" pitchFamily="34" charset="-120"/>
               </a:rPr>
-              <a:t>섹션 4 / 5</a:t>
+              <a:t>섹션 2 / 5</a:t>
             </a:r>
             <a:endParaRPr lang="en-US" sz="1100" dirty="0"/>
           </a:p>
@@ -5596,7 +5791,7 @@
                 <a:ea typeface="Noto Sans KR" pitchFamily="34" charset="-122"/>
                 <a:cs typeface="Noto Sans KR" pitchFamily="34" charset="-120"/>
               </a:rPr>
-              <a:t>4단계 — claude 첫 실행 + 인증</a:t>
+              <a:t>2단계 — 바탕화면에 작업 폴더 만들기</a:t>
             </a:r>
             <a:endParaRPr lang="en-US" sz="4200" dirty="0"/>
           </a:p>
@@ -5661,7 +5856,7 @@
                 <a:ea typeface="Noto Sans KR" pitchFamily="34" charset="-122"/>
                 <a:cs typeface="Noto Sans KR" pitchFamily="34" charset="-120"/>
               </a:rPr>
-              <a:t>· 설치 끝나면 터미널에서 claude 명령어 실행</a:t>
+              <a:t>· 폴더 이름: inflearn_ccd_challenge (강의용 통일)</a:t>
             </a:r>
             <a:endParaRPr lang="en-US" sz="1700" dirty="0"/>
           </a:p>
@@ -5681,7 +5876,7 @@
                 <a:ea typeface="Noto Sans KR" pitchFamily="34" charset="-122"/>
                 <a:cs typeface="Noto Sans KR" pitchFamily="34" charset="-120"/>
               </a:rPr>
-              <a:t>· 브라우저로 Anthropic 계정 인증 1회 (Pro/Max 로그인 상태 필요)</a:t>
+              <a:t>· 위치: 바탕화면 (찾기 쉬운 곳이면 어디든)</a:t>
             </a:r>
             <a:endParaRPr lang="en-US" sz="1700" dirty="0"/>
           </a:p>
@@ -5701,7 +5896,7 @@
                 <a:ea typeface="Noto Sans KR" pitchFamily="34" charset="-122"/>
                 <a:cs typeface="Noto Sans KR" pitchFamily="34" charset="-120"/>
               </a:rPr>
-              <a:t>· 인증 끝나면 Claude Code 프롬프트 진입</a:t>
+              <a:t>· 이 폴더 하나가 4회차 내내 작업 폴더</a:t>
             </a:r>
             <a:endParaRPr lang="en-US" sz="1700" dirty="0"/>
           </a:p>
@@ -5721,7 +5916,7 @@
                 <a:ea typeface="Noto Sans KR" pitchFamily="34" charset="-122"/>
                 <a:cs typeface="Noto Sans KR" pitchFamily="34" charset="-120"/>
               </a:rPr>
-              <a:t>· 이제부터 모든 분석은 여기서</a:t>
+              <a:t>  — 데이터·CLAUDE.md·산출물 모두 여기</a:t>
             </a:r>
             <a:endParaRPr lang="en-US" sz="1700" dirty="0"/>
           </a:p>
@@ -5760,7 +5955,7 @@
                 <a:ea typeface="Noto Sans KR" pitchFamily="34" charset="-122"/>
                 <a:cs typeface="Noto Sans KR" pitchFamily="34" charset="-120"/>
               </a:rPr>
-              <a:t>15 / 31</a:t>
+              <a:t>15 / 34</a:t>
             </a:r>
             <a:endParaRPr lang="en-US" sz="900" dirty="0"/>
           </a:p>
@@ -5883,7 +6078,7 @@
                 <a:ea typeface="Noto Sans KR" pitchFamily="34" charset="-122"/>
                 <a:cs typeface="Noto Sans KR" pitchFamily="34" charset="-120"/>
               </a:rPr>
-              <a:t>BONUS · ChatGPT 구독자용 (Codex)</a:t>
+              <a:t>섹션 3 / 5</a:t>
             </a:r>
             <a:endParaRPr lang="en-US" sz="1100" dirty="0"/>
           </a:p>
@@ -5925,7 +6120,7 @@
                 <a:ea typeface="Noto Sans KR" pitchFamily="34" charset="-122"/>
                 <a:cs typeface="Noto Sans KR" pitchFamily="34" charset="-120"/>
               </a:rPr>
-              <a:t>보너스 — OpenAI Codex 설치</a:t>
+              <a:t>3단계 — 데스크톱 앱에서 Claude Code 설치</a:t>
             </a:r>
             <a:endParaRPr lang="en-US" sz="4200" dirty="0"/>
           </a:p>
@@ -5990,7 +6185,7 @@
                 <a:ea typeface="Noto Sans KR" pitchFamily="34" charset="-122"/>
                 <a:cs typeface="Noto Sans KR" pitchFamily="34" charset="-120"/>
               </a:rPr>
-              <a:t>Claude 대신 ChatGPT를 쓰시는 분은 같은 흐름을 Codex로:</a:t>
+              <a:t>· Claude Desktop 좌측 메뉴에서 "Code" 클릭</a:t>
             </a:r>
             <a:endParaRPr lang="en-US" sz="1700" dirty="0"/>
           </a:p>
@@ -6001,6 +6196,17 @@
               </a:lnSpc>
               <a:buNone/>
             </a:pPr>
+            <a:r>
+              <a:rPr lang="en-US" sz="1700" dirty="0">
+                <a:solidFill>
+                  <a:srgbClr val="4A5568"/>
+                </a:solidFill>
+                <a:latin typeface="Noto Sans KR" pitchFamily="34" charset="0"/>
+                <a:ea typeface="Noto Sans KR" pitchFamily="34" charset="-122"/>
+                <a:cs typeface="Noto Sans KR" pitchFamily="34" charset="-120"/>
+              </a:rPr>
+              <a:t>· 작업 폴더로 inflearn_ccd_challenge 지정</a:t>
+            </a:r>
             <a:endParaRPr lang="en-US" sz="1700" dirty="0"/>
           </a:p>
           <a:p>
@@ -6019,7 +6225,7 @@
                 <a:ea typeface="Noto Sans KR" pitchFamily="34" charset="-122"/>
                 <a:cs typeface="Noto Sans KR" pitchFamily="34" charset="-120"/>
               </a:rPr>
-              <a:t>1) Codex 데스크톱 앱 설치</a:t>
+              <a:t>· 앱 안내에 따라 Claude Code 설치 진행</a:t>
             </a:r>
             <a:endParaRPr lang="en-US" sz="1700" dirty="0"/>
           </a:p>
@@ -6039,7 +6245,7 @@
                 <a:ea typeface="Noto Sans KR" pitchFamily="34" charset="-122"/>
                 <a:cs typeface="Noto Sans KR" pitchFamily="34" charset="-120"/>
               </a:rPr>
-              <a:t>   macOS: developers.openai.com/codex/app</a:t>
+              <a:t>  (Node.js 등 사전 준비 자동 처리)</a:t>
             </a:r>
             <a:endParaRPr lang="en-US" sz="1700" dirty="0"/>
           </a:p>
@@ -6059,136 +6265,7 @@
                 <a:ea typeface="Noto Sans KR" pitchFamily="34" charset="-122"/>
                 <a:cs typeface="Noto Sans KR" pitchFamily="34" charset="-120"/>
               </a:rPr>
-              <a:t>   Windows: Microsoft Store에서 "Codex" 검색</a:t>
-            </a:r>
-            <a:endParaRPr lang="en-US" sz="1700" dirty="0"/>
-          </a:p>
-          <a:p>
-            <a:pPr indent="0" marL="0">
-              <a:lnSpc>
-                <a:spcPct val="155000"/>
-              </a:lnSpc>
-              <a:buNone/>
-            </a:pPr>
-            <a:r>
-              <a:rPr lang="en-US" sz="1700" dirty="0">
-                <a:solidFill>
-                  <a:srgbClr val="4A5568"/>
-                </a:solidFill>
-                <a:latin typeface="Noto Sans KR" pitchFamily="34" charset="0"/>
-                <a:ea typeface="Noto Sans KR" pitchFamily="34" charset="-122"/>
-                <a:cs typeface="Noto Sans KR" pitchFamily="34" charset="-120"/>
-              </a:rPr>
-              <a:t>2) ChatGPT Plus/Pro 계정으로 로그인</a:t>
-            </a:r>
-            <a:endParaRPr lang="en-US" sz="1700" dirty="0"/>
-          </a:p>
-          <a:p>
-            <a:pPr indent="0" marL="0">
-              <a:lnSpc>
-                <a:spcPct val="155000"/>
-              </a:lnSpc>
-              <a:buNone/>
-            </a:pPr>
-            <a:r>
-              <a:rPr lang="en-US" sz="1700" dirty="0">
-                <a:solidFill>
-                  <a:srgbClr val="4A5568"/>
-                </a:solidFill>
-                <a:latin typeface="Noto Sans KR" pitchFamily="34" charset="0"/>
-                <a:ea typeface="Noto Sans KR" pitchFamily="34" charset="-122"/>
-                <a:cs typeface="Noto Sans KR" pitchFamily="34" charset="-120"/>
-              </a:rPr>
-              <a:t>3) 터미널에서 CLI 설치: npm install -g @openai/codex</a:t>
-            </a:r>
-            <a:endParaRPr lang="en-US" sz="1700" dirty="0"/>
-          </a:p>
-          <a:p>
-            <a:pPr indent="0" marL="0">
-              <a:lnSpc>
-                <a:spcPct val="155000"/>
-              </a:lnSpc>
-              <a:buNone/>
-            </a:pPr>
-            <a:r>
-              <a:rPr lang="en-US" sz="1700" dirty="0">
-                <a:solidFill>
-                  <a:srgbClr val="4A5568"/>
-                </a:solidFill>
-                <a:latin typeface="Noto Sans KR" pitchFamily="34" charset="0"/>
-                <a:ea typeface="Noto Sans KR" pitchFamily="34" charset="-122"/>
-                <a:cs typeface="Noto Sans KR" pitchFamily="34" charset="-120"/>
-              </a:rPr>
-              <a:t>   (또는 Homebrew: brew install codex)</a:t>
-            </a:r>
-            <a:endParaRPr lang="en-US" sz="1700" dirty="0"/>
-          </a:p>
-          <a:p>
-            <a:pPr indent="0" marL="0">
-              <a:lnSpc>
-                <a:spcPct val="155000"/>
-              </a:lnSpc>
-              <a:buNone/>
-            </a:pPr>
-            <a:r>
-              <a:rPr lang="en-US" sz="1700" dirty="0">
-                <a:solidFill>
-                  <a:srgbClr val="4A5568"/>
-                </a:solidFill>
-                <a:latin typeface="Noto Sans KR" pitchFamily="34" charset="0"/>
-                <a:ea typeface="Noto Sans KR" pitchFamily="34" charset="-122"/>
-                <a:cs typeface="Noto Sans KR" pitchFamily="34" charset="-120"/>
-              </a:rPr>
-              <a:t>4) 작업 폴더(inflearn_ccd_challenge)에서 codex 실행</a:t>
-            </a:r>
-            <a:endParaRPr lang="en-US" sz="1700" dirty="0"/>
-          </a:p>
-          <a:p>
-            <a:pPr indent="0" marL="0">
-              <a:lnSpc>
-                <a:spcPct val="155000"/>
-              </a:lnSpc>
-              <a:buNone/>
-            </a:pPr>
-            <a:r>
-              <a:rPr lang="en-US" sz="1700" dirty="0">
-                <a:solidFill>
-                  <a:srgbClr val="4A5568"/>
-                </a:solidFill>
-                <a:latin typeface="Noto Sans KR" pitchFamily="34" charset="0"/>
-                <a:ea typeface="Noto Sans KR" pitchFamily="34" charset="-122"/>
-                <a:cs typeface="Noto Sans KR" pitchFamily="34" charset="-120"/>
-              </a:rPr>
-              <a:t>   → ChatGPT 계정 인증 → 분석 시작</a:t>
-            </a:r>
-            <a:endParaRPr lang="en-US" sz="1700" dirty="0"/>
-          </a:p>
-          <a:p>
-            <a:pPr indent="0" marL="0">
-              <a:lnSpc>
-                <a:spcPct val="155000"/>
-              </a:lnSpc>
-              <a:buNone/>
-            </a:pPr>
-            <a:endParaRPr lang="en-US" sz="1700" dirty="0"/>
-          </a:p>
-          <a:p>
-            <a:pPr indent="0" marL="0">
-              <a:lnSpc>
-                <a:spcPct val="155000"/>
-              </a:lnSpc>
-              <a:buNone/>
-            </a:pPr>
-            <a:r>
-              <a:rPr lang="en-US" sz="1700" dirty="0">
-                <a:solidFill>
-                  <a:srgbClr val="4A5568"/>
-                </a:solidFill>
-                <a:latin typeface="Noto Sans KR" pitchFamily="34" charset="0"/>
-                <a:ea typeface="Noto Sans KR" pitchFamily="34" charset="-122"/>
-                <a:cs typeface="Noto Sans KR" pitchFamily="34" charset="-120"/>
-              </a:rPr>
-              <a:t>· 강의 흐름은 Claude Code와 동일하게 따라갈 수 있음</a:t>
+              <a:t>· 수강생은 터미널 명령어 외우거나 직접 칠 필요 X</a:t>
             </a:r>
             <a:endParaRPr lang="en-US" sz="1700" dirty="0"/>
           </a:p>
@@ -6227,7 +6304,7 @@
                 <a:ea typeface="Noto Sans KR" pitchFamily="34" charset="-122"/>
                 <a:cs typeface="Noto Sans KR" pitchFamily="34" charset="-120"/>
               </a:rPr>
-              <a:t>16 / 31</a:t>
+              <a:t>16 / 34</a:t>
             </a:r>
             <a:endParaRPr lang="en-US" sz="900" dirty="0"/>
           </a:p>
@@ -6350,7 +6427,7 @@
                 <a:ea typeface="Noto Sans KR" pitchFamily="34" charset="-122"/>
                 <a:cs typeface="Noto Sans KR" pitchFamily="34" charset="-120"/>
               </a:rPr>
-              <a:t>섹션 5 / 5</a:t>
+              <a:t>섹션 4 / 5</a:t>
             </a:r>
             <a:endParaRPr lang="en-US" sz="1100" dirty="0"/>
           </a:p>
@@ -6392,7 +6469,7 @@
                 <a:ea typeface="Noto Sans KR" pitchFamily="34" charset="-122"/>
                 <a:cs typeface="Noto Sans KR" pitchFamily="34" charset="-120"/>
               </a:rPr>
-              <a:t>만능 해결법 — 에러는 Claude에게 그대로 보여주세요</a:t>
+              <a:t>4단계 — claude 첫 실행 + 인증</a:t>
             </a:r>
             <a:endParaRPr lang="en-US" sz="4200" dirty="0"/>
           </a:p>
@@ -6457,7 +6534,7 @@
                 <a:ea typeface="Noto Sans KR" pitchFamily="34" charset="-122"/>
                 <a:cs typeface="Noto Sans KR" pitchFamily="34" charset="-120"/>
               </a:rPr>
-              <a:t>· 어떤 에러든, 어떤 막힘이든 → 에러 메시지를 그대로 복사</a:t>
+              <a:t>· 설치 끝나면 터미널에서 claude 명령어 실행</a:t>
             </a:r>
             <a:endParaRPr lang="en-US" sz="1700" dirty="0"/>
           </a:p>
@@ -6477,7 +6554,7 @@
                 <a:ea typeface="Noto Sans KR" pitchFamily="34" charset="-122"/>
                 <a:cs typeface="Noto Sans KR" pitchFamily="34" charset="-120"/>
               </a:rPr>
-              <a:t>· Claude Desktop 또는 Claude Code에 붙여넣고 "이거 어떻게 해결해?"</a:t>
+              <a:t>· 브라우저로 Anthropic 계정 인증 1회 (Pro/Max 로그인 상태 필요)</a:t>
             </a:r>
             <a:endParaRPr lang="en-US" sz="1700" dirty="0"/>
           </a:p>
@@ -6497,7 +6574,7 @@
                 <a:ea typeface="Noto Sans KR" pitchFamily="34" charset="-122"/>
                 <a:cs typeface="Noto Sans KR" pitchFamily="34" charset="-120"/>
               </a:rPr>
-              <a:t>· Claude가 원인 진단 + 직접 고치기까지 한 번에</a:t>
+              <a:t>· 인증 끝나면 Claude Code 프롬프트 진입</a:t>
             </a:r>
             <a:endParaRPr lang="en-US" sz="1700" dirty="0"/>
           </a:p>
@@ -6517,36 +6594,7 @@
                 <a:ea typeface="Noto Sans KR" pitchFamily="34" charset="-122"/>
                 <a:cs typeface="Noto Sans KR" pitchFamily="34" charset="-120"/>
               </a:rPr>
-              <a:t>· 검색·스택오버플로우 → 더 이상 필요 없음</a:t>
-            </a:r>
-            <a:endParaRPr lang="en-US" sz="1700" dirty="0"/>
-          </a:p>
-          <a:p>
-            <a:pPr indent="0" marL="0">
-              <a:lnSpc>
-                <a:spcPct val="155000"/>
-              </a:lnSpc>
-              <a:buNone/>
-            </a:pPr>
-            <a:endParaRPr lang="en-US" sz="1700" dirty="0"/>
-          </a:p>
-          <a:p>
-            <a:pPr indent="0" marL="0">
-              <a:lnSpc>
-                <a:spcPct val="155000"/>
-              </a:lnSpc>
-              <a:buNone/>
-            </a:pPr>
-            <a:r>
-              <a:rPr lang="en-US" sz="1700" dirty="0">
-                <a:solidFill>
-                  <a:srgbClr val="4A5568"/>
-                </a:solidFill>
-                <a:latin typeface="Noto Sans KR" pitchFamily="34" charset="0"/>
-                <a:ea typeface="Noto Sans KR" pitchFamily="34" charset="-122"/>
-                <a:cs typeface="Noto Sans KR" pitchFamily="34" charset="-120"/>
-              </a:rPr>
-              <a:t>· 머리 싸매지 말고 일단 물어보기 — 라이브 강의 트러블도 이 한 가지로 다 풀립니다</a:t>
+              <a:t>· 이제부터 모든 분석은 여기서</a:t>
             </a:r>
             <a:endParaRPr lang="en-US" sz="1700" dirty="0"/>
           </a:p>
@@ -6585,7 +6633,7 @@
                 <a:ea typeface="Noto Sans KR" pitchFamily="34" charset="-122"/>
                 <a:cs typeface="Noto Sans KR" pitchFamily="34" charset="-120"/>
               </a:rPr>
-              <a:t>17 / 31</a:t>
+              <a:t>17 / 34</a:t>
             </a:r>
             <a:endParaRPr lang="en-US" sz="900" dirty="0"/>
           </a:p>
@@ -6669,7 +6717,7 @@
                 <a:ea typeface="Noto Sans KR" pitchFamily="34" charset="-122"/>
                 <a:cs typeface="Noto Sans KR" pitchFamily="34" charset="-120"/>
               </a:rPr>
-              <a:t>파트 3. 데이터 다운로드 + 첫 분석 + CLAUDE.md</a:t>
+              <a:t>파트 2. 환경 세팅 (Claude Desktop)</a:t>
             </a:r>
             <a:endParaRPr lang="en-US" sz="1400" dirty="0"/>
           </a:p>
@@ -6708,7 +6756,7 @@
                 <a:ea typeface="Noto Sans KR" pitchFamily="34" charset="-122"/>
                 <a:cs typeface="Noto Sans KR" pitchFamily="34" charset="-120"/>
               </a:rPr>
-              <a:t>섹션 1 / 4</a:t>
+              <a:t>BONUS · ChatGPT 구독자용 (Codex)</a:t>
             </a:r>
             <a:endParaRPr lang="en-US" sz="1100" dirty="0"/>
           </a:p>
@@ -6750,7 +6798,7 @@
                 <a:ea typeface="Noto Sans KR" pitchFamily="34" charset="-122"/>
                 <a:cs typeface="Noto Sans KR" pitchFamily="34" charset="-120"/>
               </a:rPr>
-              <a:t>1단계 — 미세먼지 데이터 다운로드</a:t>
+              <a:t>보너스 — OpenAI Codex 설치</a:t>
             </a:r>
             <a:endParaRPr lang="en-US" sz="4200" dirty="0"/>
           </a:p>
@@ -6815,7 +6863,7 @@
                 <a:ea typeface="Noto Sans KR" pitchFamily="34" charset="-122"/>
                 <a:cs typeface="Noto Sans KR" pitchFamily="34" charset="-120"/>
               </a:rPr>
-              <a:t>1) https://data.seoul.go.kr/dataList/OA-2218/S/1/datasetView.do 접속</a:t>
+              <a:t>Claude 대신 ChatGPT를 쓰시는 분도 같은 흐름으로:</a:t>
             </a:r>
             <a:endParaRPr lang="en-US" sz="1700" dirty="0"/>
           </a:p>
@@ -6826,17 +6874,6 @@
               </a:lnSpc>
               <a:buNone/>
             </a:pPr>
-            <a:r>
-              <a:rPr lang="en-US" sz="1700" dirty="0">
-                <a:solidFill>
-                  <a:srgbClr val="4A5568"/>
-                </a:solidFill>
-                <a:latin typeface="Noto Sans KR" pitchFamily="34" charset="0"/>
-                <a:ea typeface="Noto Sans KR" pitchFamily="34" charset="-122"/>
-                <a:cs typeface="Noto Sans KR" pitchFamily="34" charset="-120"/>
-              </a:rPr>
-              <a:t>2) 페이지 상단 탭 중 "파일" 클릭</a:t>
-            </a:r>
             <a:endParaRPr lang="en-US" sz="1700" dirty="0"/>
           </a:p>
           <a:p>
@@ -6855,7 +6892,7 @@
                 <a:ea typeface="Noto Sans KR" pitchFamily="34" charset="-122"/>
                 <a:cs typeface="Noto Sans KR" pitchFamily="34" charset="-120"/>
               </a:rPr>
-              <a:t>3) 자료 목록에서 2024년 행 → [다운로드] 클릭</a:t>
+              <a:t>1) Codex 데스크톱 앱 설치 + ChatGPT Plus/Pro 로그인</a:t>
             </a:r>
             <a:endParaRPr lang="en-US" sz="1700" dirty="0"/>
           </a:p>
@@ -6875,7 +6912,7 @@
                 <a:ea typeface="Noto Sans KR" pitchFamily="34" charset="-122"/>
                 <a:cs typeface="Noto Sans KR" pitchFamily="34" charset="-120"/>
               </a:rPr>
-              <a:t>   → 받아지는 파일명: 기간별_일평균_대기환경_정보_2024년.csv</a:t>
+              <a:t>   macOS: developers.openai.com/codex/app</a:t>
             </a:r>
             <a:endParaRPr lang="en-US" sz="1700" dirty="0"/>
           </a:p>
@@ -6895,7 +6932,7 @@
                 <a:ea typeface="Noto Sans KR" pitchFamily="34" charset="-122"/>
                 <a:cs typeface="Noto Sans KR" pitchFamily="34" charset="-120"/>
               </a:rPr>
-              <a:t>4) 같은 방식으로 2025년 행 다운로드</a:t>
+              <a:t>   Windows: Microsoft Store "Codex" 검색</a:t>
             </a:r>
             <a:endParaRPr lang="en-US" sz="1700" dirty="0"/>
           </a:p>
@@ -6915,7 +6952,7 @@
                 <a:ea typeface="Noto Sans KR" pitchFamily="34" charset="-122"/>
                 <a:cs typeface="Noto Sans KR" pitchFamily="34" charset="-120"/>
               </a:rPr>
-              <a:t>   → 받아지는 파일명: 기간별_일평균_대기환경_정보_2025년.csv</a:t>
+              <a:t>2) 작업 폴더는 그대로 (inflearn_ccd_challenge)</a:t>
             </a:r>
             <a:endParaRPr lang="en-US" sz="1700" dirty="0"/>
           </a:p>
@@ -6935,7 +6972,7 @@
                 <a:ea typeface="Noto Sans KR" pitchFamily="34" charset="-122"/>
                 <a:cs typeface="Noto Sans KR" pitchFamily="34" charset="-120"/>
               </a:rPr>
-              <a:t>5) 두 파일을 작업 폴더(inflearn_ccd_challenge)로 이동</a:t>
+              <a:t>3) ChatGPT 데스크톱 앱 채팅창에 자연어로 부탁:</a:t>
             </a:r>
             <a:endParaRPr lang="en-US" sz="1700" dirty="0"/>
           </a:p>
@@ -6946,6 +6983,17 @@
               </a:lnSpc>
               <a:buNone/>
             </a:pPr>
+            <a:r>
+              <a:rPr lang="en-US" sz="1700" dirty="0">
+                <a:solidFill>
+                  <a:srgbClr val="4A5568"/>
+                </a:solidFill>
+                <a:latin typeface="Noto Sans KR" pitchFamily="34" charset="0"/>
+                <a:ea typeface="Noto Sans KR" pitchFamily="34" charset="-122"/>
+                <a:cs typeface="Noto Sans KR" pitchFamily="34" charset="-120"/>
+              </a:rPr>
+              <a:t>   "내 노트북에 Codex CLI 설치해줘. 사전 준비도 같이.</a:t>
+            </a:r>
             <a:endParaRPr lang="en-US" sz="1700" dirty="0"/>
           </a:p>
           <a:p>
@@ -6964,7 +7012,47 @@
                 <a:ea typeface="Noto Sans KR" pitchFamily="34" charset="-122"/>
                 <a:cs typeface="Noto Sans KR" pitchFamily="34" charset="-120"/>
               </a:rPr>
-              <a:t>※ 받기 정말 어려운 분만 운영 채널로 강사에게 요청</a:t>
+              <a:t>   설치 끝나면 codex 명령어가 되는지 확인해줘.</a:t>
+            </a:r>
+            <a:endParaRPr lang="en-US" sz="1700" dirty="0"/>
+          </a:p>
+          <a:p>
+            <a:pPr indent="0" marL="0">
+              <a:lnSpc>
+                <a:spcPct val="155000"/>
+              </a:lnSpc>
+              <a:buNone/>
+            </a:pPr>
+            <a:r>
+              <a:rPr lang="en-US" sz="1700" dirty="0">
+                <a:solidFill>
+                  <a:srgbClr val="4A5568"/>
+                </a:solidFill>
+                <a:latin typeface="Noto Sans KR" pitchFamily="34" charset="0"/>
+                <a:ea typeface="Noto Sans KR" pitchFamily="34" charset="-122"/>
+                <a:cs typeface="Noto Sans KR" pitchFamily="34" charset="-120"/>
+              </a:rPr>
+              <a:t>   운영체제는 [Mac / Windows] 야."</a:t>
+            </a:r>
+            <a:endParaRPr lang="en-US" sz="1700" dirty="0"/>
+          </a:p>
+          <a:p>
+            <a:pPr indent="0" marL="0">
+              <a:lnSpc>
+                <a:spcPct val="155000"/>
+              </a:lnSpc>
+              <a:buNone/>
+            </a:pPr>
+            <a:r>
+              <a:rPr lang="en-US" sz="1700" dirty="0">
+                <a:solidFill>
+                  <a:srgbClr val="4A5568"/>
+                </a:solidFill>
+                <a:latin typeface="Noto Sans KR" pitchFamily="34" charset="0"/>
+                <a:ea typeface="Noto Sans KR" pitchFamily="34" charset="-122"/>
+                <a:cs typeface="Noto Sans KR" pitchFamily="34" charset="-120"/>
+              </a:rPr>
+              <a:t>4) codex 첫 실행 → ChatGPT 계정 인증 → 분석 시작</a:t>
             </a:r>
             <a:endParaRPr lang="en-US" sz="1700" dirty="0"/>
           </a:p>
@@ -7003,7 +7091,7 @@
                 <a:ea typeface="Noto Sans KR" pitchFamily="34" charset="-122"/>
                 <a:cs typeface="Noto Sans KR" pitchFamily="34" charset="-120"/>
               </a:rPr>
-              <a:t>18 / 31</a:t>
+              <a:t>18 / 34</a:t>
             </a:r>
             <a:endParaRPr lang="en-US" sz="900" dirty="0"/>
           </a:p>
@@ -7087,7 +7175,7 @@
                 <a:ea typeface="Noto Sans KR" pitchFamily="34" charset="-122"/>
                 <a:cs typeface="Noto Sans KR" pitchFamily="34" charset="-120"/>
               </a:rPr>
-              <a:t>DAY 1 · DATA SOURCE</a:t>
+              <a:t>파트 2. 환경 세팅 (Claude Desktop)</a:t>
             </a:r>
             <a:endParaRPr lang="en-US" sz="1400" dirty="0"/>
           </a:p>
@@ -7126,7 +7214,7 @@
                 <a:ea typeface="Noto Sans KR" pitchFamily="34" charset="-122"/>
                 <a:cs typeface="Noto Sans KR" pitchFamily="34" charset="-120"/>
               </a:rPr>
-              <a:t>오늘 만든 결과물</a:t>
+              <a:t>섹션 5 / 5</a:t>
             </a:r>
             <a:endParaRPr lang="en-US" sz="1100" dirty="0"/>
           </a:p>
@@ -7140,8 +7228,8 @@
         </p:nvSpPr>
         <p:spPr>
           <a:xfrm>
-            <a:off x="548640" y="1417320"/>
-            <a:ext cx="11091672" cy="640080"/>
+            <a:off x="548640" y="1508760"/>
+            <a:ext cx="11091672" cy="1371600"/>
           </a:xfrm>
           <a:prstGeom prst="rect">
             <a:avLst/>
@@ -7154,10 +7242,13 @@
           <a:lstStyle/>
           <a:p>
             <a:pPr indent="0" marL="0">
-              <a:buNone/>
-            </a:pPr>
-            <a:r>
-              <a:rPr lang="en-US" sz="2800" b="1" spc="-30" kern="0" dirty="0">
+              <a:lnSpc>
+                <a:spcPct val="110000"/>
+              </a:lnSpc>
+              <a:buNone/>
+            </a:pPr>
+            <a:r>
+              <a:rPr lang="en-US" sz="4200" b="1" spc="-50" kern="0" dirty="0">
                 <a:solidFill>
                   <a:srgbClr val="1A1F36"/>
                 </a:solidFill>
@@ -7165,9 +7256,9 @@
                 <a:ea typeface="Noto Sans KR" pitchFamily="34" charset="-122"/>
                 <a:cs typeface="Noto Sans KR" pitchFamily="34" charset="-120"/>
               </a:rPr>
-              <a:t>서울 열린데이터광장 OA-2218 — 다운로드 화면</a:t>
-            </a:r>
-            <a:endParaRPr lang="en-US" sz="2800" dirty="0"/>
+              <a:t>만능 해결법 — 에러는 Claude에게 그대로 보여주세요</a:t>
+            </a:r>
+            <a:endParaRPr lang="en-US" sz="4200" dirty="0"/>
           </a:p>
         </p:txBody>
       </p:sp>
@@ -7179,22 +7270,18 @@
         </p:nvSpPr>
         <p:spPr>
           <a:xfrm>
-            <a:off x="2194560" y="2240280"/>
-            <a:ext cx="7772400" cy="3657600"/>
-          </a:xfrm>
-          <a:prstGeom prst="roundRect">
-            <a:avLst>
-              <a:gd name="adj" fmla="val 3000"/>
-            </a:avLst>
-          </a:prstGeom>
-          <a:solidFill>
-            <a:srgbClr val="F5F7FA"/>
-          </a:solidFill>
-          <a:ln w="12700">
+            <a:off x="548640" y="2971800"/>
+            <a:ext cx="1828800" cy="0"/>
+          </a:xfrm>
+          <a:prstGeom prst="line">
+            <a:avLst/>
+          </a:prstGeom>
+          <a:noFill/>
+          <a:ln w="25400">
             <a:solidFill>
-              <a:srgbClr val="CBD5E0"/>
+              <a:srgbClr val="4A7BF7"/>
             </a:solidFill>
-            <a:prstDash val="dash"/>
+            <a:prstDash val="solid"/>
           </a:ln>
         </p:spPr>
       </p:sp>
@@ -7206,141 +7293,132 @@
         </p:nvSpPr>
         <p:spPr>
           <a:xfrm>
-            <a:off x="2194560" y="3703320"/>
-            <a:ext cx="7772400" cy="731520"/>
-          </a:xfrm>
-          <a:prstGeom prst="rect">
-            <a:avLst/>
-          </a:prstGeom>
-          <a:noFill/>
-          <a:ln/>
-        </p:spPr>
-        <p:txBody>
-          <a:bodyPr wrap="square" rtlCol="0" anchor="ctr"/>
-          <a:lstStyle/>
-          <a:p>
-            <a:pPr algn="ctr" indent="0" marL="0">
+            <a:off x="548640" y="3200400"/>
+            <a:ext cx="11091672" cy="2788920"/>
+          </a:xfrm>
+          <a:prstGeom prst="rect">
+            <a:avLst/>
+          </a:prstGeom>
+          <a:noFill/>
+          <a:ln/>
+        </p:spPr>
+        <p:txBody>
+          <a:bodyPr wrap="square" rtlCol="0" anchor="t"/>
+          <a:lstStyle/>
+          <a:p>
+            <a:pPr indent="0" marL="0">
               <a:lnSpc>
-                <a:spcPct val="140000"/>
+                <a:spcPct val="155000"/>
               </a:lnSpc>
               <a:buNone/>
             </a:pPr>
             <a:r>
-              <a:rPr lang="en-US" sz="1400" i="1" dirty="0">
-                <a:solidFill>
-                  <a:srgbClr val="718096"/>
-                </a:solidFill>
-                <a:latin typeface="Noto Sans KR" pitchFamily="34" charset="0"/>
-                <a:ea typeface="Noto Sans KR" pitchFamily="34" charset="-122"/>
-                <a:cs typeface="Noto Sans KR" pitchFamily="34" charset="-120"/>
-              </a:rPr>
-              <a:t>📷  결과 이미지 위치</a:t>
-            </a:r>
-            <a:endParaRPr lang="en-US" sz="1400" dirty="0"/>
-          </a:p>
-          <a:p>
-            <a:pPr algn="ctr" indent="0" marL="0">
+              <a:rPr lang="en-US" sz="1700" dirty="0">
+                <a:solidFill>
+                  <a:srgbClr val="4A5568"/>
+                </a:solidFill>
+                <a:latin typeface="Noto Sans KR" pitchFamily="34" charset="0"/>
+                <a:ea typeface="Noto Sans KR" pitchFamily="34" charset="-122"/>
+                <a:cs typeface="Noto Sans KR" pitchFamily="34" charset="-120"/>
+              </a:rPr>
+              <a:t>· 어떤 에러든, 어떤 막힘이든 → 에러 메시지를 그대로 복사</a:t>
+            </a:r>
+            <a:endParaRPr lang="en-US" sz="1700" dirty="0"/>
+          </a:p>
+          <a:p>
+            <a:pPr indent="0" marL="0">
               <a:lnSpc>
-                <a:spcPct val="140000"/>
+                <a:spcPct val="155000"/>
               </a:lnSpc>
               <a:buNone/>
             </a:pPr>
             <a:r>
-              <a:rPr lang="en-US" sz="1400" i="1" dirty="0">
-                <a:solidFill>
-                  <a:srgbClr val="718096"/>
-                </a:solidFill>
-                <a:latin typeface="Noto Sans KR" pitchFamily="34" charset="0"/>
-                <a:ea typeface="Noto Sans KR" pitchFamily="34" charset="-122"/>
-                <a:cs typeface="Noto Sans KR" pitchFamily="34" charset="-120"/>
-              </a:rPr>
-              <a:t>(강의 시연 캡처가 들어갈 자리)</a:t>
-            </a:r>
-            <a:endParaRPr lang="en-US" sz="1400" dirty="0"/>
+              <a:rPr lang="en-US" sz="1700" dirty="0">
+                <a:solidFill>
+                  <a:srgbClr val="4A5568"/>
+                </a:solidFill>
+                <a:latin typeface="Noto Sans KR" pitchFamily="34" charset="0"/>
+                <a:ea typeface="Noto Sans KR" pitchFamily="34" charset="-122"/>
+                <a:cs typeface="Noto Sans KR" pitchFamily="34" charset="-120"/>
+              </a:rPr>
+              <a:t>· Claude Desktop 또는 Claude Code에 붙여넣고 "이거 어떻게 해결해?"</a:t>
+            </a:r>
+            <a:endParaRPr lang="en-US" sz="1700" dirty="0"/>
+          </a:p>
+          <a:p>
+            <a:pPr indent="0" marL="0">
+              <a:lnSpc>
+                <a:spcPct val="155000"/>
+              </a:lnSpc>
+              <a:buNone/>
+            </a:pPr>
+            <a:r>
+              <a:rPr lang="en-US" sz="1700" dirty="0">
+                <a:solidFill>
+                  <a:srgbClr val="4A5568"/>
+                </a:solidFill>
+                <a:latin typeface="Noto Sans KR" pitchFamily="34" charset="0"/>
+                <a:ea typeface="Noto Sans KR" pitchFamily="34" charset="-122"/>
+                <a:cs typeface="Noto Sans KR" pitchFamily="34" charset="-120"/>
+              </a:rPr>
+              <a:t>· Claude가 원인 진단 + 직접 고치기까지 한 번에</a:t>
+            </a:r>
+            <a:endParaRPr lang="en-US" sz="1700" dirty="0"/>
+          </a:p>
+          <a:p>
+            <a:pPr indent="0" marL="0">
+              <a:lnSpc>
+                <a:spcPct val="155000"/>
+              </a:lnSpc>
+              <a:buNone/>
+            </a:pPr>
+            <a:r>
+              <a:rPr lang="en-US" sz="1700" dirty="0">
+                <a:solidFill>
+                  <a:srgbClr val="4A5568"/>
+                </a:solidFill>
+                <a:latin typeface="Noto Sans KR" pitchFamily="34" charset="0"/>
+                <a:ea typeface="Noto Sans KR" pitchFamily="34" charset="-122"/>
+                <a:cs typeface="Noto Sans KR" pitchFamily="34" charset="-120"/>
+              </a:rPr>
+              <a:t>· 검색·스택오버플로우 → 더 이상 필요 없음</a:t>
+            </a:r>
+            <a:endParaRPr lang="en-US" sz="1700" dirty="0"/>
+          </a:p>
+          <a:p>
+            <a:pPr indent="0" marL="0">
+              <a:lnSpc>
+                <a:spcPct val="155000"/>
+              </a:lnSpc>
+              <a:buNone/>
+            </a:pPr>
+            <a:endParaRPr lang="en-US" sz="1700" dirty="0"/>
+          </a:p>
+          <a:p>
+            <a:pPr indent="0" marL="0">
+              <a:lnSpc>
+                <a:spcPct val="155000"/>
+              </a:lnSpc>
+              <a:buNone/>
+            </a:pPr>
+            <a:r>
+              <a:rPr lang="en-US" sz="1700" dirty="0">
+                <a:solidFill>
+                  <a:srgbClr val="4A5568"/>
+                </a:solidFill>
+                <a:latin typeface="Noto Sans KR" pitchFamily="34" charset="0"/>
+                <a:ea typeface="Noto Sans KR" pitchFamily="34" charset="-122"/>
+                <a:cs typeface="Noto Sans KR" pitchFamily="34" charset="-120"/>
+              </a:rPr>
+              <a:t>· 머리 싸매지 말고 일단 물어보기 — 라이브 강의 트러블도 이 한 가지로 다 풀립니다</a:t>
+            </a:r>
+            <a:endParaRPr lang="en-US" sz="1700" dirty="0"/>
           </a:p>
         </p:txBody>
       </p:sp>
       <p:sp>
         <p:nvSpPr>
           <p:cNvPr id="8" name="Text 6"/>
-          <p:cNvSpPr/>
-          <p:nvPr/>
-        </p:nvSpPr>
-        <p:spPr>
-          <a:xfrm>
-            <a:off x="2194560" y="4983480"/>
-            <a:ext cx="7772400" cy="365760"/>
-          </a:xfrm>
-          <a:prstGeom prst="rect">
-            <a:avLst/>
-          </a:prstGeom>
-          <a:noFill/>
-          <a:ln/>
-        </p:spPr>
-        <p:txBody>
-          <a:bodyPr wrap="square" rtlCol="0" anchor="ctr"/>
-          <a:lstStyle/>
-          <a:p>
-            <a:pPr algn="ctr" indent="0" marL="0">
-              <a:buNone/>
-            </a:pPr>
-            <a:r>
-              <a:rPr lang="en-US" sz="1000" i="1" dirty="0">
-                <a:solidFill>
-                  <a:srgbClr val="718096"/>
-                </a:solidFill>
-                <a:latin typeface="Roboto Mono" pitchFamily="34" charset="0"/>
-                <a:ea typeface="Roboto Mono" pitchFamily="34" charset="-122"/>
-                <a:cs typeface="Roboto Mono" pitchFamily="34" charset="-120"/>
-              </a:rPr>
-              <a:t>screenshots/day1/seoul_open_data_oa2218.png</a:t>
-            </a:r>
-            <a:endParaRPr lang="en-US" sz="1000" dirty="0"/>
-          </a:p>
-        </p:txBody>
-      </p:sp>
-      <p:sp>
-        <p:nvSpPr>
-          <p:cNvPr id="9" name="Text 7"/>
-          <p:cNvSpPr/>
-          <p:nvPr/>
-        </p:nvSpPr>
-        <p:spPr>
-          <a:xfrm>
-            <a:off x="548640" y="5989320"/>
-            <a:ext cx="11091672" cy="411480"/>
-          </a:xfrm>
-          <a:prstGeom prst="rect">
-            <a:avLst/>
-          </a:prstGeom>
-          <a:noFill/>
-          <a:ln/>
-        </p:spPr>
-        <p:txBody>
-          <a:bodyPr wrap="square" rtlCol="0" anchor="ctr"/>
-          <a:lstStyle/>
-          <a:p>
-            <a:pPr algn="ctr" indent="0" marL="0">
-              <a:buNone/>
-            </a:pPr>
-            <a:r>
-              <a:rPr lang="en-US" sz="1200" i="1" dirty="0">
-                <a:solidFill>
-                  <a:srgbClr val="718096"/>
-                </a:solidFill>
-                <a:latin typeface="Noto Sans KR" pitchFamily="34" charset="0"/>
-                <a:ea typeface="Noto Sans KR" pitchFamily="34" charset="-122"/>
-                <a:cs typeface="Noto Sans KR" pitchFamily="34" charset="-120"/>
-              </a:rPr>
-              <a:t>"파일" 탭에서 2024·2025 두 해 CSV 다운로드</a:t>
-            </a:r>
-            <a:endParaRPr lang="en-US" sz="1200" dirty="0"/>
-          </a:p>
-        </p:txBody>
-      </p:sp>
-      <p:sp>
-        <p:nvSpPr>
-          <p:cNvPr id="10" name="Text 8"/>
           <p:cNvSpPr/>
           <p:nvPr/>
         </p:nvSpPr>
@@ -7371,7 +7449,7 @@
                 <a:ea typeface="Noto Sans KR" pitchFamily="34" charset="-122"/>
                 <a:cs typeface="Noto Sans KR" pitchFamily="34" charset="-120"/>
               </a:rPr>
-              <a:t>19 / 31</a:t>
+              <a:t>19 / 34</a:t>
             </a:r>
             <a:endParaRPr lang="en-US" sz="900" dirty="0"/>
           </a:p>
@@ -8391,7 +8469,7 @@
                 <a:ea typeface="Noto Sans KR" pitchFamily="34" charset="-122"/>
                 <a:cs typeface="Noto Sans KR" pitchFamily="34" charset="-120"/>
               </a:rPr>
-              <a:t>2 / 31</a:t>
+              <a:t>2 / 34</a:t>
             </a:r>
             <a:endParaRPr lang="en-US" sz="900" dirty="0"/>
           </a:p>
@@ -8430,8 +8508,28 @@
         </p:nvSpPr>
         <p:spPr>
           <a:xfrm>
-            <a:off x="548640" y="384048"/>
-            <a:ext cx="914400" cy="54864"/>
+            <a:off x="0" y="0"/>
+            <a:ext cx="12192000" cy="6858000"/>
+          </a:xfrm>
+          <a:prstGeom prst="rect">
+            <a:avLst/>
+          </a:prstGeom>
+          <a:solidFill>
+            <a:srgbClr val="1A1F36"/>
+          </a:solidFill>
+          <a:ln/>
+        </p:spPr>
+      </p:sp>
+      <p:sp>
+        <p:nvSpPr>
+          <p:cNvPr id="3" name="Shape 1"/>
+          <p:cNvSpPr/>
+          <p:nvPr/>
+        </p:nvSpPr>
+        <p:spPr>
+          <a:xfrm>
+            <a:off x="9875520" y="0"/>
+            <a:ext cx="2313432" cy="6858000"/>
           </a:xfrm>
           <a:prstGeom prst="rect">
             <a:avLst/>
@@ -8444,14 +8542,14 @@
       </p:sp>
       <p:sp>
         <p:nvSpPr>
-          <p:cNvPr id="3" name="Text 1"/>
-          <p:cNvSpPr/>
-          <p:nvPr/>
-        </p:nvSpPr>
-        <p:spPr>
-          <a:xfrm>
-            <a:off x="548640" y="530352"/>
-            <a:ext cx="10515600" cy="411480"/>
+          <p:cNvPr id="4" name="Text 2"/>
+          <p:cNvSpPr/>
+          <p:nvPr/>
+        </p:nvSpPr>
+        <p:spPr>
+          <a:xfrm>
+            <a:off x="731520" y="1828800"/>
+            <a:ext cx="10515600" cy="457200"/>
           </a:xfrm>
           <a:prstGeom prst="rect">
             <a:avLst/>
@@ -8467,15 +8565,15 @@
               <a:buNone/>
             </a:pPr>
             <a:r>
-              <a:rPr lang="en-US" sz="1400" b="1" spc="50" kern="0" dirty="0">
-                <a:solidFill>
-                  <a:srgbClr val="718096"/>
-                </a:solidFill>
-                <a:latin typeface="Noto Sans KR" pitchFamily="34" charset="0"/>
-                <a:ea typeface="Noto Sans KR" pitchFamily="34" charset="-122"/>
-                <a:cs typeface="Noto Sans KR" pitchFamily="34" charset="-120"/>
-              </a:rPr>
-              <a:t>파트 3. 데이터 다운로드 + 첫 분석 + CLAUDE.md</a:t>
+              <a:rPr lang="en-US" sz="1400" b="1" spc="500" kern="0" dirty="0">
+                <a:solidFill>
+                  <a:srgbClr val="4A7BF7"/>
+                </a:solidFill>
+                <a:latin typeface="Noto Sans KR" pitchFamily="34" charset="0"/>
+                <a:ea typeface="Noto Sans KR" pitchFamily="34" charset="-122"/>
+                <a:cs typeface="Noto Sans KR" pitchFamily="34" charset="-120"/>
+              </a:rPr>
+              <a:t>PART 3</a:t>
             </a:r>
             <a:endParaRPr lang="en-US" sz="1400" dirty="0"/>
           </a:p>
@@ -8483,14 +8581,14 @@
       </p:sp>
       <p:sp>
         <p:nvSpPr>
-          <p:cNvPr id="4" name="Text 2"/>
-          <p:cNvSpPr/>
-          <p:nvPr/>
-        </p:nvSpPr>
-        <p:spPr>
-          <a:xfrm>
-            <a:off x="548640" y="960120"/>
-            <a:ext cx="10515600" cy="292608"/>
+          <p:cNvPr id="5" name="Text 3"/>
+          <p:cNvSpPr/>
+          <p:nvPr/>
+        </p:nvSpPr>
+        <p:spPr>
+          <a:xfrm>
+            <a:off x="731520" y="2468880"/>
+            <a:ext cx="10515600" cy="1645920"/>
           </a:xfrm>
           <a:prstGeom prst="rect">
             <a:avLst/>
@@ -8503,62 +8601,43 @@
           <a:lstStyle/>
           <a:p>
             <a:pPr indent="0" marL="0">
-              <a:buNone/>
-            </a:pPr>
-            <a:r>
-              <a:rPr lang="en-US" sz="1100" b="1" spc="150" kern="0" dirty="0">
-                <a:solidFill>
-                  <a:srgbClr val="4A7BF7"/>
-                </a:solidFill>
-                <a:latin typeface="Noto Sans KR" pitchFamily="34" charset="0"/>
-                <a:ea typeface="Noto Sans KR" pitchFamily="34" charset="-122"/>
-                <a:cs typeface="Noto Sans KR" pitchFamily="34" charset="-120"/>
-              </a:rPr>
-              <a:t>섹션 2 / 4</a:t>
-            </a:r>
-            <a:endParaRPr lang="en-US" sz="1100" dirty="0"/>
-          </a:p>
-        </p:txBody>
-      </p:sp>
-      <p:sp>
-        <p:nvSpPr>
-          <p:cNvPr id="5" name="Text 3"/>
-          <p:cNvSpPr/>
-          <p:nvPr/>
-        </p:nvSpPr>
-        <p:spPr>
-          <a:xfrm>
-            <a:off x="548640" y="1508760"/>
-            <a:ext cx="11091672" cy="1371600"/>
-          </a:xfrm>
-          <a:prstGeom prst="rect">
-            <a:avLst/>
-          </a:prstGeom>
-          <a:noFill/>
-          <a:ln/>
-        </p:spPr>
-        <p:txBody>
-          <a:bodyPr wrap="square" rtlCol="0" anchor="t"/>
-          <a:lstStyle/>
-          <a:p>
-            <a:pPr indent="0" marL="0">
               <a:lnSpc>
-                <a:spcPct val="110000"/>
+                <a:spcPct val="115000"/>
               </a:lnSpc>
               <a:buNone/>
             </a:pPr>
             <a:r>
-              <a:rPr lang="en-US" sz="4200" b="1" spc="-50" kern="0" dirty="0">
-                <a:solidFill>
-                  <a:srgbClr val="1A1F36"/>
-                </a:solidFill>
-                <a:latin typeface="Noto Sans KR" pitchFamily="34" charset="0"/>
-                <a:ea typeface="Noto Sans KR" pitchFamily="34" charset="-122"/>
-                <a:cs typeface="Noto Sans KR" pitchFamily="34" charset="-120"/>
-              </a:rPr>
-              <a:t>데이터 한눈에 보기</a:t>
-            </a:r>
-            <a:endParaRPr lang="en-US" sz="4200" dirty="0"/>
+              <a:rPr lang="en-US" sz="5400" b="1" spc="-50" kern="0" dirty="0">
+                <a:solidFill>
+                  <a:srgbClr val="FFFFFF"/>
+                </a:solidFill>
+                <a:latin typeface="Noto Sans KR" pitchFamily="34" charset="0"/>
+                <a:ea typeface="Noto Sans KR" pitchFamily="34" charset="-122"/>
+                <a:cs typeface="Noto Sans KR" pitchFamily="34" charset="-120"/>
+              </a:rPr>
+              <a:t>데이터 다운로드 +</a:t>
+            </a:r>
+            <a:endParaRPr lang="en-US" sz="5400" dirty="0"/>
+          </a:p>
+          <a:p>
+            <a:pPr indent="0" marL="0">
+              <a:lnSpc>
+                <a:spcPct val="115000"/>
+              </a:lnSpc>
+              <a:buNone/>
+            </a:pPr>
+            <a:r>
+              <a:rPr lang="en-US" sz="5400" b="1" spc="-50" kern="0" dirty="0">
+                <a:solidFill>
+                  <a:srgbClr val="FFFFFF"/>
+                </a:solidFill>
+                <a:latin typeface="Noto Sans KR" pitchFamily="34" charset="0"/>
+                <a:ea typeface="Noto Sans KR" pitchFamily="34" charset="-122"/>
+                <a:cs typeface="Noto Sans KR" pitchFamily="34" charset="-120"/>
+              </a:rPr>
+              <a:t>첫 분석 + CLAUDE.md</a:t>
+            </a:r>
+            <a:endParaRPr lang="en-US" sz="5400" dirty="0"/>
           </a:p>
         </p:txBody>
       </p:sp>
@@ -8570,14 +8649,14 @@
         </p:nvSpPr>
         <p:spPr>
           <a:xfrm>
-            <a:off x="548640" y="2971800"/>
-            <a:ext cx="1828800" cy="0"/>
+            <a:off x="731520" y="4297680"/>
+            <a:ext cx="3200400" cy="0"/>
           </a:xfrm>
           <a:prstGeom prst="line">
             <a:avLst/>
           </a:prstGeom>
           <a:noFill/>
-          <a:ln w="25400">
+          <a:ln w="19050">
             <a:solidFill>
               <a:srgbClr val="4A7BF7"/>
             </a:solidFill>
@@ -8593,117 +8672,37 @@
         </p:nvSpPr>
         <p:spPr>
           <a:xfrm>
-            <a:off x="548640" y="3200400"/>
-            <a:ext cx="11091672" cy="2788920"/>
-          </a:xfrm>
-          <a:prstGeom prst="rect">
-            <a:avLst/>
-          </a:prstGeom>
-          <a:noFill/>
-          <a:ln/>
-        </p:spPr>
-        <p:txBody>
-          <a:bodyPr wrap="square" rtlCol="0" anchor="t"/>
+            <a:off x="731520" y="4526280"/>
+            <a:ext cx="10515600" cy="548640"/>
+          </a:xfrm>
+          <a:prstGeom prst="rect">
+            <a:avLst/>
+          </a:prstGeom>
+          <a:noFill/>
+          <a:ln/>
+        </p:spPr>
+        <p:txBody>
+          <a:bodyPr wrap="square" rtlCol="0" anchor="ctr"/>
           <a:lstStyle/>
           <a:p>
             <a:pPr indent="0" marL="0">
               <a:lnSpc>
-                <a:spcPct val="155000"/>
+                <a:spcPct val="150000"/>
               </a:lnSpc>
               <a:buNone/>
             </a:pPr>
             <a:r>
-              <a:rPr lang="en-US" sz="1700" dirty="0">
-                <a:solidFill>
-                  <a:srgbClr val="4A5568"/>
-                </a:solidFill>
-                <a:latin typeface="Noto Sans KR" pitchFamily="34" charset="0"/>
-                <a:ea typeface="Noto Sans KR" pitchFamily="34" charset="-122"/>
-                <a:cs typeface="Noto Sans KR" pitchFamily="34" charset="-120"/>
-              </a:rPr>
-              <a:t>· 규모: 18,275행 (2024: 9,150 + 2025: 9,125)</a:t>
-            </a:r>
-            <a:endParaRPr lang="en-US" sz="1700" dirty="0"/>
-          </a:p>
-          <a:p>
-            <a:pPr indent="0" marL="0">
-              <a:lnSpc>
-                <a:spcPct val="155000"/>
-              </a:lnSpc>
-              <a:buNone/>
-            </a:pPr>
-            <a:r>
-              <a:rPr lang="en-US" sz="1700" dirty="0">
-                <a:solidFill>
-                  <a:srgbClr val="4A5568"/>
-                </a:solidFill>
-                <a:latin typeface="Noto Sans KR" pitchFamily="34" charset="0"/>
-                <a:ea typeface="Noto Sans KR" pitchFamily="34" charset="-122"/>
-                <a:cs typeface="Noto Sans KR" pitchFamily="34" charset="-120"/>
-              </a:rPr>
-              <a:t>· 컬럼 9개: 측정일시·권역명·측정소명·이산화질소·오존·일산화탄소·아황산가스·미세먼지·초미세먼지</a:t>
-            </a:r>
-            <a:endParaRPr lang="en-US" sz="1700" dirty="0"/>
-          </a:p>
-          <a:p>
-            <a:pPr indent="0" marL="0">
-              <a:lnSpc>
-                <a:spcPct val="155000"/>
-              </a:lnSpc>
-              <a:buNone/>
-            </a:pPr>
-            <a:r>
-              <a:rPr lang="en-US" sz="1700" dirty="0">
-                <a:solidFill>
-                  <a:srgbClr val="4A5568"/>
-                </a:solidFill>
-                <a:latin typeface="Noto Sans KR" pitchFamily="34" charset="0"/>
-                <a:ea typeface="Noto Sans KR" pitchFamily="34" charset="-122"/>
-                <a:cs typeface="Noto Sans KR" pitchFamily="34" charset="-120"/>
-              </a:rPr>
-              <a:t>· 인코딩: CP949 (한글이 EUC-KR 방식)</a:t>
-            </a:r>
-            <a:endParaRPr lang="en-US" sz="1700" dirty="0"/>
-          </a:p>
-          <a:p>
-            <a:pPr indent="0" marL="0">
-              <a:lnSpc>
-                <a:spcPct val="155000"/>
-              </a:lnSpc>
-              <a:buNone/>
-            </a:pPr>
-            <a:r>
-              <a:rPr lang="en-US" sz="1700" dirty="0">
-                <a:solidFill>
-                  <a:srgbClr val="4A5568"/>
-                </a:solidFill>
-                <a:latin typeface="Noto Sans KR" pitchFamily="34" charset="0"/>
-                <a:ea typeface="Noto Sans KR" pitchFamily="34" charset="-122"/>
-                <a:cs typeface="Noto Sans KR" pitchFamily="34" charset="-120"/>
-              </a:rPr>
-              <a:t>· 컬럼명 살짝 다름: 2024 "미세먼지" vs 2025 "미세먼지농도"</a:t>
-            </a:r>
-            <a:endParaRPr lang="en-US" sz="1700" dirty="0"/>
-          </a:p>
-          <a:p>
-            <a:pPr indent="0" marL="0">
-              <a:lnSpc>
-                <a:spcPct val="155000"/>
-              </a:lnSpc>
-              <a:buNone/>
-            </a:pPr>
-            <a:r>
-              <a:rPr lang="en-US" sz="1700" dirty="0">
-                <a:solidFill>
-                  <a:srgbClr val="4A5568"/>
-                </a:solidFill>
-                <a:latin typeface="Noto Sans KR" pitchFamily="34" charset="0"/>
-                <a:ea typeface="Noto Sans KR" pitchFamily="34" charset="-122"/>
-                <a:cs typeface="Noto Sans KR" pitchFamily="34" charset="-120"/>
-              </a:rPr>
-              <a:t>· 측정소: 서울 25개 자치구</a:t>
-            </a:r>
-            <a:endParaRPr lang="en-US" sz="1700" dirty="0"/>
+              <a:rPr lang="en-US" sz="1600" dirty="0">
+                <a:solidFill>
+                  <a:srgbClr val="A0AEC0"/>
+                </a:solidFill>
+                <a:latin typeface="Noto Sans KR" pitchFamily="34" charset="0"/>
+                <a:ea typeface="Noto Sans KR" pitchFamily="34" charset="-122"/>
+                <a:cs typeface="Noto Sans KR" pitchFamily="34" charset="-120"/>
+              </a:rPr>
+              <a:t>직접 다운로드 → 직접 프롬프트 → 직접 산출물 정리</a:t>
+            </a:r>
+            <a:endParaRPr lang="en-US" sz="1600" dirty="0"/>
           </a:p>
         </p:txBody>
       </p:sp>
@@ -8740,7 +8739,7 @@
                 <a:ea typeface="Noto Sans KR" pitchFamily="34" charset="-122"/>
                 <a:cs typeface="Noto Sans KR" pitchFamily="34" charset="-120"/>
               </a:rPr>
-              <a:t>20 / 31</a:t>
+              <a:t>20 / 34</a:t>
             </a:r>
             <a:endParaRPr lang="en-US" sz="900" dirty="0"/>
           </a:p>
@@ -8839,7 +8838,7 @@
         <p:spPr>
           <a:xfrm>
             <a:off x="548640" y="960120"/>
-            <a:ext cx="11091672" cy="292608"/>
+            <a:ext cx="10515600" cy="292608"/>
           </a:xfrm>
           <a:prstGeom prst="rect">
             <a:avLst/>
@@ -8855,7 +8854,7 @@
               <a:buNone/>
             </a:pPr>
             <a:r>
-              <a:rPr lang="en-US" sz="1100" b="1" spc="50" kern="0" dirty="0">
+              <a:rPr lang="en-US" sz="1100" b="1" spc="150" kern="0" dirty="0">
                 <a:solidFill>
                   <a:srgbClr val="4A7BF7"/>
                 </a:solidFill>
@@ -8863,7 +8862,7 @@
                 <a:ea typeface="Noto Sans KR" pitchFamily="34" charset="-122"/>
                 <a:cs typeface="Noto Sans KR" pitchFamily="34" charset="-120"/>
               </a:rPr>
-              <a:t>👉 직접 따라쳐보세요 — 본인 Claude Code에 그대로 붙여넣기</a:t>
+              <a:t>섹션 1 / 4</a:t>
             </a:r>
             <a:endParaRPr lang="en-US" sz="1100" dirty="0"/>
           </a:p>
@@ -8878,7 +8877,7 @@
         <p:spPr>
           <a:xfrm>
             <a:off x="548640" y="1508760"/>
-            <a:ext cx="11091672" cy="1005840"/>
+            <a:ext cx="11091672" cy="1371600"/>
           </a:xfrm>
           <a:prstGeom prst="rect">
             <a:avLst/>
@@ -8892,12 +8891,12 @@
           <a:p>
             <a:pPr indent="0" marL="0">
               <a:lnSpc>
-                <a:spcPct val="115000"/>
+                <a:spcPct val="110000"/>
               </a:lnSpc>
               <a:buNone/>
             </a:pPr>
             <a:r>
-              <a:rPr lang="en-US" sz="3400" b="1" spc="-50" kern="0" dirty="0">
+              <a:rPr lang="en-US" sz="4200" b="1" spc="-50" kern="0" dirty="0">
                 <a:solidFill>
                   <a:srgbClr val="1A1F36"/>
                 </a:solidFill>
@@ -8905,9 +8904,9 @@
                 <a:ea typeface="Noto Sans KR" pitchFamily="34" charset="-122"/>
                 <a:cs typeface="Noto Sans KR" pitchFamily="34" charset="-120"/>
               </a:rPr>
-              <a:t>2단계 — 이 데이터, 어떻게 생겼지?</a:t>
-            </a:r>
-            <a:endParaRPr lang="en-US" sz="3400" dirty="0"/>
+              <a:t>1단계 — 미세먼지 데이터 다운로드</a:t>
+            </a:r>
+            <a:endParaRPr lang="en-US" sz="4200" dirty="0"/>
           </a:p>
         </p:txBody>
       </p:sp>
@@ -8919,7 +8918,7 @@
         </p:nvSpPr>
         <p:spPr>
           <a:xfrm>
-            <a:off x="548640" y="2606040"/>
+            <a:off x="548640" y="2971800"/>
             <a:ext cx="1828800" cy="0"/>
           </a:xfrm>
           <a:prstGeom prst="line">
@@ -8936,156 +8935,198 @@
       </p:sp>
       <p:sp>
         <p:nvSpPr>
-          <p:cNvPr id="7" name="Shape 5"/>
-          <p:cNvSpPr/>
-          <p:nvPr/>
-        </p:nvSpPr>
-        <p:spPr>
-          <a:xfrm>
-            <a:off x="548640" y="2926080"/>
-            <a:ext cx="11091672" cy="3200400"/>
-          </a:xfrm>
-          <a:prstGeom prst="roundRect">
-            <a:avLst>
-              <a:gd name="adj" fmla="val 1714"/>
-            </a:avLst>
-          </a:prstGeom>
-          <a:solidFill>
-            <a:srgbClr val="F1F5F9"/>
-          </a:solidFill>
-          <a:ln w="6350">
-            <a:solidFill>
-              <a:srgbClr val="E2E8F0"/>
-            </a:solidFill>
-            <a:prstDash val="solid"/>
-          </a:ln>
-        </p:spPr>
+          <p:cNvPr id="7" name="Text 5"/>
+          <p:cNvSpPr/>
+          <p:nvPr/>
+        </p:nvSpPr>
+        <p:spPr>
+          <a:xfrm>
+            <a:off x="548640" y="3200400"/>
+            <a:ext cx="11091672" cy="2788920"/>
+          </a:xfrm>
+          <a:prstGeom prst="rect">
+            <a:avLst/>
+          </a:prstGeom>
+          <a:noFill/>
+          <a:ln/>
+        </p:spPr>
+        <p:txBody>
+          <a:bodyPr wrap="square" rtlCol="0" anchor="t"/>
+          <a:lstStyle/>
+          <a:p>
+            <a:pPr indent="0" marL="0">
+              <a:lnSpc>
+                <a:spcPct val="155000"/>
+              </a:lnSpc>
+              <a:buNone/>
+            </a:pPr>
+            <a:r>
+              <a:rPr lang="en-US" sz="1700" dirty="0">
+                <a:solidFill>
+                  <a:srgbClr val="4A5568"/>
+                </a:solidFill>
+                <a:latin typeface="Noto Sans KR" pitchFamily="34" charset="0"/>
+                <a:ea typeface="Noto Sans KR" pitchFamily="34" charset="-122"/>
+                <a:cs typeface="Noto Sans KR" pitchFamily="34" charset="-120"/>
+              </a:rPr>
+              <a:t>1) https://data.seoul.go.kr/dataList/OA-2218/S/1/datasetView.do 접속</a:t>
+            </a:r>
+            <a:endParaRPr lang="en-US" sz="1700" dirty="0"/>
+          </a:p>
+          <a:p>
+            <a:pPr indent="0" marL="0">
+              <a:lnSpc>
+                <a:spcPct val="155000"/>
+              </a:lnSpc>
+              <a:buNone/>
+            </a:pPr>
+            <a:r>
+              <a:rPr lang="en-US" sz="1700" dirty="0">
+                <a:solidFill>
+                  <a:srgbClr val="4A5568"/>
+                </a:solidFill>
+                <a:latin typeface="Noto Sans KR" pitchFamily="34" charset="0"/>
+                <a:ea typeface="Noto Sans KR" pitchFamily="34" charset="-122"/>
+                <a:cs typeface="Noto Sans KR" pitchFamily="34" charset="-120"/>
+              </a:rPr>
+              <a:t>2) 페이지 상단 탭 중 "파일" 클릭</a:t>
+            </a:r>
+            <a:endParaRPr lang="en-US" sz="1700" dirty="0"/>
+          </a:p>
+          <a:p>
+            <a:pPr indent="0" marL="0">
+              <a:lnSpc>
+                <a:spcPct val="155000"/>
+              </a:lnSpc>
+              <a:buNone/>
+            </a:pPr>
+            <a:r>
+              <a:rPr lang="en-US" sz="1700" dirty="0">
+                <a:solidFill>
+                  <a:srgbClr val="4A5568"/>
+                </a:solidFill>
+                <a:latin typeface="Noto Sans KR" pitchFamily="34" charset="0"/>
+                <a:ea typeface="Noto Sans KR" pitchFamily="34" charset="-122"/>
+                <a:cs typeface="Noto Sans KR" pitchFamily="34" charset="-120"/>
+              </a:rPr>
+              <a:t>3) 자료 목록에서 2024년 행 → [다운로드] 클릭</a:t>
+            </a:r>
+            <a:endParaRPr lang="en-US" sz="1700" dirty="0"/>
+          </a:p>
+          <a:p>
+            <a:pPr indent="0" marL="0">
+              <a:lnSpc>
+                <a:spcPct val="155000"/>
+              </a:lnSpc>
+              <a:buNone/>
+            </a:pPr>
+            <a:r>
+              <a:rPr lang="en-US" sz="1700" dirty="0">
+                <a:solidFill>
+                  <a:srgbClr val="4A5568"/>
+                </a:solidFill>
+                <a:latin typeface="Noto Sans KR" pitchFamily="34" charset="0"/>
+                <a:ea typeface="Noto Sans KR" pitchFamily="34" charset="-122"/>
+                <a:cs typeface="Noto Sans KR" pitchFamily="34" charset="-120"/>
+              </a:rPr>
+              <a:t>   → 받아지는 파일명: 기간별_일평균_대기환경_정보_2024년.csv</a:t>
+            </a:r>
+            <a:endParaRPr lang="en-US" sz="1700" dirty="0"/>
+          </a:p>
+          <a:p>
+            <a:pPr indent="0" marL="0">
+              <a:lnSpc>
+                <a:spcPct val="155000"/>
+              </a:lnSpc>
+              <a:buNone/>
+            </a:pPr>
+            <a:r>
+              <a:rPr lang="en-US" sz="1700" dirty="0">
+                <a:solidFill>
+                  <a:srgbClr val="4A5568"/>
+                </a:solidFill>
+                <a:latin typeface="Noto Sans KR" pitchFamily="34" charset="0"/>
+                <a:ea typeface="Noto Sans KR" pitchFamily="34" charset="-122"/>
+                <a:cs typeface="Noto Sans KR" pitchFamily="34" charset="-120"/>
+              </a:rPr>
+              <a:t>4) 같은 방식으로 2025년 행 다운로드</a:t>
+            </a:r>
+            <a:endParaRPr lang="en-US" sz="1700" dirty="0"/>
+          </a:p>
+          <a:p>
+            <a:pPr indent="0" marL="0">
+              <a:lnSpc>
+                <a:spcPct val="155000"/>
+              </a:lnSpc>
+              <a:buNone/>
+            </a:pPr>
+            <a:r>
+              <a:rPr lang="en-US" sz="1700" dirty="0">
+                <a:solidFill>
+                  <a:srgbClr val="4A5568"/>
+                </a:solidFill>
+                <a:latin typeface="Noto Sans KR" pitchFamily="34" charset="0"/>
+                <a:ea typeface="Noto Sans KR" pitchFamily="34" charset="-122"/>
+                <a:cs typeface="Noto Sans KR" pitchFamily="34" charset="-120"/>
+              </a:rPr>
+              <a:t>   → 받아지는 파일명: 기간별_일평균_대기환경_정보_2025년.csv</a:t>
+            </a:r>
+            <a:endParaRPr lang="en-US" sz="1700" dirty="0"/>
+          </a:p>
+          <a:p>
+            <a:pPr indent="0" marL="0">
+              <a:lnSpc>
+                <a:spcPct val="155000"/>
+              </a:lnSpc>
+              <a:buNone/>
+            </a:pPr>
+            <a:r>
+              <a:rPr lang="en-US" sz="1700" dirty="0">
+                <a:solidFill>
+                  <a:srgbClr val="4A5568"/>
+                </a:solidFill>
+                <a:latin typeface="Noto Sans KR" pitchFamily="34" charset="0"/>
+                <a:ea typeface="Noto Sans KR" pitchFamily="34" charset="-122"/>
+                <a:cs typeface="Noto Sans KR" pitchFamily="34" charset="-120"/>
+              </a:rPr>
+              <a:t>5) 두 파일을 작업 폴더(inflearn_ccd_challenge)로 이동</a:t>
+            </a:r>
+            <a:endParaRPr lang="en-US" sz="1700" dirty="0"/>
+          </a:p>
+          <a:p>
+            <a:pPr indent="0" marL="0">
+              <a:lnSpc>
+                <a:spcPct val="155000"/>
+              </a:lnSpc>
+              <a:buNone/>
+            </a:pPr>
+            <a:endParaRPr lang="en-US" sz="1700" dirty="0"/>
+          </a:p>
+          <a:p>
+            <a:pPr indent="0" marL="0">
+              <a:lnSpc>
+                <a:spcPct val="155000"/>
+              </a:lnSpc>
+              <a:buNone/>
+            </a:pPr>
+            <a:r>
+              <a:rPr lang="en-US" sz="1700" dirty="0">
+                <a:solidFill>
+                  <a:srgbClr val="4A5568"/>
+                </a:solidFill>
+                <a:latin typeface="Noto Sans KR" pitchFamily="34" charset="0"/>
+                <a:ea typeface="Noto Sans KR" pitchFamily="34" charset="-122"/>
+                <a:cs typeface="Noto Sans KR" pitchFamily="34" charset="-120"/>
+              </a:rPr>
+              <a:t>※ 받기 정말 어려운 분만 운영 채널로 강사에게 요청</a:t>
+            </a:r>
+            <a:endParaRPr lang="en-US" sz="1700" dirty="0"/>
+          </a:p>
+        </p:txBody>
       </p:sp>
       <p:sp>
         <p:nvSpPr>
           <p:cNvPr id="8" name="Text 6"/>
-          <p:cNvSpPr/>
-          <p:nvPr/>
-        </p:nvSpPr>
-        <p:spPr>
-          <a:xfrm>
-            <a:off x="713232" y="3035808"/>
-            <a:ext cx="10762488" cy="2980944"/>
-          </a:xfrm>
-          <a:prstGeom prst="rect">
-            <a:avLst/>
-          </a:prstGeom>
-          <a:noFill/>
-          <a:ln/>
-        </p:spPr>
-        <p:txBody>
-          <a:bodyPr wrap="square" rtlCol="0" anchor="t"/>
-          <a:lstStyle/>
-          <a:p>
-            <a:pPr indent="0" marL="0">
-              <a:lnSpc>
-                <a:spcPct val="140000"/>
-              </a:lnSpc>
-              <a:buNone/>
-            </a:pPr>
-            <a:r>
-              <a:rPr lang="en-US" sz="1150" dirty="0">
-                <a:solidFill>
-                  <a:srgbClr val="1A1F36"/>
-                </a:solidFill>
-                <a:latin typeface="Roboto Mono" pitchFamily="34" charset="0"/>
-                <a:ea typeface="Roboto Mono" pitchFamily="34" charset="-122"/>
-                <a:cs typeface="Roboto Mono" pitchFamily="34" charset="-120"/>
-              </a:rPr>
-              <a:t>이 폴더의 기간별_일평균_대기환경_정보_2024년.csv 와 기간별_일평균_대기환경_정보_2025년.csv 둘 다</a:t>
-            </a:r>
-            <a:endParaRPr lang="en-US" sz="1150" dirty="0"/>
-          </a:p>
-          <a:p>
-            <a:pPr indent="0" marL="0">
-              <a:lnSpc>
-                <a:spcPct val="140000"/>
-              </a:lnSpc>
-              <a:buNone/>
-            </a:pPr>
-            <a:r>
-              <a:rPr lang="en-US" sz="1150" dirty="0">
-                <a:solidFill>
-                  <a:srgbClr val="1A1F36"/>
-                </a:solidFill>
-                <a:latin typeface="Roboto Mono" pitchFamily="34" charset="0"/>
-                <a:ea typeface="Roboto Mono" pitchFamily="34" charset="-122"/>
-                <a:cs typeface="Roboto Mono" pitchFamily="34" charset="-120"/>
-              </a:rPr>
-              <a:t>읽어서 어떤 데이터인지 요약해줘. 둘 다 인코딩은 CP949야.</a:t>
-            </a:r>
-            <a:endParaRPr lang="en-US" sz="1150" dirty="0"/>
-          </a:p>
-          <a:p>
-            <a:pPr indent="0" marL="0">
-              <a:lnSpc>
-                <a:spcPct val="140000"/>
-              </a:lnSpc>
-              <a:buNone/>
-            </a:pPr>
-            <a:r>
-              <a:rPr lang="en-US" sz="1150" dirty="0">
-                <a:solidFill>
-                  <a:srgbClr val="1A1F36"/>
-                </a:solidFill>
-                <a:latin typeface="Roboto Mono" pitchFamily="34" charset="0"/>
-                <a:ea typeface="Roboto Mono" pitchFamily="34" charset="-122"/>
-                <a:cs typeface="Roboto Mono" pitchFamily="34" charset="-120"/>
-              </a:rPr>
-              <a:t>원본 9개 컬럼(측정일시·권역명·측정소명·이산화질소·오존·일산화탄소·</a:t>
-            </a:r>
-            <a:endParaRPr lang="en-US" sz="1150" dirty="0"/>
-          </a:p>
-          <a:p>
-            <a:pPr indent="0" marL="0">
-              <a:lnSpc>
-                <a:spcPct val="140000"/>
-              </a:lnSpc>
-              <a:buNone/>
-            </a:pPr>
-            <a:r>
-              <a:rPr lang="en-US" sz="1150" dirty="0">
-                <a:solidFill>
-                  <a:srgbClr val="1A1F36"/>
-                </a:solidFill>
-                <a:latin typeface="Roboto Mono" pitchFamily="34" charset="0"/>
-                <a:ea typeface="Roboto Mono" pitchFamily="34" charset="-122"/>
-                <a:cs typeface="Roboto Mono" pitchFamily="34" charset="-120"/>
-              </a:rPr>
-              <a:t>아황산가스·미세먼지·초미세먼지) 그대로 보여주고, 컬럼명 통일해주고,</a:t>
-            </a:r>
-            <a:endParaRPr lang="en-US" sz="1150" dirty="0"/>
-          </a:p>
-          <a:p>
-            <a:pPr indent="0" marL="0">
-              <a:lnSpc>
-                <a:spcPct val="140000"/>
-              </a:lnSpc>
-              <a:buNone/>
-            </a:pPr>
-            <a:r>
-              <a:rPr lang="en-US" sz="1150" dirty="0">
-                <a:solidFill>
-                  <a:srgbClr val="1A1F36"/>
-                </a:solidFill>
-                <a:latin typeface="Roboto Mono" pitchFamily="34" charset="0"/>
-                <a:ea typeface="Roboto Mono" pitchFamily="34" charset="-122"/>
-                <a:cs typeface="Roboto Mono" pitchFamily="34" charset="-120"/>
-              </a:rPr>
-              <a:t>연도별 행 수·결측 비율·날짜 범위 알려줘.</a:t>
-            </a:r>
-            <a:endParaRPr lang="en-US" sz="1150" dirty="0"/>
-          </a:p>
-        </p:txBody>
-      </p:sp>
-      <p:sp>
-        <p:nvSpPr>
-          <p:cNvPr id="9" name="Text 7"/>
           <p:cNvSpPr/>
           <p:nvPr/>
         </p:nvSpPr>
@@ -9116,7 +9157,7 @@
                 <a:ea typeface="Noto Sans KR" pitchFamily="34" charset="-122"/>
                 <a:cs typeface="Noto Sans KR" pitchFamily="34" charset="-120"/>
               </a:rPr>
-              <a:t>21 / 31</a:t>
+              <a:t>21 / 34</a:t>
             </a:r>
             <a:endParaRPr lang="en-US" sz="900" dirty="0"/>
           </a:p>
@@ -9200,7 +9241,7 @@
                 <a:ea typeface="Noto Sans KR" pitchFamily="34" charset="-122"/>
                 <a:cs typeface="Noto Sans KR" pitchFamily="34" charset="-120"/>
               </a:rPr>
-              <a:t>DAY 1 · STEP 2</a:t>
+              <a:t>DAY 1 · DATA SOURCE</a:t>
             </a:r>
             <a:endParaRPr lang="en-US" sz="1400" dirty="0"/>
           </a:p>
@@ -9278,38 +9319,143 @@
                 <a:ea typeface="Noto Sans KR" pitchFamily="34" charset="-122"/>
                 <a:cs typeface="Noto Sans KR" pitchFamily="34" charset="-120"/>
               </a:rPr>
-              <a:t>2단계 결과 — 데이터 요약</a:t>
+              <a:t>서울 열린데이터광장 OA-2218 — 다운로드 화면</a:t>
             </a:r>
             <a:endParaRPr lang="en-US" sz="2800" dirty="0"/>
           </a:p>
         </p:txBody>
       </p:sp>
-      <p:pic>
-        <p:nvPicPr>
-          <p:cNvPr id="6" name="Image 0" descr="/Users/sujinpark/b2b-lecture-note/20260512_inflearn_B2G_dataanalysis/assets/screenshots/day1/result_step1_summary.png">    </p:cNvPr>
-          <p:cNvPicPr>
-            <a:picLocks noChangeAspect="1"/>
-          </p:cNvPicPr>
-          <p:nvPr/>
-        </p:nvPicPr>
-        <p:blipFill>
-          <a:blip r:embed="rId1"/>
-          <a:srcRect l="0" r="0" t="0" b="0"/>
-          <a:stretch/>
-        </p:blipFill>
+      <p:sp>
+        <p:nvSpPr>
+          <p:cNvPr id="6" name="Shape 4"/>
+          <p:cNvSpPr/>
+          <p:nvPr/>
+        </p:nvSpPr>
         <p:spPr>
           <a:xfrm>
             <a:off x="2194560" y="2240280"/>
             <a:ext cx="7772400" cy="3657600"/>
           </a:xfrm>
-          <a:prstGeom prst="rect">
-            <a:avLst/>
-          </a:prstGeom>
-        </p:spPr>
-      </p:pic>
-      <p:sp>
-        <p:nvSpPr>
-          <p:cNvPr id="7" name="Text 4"/>
+          <a:prstGeom prst="roundRect">
+            <a:avLst>
+              <a:gd name="adj" fmla="val 3000"/>
+            </a:avLst>
+          </a:prstGeom>
+          <a:solidFill>
+            <a:srgbClr val="F5F7FA"/>
+          </a:solidFill>
+          <a:ln w="12700">
+            <a:solidFill>
+              <a:srgbClr val="CBD5E0"/>
+            </a:solidFill>
+            <a:prstDash val="dash"/>
+          </a:ln>
+        </p:spPr>
+      </p:sp>
+      <p:sp>
+        <p:nvSpPr>
+          <p:cNvPr id="7" name="Text 5"/>
+          <p:cNvSpPr/>
+          <p:nvPr/>
+        </p:nvSpPr>
+        <p:spPr>
+          <a:xfrm>
+            <a:off x="2194560" y="3703320"/>
+            <a:ext cx="7772400" cy="731520"/>
+          </a:xfrm>
+          <a:prstGeom prst="rect">
+            <a:avLst/>
+          </a:prstGeom>
+          <a:noFill/>
+          <a:ln/>
+        </p:spPr>
+        <p:txBody>
+          <a:bodyPr wrap="square" rtlCol="0" anchor="ctr"/>
+          <a:lstStyle/>
+          <a:p>
+            <a:pPr algn="ctr" indent="0" marL="0">
+              <a:lnSpc>
+                <a:spcPct val="140000"/>
+              </a:lnSpc>
+              <a:buNone/>
+            </a:pPr>
+            <a:r>
+              <a:rPr lang="en-US" sz="1400" i="1" dirty="0">
+                <a:solidFill>
+                  <a:srgbClr val="718096"/>
+                </a:solidFill>
+                <a:latin typeface="Noto Sans KR" pitchFamily="34" charset="0"/>
+                <a:ea typeface="Noto Sans KR" pitchFamily="34" charset="-122"/>
+                <a:cs typeface="Noto Sans KR" pitchFamily="34" charset="-120"/>
+              </a:rPr>
+              <a:t>📷  결과 이미지 위치</a:t>
+            </a:r>
+            <a:endParaRPr lang="en-US" sz="1400" dirty="0"/>
+          </a:p>
+          <a:p>
+            <a:pPr algn="ctr" indent="0" marL="0">
+              <a:lnSpc>
+                <a:spcPct val="140000"/>
+              </a:lnSpc>
+              <a:buNone/>
+            </a:pPr>
+            <a:r>
+              <a:rPr lang="en-US" sz="1400" i="1" dirty="0">
+                <a:solidFill>
+                  <a:srgbClr val="718096"/>
+                </a:solidFill>
+                <a:latin typeface="Noto Sans KR" pitchFamily="34" charset="0"/>
+                <a:ea typeface="Noto Sans KR" pitchFamily="34" charset="-122"/>
+                <a:cs typeface="Noto Sans KR" pitchFamily="34" charset="-120"/>
+              </a:rPr>
+              <a:t>(강의 시연 캡처가 들어갈 자리)</a:t>
+            </a:r>
+            <a:endParaRPr lang="en-US" sz="1400" dirty="0"/>
+          </a:p>
+        </p:txBody>
+      </p:sp>
+      <p:sp>
+        <p:nvSpPr>
+          <p:cNvPr id="8" name="Text 6"/>
+          <p:cNvSpPr/>
+          <p:nvPr/>
+        </p:nvSpPr>
+        <p:spPr>
+          <a:xfrm>
+            <a:off x="2194560" y="4983480"/>
+            <a:ext cx="7772400" cy="365760"/>
+          </a:xfrm>
+          <a:prstGeom prst="rect">
+            <a:avLst/>
+          </a:prstGeom>
+          <a:noFill/>
+          <a:ln/>
+        </p:spPr>
+        <p:txBody>
+          <a:bodyPr wrap="square" rtlCol="0" anchor="ctr"/>
+          <a:lstStyle/>
+          <a:p>
+            <a:pPr algn="ctr" indent="0" marL="0">
+              <a:buNone/>
+            </a:pPr>
+            <a:r>
+              <a:rPr lang="en-US" sz="1000" i="1" dirty="0">
+                <a:solidFill>
+                  <a:srgbClr val="718096"/>
+                </a:solidFill>
+                <a:latin typeface="Roboto Mono" pitchFamily="34" charset="0"/>
+                <a:ea typeface="Roboto Mono" pitchFamily="34" charset="-122"/>
+                <a:cs typeface="Roboto Mono" pitchFamily="34" charset="-120"/>
+              </a:rPr>
+              <a:t>screenshots/day1/seoul_open_data_oa2218.png</a:t>
+            </a:r>
+            <a:endParaRPr lang="en-US" sz="1000" dirty="0"/>
+          </a:p>
+        </p:txBody>
+      </p:sp>
+      <p:sp>
+        <p:nvSpPr>
+          <p:cNvPr id="9" name="Text 7"/>
           <p:cNvSpPr/>
           <p:nvPr/>
         </p:nvSpPr>
@@ -9340,7 +9486,7 @@
                 <a:ea typeface="Noto Sans KR" pitchFamily="34" charset="-122"/>
                 <a:cs typeface="Noto Sans KR" pitchFamily="34" charset="-120"/>
               </a:rPr>
-              <a:t>shape · dtypes · 결측 비율 · 날짜 범위</a:t>
+              <a:t>"파일" 탭에서 2024·2025 두 해 CSV 다운로드</a:t>
             </a:r>
             <a:endParaRPr lang="en-US" sz="1200" dirty="0"/>
           </a:p>
@@ -9348,7 +9494,7 @@
       </p:sp>
       <p:sp>
         <p:nvSpPr>
-          <p:cNvPr id="8" name="Text 5"/>
+          <p:cNvPr id="10" name="Text 8"/>
           <p:cNvSpPr/>
           <p:nvPr/>
         </p:nvSpPr>
@@ -9379,7 +9525,7 @@
                 <a:ea typeface="Noto Sans KR" pitchFamily="34" charset="-122"/>
                 <a:cs typeface="Noto Sans KR" pitchFamily="34" charset="-120"/>
               </a:rPr>
-              <a:t>22 / 31</a:t>
+              <a:t>22 / 34</a:t>
             </a:r>
             <a:endParaRPr lang="en-US" sz="900" dirty="0"/>
           </a:p>
@@ -9478,7 +9624,7 @@
         <p:spPr>
           <a:xfrm>
             <a:off x="548640" y="960120"/>
-            <a:ext cx="11091672" cy="292608"/>
+            <a:ext cx="10515600" cy="292608"/>
           </a:xfrm>
           <a:prstGeom prst="rect">
             <a:avLst/>
@@ -9494,7 +9640,7 @@
               <a:buNone/>
             </a:pPr>
             <a:r>
-              <a:rPr lang="en-US" sz="1100" b="1" spc="50" kern="0" dirty="0">
+              <a:rPr lang="en-US" sz="1100" b="1" spc="150" kern="0" dirty="0">
                 <a:solidFill>
                   <a:srgbClr val="4A7BF7"/>
                 </a:solidFill>
@@ -9502,7 +9648,7 @@
                 <a:ea typeface="Noto Sans KR" pitchFamily="34" charset="-122"/>
                 <a:cs typeface="Noto Sans KR" pitchFamily="34" charset="-120"/>
               </a:rPr>
-              <a:t>👉 직접 따라쳐보세요 — 본인 Claude Code에 그대로 붙여넣기</a:t>
+              <a:t>섹션 2 / 4</a:t>
             </a:r>
             <a:endParaRPr lang="en-US" sz="1100" dirty="0"/>
           </a:p>
@@ -9517,7 +9663,7 @@
         <p:spPr>
           <a:xfrm>
             <a:off x="548640" y="1508760"/>
-            <a:ext cx="11091672" cy="1005840"/>
+            <a:ext cx="11091672" cy="1371600"/>
           </a:xfrm>
           <a:prstGeom prst="rect">
             <a:avLst/>
@@ -9531,12 +9677,12 @@
           <a:p>
             <a:pPr indent="0" marL="0">
               <a:lnSpc>
-                <a:spcPct val="115000"/>
+                <a:spcPct val="110000"/>
               </a:lnSpc>
               <a:buNone/>
             </a:pPr>
             <a:r>
-              <a:rPr lang="en-US" sz="3400" b="1" spc="-50" kern="0" dirty="0">
+              <a:rPr lang="en-US" sz="4200" b="1" spc="-50" kern="0" dirty="0">
                 <a:solidFill>
                   <a:srgbClr val="1A1F36"/>
                 </a:solidFill>
@@ -9544,9 +9690,9 @@
                 <a:ea typeface="Noto Sans KR" pitchFamily="34" charset="-122"/>
                 <a:cs typeface="Noto Sans KR" pitchFamily="34" charset="-120"/>
               </a:rPr>
-              <a:t>3단계 — 자치구별 PM2.5 연평균 (2024 vs 2025)</a:t>
-            </a:r>
-            <a:endParaRPr lang="en-US" sz="3400" dirty="0"/>
+              <a:t>데이터 한눈에 보기</a:t>
+            </a:r>
+            <a:endParaRPr lang="en-US" sz="4200" dirty="0"/>
           </a:p>
         </p:txBody>
       </p:sp>
@@ -9558,7 +9704,7 @@
         </p:nvSpPr>
         <p:spPr>
           <a:xfrm>
-            <a:off x="548640" y="2606040"/>
+            <a:off x="548640" y="2971800"/>
             <a:ext cx="1828800" cy="0"/>
           </a:xfrm>
           <a:prstGeom prst="line">
@@ -9575,136 +9721,129 @@
       </p:sp>
       <p:sp>
         <p:nvSpPr>
-          <p:cNvPr id="7" name="Shape 5"/>
-          <p:cNvSpPr/>
-          <p:nvPr/>
-        </p:nvSpPr>
-        <p:spPr>
-          <a:xfrm>
-            <a:off x="548640" y="2926080"/>
-            <a:ext cx="11091672" cy="3200400"/>
-          </a:xfrm>
-          <a:prstGeom prst="roundRect">
-            <a:avLst>
-              <a:gd name="adj" fmla="val 1714"/>
-            </a:avLst>
-          </a:prstGeom>
-          <a:solidFill>
-            <a:srgbClr val="F1F5F9"/>
-          </a:solidFill>
-          <a:ln w="6350">
-            <a:solidFill>
-              <a:srgbClr val="E2E8F0"/>
-            </a:solidFill>
-            <a:prstDash val="solid"/>
-          </a:ln>
-        </p:spPr>
+          <p:cNvPr id="7" name="Text 5"/>
+          <p:cNvSpPr/>
+          <p:nvPr/>
+        </p:nvSpPr>
+        <p:spPr>
+          <a:xfrm>
+            <a:off x="548640" y="3200400"/>
+            <a:ext cx="11091672" cy="2788920"/>
+          </a:xfrm>
+          <a:prstGeom prst="rect">
+            <a:avLst/>
+          </a:prstGeom>
+          <a:noFill/>
+          <a:ln/>
+        </p:spPr>
+        <p:txBody>
+          <a:bodyPr wrap="square" rtlCol="0" anchor="t"/>
+          <a:lstStyle/>
+          <a:p>
+            <a:pPr indent="0" marL="0">
+              <a:lnSpc>
+                <a:spcPct val="155000"/>
+              </a:lnSpc>
+              <a:buNone/>
+            </a:pPr>
+            <a:r>
+              <a:rPr lang="en-US" sz="1700" dirty="0">
+                <a:solidFill>
+                  <a:srgbClr val="4A5568"/>
+                </a:solidFill>
+                <a:latin typeface="Noto Sans KR" pitchFamily="34" charset="0"/>
+                <a:ea typeface="Noto Sans KR" pitchFamily="34" charset="-122"/>
+                <a:cs typeface="Noto Sans KR" pitchFamily="34" charset="-120"/>
+              </a:rPr>
+              <a:t>· 규모: 18,275행 (2024: 9,150 + 2025: 9,125)</a:t>
+            </a:r>
+            <a:endParaRPr lang="en-US" sz="1700" dirty="0"/>
+          </a:p>
+          <a:p>
+            <a:pPr indent="0" marL="0">
+              <a:lnSpc>
+                <a:spcPct val="155000"/>
+              </a:lnSpc>
+              <a:buNone/>
+            </a:pPr>
+            <a:r>
+              <a:rPr lang="en-US" sz="1700" dirty="0">
+                <a:solidFill>
+                  <a:srgbClr val="4A5568"/>
+                </a:solidFill>
+                <a:latin typeface="Noto Sans KR" pitchFamily="34" charset="0"/>
+                <a:ea typeface="Noto Sans KR" pitchFamily="34" charset="-122"/>
+                <a:cs typeface="Noto Sans KR" pitchFamily="34" charset="-120"/>
+              </a:rPr>
+              <a:t>· 컬럼 9개: 측정일시·권역명·측정소명·이산화질소·오존·일산화탄소·아황산가스·미세먼지·초미세먼지</a:t>
+            </a:r>
+            <a:endParaRPr lang="en-US" sz="1700" dirty="0"/>
+          </a:p>
+          <a:p>
+            <a:pPr indent="0" marL="0">
+              <a:lnSpc>
+                <a:spcPct val="155000"/>
+              </a:lnSpc>
+              <a:buNone/>
+            </a:pPr>
+            <a:r>
+              <a:rPr lang="en-US" sz="1700" dirty="0">
+                <a:solidFill>
+                  <a:srgbClr val="4A5568"/>
+                </a:solidFill>
+                <a:latin typeface="Noto Sans KR" pitchFamily="34" charset="0"/>
+                <a:ea typeface="Noto Sans KR" pitchFamily="34" charset="-122"/>
+                <a:cs typeface="Noto Sans KR" pitchFamily="34" charset="-120"/>
+              </a:rPr>
+              <a:t>· 인코딩: CP949 (한글이 EUC-KR 방식)</a:t>
+            </a:r>
+            <a:endParaRPr lang="en-US" sz="1700" dirty="0"/>
+          </a:p>
+          <a:p>
+            <a:pPr indent="0" marL="0">
+              <a:lnSpc>
+                <a:spcPct val="155000"/>
+              </a:lnSpc>
+              <a:buNone/>
+            </a:pPr>
+            <a:r>
+              <a:rPr lang="en-US" sz="1700" dirty="0">
+                <a:solidFill>
+                  <a:srgbClr val="4A5568"/>
+                </a:solidFill>
+                <a:latin typeface="Noto Sans KR" pitchFamily="34" charset="0"/>
+                <a:ea typeface="Noto Sans KR" pitchFamily="34" charset="-122"/>
+                <a:cs typeface="Noto Sans KR" pitchFamily="34" charset="-120"/>
+              </a:rPr>
+              <a:t>· 컬럼명 살짝 다름: 2024 "미세먼지" vs 2025 "미세먼지농도"</a:t>
+            </a:r>
+            <a:endParaRPr lang="en-US" sz="1700" dirty="0"/>
+          </a:p>
+          <a:p>
+            <a:pPr indent="0" marL="0">
+              <a:lnSpc>
+                <a:spcPct val="155000"/>
+              </a:lnSpc>
+              <a:buNone/>
+            </a:pPr>
+            <a:r>
+              <a:rPr lang="en-US" sz="1700" dirty="0">
+                <a:solidFill>
+                  <a:srgbClr val="4A5568"/>
+                </a:solidFill>
+                <a:latin typeface="Noto Sans KR" pitchFamily="34" charset="0"/>
+                <a:ea typeface="Noto Sans KR" pitchFamily="34" charset="-122"/>
+                <a:cs typeface="Noto Sans KR" pitchFamily="34" charset="-120"/>
+              </a:rPr>
+              <a:t>· 측정소: 서울 25개 자치구</a:t>
+            </a:r>
+            <a:endParaRPr lang="en-US" sz="1700" dirty="0"/>
+          </a:p>
+        </p:txBody>
       </p:sp>
       <p:sp>
         <p:nvSpPr>
           <p:cNvPr id="8" name="Text 6"/>
-          <p:cNvSpPr/>
-          <p:nvPr/>
-        </p:nvSpPr>
-        <p:spPr>
-          <a:xfrm>
-            <a:off x="713232" y="3035808"/>
-            <a:ext cx="10762488" cy="2980944"/>
-          </a:xfrm>
-          <a:prstGeom prst="rect">
-            <a:avLst/>
-          </a:prstGeom>
-          <a:noFill/>
-          <a:ln/>
-        </p:spPr>
-        <p:txBody>
-          <a:bodyPr wrap="square" rtlCol="0" anchor="t"/>
-          <a:lstStyle/>
-          <a:p>
-            <a:pPr indent="0" marL="0">
-              <a:lnSpc>
-                <a:spcPct val="140000"/>
-              </a:lnSpc>
-              <a:buNone/>
-            </a:pPr>
-            <a:r>
-              <a:rPr lang="en-US" sz="1150" dirty="0">
-                <a:solidFill>
-                  <a:srgbClr val="1A1F36"/>
-                </a:solidFill>
-                <a:latin typeface="Roboto Mono" pitchFamily="34" charset="0"/>
-                <a:ea typeface="Roboto Mono" pitchFamily="34" charset="-122"/>
-                <a:cs typeface="Roboto Mono" pitchFamily="34" charset="-120"/>
-              </a:rPr>
-              <a:t>자치구별 PM2.5 연평균을 2024와 2025 두 해 비교 막대그래프로,</a:t>
-            </a:r>
-            <a:endParaRPr lang="en-US" sz="1150" dirty="0"/>
-          </a:p>
-          <a:p>
-            <a:pPr indent="0" marL="0">
-              <a:lnSpc>
-                <a:spcPct val="140000"/>
-              </a:lnSpc>
-              <a:buNone/>
-            </a:pPr>
-            <a:r>
-              <a:rPr lang="en-US" sz="1150" dirty="0">
-                <a:solidFill>
-                  <a:srgbClr val="1A1F36"/>
-                </a:solidFill>
-                <a:latin typeface="Roboto Mono" pitchFamily="34" charset="0"/>
-                <a:ea typeface="Roboto Mono" pitchFamily="34" charset="-122"/>
-                <a:cs typeface="Roboto Mono" pitchFamily="34" charset="-120"/>
-              </a:rPr>
-              <a:t>한글 폰트 안 깨지게 그려줘.</a:t>
-            </a:r>
-            <a:endParaRPr lang="en-US" sz="1150" dirty="0"/>
-          </a:p>
-          <a:p>
-            <a:pPr indent="0" marL="0">
-              <a:lnSpc>
-                <a:spcPct val="140000"/>
-              </a:lnSpc>
-              <a:buNone/>
-            </a:pPr>
-            <a:r>
-              <a:rPr lang="en-US" sz="1150" dirty="0">
-                <a:solidFill>
-                  <a:srgbClr val="1A1F36"/>
-                </a:solidFill>
-                <a:latin typeface="Roboto Mono" pitchFamily="34" charset="0"/>
-                <a:ea typeface="Roboto Mono" pitchFamily="34" charset="-122"/>
-                <a:cs typeface="Roboto Mono" pitchFamily="34" charset="-120"/>
-              </a:rPr>
-              <a:t>같은 자치구가 가로축에서 두 해 막대로 나란히 보이게.</a:t>
-            </a:r>
-            <a:endParaRPr lang="en-US" sz="1150" dirty="0"/>
-          </a:p>
-          <a:p>
-            <a:pPr indent="0" marL="0">
-              <a:lnSpc>
-                <a:spcPct val="140000"/>
-              </a:lnSpc>
-              <a:buNone/>
-            </a:pPr>
-            <a:r>
-              <a:rPr lang="en-US" sz="1150" dirty="0">
-                <a:solidFill>
-                  <a:srgbClr val="1A1F36"/>
-                </a:solidFill>
-                <a:latin typeface="Roboto Mono" pitchFamily="34" charset="0"/>
-                <a:ea typeface="Roboto Mono" pitchFamily="34" charset="-122"/>
-                <a:cs typeface="Roboto Mono" pitchFamily="34" charset="-120"/>
-              </a:rPr>
-              <a:t>yoy_district_pm25.png 로 저장.</a:t>
-            </a:r>
-            <a:endParaRPr lang="en-US" sz="1150" dirty="0"/>
-          </a:p>
-        </p:txBody>
-      </p:sp>
-      <p:sp>
-        <p:nvSpPr>
-          <p:cNvPr id="9" name="Text 7"/>
           <p:cNvSpPr/>
           <p:nvPr/>
         </p:nvSpPr>
@@ -9735,7 +9874,7 @@
                 <a:ea typeface="Noto Sans KR" pitchFamily="34" charset="-122"/>
                 <a:cs typeface="Noto Sans KR" pitchFamily="34" charset="-120"/>
               </a:rPr>
-              <a:t>23 / 31</a:t>
+              <a:t>23 / 34</a:t>
             </a:r>
             <a:endParaRPr lang="en-US" sz="900" dirty="0"/>
           </a:p>
@@ -9819,7 +9958,7 @@
                 <a:ea typeface="Noto Sans KR" pitchFamily="34" charset="-122"/>
                 <a:cs typeface="Noto Sans KR" pitchFamily="34" charset="-120"/>
               </a:rPr>
-              <a:t>DAY 1 · STEP 3</a:t>
+              <a:t>파트 3. 데이터 다운로드 + 첫 분석 + CLAUDE.md</a:t>
             </a:r>
             <a:endParaRPr lang="en-US" sz="1400" dirty="0"/>
           </a:p>
@@ -9834,7 +9973,7 @@
         <p:spPr>
           <a:xfrm>
             <a:off x="548640" y="960120"/>
-            <a:ext cx="10515600" cy="292608"/>
+            <a:ext cx="11091672" cy="292608"/>
           </a:xfrm>
           <a:prstGeom prst="rect">
             <a:avLst/>
@@ -9850,7 +9989,7 @@
               <a:buNone/>
             </a:pPr>
             <a:r>
-              <a:rPr lang="en-US" sz="1100" b="1" spc="150" kern="0" dirty="0">
+              <a:rPr lang="en-US" sz="1100" b="1" spc="50" kern="0" dirty="0">
                 <a:solidFill>
                   <a:srgbClr val="4A7BF7"/>
                 </a:solidFill>
@@ -9858,7 +9997,7 @@
                 <a:ea typeface="Noto Sans KR" pitchFamily="34" charset="-122"/>
                 <a:cs typeface="Noto Sans KR" pitchFamily="34" charset="-120"/>
               </a:rPr>
-              <a:t>오늘 만든 결과물</a:t>
+              <a:t>👉 직접 따라쳐보세요 — 본인 Claude Code에 그대로 붙여넣기</a:t>
             </a:r>
             <a:endParaRPr lang="en-US" sz="1100" dirty="0"/>
           </a:p>
@@ -9872,8 +10011,8 @@
         </p:nvSpPr>
         <p:spPr>
           <a:xfrm>
-            <a:off x="548640" y="1417320"/>
-            <a:ext cx="11091672" cy="640080"/>
+            <a:off x="548640" y="1508760"/>
+            <a:ext cx="11091672" cy="1005840"/>
           </a:xfrm>
           <a:prstGeom prst="rect">
             <a:avLst/>
@@ -9886,10 +10025,13 @@
           <a:lstStyle/>
           <a:p>
             <a:pPr indent="0" marL="0">
-              <a:buNone/>
-            </a:pPr>
-            <a:r>
-              <a:rPr lang="en-US" sz="2800" b="1" spc="-30" kern="0" dirty="0">
+              <a:lnSpc>
+                <a:spcPct val="115000"/>
+              </a:lnSpc>
+              <a:buNone/>
+            </a:pPr>
+            <a:r>
+              <a:rPr lang="en-US" sz="3400" b="1" spc="-50" kern="0" dirty="0">
                 <a:solidFill>
                   <a:srgbClr val="1A1F36"/>
                 </a:solidFill>
@@ -9897,77 +10039,187 @@
                 <a:ea typeface="Noto Sans KR" pitchFamily="34" charset="-122"/>
                 <a:cs typeface="Noto Sans KR" pitchFamily="34" charset="-120"/>
               </a:rPr>
-              <a:t>3단계 결과 — 자치구별 PM2.5 비교</a:t>
-            </a:r>
-            <a:endParaRPr lang="en-US" sz="2800" dirty="0"/>
-          </a:p>
-        </p:txBody>
-      </p:sp>
-      <p:pic>
-        <p:nvPicPr>
-          <p:cNvPr id="6" name="Image 0" descr="/Users/sujinpark/b2b-lecture-note/20260512_inflearn_B2G_dataanalysis/assets/screenshots/day1/result_step2_district.png">    </p:cNvPr>
-          <p:cNvPicPr>
-            <a:picLocks noChangeAspect="1"/>
-          </p:cNvPicPr>
-          <p:nvPr/>
-        </p:nvPicPr>
-        <p:blipFill>
-          <a:blip r:embed="rId1"/>
-          <a:srcRect l="0" r="0" t="0" b="0"/>
-          <a:stretch/>
-        </p:blipFill>
-        <p:spPr>
-          <a:xfrm>
-            <a:off x="2194560" y="2240280"/>
-            <a:ext cx="7772400" cy="3657600"/>
-          </a:xfrm>
-          <a:prstGeom prst="rect">
-            <a:avLst/>
-          </a:prstGeom>
-        </p:spPr>
-      </p:pic>
-      <p:sp>
-        <p:nvSpPr>
-          <p:cNvPr id="7" name="Text 4"/>
-          <p:cNvSpPr/>
-          <p:nvPr/>
-        </p:nvSpPr>
-        <p:spPr>
-          <a:xfrm>
-            <a:off x="548640" y="5989320"/>
-            <a:ext cx="11091672" cy="411480"/>
-          </a:xfrm>
-          <a:prstGeom prst="rect">
-            <a:avLst/>
-          </a:prstGeom>
-          <a:noFill/>
-          <a:ln/>
-        </p:spPr>
-        <p:txBody>
-          <a:bodyPr wrap="square" rtlCol="0" anchor="ctr"/>
-          <a:lstStyle/>
-          <a:p>
-            <a:pPr algn="ctr" indent="0" marL="0">
-              <a:buNone/>
-            </a:pPr>
-            <a:r>
-              <a:rPr lang="en-US" sz="1200" i="1" dirty="0">
-                <a:solidFill>
-                  <a:srgbClr val="718096"/>
-                </a:solidFill>
-                <a:latin typeface="Noto Sans KR" pitchFamily="34" charset="0"/>
-                <a:ea typeface="Noto Sans KR" pitchFamily="34" charset="-122"/>
-                <a:cs typeface="Noto Sans KR" pitchFamily="34" charset="-120"/>
-              </a:rPr>
-              <a:t>25개 자치구 × 2개 연도 막대그래프</a:t>
-            </a:r>
-            <a:endParaRPr lang="en-US" sz="1200" dirty="0"/>
-          </a:p>
-        </p:txBody>
-      </p:sp>
-      <p:sp>
-        <p:nvSpPr>
-          <p:cNvPr id="8" name="Text 5"/>
+              <a:t>2단계 — 이 데이터, 어떻게 생겼지?</a:t>
+            </a:r>
+            <a:endParaRPr lang="en-US" sz="3400" dirty="0"/>
+          </a:p>
+        </p:txBody>
+      </p:sp>
+      <p:sp>
+        <p:nvSpPr>
+          <p:cNvPr id="6" name="Shape 4"/>
+          <p:cNvSpPr/>
+          <p:nvPr/>
+        </p:nvSpPr>
+        <p:spPr>
+          <a:xfrm>
+            <a:off x="548640" y="2606040"/>
+            <a:ext cx="1828800" cy="0"/>
+          </a:xfrm>
+          <a:prstGeom prst="line">
+            <a:avLst/>
+          </a:prstGeom>
+          <a:noFill/>
+          <a:ln w="25400">
+            <a:solidFill>
+              <a:srgbClr val="4A7BF7"/>
+            </a:solidFill>
+            <a:prstDash val="solid"/>
+          </a:ln>
+        </p:spPr>
+      </p:sp>
+      <p:sp>
+        <p:nvSpPr>
+          <p:cNvPr id="7" name="Shape 5"/>
+          <p:cNvSpPr/>
+          <p:nvPr/>
+        </p:nvSpPr>
+        <p:spPr>
+          <a:xfrm>
+            <a:off x="548640" y="2926080"/>
+            <a:ext cx="11091672" cy="3200400"/>
+          </a:xfrm>
+          <a:prstGeom prst="roundRect">
+            <a:avLst>
+              <a:gd name="adj" fmla="val 1714"/>
+            </a:avLst>
+          </a:prstGeom>
+          <a:solidFill>
+            <a:srgbClr val="F1F5F9"/>
+          </a:solidFill>
+          <a:ln w="6350">
+            <a:solidFill>
+              <a:srgbClr val="E2E8F0"/>
+            </a:solidFill>
+            <a:prstDash val="solid"/>
+          </a:ln>
+        </p:spPr>
+      </p:sp>
+      <p:sp>
+        <p:nvSpPr>
+          <p:cNvPr id="8" name="Text 6"/>
+          <p:cNvSpPr/>
+          <p:nvPr/>
+        </p:nvSpPr>
+        <p:spPr>
+          <a:xfrm>
+            <a:off x="713232" y="3035808"/>
+            <a:ext cx="10762488" cy="2980944"/>
+          </a:xfrm>
+          <a:prstGeom prst="rect">
+            <a:avLst/>
+          </a:prstGeom>
+          <a:noFill/>
+          <a:ln/>
+        </p:spPr>
+        <p:txBody>
+          <a:bodyPr wrap="square" rtlCol="0" anchor="t"/>
+          <a:lstStyle/>
+          <a:p>
+            <a:pPr indent="0" marL="0">
+              <a:lnSpc>
+                <a:spcPct val="140000"/>
+              </a:lnSpc>
+              <a:buNone/>
+            </a:pPr>
+            <a:r>
+              <a:rPr lang="en-US" sz="1150" dirty="0">
+                <a:solidFill>
+                  <a:srgbClr val="1A1F36"/>
+                </a:solidFill>
+                <a:latin typeface="Roboto Mono" pitchFamily="34" charset="0"/>
+                <a:ea typeface="Roboto Mono" pitchFamily="34" charset="-122"/>
+                <a:cs typeface="Roboto Mono" pitchFamily="34" charset="-120"/>
+              </a:rPr>
+              <a:t>이 폴더의 기간별_일평균_대기환경_정보_2024년.csv 와 기간별_일평균_대기환경_정보_2025년.csv 둘 다</a:t>
+            </a:r>
+            <a:endParaRPr lang="en-US" sz="1150" dirty="0"/>
+          </a:p>
+          <a:p>
+            <a:pPr indent="0" marL="0">
+              <a:lnSpc>
+                <a:spcPct val="140000"/>
+              </a:lnSpc>
+              <a:buNone/>
+            </a:pPr>
+            <a:r>
+              <a:rPr lang="en-US" sz="1150" dirty="0">
+                <a:solidFill>
+                  <a:srgbClr val="1A1F36"/>
+                </a:solidFill>
+                <a:latin typeface="Roboto Mono" pitchFamily="34" charset="0"/>
+                <a:ea typeface="Roboto Mono" pitchFamily="34" charset="-122"/>
+                <a:cs typeface="Roboto Mono" pitchFamily="34" charset="-120"/>
+              </a:rPr>
+              <a:t>읽어서 어떤 데이터인지 요약해줘. 둘 다 인코딩은 CP949야.</a:t>
+            </a:r>
+            <a:endParaRPr lang="en-US" sz="1150" dirty="0"/>
+          </a:p>
+          <a:p>
+            <a:pPr indent="0" marL="0">
+              <a:lnSpc>
+                <a:spcPct val="140000"/>
+              </a:lnSpc>
+              <a:buNone/>
+            </a:pPr>
+            <a:r>
+              <a:rPr lang="en-US" sz="1150" dirty="0">
+                <a:solidFill>
+                  <a:srgbClr val="1A1F36"/>
+                </a:solidFill>
+                <a:latin typeface="Roboto Mono" pitchFamily="34" charset="0"/>
+                <a:ea typeface="Roboto Mono" pitchFamily="34" charset="-122"/>
+                <a:cs typeface="Roboto Mono" pitchFamily="34" charset="-120"/>
+              </a:rPr>
+              <a:t>원본 9개 컬럼(측정일시·권역명·측정소명·이산화질소·오존·일산화탄소·</a:t>
+            </a:r>
+            <a:endParaRPr lang="en-US" sz="1150" dirty="0"/>
+          </a:p>
+          <a:p>
+            <a:pPr indent="0" marL="0">
+              <a:lnSpc>
+                <a:spcPct val="140000"/>
+              </a:lnSpc>
+              <a:buNone/>
+            </a:pPr>
+            <a:r>
+              <a:rPr lang="en-US" sz="1150" dirty="0">
+                <a:solidFill>
+                  <a:srgbClr val="1A1F36"/>
+                </a:solidFill>
+                <a:latin typeface="Roboto Mono" pitchFamily="34" charset="0"/>
+                <a:ea typeface="Roboto Mono" pitchFamily="34" charset="-122"/>
+                <a:cs typeface="Roboto Mono" pitchFamily="34" charset="-120"/>
+              </a:rPr>
+              <a:t>아황산가스·미세먼지·초미세먼지) 그대로 보여주고, 컬럼명 통일해주고,</a:t>
+            </a:r>
+            <a:endParaRPr lang="en-US" sz="1150" dirty="0"/>
+          </a:p>
+          <a:p>
+            <a:pPr indent="0" marL="0">
+              <a:lnSpc>
+                <a:spcPct val="140000"/>
+              </a:lnSpc>
+              <a:buNone/>
+            </a:pPr>
+            <a:r>
+              <a:rPr lang="en-US" sz="1150" dirty="0">
+                <a:solidFill>
+                  <a:srgbClr val="1A1F36"/>
+                </a:solidFill>
+                <a:latin typeface="Roboto Mono" pitchFamily="34" charset="0"/>
+                <a:ea typeface="Roboto Mono" pitchFamily="34" charset="-122"/>
+                <a:cs typeface="Roboto Mono" pitchFamily="34" charset="-120"/>
+              </a:rPr>
+              <a:t>연도별 행 수·결측 비율·날짜 범위 알려줘.</a:t>
+            </a:r>
+            <a:endParaRPr lang="en-US" sz="1150" dirty="0"/>
+          </a:p>
+        </p:txBody>
+      </p:sp>
+      <p:sp>
+        <p:nvSpPr>
+          <p:cNvPr id="9" name="Text 7"/>
           <p:cNvSpPr/>
           <p:nvPr/>
         </p:nvSpPr>
@@ -9998,7 +10250,7 @@
                 <a:ea typeface="Noto Sans KR" pitchFamily="34" charset="-122"/>
                 <a:cs typeface="Noto Sans KR" pitchFamily="34" charset="-120"/>
               </a:rPr>
-              <a:t>24 / 31</a:t>
+              <a:t>24 / 34</a:t>
             </a:r>
             <a:endParaRPr lang="en-US" sz="900" dirty="0"/>
           </a:p>
@@ -10082,7 +10334,7 @@
                 <a:ea typeface="Noto Sans KR" pitchFamily="34" charset="-122"/>
                 <a:cs typeface="Noto Sans KR" pitchFamily="34" charset="-120"/>
               </a:rPr>
-              <a:t>파트 3. 데이터 다운로드 + 첫 분석 + CLAUDE.md</a:t>
+              <a:t>DAY 1 · STEP 2</a:t>
             </a:r>
             <a:endParaRPr lang="en-US" sz="1400" dirty="0"/>
           </a:p>
@@ -10097,7 +10349,7 @@
         <p:spPr>
           <a:xfrm>
             <a:off x="548640" y="960120"/>
-            <a:ext cx="11091672" cy="292608"/>
+            <a:ext cx="10515600" cy="292608"/>
           </a:xfrm>
           <a:prstGeom prst="rect">
             <a:avLst/>
@@ -10113,7 +10365,7 @@
               <a:buNone/>
             </a:pPr>
             <a:r>
-              <a:rPr lang="en-US" sz="1100" b="1" spc="50" kern="0" dirty="0">
+              <a:rPr lang="en-US" sz="1100" b="1" spc="150" kern="0" dirty="0">
                 <a:solidFill>
                   <a:srgbClr val="4A7BF7"/>
                 </a:solidFill>
@@ -10121,7 +10373,7 @@
                 <a:ea typeface="Noto Sans KR" pitchFamily="34" charset="-122"/>
                 <a:cs typeface="Noto Sans KR" pitchFamily="34" charset="-120"/>
               </a:rPr>
-              <a:t>👉 직접 따라쳐보세요 — 본인 Claude Code에 그대로 붙여넣기</a:t>
+              <a:t>오늘 만든 결과물</a:t>
             </a:r>
             <a:endParaRPr lang="en-US" sz="1100" dirty="0"/>
           </a:p>
@@ -10135,8 +10387,8 @@
         </p:nvSpPr>
         <p:spPr>
           <a:xfrm>
-            <a:off x="548640" y="1508760"/>
-            <a:ext cx="11091672" cy="1005840"/>
+            <a:off x="548640" y="1417320"/>
+            <a:ext cx="11091672" cy="640080"/>
           </a:xfrm>
           <a:prstGeom prst="rect">
             <a:avLst/>
@@ -10149,13 +10401,10 @@
           <a:lstStyle/>
           <a:p>
             <a:pPr indent="0" marL="0">
-              <a:lnSpc>
-                <a:spcPct val="115000"/>
-              </a:lnSpc>
-              <a:buNone/>
-            </a:pPr>
-            <a:r>
-              <a:rPr lang="en-US" sz="3400" b="1" spc="-50" kern="0" dirty="0">
+              <a:buNone/>
+            </a:pPr>
+            <a:r>
+              <a:rPr lang="en-US" sz="2800" b="1" spc="-30" kern="0" dirty="0">
                 <a:solidFill>
                   <a:srgbClr val="1A1F36"/>
                 </a:solidFill>
@@ -10163,167 +10412,77 @@
                 <a:ea typeface="Noto Sans KR" pitchFamily="34" charset="-122"/>
                 <a:cs typeface="Noto Sans KR" pitchFamily="34" charset="-120"/>
               </a:rPr>
-              <a:t>4단계 — 월별 추이 + 황사 시즌</a:t>
-            </a:r>
-            <a:endParaRPr lang="en-US" sz="3400" dirty="0"/>
-          </a:p>
-        </p:txBody>
-      </p:sp>
-      <p:sp>
-        <p:nvSpPr>
-          <p:cNvPr id="6" name="Shape 4"/>
-          <p:cNvSpPr/>
-          <p:nvPr/>
-        </p:nvSpPr>
-        <p:spPr>
-          <a:xfrm>
-            <a:off x="548640" y="2606040"/>
-            <a:ext cx="1828800" cy="0"/>
-          </a:xfrm>
-          <a:prstGeom prst="line">
-            <a:avLst/>
-          </a:prstGeom>
-          <a:noFill/>
-          <a:ln w="25400">
-            <a:solidFill>
-              <a:srgbClr val="4A7BF7"/>
-            </a:solidFill>
-            <a:prstDash val="solid"/>
-          </a:ln>
-        </p:spPr>
-      </p:sp>
-      <p:sp>
-        <p:nvSpPr>
-          <p:cNvPr id="7" name="Shape 5"/>
-          <p:cNvSpPr/>
-          <p:nvPr/>
-        </p:nvSpPr>
-        <p:spPr>
-          <a:xfrm>
-            <a:off x="548640" y="2926080"/>
-            <a:ext cx="11091672" cy="3200400"/>
-          </a:xfrm>
-          <a:prstGeom prst="roundRect">
-            <a:avLst>
-              <a:gd name="adj" fmla="val 1714"/>
-            </a:avLst>
-          </a:prstGeom>
-          <a:solidFill>
-            <a:srgbClr val="F1F5F9"/>
-          </a:solidFill>
-          <a:ln w="6350">
-            <a:solidFill>
-              <a:srgbClr val="E2E8F0"/>
-            </a:solidFill>
-            <a:prstDash val="solid"/>
-          </a:ln>
-        </p:spPr>
-      </p:sp>
-      <p:sp>
-        <p:nvSpPr>
-          <p:cNvPr id="8" name="Text 6"/>
-          <p:cNvSpPr/>
-          <p:nvPr/>
-        </p:nvSpPr>
-        <p:spPr>
-          <a:xfrm>
-            <a:off x="713232" y="3035808"/>
-            <a:ext cx="10762488" cy="2980944"/>
-          </a:xfrm>
-          <a:prstGeom prst="rect">
-            <a:avLst/>
-          </a:prstGeom>
-          <a:noFill/>
-          <a:ln/>
-        </p:spPr>
-        <p:txBody>
-          <a:bodyPr wrap="square" rtlCol="0" anchor="t"/>
-          <a:lstStyle/>
-          <a:p>
-            <a:pPr indent="0" marL="0">
-              <a:lnSpc>
-                <a:spcPct val="140000"/>
-              </a:lnSpc>
-              <a:buNone/>
-            </a:pPr>
-            <a:r>
-              <a:rPr lang="en-US" sz="1150" dirty="0">
-                <a:solidFill>
-                  <a:srgbClr val="1A1F36"/>
-                </a:solidFill>
-                <a:latin typeface="Roboto Mono" pitchFamily="34" charset="0"/>
-                <a:ea typeface="Roboto Mono" pitchFamily="34" charset="-122"/>
-                <a:cs typeface="Roboto Mono" pitchFamily="34" charset="-120"/>
-              </a:rPr>
-              <a:t>월별 PM2.5 추이를 2024와 2025 두 해 라인차트로 같이 그려줘.</a:t>
-            </a:r>
-            <a:endParaRPr lang="en-US" sz="1150" dirty="0"/>
-          </a:p>
-          <a:p>
-            <a:pPr indent="0" marL="0">
-              <a:lnSpc>
-                <a:spcPct val="140000"/>
-              </a:lnSpc>
-              <a:buNone/>
-            </a:pPr>
-            <a:r>
-              <a:rPr lang="en-US" sz="1150" dirty="0">
-                <a:solidFill>
-                  <a:srgbClr val="1A1F36"/>
-                </a:solidFill>
-                <a:latin typeface="Roboto Mono" pitchFamily="34" charset="0"/>
-                <a:ea typeface="Roboto Mono" pitchFamily="34" charset="-122"/>
-                <a:cs typeface="Roboto Mono" pitchFamily="34" charset="-120"/>
-              </a:rPr>
-              <a:t>황사 시즌(3~5월) 영역을 음영 처리하고,</a:t>
-            </a:r>
-            <a:endParaRPr lang="en-US" sz="1150" dirty="0"/>
-          </a:p>
-          <a:p>
-            <a:pPr indent="0" marL="0">
-              <a:lnSpc>
-                <a:spcPct val="140000"/>
-              </a:lnSpc>
-              <a:buNone/>
-            </a:pPr>
-            <a:r>
-              <a:rPr lang="en-US" sz="1150" dirty="0">
-                <a:solidFill>
-                  <a:srgbClr val="1A1F36"/>
-                </a:solidFill>
-                <a:latin typeface="Roboto Mono" pitchFamily="34" charset="0"/>
-                <a:ea typeface="Roboto Mono" pitchFamily="34" charset="-122"/>
-                <a:cs typeface="Roboto Mono" pitchFamily="34" charset="-120"/>
-              </a:rPr>
-              <a:t>2025 황사 시즌이 작년 대비 강해졌는지 한 줄로 해석.</a:t>
-            </a:r>
-            <a:endParaRPr lang="en-US" sz="1150" dirty="0"/>
-          </a:p>
-          <a:p>
-            <a:pPr indent="0" marL="0">
-              <a:lnSpc>
-                <a:spcPct val="140000"/>
-              </a:lnSpc>
-              <a:buNone/>
-            </a:pPr>
-            <a:r>
-              <a:rPr lang="en-US" sz="1150" dirty="0">
-                <a:solidFill>
-                  <a:srgbClr val="1A1F36"/>
-                </a:solidFill>
-                <a:latin typeface="Roboto Mono" pitchFamily="34" charset="0"/>
-                <a:ea typeface="Roboto Mono" pitchFamily="34" charset="-122"/>
-                <a:cs typeface="Roboto Mono" pitchFamily="34" charset="-120"/>
-              </a:rPr>
-              <a:t>yoy_monthly_pm25.png 로 저장.</a:t>
-            </a:r>
-            <a:endParaRPr lang="en-US" sz="1150" dirty="0"/>
-          </a:p>
-        </p:txBody>
-      </p:sp>
-      <p:sp>
-        <p:nvSpPr>
-          <p:cNvPr id="9" name="Text 7"/>
+              <a:t>2단계 결과 — 데이터 요약</a:t>
+            </a:r>
+            <a:endParaRPr lang="en-US" sz="2800" dirty="0"/>
+          </a:p>
+        </p:txBody>
+      </p:sp>
+      <p:pic>
+        <p:nvPicPr>
+          <p:cNvPr id="6" name="Image 0" descr="/Users/sujinpark/b2b-lecture-note/20260512_inflearn_B2G_dataanalysis/assets/screenshots/day1/result_step1_summary.png">    </p:cNvPr>
+          <p:cNvPicPr>
+            <a:picLocks noChangeAspect="1"/>
+          </p:cNvPicPr>
+          <p:nvPr/>
+        </p:nvPicPr>
+        <p:blipFill>
+          <a:blip r:embed="rId1"/>
+          <a:srcRect l="0" r="0" t="0" b="0"/>
+          <a:stretch/>
+        </p:blipFill>
+        <p:spPr>
+          <a:xfrm>
+            <a:off x="2194560" y="2240280"/>
+            <a:ext cx="7772400" cy="3657600"/>
+          </a:xfrm>
+          <a:prstGeom prst="rect">
+            <a:avLst/>
+          </a:prstGeom>
+        </p:spPr>
+      </p:pic>
+      <p:sp>
+        <p:nvSpPr>
+          <p:cNvPr id="7" name="Text 4"/>
+          <p:cNvSpPr/>
+          <p:nvPr/>
+        </p:nvSpPr>
+        <p:spPr>
+          <a:xfrm>
+            <a:off x="548640" y="5989320"/>
+            <a:ext cx="11091672" cy="411480"/>
+          </a:xfrm>
+          <a:prstGeom prst="rect">
+            <a:avLst/>
+          </a:prstGeom>
+          <a:noFill/>
+          <a:ln/>
+        </p:spPr>
+        <p:txBody>
+          <a:bodyPr wrap="square" rtlCol="0" anchor="ctr"/>
+          <a:lstStyle/>
+          <a:p>
+            <a:pPr algn="ctr" indent="0" marL="0">
+              <a:buNone/>
+            </a:pPr>
+            <a:r>
+              <a:rPr lang="en-US" sz="1200" i="1" dirty="0">
+                <a:solidFill>
+                  <a:srgbClr val="718096"/>
+                </a:solidFill>
+                <a:latin typeface="Noto Sans KR" pitchFamily="34" charset="0"/>
+                <a:ea typeface="Noto Sans KR" pitchFamily="34" charset="-122"/>
+                <a:cs typeface="Noto Sans KR" pitchFamily="34" charset="-120"/>
+              </a:rPr>
+              <a:t>shape · dtypes · 결측 비율 · 날짜 범위</a:t>
+            </a:r>
+            <a:endParaRPr lang="en-US" sz="1200" dirty="0"/>
+          </a:p>
+        </p:txBody>
+      </p:sp>
+      <p:sp>
+        <p:nvSpPr>
+          <p:cNvPr id="8" name="Text 5"/>
           <p:cNvSpPr/>
           <p:nvPr/>
         </p:nvSpPr>
@@ -10354,7 +10513,7 @@
                 <a:ea typeface="Noto Sans KR" pitchFamily="34" charset="-122"/>
                 <a:cs typeface="Noto Sans KR" pitchFamily="34" charset="-120"/>
               </a:rPr>
-              <a:t>25 / 31</a:t>
+              <a:t>25 / 34</a:t>
             </a:r>
             <a:endParaRPr lang="en-US" sz="900" dirty="0"/>
           </a:p>
@@ -10438,7 +10597,7 @@
                 <a:ea typeface="Noto Sans KR" pitchFamily="34" charset="-122"/>
                 <a:cs typeface="Noto Sans KR" pitchFamily="34" charset="-120"/>
               </a:rPr>
-              <a:t>DAY 1 · STEP 4</a:t>
+              <a:t>파트 3. 데이터 다운로드 + 첫 분석 + CLAUDE.md</a:t>
             </a:r>
             <a:endParaRPr lang="en-US" sz="1400" dirty="0"/>
           </a:p>
@@ -10453,7 +10612,7 @@
         <p:spPr>
           <a:xfrm>
             <a:off x="548640" y="960120"/>
-            <a:ext cx="10515600" cy="292608"/>
+            <a:ext cx="11091672" cy="292608"/>
           </a:xfrm>
           <a:prstGeom prst="rect">
             <a:avLst/>
@@ -10469,7 +10628,7 @@
               <a:buNone/>
             </a:pPr>
             <a:r>
-              <a:rPr lang="en-US" sz="1100" b="1" spc="150" kern="0" dirty="0">
+              <a:rPr lang="en-US" sz="1100" b="1" spc="50" kern="0" dirty="0">
                 <a:solidFill>
                   <a:srgbClr val="4A7BF7"/>
                 </a:solidFill>
@@ -10477,7 +10636,7 @@
                 <a:ea typeface="Noto Sans KR" pitchFamily="34" charset="-122"/>
                 <a:cs typeface="Noto Sans KR" pitchFamily="34" charset="-120"/>
               </a:rPr>
-              <a:t>오늘 만든 결과물</a:t>
+              <a:t>👉 직접 따라쳐보세요 — 본인 Claude Code에 그대로 붙여넣기</a:t>
             </a:r>
             <a:endParaRPr lang="en-US" sz="1100" dirty="0"/>
           </a:p>
@@ -10491,8 +10650,8 @@
         </p:nvSpPr>
         <p:spPr>
           <a:xfrm>
-            <a:off x="548640" y="1417320"/>
-            <a:ext cx="11091672" cy="640080"/>
+            <a:off x="548640" y="1508760"/>
+            <a:ext cx="11091672" cy="1005840"/>
           </a:xfrm>
           <a:prstGeom prst="rect">
             <a:avLst/>
@@ -10505,10 +10664,13 @@
           <a:lstStyle/>
           <a:p>
             <a:pPr indent="0" marL="0">
-              <a:buNone/>
-            </a:pPr>
-            <a:r>
-              <a:rPr lang="en-US" sz="2800" b="1" spc="-30" kern="0" dirty="0">
+              <a:lnSpc>
+                <a:spcPct val="115000"/>
+              </a:lnSpc>
+              <a:buNone/>
+            </a:pPr>
+            <a:r>
+              <a:rPr lang="en-US" sz="3400" b="1" spc="-50" kern="0" dirty="0">
                 <a:solidFill>
                   <a:srgbClr val="1A1F36"/>
                 </a:solidFill>
@@ -10516,77 +10678,167 @@
                 <a:ea typeface="Noto Sans KR" pitchFamily="34" charset="-122"/>
                 <a:cs typeface="Noto Sans KR" pitchFamily="34" charset="-120"/>
               </a:rPr>
-              <a:t>4단계 결과 — 월별 추이 + 황사 시즌</a:t>
-            </a:r>
-            <a:endParaRPr lang="en-US" sz="2800" dirty="0"/>
-          </a:p>
-        </p:txBody>
-      </p:sp>
-      <p:pic>
-        <p:nvPicPr>
-          <p:cNvPr id="6" name="Image 0" descr="/Users/sujinpark/b2b-lecture-note/20260512_inflearn_B2G_dataanalysis/assets/screenshots/day1/result_step3_monthly.png">    </p:cNvPr>
-          <p:cNvPicPr>
-            <a:picLocks noChangeAspect="1"/>
-          </p:cNvPicPr>
-          <p:nvPr/>
-        </p:nvPicPr>
-        <p:blipFill>
-          <a:blip r:embed="rId1"/>
-          <a:srcRect l="0" r="0" t="0" b="0"/>
-          <a:stretch/>
-        </p:blipFill>
-        <p:spPr>
-          <a:xfrm>
-            <a:off x="2194560" y="2240280"/>
-            <a:ext cx="7772400" cy="3657600"/>
-          </a:xfrm>
-          <a:prstGeom prst="rect">
-            <a:avLst/>
-          </a:prstGeom>
-        </p:spPr>
-      </p:pic>
-      <p:sp>
-        <p:nvSpPr>
-          <p:cNvPr id="7" name="Text 4"/>
-          <p:cNvSpPr/>
-          <p:nvPr/>
-        </p:nvSpPr>
-        <p:spPr>
-          <a:xfrm>
-            <a:off x="548640" y="5989320"/>
-            <a:ext cx="11091672" cy="411480"/>
-          </a:xfrm>
-          <a:prstGeom prst="rect">
-            <a:avLst/>
-          </a:prstGeom>
-          <a:noFill/>
-          <a:ln/>
-        </p:spPr>
-        <p:txBody>
-          <a:bodyPr wrap="square" rtlCol="0" anchor="ctr"/>
-          <a:lstStyle/>
-          <a:p>
-            <a:pPr algn="ctr" indent="0" marL="0">
-              <a:buNone/>
-            </a:pPr>
-            <a:r>
-              <a:rPr lang="en-US" sz="1200" i="1" dirty="0">
-                <a:solidFill>
-                  <a:srgbClr val="718096"/>
-                </a:solidFill>
-                <a:latin typeface="Noto Sans KR" pitchFamily="34" charset="0"/>
-                <a:ea typeface="Noto Sans KR" pitchFamily="34" charset="-122"/>
-                <a:cs typeface="Noto Sans KR" pitchFamily="34" charset="-120"/>
-              </a:rPr>
-              <a:t>월별 PM2.5 (2024 vs 2025) + 황사 시즌 음영</a:t>
-            </a:r>
-            <a:endParaRPr lang="en-US" sz="1200" dirty="0"/>
-          </a:p>
-        </p:txBody>
-      </p:sp>
-      <p:sp>
-        <p:nvSpPr>
-          <p:cNvPr id="8" name="Text 5"/>
+              <a:t>3단계 — 자치구별 PM2.5 연평균 (2024 vs 2025)</a:t>
+            </a:r>
+            <a:endParaRPr lang="en-US" sz="3400" dirty="0"/>
+          </a:p>
+        </p:txBody>
+      </p:sp>
+      <p:sp>
+        <p:nvSpPr>
+          <p:cNvPr id="6" name="Shape 4"/>
+          <p:cNvSpPr/>
+          <p:nvPr/>
+        </p:nvSpPr>
+        <p:spPr>
+          <a:xfrm>
+            <a:off x="548640" y="2606040"/>
+            <a:ext cx="1828800" cy="0"/>
+          </a:xfrm>
+          <a:prstGeom prst="line">
+            <a:avLst/>
+          </a:prstGeom>
+          <a:noFill/>
+          <a:ln w="25400">
+            <a:solidFill>
+              <a:srgbClr val="4A7BF7"/>
+            </a:solidFill>
+            <a:prstDash val="solid"/>
+          </a:ln>
+        </p:spPr>
+      </p:sp>
+      <p:sp>
+        <p:nvSpPr>
+          <p:cNvPr id="7" name="Shape 5"/>
+          <p:cNvSpPr/>
+          <p:nvPr/>
+        </p:nvSpPr>
+        <p:spPr>
+          <a:xfrm>
+            <a:off x="548640" y="2926080"/>
+            <a:ext cx="11091672" cy="3200400"/>
+          </a:xfrm>
+          <a:prstGeom prst="roundRect">
+            <a:avLst>
+              <a:gd name="adj" fmla="val 1714"/>
+            </a:avLst>
+          </a:prstGeom>
+          <a:solidFill>
+            <a:srgbClr val="F1F5F9"/>
+          </a:solidFill>
+          <a:ln w="6350">
+            <a:solidFill>
+              <a:srgbClr val="E2E8F0"/>
+            </a:solidFill>
+            <a:prstDash val="solid"/>
+          </a:ln>
+        </p:spPr>
+      </p:sp>
+      <p:sp>
+        <p:nvSpPr>
+          <p:cNvPr id="8" name="Text 6"/>
+          <p:cNvSpPr/>
+          <p:nvPr/>
+        </p:nvSpPr>
+        <p:spPr>
+          <a:xfrm>
+            <a:off x="713232" y="3035808"/>
+            <a:ext cx="10762488" cy="2980944"/>
+          </a:xfrm>
+          <a:prstGeom prst="rect">
+            <a:avLst/>
+          </a:prstGeom>
+          <a:noFill/>
+          <a:ln/>
+        </p:spPr>
+        <p:txBody>
+          <a:bodyPr wrap="square" rtlCol="0" anchor="t"/>
+          <a:lstStyle/>
+          <a:p>
+            <a:pPr indent="0" marL="0">
+              <a:lnSpc>
+                <a:spcPct val="140000"/>
+              </a:lnSpc>
+              <a:buNone/>
+            </a:pPr>
+            <a:r>
+              <a:rPr lang="en-US" sz="1150" dirty="0">
+                <a:solidFill>
+                  <a:srgbClr val="1A1F36"/>
+                </a:solidFill>
+                <a:latin typeface="Roboto Mono" pitchFamily="34" charset="0"/>
+                <a:ea typeface="Roboto Mono" pitchFamily="34" charset="-122"/>
+                <a:cs typeface="Roboto Mono" pitchFamily="34" charset="-120"/>
+              </a:rPr>
+              <a:t>자치구별 PM2.5 연평균을 2024와 2025 두 해 비교 막대그래프로,</a:t>
+            </a:r>
+            <a:endParaRPr lang="en-US" sz="1150" dirty="0"/>
+          </a:p>
+          <a:p>
+            <a:pPr indent="0" marL="0">
+              <a:lnSpc>
+                <a:spcPct val="140000"/>
+              </a:lnSpc>
+              <a:buNone/>
+            </a:pPr>
+            <a:r>
+              <a:rPr lang="en-US" sz="1150" dirty="0">
+                <a:solidFill>
+                  <a:srgbClr val="1A1F36"/>
+                </a:solidFill>
+                <a:latin typeface="Roboto Mono" pitchFamily="34" charset="0"/>
+                <a:ea typeface="Roboto Mono" pitchFamily="34" charset="-122"/>
+                <a:cs typeface="Roboto Mono" pitchFamily="34" charset="-120"/>
+              </a:rPr>
+              <a:t>한글 폰트 안 깨지게 그려줘.</a:t>
+            </a:r>
+            <a:endParaRPr lang="en-US" sz="1150" dirty="0"/>
+          </a:p>
+          <a:p>
+            <a:pPr indent="0" marL="0">
+              <a:lnSpc>
+                <a:spcPct val="140000"/>
+              </a:lnSpc>
+              <a:buNone/>
+            </a:pPr>
+            <a:r>
+              <a:rPr lang="en-US" sz="1150" dirty="0">
+                <a:solidFill>
+                  <a:srgbClr val="1A1F36"/>
+                </a:solidFill>
+                <a:latin typeface="Roboto Mono" pitchFamily="34" charset="0"/>
+                <a:ea typeface="Roboto Mono" pitchFamily="34" charset="-122"/>
+                <a:cs typeface="Roboto Mono" pitchFamily="34" charset="-120"/>
+              </a:rPr>
+              <a:t>같은 자치구가 가로축에서 두 해 막대로 나란히 보이게.</a:t>
+            </a:r>
+            <a:endParaRPr lang="en-US" sz="1150" dirty="0"/>
+          </a:p>
+          <a:p>
+            <a:pPr indent="0" marL="0">
+              <a:lnSpc>
+                <a:spcPct val="140000"/>
+              </a:lnSpc>
+              <a:buNone/>
+            </a:pPr>
+            <a:r>
+              <a:rPr lang="en-US" sz="1150" dirty="0">
+                <a:solidFill>
+                  <a:srgbClr val="1A1F36"/>
+                </a:solidFill>
+                <a:latin typeface="Roboto Mono" pitchFamily="34" charset="0"/>
+                <a:ea typeface="Roboto Mono" pitchFamily="34" charset="-122"/>
+                <a:cs typeface="Roboto Mono" pitchFamily="34" charset="-120"/>
+              </a:rPr>
+              <a:t>yoy_district_pm25.png 로 저장.</a:t>
+            </a:r>
+            <a:endParaRPr lang="en-US" sz="1150" dirty="0"/>
+          </a:p>
+        </p:txBody>
+      </p:sp>
+      <p:sp>
+        <p:nvSpPr>
+          <p:cNvPr id="9" name="Text 7"/>
           <p:cNvSpPr/>
           <p:nvPr/>
         </p:nvSpPr>
@@ -10617,7 +10869,7 @@
                 <a:ea typeface="Noto Sans KR" pitchFamily="34" charset="-122"/>
                 <a:cs typeface="Noto Sans KR" pitchFamily="34" charset="-120"/>
               </a:rPr>
-              <a:t>26 / 31</a:t>
+              <a:t>26 / 34</a:t>
             </a:r>
             <a:endParaRPr lang="en-US" sz="900" dirty="0"/>
           </a:p>
@@ -10701,7 +10953,7 @@
                 <a:ea typeface="Noto Sans KR" pitchFamily="34" charset="-122"/>
                 <a:cs typeface="Noto Sans KR" pitchFamily="34" charset="-120"/>
               </a:rPr>
-              <a:t>파트 3. 데이터 다운로드 + 첫 분석 + CLAUDE.md</a:t>
+              <a:t>DAY 1 · STEP 3</a:t>
             </a:r>
             <a:endParaRPr lang="en-US" sz="1400" dirty="0"/>
           </a:p>
@@ -10740,7 +10992,7 @@
                 <a:ea typeface="Noto Sans KR" pitchFamily="34" charset="-122"/>
                 <a:cs typeface="Noto Sans KR" pitchFamily="34" charset="-120"/>
               </a:rPr>
-              <a:t>섹션 3 / 4</a:t>
+              <a:t>오늘 만든 결과물</a:t>
             </a:r>
             <a:endParaRPr lang="en-US" sz="1100" dirty="0"/>
           </a:p>
@@ -10754,8 +11006,8 @@
         </p:nvSpPr>
         <p:spPr>
           <a:xfrm>
-            <a:off x="548640" y="1508760"/>
-            <a:ext cx="11091672" cy="1371600"/>
+            <a:off x="548640" y="1417320"/>
+            <a:ext cx="11091672" cy="640080"/>
           </a:xfrm>
           <a:prstGeom prst="rect">
             <a:avLst/>
@@ -10768,13 +11020,10 @@
           <a:lstStyle/>
           <a:p>
             <a:pPr indent="0" marL="0">
-              <a:lnSpc>
-                <a:spcPct val="110000"/>
-              </a:lnSpc>
-              <a:buNone/>
-            </a:pPr>
-            <a:r>
-              <a:rPr lang="en-US" sz="4200" b="1" spc="-50" kern="0" dirty="0">
+              <a:buNone/>
+            </a:pPr>
+            <a:r>
+              <a:rPr lang="en-US" sz="2800" b="1" spc="-30" kern="0" dirty="0">
                 <a:solidFill>
                   <a:srgbClr val="1A1F36"/>
                 </a:solidFill>
@@ -10782,180 +11031,77 @@
                 <a:ea typeface="Noto Sans KR" pitchFamily="34" charset="-122"/>
                 <a:cs typeface="Noto Sans KR" pitchFamily="34" charset="-120"/>
               </a:rPr>
-              <a:t>CLAUDE.md — 같은 결과를 매번 재현</a:t>
-            </a:r>
-            <a:endParaRPr lang="en-US" sz="4200" dirty="0"/>
-          </a:p>
-        </p:txBody>
-      </p:sp>
-      <p:sp>
-        <p:nvSpPr>
-          <p:cNvPr id="6" name="Shape 4"/>
-          <p:cNvSpPr/>
-          <p:nvPr/>
-        </p:nvSpPr>
-        <p:spPr>
-          <a:xfrm>
-            <a:off x="548640" y="2971800"/>
-            <a:ext cx="1828800" cy="0"/>
-          </a:xfrm>
-          <a:prstGeom prst="line">
-            <a:avLst/>
-          </a:prstGeom>
-          <a:noFill/>
-          <a:ln w="25400">
-            <a:solidFill>
-              <a:srgbClr val="4A7BF7"/>
-            </a:solidFill>
-            <a:prstDash val="solid"/>
-          </a:ln>
-        </p:spPr>
-      </p:sp>
-      <p:sp>
-        <p:nvSpPr>
-          <p:cNvPr id="7" name="Text 5"/>
-          <p:cNvSpPr/>
-          <p:nvPr/>
-        </p:nvSpPr>
-        <p:spPr>
-          <a:xfrm>
-            <a:off x="548640" y="3200400"/>
-            <a:ext cx="11091672" cy="2788920"/>
-          </a:xfrm>
-          <a:prstGeom prst="rect">
-            <a:avLst/>
-          </a:prstGeom>
-          <a:noFill/>
-          <a:ln/>
-        </p:spPr>
-        <p:txBody>
-          <a:bodyPr wrap="square" rtlCol="0" anchor="t"/>
-          <a:lstStyle/>
-          <a:p>
-            <a:pPr indent="0" marL="0">
-              <a:lnSpc>
-                <a:spcPct val="155000"/>
-              </a:lnSpc>
-              <a:buNone/>
-            </a:pPr>
-            <a:r>
-              <a:rPr lang="en-US" sz="1700" dirty="0">
-                <a:solidFill>
-                  <a:srgbClr val="4A5568"/>
-                </a:solidFill>
-                <a:latin typeface="Noto Sans KR" pitchFamily="34" charset="0"/>
-                <a:ea typeface="Noto Sans KR" pitchFamily="34" charset="-122"/>
-                <a:cs typeface="Noto Sans KR" pitchFamily="34" charset="-120"/>
-              </a:rPr>
-              <a:t>· 작업 폴더 루트에 두는 "프로젝트 컨텍스트 메모"</a:t>
-            </a:r>
-            <a:endParaRPr lang="en-US" sz="1700" dirty="0"/>
-          </a:p>
-          <a:p>
-            <a:pPr indent="0" marL="0">
-              <a:lnSpc>
-                <a:spcPct val="155000"/>
-              </a:lnSpc>
-              <a:buNone/>
-            </a:pPr>
-            <a:r>
-              <a:rPr lang="en-US" sz="1700" dirty="0">
-                <a:solidFill>
-                  <a:srgbClr val="4A5568"/>
-                </a:solidFill>
-                <a:latin typeface="Noto Sans KR" pitchFamily="34" charset="0"/>
-                <a:ea typeface="Noto Sans KR" pitchFamily="34" charset="-122"/>
-                <a:cs typeface="Noto Sans KR" pitchFamily="34" charset="-120"/>
-              </a:rPr>
-              <a:t>· 인코딩·폰트·임계값·차트 저장 경로·파일명 규칙까지 명시</a:t>
-            </a:r>
-            <a:endParaRPr lang="en-US" sz="1700" dirty="0"/>
-          </a:p>
-          <a:p>
-            <a:pPr indent="0" marL="0">
-              <a:lnSpc>
-                <a:spcPct val="155000"/>
-              </a:lnSpc>
-              <a:buNone/>
-            </a:pPr>
-            <a:r>
-              <a:rPr lang="en-US" sz="1700" dirty="0">
-                <a:solidFill>
-                  <a:srgbClr val="4A5568"/>
-                </a:solidFill>
-                <a:latin typeface="Noto Sans KR" pitchFamily="34" charset="0"/>
-                <a:ea typeface="Noto Sans KR" pitchFamily="34" charset="-122"/>
-                <a:cs typeface="Noto Sans KR" pitchFamily="34" charset="-120"/>
-              </a:rPr>
-              <a:t>· 한 번 적어두면 다음 분석부터 같은 결과가 재현됨</a:t>
-            </a:r>
-            <a:endParaRPr lang="en-US" sz="1700" dirty="0"/>
-          </a:p>
-          <a:p>
-            <a:pPr indent="0" marL="0">
-              <a:lnSpc>
-                <a:spcPct val="155000"/>
-              </a:lnSpc>
-              <a:buNone/>
-            </a:pPr>
-            <a:r>
-              <a:rPr lang="en-US" sz="1700" dirty="0">
-                <a:solidFill>
-                  <a:srgbClr val="4A5568"/>
-                </a:solidFill>
-                <a:latin typeface="Noto Sans KR" pitchFamily="34" charset="0"/>
-                <a:ea typeface="Noto Sans KR" pitchFamily="34" charset="-122"/>
-                <a:cs typeface="Noto Sans KR" pitchFamily="34" charset="-120"/>
-              </a:rPr>
-              <a:t>  (강사 시연 → 수강생 → 본인 회사 데이터에서도 동일하게)</a:t>
-            </a:r>
-            <a:endParaRPr lang="en-US" sz="1700" dirty="0"/>
-          </a:p>
-          <a:p>
-            <a:pPr indent="0" marL="0">
-              <a:lnSpc>
-                <a:spcPct val="155000"/>
-              </a:lnSpc>
-              <a:buNone/>
-            </a:pPr>
-            <a:r>
-              <a:rPr lang="en-US" sz="1700" dirty="0">
-                <a:solidFill>
-                  <a:srgbClr val="4A5568"/>
-                </a:solidFill>
-                <a:latin typeface="Noto Sans KR" pitchFamily="34" charset="0"/>
-                <a:ea typeface="Noto Sans KR" pitchFamily="34" charset="-122"/>
-                <a:cs typeface="Noto Sans KR" pitchFamily="34" charset="-120"/>
-              </a:rPr>
-              <a:t>· 추가 규칙은 자연어로 부탁 — "이 규칙 추가해줘"</a:t>
-            </a:r>
-            <a:endParaRPr lang="en-US" sz="1700" dirty="0"/>
-          </a:p>
-          <a:p>
-            <a:pPr indent="0" marL="0">
-              <a:lnSpc>
-                <a:spcPct val="155000"/>
-              </a:lnSpc>
-              <a:buNone/>
-            </a:pPr>
-            <a:r>
-              <a:rPr lang="en-US" sz="1700" dirty="0">
-                <a:solidFill>
-                  <a:srgbClr val="4A5568"/>
-                </a:solidFill>
-                <a:latin typeface="Noto Sans KR" pitchFamily="34" charset="0"/>
-                <a:ea typeface="Noto Sans KR" pitchFamily="34" charset="-122"/>
-                <a:cs typeface="Noto Sans KR" pitchFamily="34" charset="-120"/>
-              </a:rPr>
-              <a:t>· 버전 구분(v1/v2) 안 함 — 폴더(day1/, day2/)로 히스토리 관리</a:t>
-            </a:r>
-            <a:endParaRPr lang="en-US" sz="1700" dirty="0"/>
-          </a:p>
-        </p:txBody>
-      </p:sp>
-      <p:sp>
-        <p:nvSpPr>
-          <p:cNvPr id="8" name="Text 6"/>
+              <a:t>3단계 결과 — 자치구별 PM2.5 비교</a:t>
+            </a:r>
+            <a:endParaRPr lang="en-US" sz="2800" dirty="0"/>
+          </a:p>
+        </p:txBody>
+      </p:sp>
+      <p:pic>
+        <p:nvPicPr>
+          <p:cNvPr id="6" name="Image 0" descr="/Users/sujinpark/b2b-lecture-note/20260512_inflearn_B2G_dataanalysis/assets/screenshots/day1/result_step2_district.png">    </p:cNvPr>
+          <p:cNvPicPr>
+            <a:picLocks noChangeAspect="1"/>
+          </p:cNvPicPr>
+          <p:nvPr/>
+        </p:nvPicPr>
+        <p:blipFill>
+          <a:blip r:embed="rId1"/>
+          <a:srcRect l="0" r="0" t="0" b="0"/>
+          <a:stretch/>
+        </p:blipFill>
+        <p:spPr>
+          <a:xfrm>
+            <a:off x="2194560" y="2240280"/>
+            <a:ext cx="7772400" cy="3657600"/>
+          </a:xfrm>
+          <a:prstGeom prst="rect">
+            <a:avLst/>
+          </a:prstGeom>
+        </p:spPr>
+      </p:pic>
+      <p:sp>
+        <p:nvSpPr>
+          <p:cNvPr id="7" name="Text 4"/>
+          <p:cNvSpPr/>
+          <p:nvPr/>
+        </p:nvSpPr>
+        <p:spPr>
+          <a:xfrm>
+            <a:off x="548640" y="5989320"/>
+            <a:ext cx="11091672" cy="411480"/>
+          </a:xfrm>
+          <a:prstGeom prst="rect">
+            <a:avLst/>
+          </a:prstGeom>
+          <a:noFill/>
+          <a:ln/>
+        </p:spPr>
+        <p:txBody>
+          <a:bodyPr wrap="square" rtlCol="0" anchor="ctr"/>
+          <a:lstStyle/>
+          <a:p>
+            <a:pPr algn="ctr" indent="0" marL="0">
+              <a:buNone/>
+            </a:pPr>
+            <a:r>
+              <a:rPr lang="en-US" sz="1200" i="1" dirty="0">
+                <a:solidFill>
+                  <a:srgbClr val="718096"/>
+                </a:solidFill>
+                <a:latin typeface="Noto Sans KR" pitchFamily="34" charset="0"/>
+                <a:ea typeface="Noto Sans KR" pitchFamily="34" charset="-122"/>
+                <a:cs typeface="Noto Sans KR" pitchFamily="34" charset="-120"/>
+              </a:rPr>
+              <a:t>25개 자치구 × 2개 연도 막대그래프</a:t>
+            </a:r>
+            <a:endParaRPr lang="en-US" sz="1200" dirty="0"/>
+          </a:p>
+        </p:txBody>
+      </p:sp>
+      <p:sp>
+        <p:nvSpPr>
+          <p:cNvPr id="8" name="Text 5"/>
           <p:cNvSpPr/>
           <p:nvPr/>
         </p:nvSpPr>
@@ -10986,7 +11132,7 @@
                 <a:ea typeface="Noto Sans KR" pitchFamily="34" charset="-122"/>
                 <a:cs typeface="Noto Sans KR" pitchFamily="34" charset="-120"/>
               </a:rPr>
-              <a:t>27 / 31</a:t>
+              <a:t>27 / 34</a:t>
             </a:r>
             <a:endParaRPr lang="en-US" sz="900" dirty="0"/>
           </a:p>
@@ -11070,7 +11216,7 @@
                 <a:ea typeface="Noto Sans KR" pitchFamily="34" charset="-122"/>
                 <a:cs typeface="Noto Sans KR" pitchFamily="34" charset="-120"/>
               </a:rPr>
-              <a:t>DAY 1 · CLAUDE.md</a:t>
+              <a:t>파트 3. 데이터 다운로드 + 첫 분석 + CLAUDE.md</a:t>
             </a:r>
             <a:endParaRPr lang="en-US" sz="1400" dirty="0"/>
           </a:p>
@@ -11085,7 +11231,7 @@
         <p:spPr>
           <a:xfrm>
             <a:off x="548640" y="960120"/>
-            <a:ext cx="10515600" cy="292608"/>
+            <a:ext cx="11091672" cy="292608"/>
           </a:xfrm>
           <a:prstGeom prst="rect">
             <a:avLst/>
@@ -11101,7 +11247,7 @@
               <a:buNone/>
             </a:pPr>
             <a:r>
-              <a:rPr lang="en-US" sz="1100" b="1" spc="150" kern="0" dirty="0">
+              <a:rPr lang="en-US" sz="1100" b="1" spc="50" kern="0" dirty="0">
                 <a:solidFill>
                   <a:srgbClr val="4A7BF7"/>
                 </a:solidFill>
@@ -11109,7 +11255,7 @@
                 <a:ea typeface="Noto Sans KR" pitchFamily="34" charset="-122"/>
                 <a:cs typeface="Noto Sans KR" pitchFamily="34" charset="-120"/>
               </a:rPr>
-              <a:t>오늘 만든 결과물</a:t>
+              <a:t>👉 직접 따라쳐보세요 — 본인 Claude Code에 그대로 붙여넣기</a:t>
             </a:r>
             <a:endParaRPr lang="en-US" sz="1100" dirty="0"/>
           </a:p>
@@ -11123,8 +11269,8 @@
         </p:nvSpPr>
         <p:spPr>
           <a:xfrm>
-            <a:off x="548640" y="1417320"/>
-            <a:ext cx="11091672" cy="640080"/>
+            <a:off x="548640" y="1508760"/>
+            <a:ext cx="11091672" cy="1005840"/>
           </a:xfrm>
           <a:prstGeom prst="rect">
             <a:avLst/>
@@ -11137,10 +11283,13 @@
           <a:lstStyle/>
           <a:p>
             <a:pPr indent="0" marL="0">
-              <a:buNone/>
-            </a:pPr>
-            <a:r>
-              <a:rPr lang="en-US" sz="2800" b="1" spc="-30" kern="0" dirty="0">
+              <a:lnSpc>
+                <a:spcPct val="115000"/>
+              </a:lnSpc>
+              <a:buNone/>
+            </a:pPr>
+            <a:r>
+              <a:rPr lang="en-US" sz="3400" b="1" spc="-50" kern="0" dirty="0">
                 <a:solidFill>
                   <a:srgbClr val="1A1F36"/>
                 </a:solidFill>
@@ -11148,77 +11297,167 @@
                 <a:ea typeface="Noto Sans KR" pitchFamily="34" charset="-122"/>
                 <a:cs typeface="Noto Sans KR" pitchFamily="34" charset="-120"/>
               </a:rPr>
-              <a:t>CLAUDE.md 예시 — 그대로 복사해서 쓰세요</a:t>
-            </a:r>
-            <a:endParaRPr lang="en-US" sz="2800" dirty="0"/>
-          </a:p>
-        </p:txBody>
-      </p:sp>
-      <p:pic>
-        <p:nvPicPr>
-          <p:cNvPr id="6" name="Image 0" descr="/Users/sujinpark/b2b-lecture-note/20260512_inflearn_B2G_dataanalysis/assets/screenshots/day1/claude_md_example.png">    </p:cNvPr>
-          <p:cNvPicPr>
-            <a:picLocks noChangeAspect="1"/>
-          </p:cNvPicPr>
-          <p:nvPr/>
-        </p:nvPicPr>
-        <p:blipFill>
-          <a:blip r:embed="rId1"/>
-          <a:srcRect l="0" r="0" t="0" b="0"/>
-          <a:stretch/>
-        </p:blipFill>
-        <p:spPr>
-          <a:xfrm>
-            <a:off x="2194560" y="2240280"/>
-            <a:ext cx="7772400" cy="3657600"/>
-          </a:xfrm>
-          <a:prstGeom prst="rect">
-            <a:avLst/>
-          </a:prstGeom>
-        </p:spPr>
-      </p:pic>
-      <p:sp>
-        <p:nvSpPr>
-          <p:cNvPr id="7" name="Text 4"/>
-          <p:cNvSpPr/>
-          <p:nvPr/>
-        </p:nvSpPr>
-        <p:spPr>
-          <a:xfrm>
-            <a:off x="548640" y="5989320"/>
-            <a:ext cx="11091672" cy="411480"/>
-          </a:xfrm>
-          <a:prstGeom prst="rect">
-            <a:avLst/>
-          </a:prstGeom>
-          <a:noFill/>
-          <a:ln/>
-        </p:spPr>
-        <p:txBody>
-          <a:bodyPr wrap="square" rtlCol="0" anchor="ctr"/>
-          <a:lstStyle/>
-          <a:p>
-            <a:pPr algn="ctr" indent="0" marL="0">
-              <a:buNone/>
-            </a:pPr>
-            <a:r>
-              <a:rPr lang="en-US" sz="1200" i="1" dirty="0">
-                <a:solidFill>
-                  <a:srgbClr val="718096"/>
-                </a:solidFill>
-                <a:latin typeface="Noto Sans KR" pitchFamily="34" charset="0"/>
-                <a:ea typeface="Noto Sans KR" pitchFamily="34" charset="-122"/>
-                <a:cs typeface="Noto Sans KR" pitchFamily="34" charset="-120"/>
-              </a:rPr>
-              <a:t>이 CLAUDE.md를 그대로 두면 다음 분석부터 같은 결과가 재현됩니다</a:t>
-            </a:r>
-            <a:endParaRPr lang="en-US" sz="1200" dirty="0"/>
-          </a:p>
-        </p:txBody>
-      </p:sp>
-      <p:sp>
-        <p:nvSpPr>
-          <p:cNvPr id="8" name="Text 5"/>
+              <a:t>4단계 — 월별 추이 + 황사 시즌</a:t>
+            </a:r>
+            <a:endParaRPr lang="en-US" sz="3400" dirty="0"/>
+          </a:p>
+        </p:txBody>
+      </p:sp>
+      <p:sp>
+        <p:nvSpPr>
+          <p:cNvPr id="6" name="Shape 4"/>
+          <p:cNvSpPr/>
+          <p:nvPr/>
+        </p:nvSpPr>
+        <p:spPr>
+          <a:xfrm>
+            <a:off x="548640" y="2606040"/>
+            <a:ext cx="1828800" cy="0"/>
+          </a:xfrm>
+          <a:prstGeom prst="line">
+            <a:avLst/>
+          </a:prstGeom>
+          <a:noFill/>
+          <a:ln w="25400">
+            <a:solidFill>
+              <a:srgbClr val="4A7BF7"/>
+            </a:solidFill>
+            <a:prstDash val="solid"/>
+          </a:ln>
+        </p:spPr>
+      </p:sp>
+      <p:sp>
+        <p:nvSpPr>
+          <p:cNvPr id="7" name="Shape 5"/>
+          <p:cNvSpPr/>
+          <p:nvPr/>
+        </p:nvSpPr>
+        <p:spPr>
+          <a:xfrm>
+            <a:off x="548640" y="2926080"/>
+            <a:ext cx="11091672" cy="3200400"/>
+          </a:xfrm>
+          <a:prstGeom prst="roundRect">
+            <a:avLst>
+              <a:gd name="adj" fmla="val 1714"/>
+            </a:avLst>
+          </a:prstGeom>
+          <a:solidFill>
+            <a:srgbClr val="F1F5F9"/>
+          </a:solidFill>
+          <a:ln w="6350">
+            <a:solidFill>
+              <a:srgbClr val="E2E8F0"/>
+            </a:solidFill>
+            <a:prstDash val="solid"/>
+          </a:ln>
+        </p:spPr>
+      </p:sp>
+      <p:sp>
+        <p:nvSpPr>
+          <p:cNvPr id="8" name="Text 6"/>
+          <p:cNvSpPr/>
+          <p:nvPr/>
+        </p:nvSpPr>
+        <p:spPr>
+          <a:xfrm>
+            <a:off x="713232" y="3035808"/>
+            <a:ext cx="10762488" cy="2980944"/>
+          </a:xfrm>
+          <a:prstGeom prst="rect">
+            <a:avLst/>
+          </a:prstGeom>
+          <a:noFill/>
+          <a:ln/>
+        </p:spPr>
+        <p:txBody>
+          <a:bodyPr wrap="square" rtlCol="0" anchor="t"/>
+          <a:lstStyle/>
+          <a:p>
+            <a:pPr indent="0" marL="0">
+              <a:lnSpc>
+                <a:spcPct val="140000"/>
+              </a:lnSpc>
+              <a:buNone/>
+            </a:pPr>
+            <a:r>
+              <a:rPr lang="en-US" sz="1150" dirty="0">
+                <a:solidFill>
+                  <a:srgbClr val="1A1F36"/>
+                </a:solidFill>
+                <a:latin typeface="Roboto Mono" pitchFamily="34" charset="0"/>
+                <a:ea typeface="Roboto Mono" pitchFamily="34" charset="-122"/>
+                <a:cs typeface="Roboto Mono" pitchFamily="34" charset="-120"/>
+              </a:rPr>
+              <a:t>월별 PM2.5 추이를 2024와 2025 두 해 라인차트로 같이 그려줘.</a:t>
+            </a:r>
+            <a:endParaRPr lang="en-US" sz="1150" dirty="0"/>
+          </a:p>
+          <a:p>
+            <a:pPr indent="0" marL="0">
+              <a:lnSpc>
+                <a:spcPct val="140000"/>
+              </a:lnSpc>
+              <a:buNone/>
+            </a:pPr>
+            <a:r>
+              <a:rPr lang="en-US" sz="1150" dirty="0">
+                <a:solidFill>
+                  <a:srgbClr val="1A1F36"/>
+                </a:solidFill>
+                <a:latin typeface="Roboto Mono" pitchFamily="34" charset="0"/>
+                <a:ea typeface="Roboto Mono" pitchFamily="34" charset="-122"/>
+                <a:cs typeface="Roboto Mono" pitchFamily="34" charset="-120"/>
+              </a:rPr>
+              <a:t>황사 시즌(3~5월) 영역을 음영 처리하고,</a:t>
+            </a:r>
+            <a:endParaRPr lang="en-US" sz="1150" dirty="0"/>
+          </a:p>
+          <a:p>
+            <a:pPr indent="0" marL="0">
+              <a:lnSpc>
+                <a:spcPct val="140000"/>
+              </a:lnSpc>
+              <a:buNone/>
+            </a:pPr>
+            <a:r>
+              <a:rPr lang="en-US" sz="1150" dirty="0">
+                <a:solidFill>
+                  <a:srgbClr val="1A1F36"/>
+                </a:solidFill>
+                <a:latin typeface="Roboto Mono" pitchFamily="34" charset="0"/>
+                <a:ea typeface="Roboto Mono" pitchFamily="34" charset="-122"/>
+                <a:cs typeface="Roboto Mono" pitchFamily="34" charset="-120"/>
+              </a:rPr>
+              <a:t>2025 황사 시즌이 작년 대비 강해졌는지 한 줄로 해석.</a:t>
+            </a:r>
+            <a:endParaRPr lang="en-US" sz="1150" dirty="0"/>
+          </a:p>
+          <a:p>
+            <a:pPr indent="0" marL="0">
+              <a:lnSpc>
+                <a:spcPct val="140000"/>
+              </a:lnSpc>
+              <a:buNone/>
+            </a:pPr>
+            <a:r>
+              <a:rPr lang="en-US" sz="1150" dirty="0">
+                <a:solidFill>
+                  <a:srgbClr val="1A1F36"/>
+                </a:solidFill>
+                <a:latin typeface="Roboto Mono" pitchFamily="34" charset="0"/>
+                <a:ea typeface="Roboto Mono" pitchFamily="34" charset="-122"/>
+                <a:cs typeface="Roboto Mono" pitchFamily="34" charset="-120"/>
+              </a:rPr>
+              <a:t>yoy_monthly_pm25.png 로 저장.</a:t>
+            </a:r>
+            <a:endParaRPr lang="en-US" sz="1150" dirty="0"/>
+          </a:p>
+        </p:txBody>
+      </p:sp>
+      <p:sp>
+        <p:nvSpPr>
+          <p:cNvPr id="9" name="Text 7"/>
           <p:cNvSpPr/>
           <p:nvPr/>
         </p:nvSpPr>
@@ -11249,7 +11488,7 @@
                 <a:ea typeface="Noto Sans KR" pitchFamily="34" charset="-122"/>
                 <a:cs typeface="Noto Sans KR" pitchFamily="34" charset="-120"/>
               </a:rPr>
-              <a:t>28 / 31</a:t>
+              <a:t>28 / 34</a:t>
             </a:r>
             <a:endParaRPr lang="en-US" sz="900" dirty="0"/>
           </a:p>
@@ -11333,7 +11572,7 @@
                 <a:ea typeface="Noto Sans KR" pitchFamily="34" charset="-122"/>
                 <a:cs typeface="Noto Sans KR" pitchFamily="34" charset="-120"/>
               </a:rPr>
-              <a:t>파트 3. 데이터 다운로드 + 첫 분석 + CLAUDE.md</a:t>
+              <a:t>DAY 1 · STEP 4</a:t>
             </a:r>
             <a:endParaRPr lang="en-US" sz="1400" dirty="0"/>
           </a:p>
@@ -11372,7 +11611,7 @@
                 <a:ea typeface="Noto Sans KR" pitchFamily="34" charset="-122"/>
                 <a:cs typeface="Noto Sans KR" pitchFamily="34" charset="-120"/>
               </a:rPr>
-              <a:t>섹션 4 / 4</a:t>
+              <a:t>오늘 만든 결과물</a:t>
             </a:r>
             <a:endParaRPr lang="en-US" sz="1100" dirty="0"/>
           </a:p>
@@ -11386,8 +11625,8 @@
         </p:nvSpPr>
         <p:spPr>
           <a:xfrm>
-            <a:off x="548640" y="1508760"/>
-            <a:ext cx="11091672" cy="1371600"/>
+            <a:off x="548640" y="1417320"/>
+            <a:ext cx="11091672" cy="640080"/>
           </a:xfrm>
           <a:prstGeom prst="rect">
             <a:avLst/>
@@ -11400,13 +11639,10 @@
           <a:lstStyle/>
           <a:p>
             <a:pPr indent="0" marL="0">
-              <a:lnSpc>
-                <a:spcPct val="110000"/>
-              </a:lnSpc>
-              <a:buNone/>
-            </a:pPr>
-            <a:r>
-              <a:rPr lang="en-US" sz="4200" b="1" spc="-50" kern="0" dirty="0">
+              <a:buNone/>
+            </a:pPr>
+            <a:r>
+              <a:rPr lang="en-US" sz="2800" b="1" spc="-30" kern="0" dirty="0">
                 <a:solidFill>
                   <a:srgbClr val="1A1F36"/>
                 </a:solidFill>
@@ -11414,229 +11650,77 @@
                 <a:ea typeface="Noto Sans KR" pitchFamily="34" charset="-122"/>
                 <a:cs typeface="Noto Sans KR" pitchFamily="34" charset="-120"/>
               </a:rPr>
-              <a:t>산출물 정리 + 운영 채널 업로드</a:t>
-            </a:r>
-            <a:endParaRPr lang="en-US" sz="4200" dirty="0"/>
-          </a:p>
-        </p:txBody>
-      </p:sp>
-      <p:sp>
-        <p:nvSpPr>
-          <p:cNvPr id="6" name="Shape 4"/>
-          <p:cNvSpPr/>
-          <p:nvPr/>
-        </p:nvSpPr>
-        <p:spPr>
-          <a:xfrm>
-            <a:off x="548640" y="2971800"/>
-            <a:ext cx="1828800" cy="0"/>
-          </a:xfrm>
-          <a:prstGeom prst="line">
-            <a:avLst/>
-          </a:prstGeom>
-          <a:noFill/>
-          <a:ln w="25400">
-            <a:solidFill>
-              <a:srgbClr val="4A7BF7"/>
-            </a:solidFill>
-            <a:prstDash val="solid"/>
-          </a:ln>
-        </p:spPr>
-      </p:sp>
-      <p:sp>
-        <p:nvSpPr>
-          <p:cNvPr id="7" name="Text 5"/>
-          <p:cNvSpPr/>
-          <p:nvPr/>
-        </p:nvSpPr>
-        <p:spPr>
-          <a:xfrm>
-            <a:off x="548640" y="3200400"/>
-            <a:ext cx="11091672" cy="2788920"/>
-          </a:xfrm>
-          <a:prstGeom prst="rect">
-            <a:avLst/>
-          </a:prstGeom>
-          <a:noFill/>
-          <a:ln/>
-        </p:spPr>
-        <p:txBody>
-          <a:bodyPr wrap="square" rtlCol="0" anchor="t"/>
-          <a:lstStyle/>
-          <a:p>
-            <a:pPr indent="0" marL="0">
-              <a:lnSpc>
-                <a:spcPct val="155000"/>
-              </a:lnSpc>
-              <a:buNone/>
-            </a:pPr>
-            <a:r>
-              <a:rPr lang="en-US" sz="1700" dirty="0">
-                <a:solidFill>
-                  <a:srgbClr val="4A5568"/>
-                </a:solidFill>
-                <a:latin typeface="Noto Sans KR" pitchFamily="34" charset="0"/>
-                <a:ea typeface="Noto Sans KR" pitchFamily="34" charset="-122"/>
-                <a:cs typeface="Noto Sans KR" pitchFamily="34" charset="-120"/>
-              </a:rPr>
-              <a:t>inflearn_ccd_challenge/</a:t>
-            </a:r>
-            <a:endParaRPr lang="en-US" sz="1700" dirty="0"/>
-          </a:p>
-          <a:p>
-            <a:pPr indent="0" marL="0">
-              <a:lnSpc>
-                <a:spcPct val="155000"/>
-              </a:lnSpc>
-              <a:buNone/>
-            </a:pPr>
-            <a:r>
-              <a:rPr lang="en-US" sz="1700" dirty="0">
-                <a:solidFill>
-                  <a:srgbClr val="4A5568"/>
-                </a:solidFill>
-                <a:latin typeface="Noto Sans KR" pitchFamily="34" charset="0"/>
-                <a:ea typeface="Noto Sans KR" pitchFamily="34" charset="-122"/>
-                <a:cs typeface="Noto Sans KR" pitchFamily="34" charset="-120"/>
-              </a:rPr>
-              <a:t>├── CLAUDE.md</a:t>
-            </a:r>
-            <a:endParaRPr lang="en-US" sz="1700" dirty="0"/>
-          </a:p>
-          <a:p>
-            <a:pPr indent="0" marL="0">
-              <a:lnSpc>
-                <a:spcPct val="155000"/>
-              </a:lnSpc>
-              <a:buNone/>
-            </a:pPr>
-            <a:r>
-              <a:rPr lang="en-US" sz="1700" dirty="0">
-                <a:solidFill>
-                  <a:srgbClr val="4A5568"/>
-                </a:solidFill>
-                <a:latin typeface="Noto Sans KR" pitchFamily="34" charset="0"/>
-                <a:ea typeface="Noto Sans KR" pitchFamily="34" charset="-122"/>
-                <a:cs typeface="Noto Sans KR" pitchFamily="34" charset="-120"/>
-              </a:rPr>
-              <a:t>├── 기간별_일평균_대기환경_정보_2024년.csv</a:t>
-            </a:r>
-            <a:endParaRPr lang="en-US" sz="1700" dirty="0"/>
-          </a:p>
-          <a:p>
-            <a:pPr indent="0" marL="0">
-              <a:lnSpc>
-                <a:spcPct val="155000"/>
-              </a:lnSpc>
-              <a:buNone/>
-            </a:pPr>
-            <a:r>
-              <a:rPr lang="en-US" sz="1700" dirty="0">
-                <a:solidFill>
-                  <a:srgbClr val="4A5568"/>
-                </a:solidFill>
-                <a:latin typeface="Noto Sans KR" pitchFamily="34" charset="0"/>
-                <a:ea typeface="Noto Sans KR" pitchFamily="34" charset="-122"/>
-                <a:cs typeface="Noto Sans KR" pitchFamily="34" charset="-120"/>
-              </a:rPr>
-              <a:t>├── 기간별_일평균_대기환경_정보_2025년.csv</a:t>
-            </a:r>
-            <a:endParaRPr lang="en-US" sz="1700" dirty="0"/>
-          </a:p>
-          <a:p>
-            <a:pPr indent="0" marL="0">
-              <a:lnSpc>
-                <a:spcPct val="155000"/>
-              </a:lnSpc>
-              <a:buNone/>
-            </a:pPr>
-            <a:r>
-              <a:rPr lang="en-US" sz="1700" dirty="0">
-                <a:solidFill>
-                  <a:srgbClr val="4A5568"/>
-                </a:solidFill>
-                <a:latin typeface="Noto Sans KR" pitchFamily="34" charset="0"/>
-                <a:ea typeface="Noto Sans KR" pitchFamily="34" charset="-122"/>
-                <a:cs typeface="Noto Sans KR" pitchFamily="34" charset="-120"/>
-              </a:rPr>
-              <a:t>└── outputs/</a:t>
-            </a:r>
-            <a:endParaRPr lang="en-US" sz="1700" dirty="0"/>
-          </a:p>
-          <a:p>
-            <a:pPr indent="0" marL="0">
-              <a:lnSpc>
-                <a:spcPct val="155000"/>
-              </a:lnSpc>
-              <a:buNone/>
-            </a:pPr>
-            <a:r>
-              <a:rPr lang="en-US" sz="1700" dirty="0">
-                <a:solidFill>
-                  <a:srgbClr val="4A5568"/>
-                </a:solidFill>
-                <a:latin typeface="Noto Sans KR" pitchFamily="34" charset="0"/>
-                <a:ea typeface="Noto Sans KR" pitchFamily="34" charset="-122"/>
-                <a:cs typeface="Noto Sans KR" pitchFamily="34" charset="-120"/>
-              </a:rPr>
-              <a:t>    ├── yoy_district_pm25.png</a:t>
-            </a:r>
-            <a:endParaRPr lang="en-US" sz="1700" dirty="0"/>
-          </a:p>
-          <a:p>
-            <a:pPr indent="0" marL="0">
-              <a:lnSpc>
-                <a:spcPct val="155000"/>
-              </a:lnSpc>
-              <a:buNone/>
-            </a:pPr>
-            <a:r>
-              <a:rPr lang="en-US" sz="1700" dirty="0">
-                <a:solidFill>
-                  <a:srgbClr val="4A5568"/>
-                </a:solidFill>
-                <a:latin typeface="Noto Sans KR" pitchFamily="34" charset="0"/>
-                <a:ea typeface="Noto Sans KR" pitchFamily="34" charset="-122"/>
-                <a:cs typeface="Noto Sans KR" pitchFamily="34" charset="-120"/>
-              </a:rPr>
-              <a:t>    └── yoy_monthly_pm25.png</a:t>
-            </a:r>
-            <a:endParaRPr lang="en-US" sz="1700" dirty="0"/>
-          </a:p>
-          <a:p>
-            <a:pPr indent="0" marL="0">
-              <a:lnSpc>
-                <a:spcPct val="155000"/>
-              </a:lnSpc>
-              <a:buNone/>
-            </a:pPr>
-            <a:endParaRPr lang="en-US" sz="1700" dirty="0"/>
-          </a:p>
-          <a:p>
-            <a:pPr indent="0" marL="0">
-              <a:lnSpc>
-                <a:spcPct val="155000"/>
-              </a:lnSpc>
-              <a:buNone/>
-            </a:pPr>
-            <a:r>
-              <a:rPr lang="en-US" sz="1700" dirty="0">
-                <a:solidFill>
-                  <a:srgbClr val="4A5568"/>
-                </a:solidFill>
-                <a:latin typeface="Noto Sans KR" pitchFamily="34" charset="0"/>
-                <a:ea typeface="Noto Sans KR" pitchFamily="34" charset="-122"/>
-                <a:cs typeface="Noto Sans KR" pitchFamily="34" charset="-120"/>
-              </a:rPr>
-              <a:t>→ outputs/ PNG · CLAUDE.md 를 인프런/운영 채널에 업로드</a:t>
-            </a:r>
-            <a:endParaRPr lang="en-US" sz="1700" dirty="0"/>
-          </a:p>
-        </p:txBody>
-      </p:sp>
-      <p:sp>
-        <p:nvSpPr>
-          <p:cNvPr id="8" name="Text 6"/>
+              <a:t>4단계 결과 — 월별 추이 + 황사 시즌</a:t>
+            </a:r>
+            <a:endParaRPr lang="en-US" sz="2800" dirty="0"/>
+          </a:p>
+        </p:txBody>
+      </p:sp>
+      <p:pic>
+        <p:nvPicPr>
+          <p:cNvPr id="6" name="Image 0" descr="/Users/sujinpark/b2b-lecture-note/20260512_inflearn_B2G_dataanalysis/assets/screenshots/day1/result_step3_monthly.png">    </p:cNvPr>
+          <p:cNvPicPr>
+            <a:picLocks noChangeAspect="1"/>
+          </p:cNvPicPr>
+          <p:nvPr/>
+        </p:nvPicPr>
+        <p:blipFill>
+          <a:blip r:embed="rId1"/>
+          <a:srcRect l="0" r="0" t="0" b="0"/>
+          <a:stretch/>
+        </p:blipFill>
+        <p:spPr>
+          <a:xfrm>
+            <a:off x="2194560" y="2240280"/>
+            <a:ext cx="7772400" cy="3657600"/>
+          </a:xfrm>
+          <a:prstGeom prst="rect">
+            <a:avLst/>
+          </a:prstGeom>
+        </p:spPr>
+      </p:pic>
+      <p:sp>
+        <p:nvSpPr>
+          <p:cNvPr id="7" name="Text 4"/>
+          <p:cNvSpPr/>
+          <p:nvPr/>
+        </p:nvSpPr>
+        <p:spPr>
+          <a:xfrm>
+            <a:off x="548640" y="5989320"/>
+            <a:ext cx="11091672" cy="411480"/>
+          </a:xfrm>
+          <a:prstGeom prst="rect">
+            <a:avLst/>
+          </a:prstGeom>
+          <a:noFill/>
+          <a:ln/>
+        </p:spPr>
+        <p:txBody>
+          <a:bodyPr wrap="square" rtlCol="0" anchor="ctr"/>
+          <a:lstStyle/>
+          <a:p>
+            <a:pPr algn="ctr" indent="0" marL="0">
+              <a:buNone/>
+            </a:pPr>
+            <a:r>
+              <a:rPr lang="en-US" sz="1200" i="1" dirty="0">
+                <a:solidFill>
+                  <a:srgbClr val="718096"/>
+                </a:solidFill>
+                <a:latin typeface="Noto Sans KR" pitchFamily="34" charset="0"/>
+                <a:ea typeface="Noto Sans KR" pitchFamily="34" charset="-122"/>
+                <a:cs typeface="Noto Sans KR" pitchFamily="34" charset="-120"/>
+              </a:rPr>
+              <a:t>월별 PM2.5 (2024 vs 2025) + 황사 시즌 음영</a:t>
+            </a:r>
+            <a:endParaRPr lang="en-US" sz="1200" dirty="0"/>
+          </a:p>
+        </p:txBody>
+      </p:sp>
+      <p:sp>
+        <p:nvSpPr>
+          <p:cNvPr id="8" name="Text 5"/>
           <p:cNvSpPr/>
           <p:nvPr/>
         </p:nvSpPr>
@@ -11667,7 +11751,7 @@
                 <a:ea typeface="Noto Sans KR" pitchFamily="34" charset="-122"/>
                 <a:cs typeface="Noto Sans KR" pitchFamily="34" charset="-120"/>
               </a:rPr>
-              <a:t>29 / 31</a:t>
+              <a:t>29 / 34</a:t>
             </a:r>
             <a:endParaRPr lang="en-US" sz="900" dirty="0"/>
           </a:p>
@@ -12226,7 +12310,7 @@
                 <a:ea typeface="Noto Sans KR" pitchFamily="34" charset="-122"/>
                 <a:cs typeface="Noto Sans KR" pitchFamily="34" charset="-120"/>
               </a:rPr>
-              <a:t>3 / 31</a:t>
+              <a:t>3 / 34</a:t>
             </a:r>
             <a:endParaRPr lang="en-US" sz="900" dirty="0"/>
           </a:p>
@@ -12286,7 +12370,7 @@
         <p:spPr>
           <a:xfrm>
             <a:off x="548640" y="530352"/>
-            <a:ext cx="10515600" cy="502920"/>
+            <a:ext cx="10515600" cy="411480"/>
           </a:xfrm>
           <a:prstGeom prst="rect">
             <a:avLst/>
@@ -12302,7 +12386,88 @@
               <a:buNone/>
             </a:pPr>
             <a:r>
-              <a:rPr lang="en-US" sz="2600" b="1" spc="-30" kern="0" dirty="0">
+              <a:rPr lang="en-US" sz="1400" b="1" spc="50" kern="0" dirty="0">
+                <a:solidFill>
+                  <a:srgbClr val="718096"/>
+                </a:solidFill>
+                <a:latin typeface="Noto Sans KR" pitchFamily="34" charset="0"/>
+                <a:ea typeface="Noto Sans KR" pitchFamily="34" charset="-122"/>
+                <a:cs typeface="Noto Sans KR" pitchFamily="34" charset="-120"/>
+              </a:rPr>
+              <a:t>파트 3. 데이터 다운로드 + 첫 분석 + CLAUDE.md</a:t>
+            </a:r>
+            <a:endParaRPr lang="en-US" sz="1400" dirty="0"/>
+          </a:p>
+        </p:txBody>
+      </p:sp>
+      <p:sp>
+        <p:nvSpPr>
+          <p:cNvPr id="4" name="Text 2"/>
+          <p:cNvSpPr/>
+          <p:nvPr/>
+        </p:nvSpPr>
+        <p:spPr>
+          <a:xfrm>
+            <a:off x="548640" y="960120"/>
+            <a:ext cx="10515600" cy="292608"/>
+          </a:xfrm>
+          <a:prstGeom prst="rect">
+            <a:avLst/>
+          </a:prstGeom>
+          <a:noFill/>
+          <a:ln/>
+        </p:spPr>
+        <p:txBody>
+          <a:bodyPr wrap="square" rtlCol="0" anchor="ctr"/>
+          <a:lstStyle/>
+          <a:p>
+            <a:pPr indent="0" marL="0">
+              <a:buNone/>
+            </a:pPr>
+            <a:r>
+              <a:rPr lang="en-US" sz="1100" b="1" spc="150" kern="0" dirty="0">
+                <a:solidFill>
+                  <a:srgbClr val="4A7BF7"/>
+                </a:solidFill>
+                <a:latin typeface="Noto Sans KR" pitchFamily="34" charset="0"/>
+                <a:ea typeface="Noto Sans KR" pitchFamily="34" charset="-122"/>
+                <a:cs typeface="Noto Sans KR" pitchFamily="34" charset="-120"/>
+              </a:rPr>
+              <a:t>섹션 3 / 4</a:t>
+            </a:r>
+            <a:endParaRPr lang="en-US" sz="1100" dirty="0"/>
+          </a:p>
+        </p:txBody>
+      </p:sp>
+      <p:sp>
+        <p:nvSpPr>
+          <p:cNvPr id="5" name="Text 3"/>
+          <p:cNvSpPr/>
+          <p:nvPr/>
+        </p:nvSpPr>
+        <p:spPr>
+          <a:xfrm>
+            <a:off x="548640" y="1508760"/>
+            <a:ext cx="11091672" cy="1371600"/>
+          </a:xfrm>
+          <a:prstGeom prst="rect">
+            <a:avLst/>
+          </a:prstGeom>
+          <a:noFill/>
+          <a:ln/>
+        </p:spPr>
+        <p:txBody>
+          <a:bodyPr wrap="square" rtlCol="0" anchor="t"/>
+          <a:lstStyle/>
+          <a:p>
+            <a:pPr indent="0" marL="0">
+              <a:lnSpc>
+                <a:spcPct val="110000"/>
+              </a:lnSpc>
+              <a:buNone/>
+            </a:pPr>
+            <a:r>
+              <a:rPr lang="en-US" sz="4200" b="1" spc="-50" kern="0" dirty="0">
                 <a:solidFill>
                   <a:srgbClr val="1A1F36"/>
                 </a:solidFill>
@@ -12310,79 +12475,11 @@
                 <a:ea typeface="Noto Sans KR" pitchFamily="34" charset="-122"/>
                 <a:cs typeface="Noto Sans KR" pitchFamily="34" charset="-120"/>
               </a:rPr>
-              <a:t>🎯 미션 1 — 첫 분석 + CLAUDE.md</a:t>
-            </a:r>
-            <a:endParaRPr lang="en-US" sz="2600" dirty="0"/>
-          </a:p>
-        </p:txBody>
-      </p:sp>
-      <p:sp>
-        <p:nvSpPr>
-          <p:cNvPr id="4" name="Text 2"/>
-          <p:cNvSpPr/>
-          <p:nvPr/>
-        </p:nvSpPr>
-        <p:spPr>
-          <a:xfrm>
-            <a:off x="548640" y="1051560"/>
-            <a:ext cx="10515600" cy="347472"/>
-          </a:xfrm>
-          <a:prstGeom prst="rect">
-            <a:avLst/>
-          </a:prstGeom>
-          <a:noFill/>
-          <a:ln/>
-        </p:spPr>
-        <p:txBody>
-          <a:bodyPr wrap="square" rtlCol="0" anchor="ctr"/>
-          <a:lstStyle/>
-          <a:p>
-            <a:pPr indent="0" marL="0">
-              <a:buNone/>
-            </a:pPr>
-            <a:r>
-              <a:rPr lang="en-US" sz="1400" dirty="0">
-                <a:solidFill>
-                  <a:srgbClr val="718096"/>
-                </a:solidFill>
-                <a:latin typeface="Noto Sans KR" pitchFamily="34" charset="0"/>
-                <a:ea typeface="Noto Sans KR" pitchFamily="34" charset="-122"/>
-                <a:cs typeface="Noto Sans KR" pitchFamily="34" charset="-120"/>
-              </a:rPr>
-              <a:t>미세먼지 데이터에 질문 3개 + 결과 캡처 + CLAUDE.md → 인프런/운영 채널 업로드</a:t>
-            </a:r>
-            <a:endParaRPr lang="en-US" sz="1400" dirty="0"/>
-          </a:p>
-        </p:txBody>
-      </p:sp>
-      <p:sp>
-        <p:nvSpPr>
-          <p:cNvPr id="5" name="Shape 3"/>
-          <p:cNvSpPr/>
-          <p:nvPr/>
-        </p:nvSpPr>
-        <p:spPr>
-          <a:xfrm>
-            <a:off x="548640" y="1554480"/>
-            <a:ext cx="5669280" cy="4572000"/>
-          </a:xfrm>
-          <a:prstGeom prst="roundRect">
-            <a:avLst>
-              <a:gd name="adj" fmla="val 2000"/>
-            </a:avLst>
-          </a:prstGeom>
-          <a:solidFill>
-            <a:srgbClr val="FFFFFF"/>
-          </a:solidFill>
-          <a:ln/>
-          <a:effectLst>
-            <a:outerShdw sx="100000" sy="100000" kx="0" ky="0" algn="bl" rotWithShape="0" blurRad="76200" dist="25400" dir="16200000">
-              <a:srgbClr val="000000">
-                <a:alpha val="8000"/>
-              </a:srgbClr>
-            </a:outerShdw>
-          </a:effectLst>
-        </p:spPr>
+              <a:t>CLAUDE.md — 같은 결과를 매번 재현</a:t>
+            </a:r>
+            <a:endParaRPr lang="en-US" sz="4200" dirty="0"/>
+          </a:p>
+        </p:txBody>
       </p:sp>
       <p:sp>
         <p:nvSpPr>
@@ -12392,170 +12489,16 @@
         </p:nvSpPr>
         <p:spPr>
           <a:xfrm>
-            <a:off x="548640" y="1554480"/>
-            <a:ext cx="5669280" cy="64008"/>
-          </a:xfrm>
-          <a:prstGeom prst="rect">
-            <a:avLst/>
-          </a:prstGeom>
-          <a:solidFill>
-            <a:srgbClr val="4A7BF7"/>
-          </a:solidFill>
-          <a:ln/>
-        </p:spPr>
-      </p:sp>
-      <p:sp>
-        <p:nvSpPr>
-          <p:cNvPr id="7" name="Text 5"/>
-          <p:cNvSpPr/>
-          <p:nvPr/>
-        </p:nvSpPr>
-        <p:spPr>
-          <a:xfrm>
-            <a:off x="777240" y="1691640"/>
-            <a:ext cx="5212080" cy="365760"/>
-          </a:xfrm>
-          <a:prstGeom prst="rect">
-            <a:avLst/>
-          </a:prstGeom>
-          <a:noFill/>
-          <a:ln/>
-        </p:spPr>
-        <p:txBody>
-          <a:bodyPr wrap="square" rtlCol="0" anchor="ctr"/>
-          <a:lstStyle/>
-          <a:p>
-            <a:pPr indent="0" marL="0">
-              <a:buNone/>
-            </a:pPr>
-            <a:r>
-              <a:rPr lang="en-US" sz="1500" b="1" dirty="0">
-                <a:solidFill>
-                  <a:srgbClr val="1A1F36"/>
-                </a:solidFill>
-                <a:latin typeface="Noto Sans KR" pitchFamily="34" charset="0"/>
-                <a:ea typeface="Noto Sans KR" pitchFamily="34" charset="-122"/>
-                <a:cs typeface="Noto Sans KR" pitchFamily="34" charset="-120"/>
-              </a:rPr>
-              <a:t>필수 제출</a:t>
-            </a:r>
-            <a:endParaRPr lang="en-US" sz="1500" dirty="0"/>
-          </a:p>
-        </p:txBody>
-      </p:sp>
-      <p:sp>
-        <p:nvSpPr>
-          <p:cNvPr id="8" name="Text 6"/>
-          <p:cNvSpPr/>
-          <p:nvPr/>
-        </p:nvSpPr>
-        <p:spPr>
-          <a:xfrm>
-            <a:off x="777240" y="2148840"/>
-            <a:ext cx="5212080" cy="3840480"/>
-          </a:xfrm>
-          <a:prstGeom prst="rect">
-            <a:avLst/>
-          </a:prstGeom>
-          <a:noFill/>
-          <a:ln/>
-        </p:spPr>
-        <p:txBody>
-          <a:bodyPr wrap="square" rtlCol="0" anchor="t"/>
-          <a:lstStyle/>
-          <a:p>
-            <a:pPr indent="0" marL="0">
-              <a:lnSpc>
-                <a:spcPct val="150000"/>
-              </a:lnSpc>
-              <a:spcAft>
-                <a:spcPts val="1000"/>
-              </a:spcAft>
-              <a:buNone/>
-            </a:pPr>
-            <a:r>
-              <a:rPr lang="en-US" sz="1300" dirty="0">
-                <a:solidFill>
-                  <a:srgbClr val="4A5568"/>
-                </a:solidFill>
-                <a:latin typeface="Noto Sans KR" pitchFamily="34" charset="0"/>
-                <a:ea typeface="Noto Sans KR" pitchFamily="34" charset="-122"/>
-                <a:cs typeface="Noto Sans KR" pitchFamily="34" charset="-120"/>
-              </a:rPr>
-              <a:t>✅ 질문 3개 + 결과 캡처 (PNG)</a:t>
-            </a:r>
-            <a:endParaRPr lang="en-US" sz="1300" dirty="0"/>
-          </a:p>
-          <a:p>
-            <a:pPr indent="0" marL="0">
-              <a:lnSpc>
-                <a:spcPct val="150000"/>
-              </a:lnSpc>
-              <a:spcAft>
-                <a:spcPts val="1000"/>
-              </a:spcAft>
-              <a:buNone/>
-            </a:pPr>
-            <a:r>
-              <a:rPr lang="en-US" sz="1300" dirty="0">
-                <a:solidFill>
-                  <a:srgbClr val="4A5568"/>
-                </a:solidFill>
-                <a:latin typeface="Noto Sans KR" pitchFamily="34" charset="0"/>
-                <a:ea typeface="Noto Sans KR" pitchFamily="34" charset="-122"/>
-                <a:cs typeface="Noto Sans KR" pitchFamily="34" charset="-120"/>
-              </a:rPr>
-              <a:t>✅ CLAUDE.md (분석 규칙 5개 이상)</a:t>
-            </a:r>
-            <a:endParaRPr lang="en-US" sz="1300" dirty="0"/>
-          </a:p>
-          <a:p>
-            <a:pPr indent="0" marL="0">
-              <a:lnSpc>
-                <a:spcPct val="150000"/>
-              </a:lnSpc>
-              <a:spcAft>
-                <a:spcPts val="1000"/>
-              </a:spcAft>
-              <a:buNone/>
-            </a:pPr>
-            <a:r>
-              <a:rPr lang="en-US" sz="1300" dirty="0">
-                <a:solidFill>
-                  <a:srgbClr val="4A5568"/>
-                </a:solidFill>
-                <a:latin typeface="Noto Sans KR" pitchFamily="34" charset="0"/>
-                <a:ea typeface="Noto Sans KR" pitchFamily="34" charset="-122"/>
-                <a:cs typeface="Noto Sans KR" pitchFamily="34" charset="-120"/>
-              </a:rPr>
-              <a:t>✅ 운영 채널 업로드 (PNG · CLAUDE.md)</a:t>
-            </a:r>
-            <a:endParaRPr lang="en-US" sz="1300" dirty="0"/>
-          </a:p>
-        </p:txBody>
-      </p:sp>
-      <p:sp>
-        <p:nvSpPr>
-          <p:cNvPr id="9" name="Shape 7"/>
-          <p:cNvSpPr/>
-          <p:nvPr/>
-        </p:nvSpPr>
-        <p:spPr>
-          <a:xfrm>
-            <a:off x="6400800" y="1554480"/>
-            <a:ext cx="5212080" cy="4572000"/>
-          </a:xfrm>
-          <a:prstGeom prst="roundRect">
-            <a:avLst>
-              <a:gd name="adj" fmla="val 2000"/>
-            </a:avLst>
-          </a:prstGeom>
-          <a:solidFill>
-            <a:srgbClr val="F5F7FA"/>
-          </a:solidFill>
-          <a:ln w="6350">
+            <a:off x="548640" y="2971800"/>
+            <a:ext cx="1828800" cy="0"/>
+          </a:xfrm>
+          <a:prstGeom prst="line">
+            <a:avLst/>
+          </a:prstGeom>
+          <a:noFill/>
+          <a:ln w="25400">
             <a:solidFill>
-              <a:srgbClr val="E2E8F0"/>
+              <a:srgbClr val="4A7BF7"/>
             </a:solidFill>
             <a:prstDash val="solid"/>
           </a:ln>
@@ -12563,73 +12506,14 @@
       </p:sp>
       <p:sp>
         <p:nvSpPr>
-          <p:cNvPr id="10" name="Shape 8"/>
-          <p:cNvSpPr/>
-          <p:nvPr/>
-        </p:nvSpPr>
-        <p:spPr>
-          <a:xfrm>
-            <a:off x="6400800" y="1554480"/>
-            <a:ext cx="5212080" cy="64008"/>
-          </a:xfrm>
-          <a:prstGeom prst="rect">
-            <a:avLst/>
-          </a:prstGeom>
-          <a:solidFill>
-            <a:srgbClr val="4A7BF7"/>
-          </a:solidFill>
-          <a:ln/>
-        </p:spPr>
-      </p:sp>
-      <p:sp>
-        <p:nvSpPr>
-          <p:cNvPr id="11" name="Text 9"/>
-          <p:cNvSpPr/>
-          <p:nvPr/>
-        </p:nvSpPr>
-        <p:spPr>
-          <a:xfrm>
-            <a:off x="6629400" y="1691640"/>
-            <a:ext cx="4754880" cy="365760"/>
-          </a:xfrm>
-          <a:prstGeom prst="rect">
-            <a:avLst/>
-          </a:prstGeom>
-          <a:noFill/>
-          <a:ln/>
-        </p:spPr>
-        <p:txBody>
-          <a:bodyPr wrap="square" rtlCol="0" anchor="ctr"/>
-          <a:lstStyle/>
-          <a:p>
-            <a:pPr indent="0" marL="0">
-              <a:buNone/>
-            </a:pPr>
-            <a:r>
-              <a:rPr lang="en-US" sz="1500" b="1" dirty="0">
-                <a:solidFill>
-                  <a:srgbClr val="1A1F36"/>
-                </a:solidFill>
-                <a:latin typeface="Noto Sans KR" pitchFamily="34" charset="0"/>
-                <a:ea typeface="Noto Sans KR" pitchFamily="34" charset="-122"/>
-                <a:cs typeface="Noto Sans KR" pitchFamily="34" charset="-120"/>
-              </a:rPr>
-              <a:t>선택 (보너스)</a:t>
-            </a:r>
-            <a:endParaRPr lang="en-US" sz="1500" dirty="0"/>
-          </a:p>
-        </p:txBody>
-      </p:sp>
-      <p:sp>
-        <p:nvSpPr>
-          <p:cNvPr id="12" name="Text 10"/>
-          <p:cNvSpPr/>
-          <p:nvPr/>
-        </p:nvSpPr>
-        <p:spPr>
-          <a:xfrm>
-            <a:off x="6629400" y="2148840"/>
-            <a:ext cx="4754880" cy="3840480"/>
+          <p:cNvPr id="7" name="Text 5"/>
+          <p:cNvSpPr/>
+          <p:nvPr/>
+        </p:nvSpPr>
+        <p:spPr>
+          <a:xfrm>
+            <a:off x="548640" y="3200400"/>
+            <a:ext cx="11091672" cy="2788920"/>
           </a:xfrm>
           <a:prstGeom prst="rect">
             <a:avLst/>
@@ -12643,15 +12527,12 @@
           <a:p>
             <a:pPr indent="0" marL="0">
               <a:lnSpc>
-                <a:spcPct val="150000"/>
+                <a:spcPct val="155000"/>
               </a:lnSpc>
-              <a:spcAft>
-                <a:spcPts val="1000"/>
-              </a:spcAft>
-              <a:buNone/>
-            </a:pPr>
-            <a:r>
-              <a:rPr lang="en-US" sz="1300" dirty="0">
+              <a:buNone/>
+            </a:pPr>
+            <a:r>
+              <a:rPr lang="en-US" sz="1700" dirty="0">
                 <a:solidFill>
                   <a:srgbClr val="4A5568"/>
                 </a:solidFill>
@@ -12659,22 +12540,19 @@
                 <a:ea typeface="Noto Sans KR" pitchFamily="34" charset="-122"/>
                 <a:cs typeface="Noto Sans KR" pitchFamily="34" charset="-120"/>
               </a:rPr>
-              <a:t>⭐ "평소 같으면 얼마나 걸렸을까?" 한 줄 소감</a:t>
-            </a:r>
-            <a:endParaRPr lang="en-US" sz="1300" dirty="0"/>
+              <a:t>· 작업 폴더 루트에 두는 "프로젝트 컨텍스트 메모"</a:t>
+            </a:r>
+            <a:endParaRPr lang="en-US" sz="1700" dirty="0"/>
           </a:p>
           <a:p>
             <a:pPr indent="0" marL="0">
               <a:lnSpc>
-                <a:spcPct val="150000"/>
+                <a:spcPct val="155000"/>
               </a:lnSpc>
-              <a:spcAft>
-                <a:spcPts val="1000"/>
-              </a:spcAft>
-              <a:buNone/>
-            </a:pPr>
-            <a:r>
-              <a:rPr lang="en-US" sz="1300" dirty="0">
+              <a:buNone/>
+            </a:pPr>
+            <a:r>
+              <a:rPr lang="en-US" sz="1700" dirty="0">
                 <a:solidFill>
                   <a:srgbClr val="4A5568"/>
                 </a:solidFill>
@@ -12682,15 +12560,95 @@
                 <a:ea typeface="Noto Sans KR" pitchFamily="34" charset="-122"/>
                 <a:cs typeface="Noto Sans KR" pitchFamily="34" charset="-120"/>
               </a:rPr>
-              <a:t>⭐ 본인 회사 데이터로 시도해본 결과</a:t>
-            </a:r>
-            <a:endParaRPr lang="en-US" sz="1300" dirty="0"/>
-          </a:p>
-        </p:txBody>
-      </p:sp>
-      <p:sp>
-        <p:nvSpPr>
-          <p:cNvPr id="13" name="Text 11"/>
+              <a:t>· 인코딩·폰트·임계값·차트 저장 경로·파일명 규칙까지 명시</a:t>
+            </a:r>
+            <a:endParaRPr lang="en-US" sz="1700" dirty="0"/>
+          </a:p>
+          <a:p>
+            <a:pPr indent="0" marL="0">
+              <a:lnSpc>
+                <a:spcPct val="155000"/>
+              </a:lnSpc>
+              <a:buNone/>
+            </a:pPr>
+            <a:r>
+              <a:rPr lang="en-US" sz="1700" dirty="0">
+                <a:solidFill>
+                  <a:srgbClr val="4A5568"/>
+                </a:solidFill>
+                <a:latin typeface="Noto Sans KR" pitchFamily="34" charset="0"/>
+                <a:ea typeface="Noto Sans KR" pitchFamily="34" charset="-122"/>
+                <a:cs typeface="Noto Sans KR" pitchFamily="34" charset="-120"/>
+              </a:rPr>
+              <a:t>· 한 번 적어두면 다음 분석부터 같은 결과가 재현됨</a:t>
+            </a:r>
+            <a:endParaRPr lang="en-US" sz="1700" dirty="0"/>
+          </a:p>
+          <a:p>
+            <a:pPr indent="0" marL="0">
+              <a:lnSpc>
+                <a:spcPct val="155000"/>
+              </a:lnSpc>
+              <a:buNone/>
+            </a:pPr>
+            <a:r>
+              <a:rPr lang="en-US" sz="1700" dirty="0">
+                <a:solidFill>
+                  <a:srgbClr val="4A5568"/>
+                </a:solidFill>
+                <a:latin typeface="Noto Sans KR" pitchFamily="34" charset="0"/>
+                <a:ea typeface="Noto Sans KR" pitchFamily="34" charset="-122"/>
+                <a:cs typeface="Noto Sans KR" pitchFamily="34" charset="-120"/>
+              </a:rPr>
+              <a:t>  (강사 시연 → 수강생 → 본인 회사 데이터에서도 동일하게)</a:t>
+            </a:r>
+            <a:endParaRPr lang="en-US" sz="1700" dirty="0"/>
+          </a:p>
+          <a:p>
+            <a:pPr indent="0" marL="0">
+              <a:lnSpc>
+                <a:spcPct val="155000"/>
+              </a:lnSpc>
+              <a:buNone/>
+            </a:pPr>
+            <a:r>
+              <a:rPr lang="en-US" sz="1700" dirty="0">
+                <a:solidFill>
+                  <a:srgbClr val="4A5568"/>
+                </a:solidFill>
+                <a:latin typeface="Noto Sans KR" pitchFamily="34" charset="0"/>
+                <a:ea typeface="Noto Sans KR" pitchFamily="34" charset="-122"/>
+                <a:cs typeface="Noto Sans KR" pitchFamily="34" charset="-120"/>
+              </a:rPr>
+              <a:t>· 추가 규칙은 자연어로 부탁 — "이 규칙 추가해줘"</a:t>
+            </a:r>
+            <a:endParaRPr lang="en-US" sz="1700" dirty="0"/>
+          </a:p>
+          <a:p>
+            <a:pPr indent="0" marL="0">
+              <a:lnSpc>
+                <a:spcPct val="155000"/>
+              </a:lnSpc>
+              <a:buNone/>
+            </a:pPr>
+            <a:r>
+              <a:rPr lang="en-US" sz="1700" dirty="0">
+                <a:solidFill>
+                  <a:srgbClr val="4A5568"/>
+                </a:solidFill>
+                <a:latin typeface="Noto Sans KR" pitchFamily="34" charset="0"/>
+                <a:ea typeface="Noto Sans KR" pitchFamily="34" charset="-122"/>
+                <a:cs typeface="Noto Sans KR" pitchFamily="34" charset="-120"/>
+              </a:rPr>
+              <a:t>· 버전 구분(v1/v2) 안 함 — 폴더(day1/, day2/)로 히스토리 관리</a:t>
+            </a:r>
+            <a:endParaRPr lang="en-US" sz="1700" dirty="0"/>
+          </a:p>
+        </p:txBody>
+      </p:sp>
+      <p:sp>
+        <p:nvSpPr>
+          <p:cNvPr id="8" name="Text 6"/>
           <p:cNvSpPr/>
           <p:nvPr/>
         </p:nvSpPr>
@@ -12721,7 +12679,7 @@
                 <a:ea typeface="Noto Sans KR" pitchFamily="34" charset="-122"/>
                 <a:cs typeface="Noto Sans KR" pitchFamily="34" charset="-120"/>
               </a:rPr>
-              <a:t>30 / 31</a:t>
+              <a:t>30 / 34</a:t>
             </a:r>
             <a:endParaRPr lang="en-US" sz="900" dirty="0"/>
           </a:p>
@@ -12760,6 +12718,1182 @@
         </p:nvSpPr>
         <p:spPr>
           <a:xfrm>
+            <a:off x="548640" y="384048"/>
+            <a:ext cx="914400" cy="54864"/>
+          </a:xfrm>
+          <a:prstGeom prst="rect">
+            <a:avLst/>
+          </a:prstGeom>
+          <a:solidFill>
+            <a:srgbClr val="4A7BF7"/>
+          </a:solidFill>
+          <a:ln/>
+        </p:spPr>
+      </p:sp>
+      <p:sp>
+        <p:nvSpPr>
+          <p:cNvPr id="3" name="Text 1"/>
+          <p:cNvSpPr/>
+          <p:nvPr/>
+        </p:nvSpPr>
+        <p:spPr>
+          <a:xfrm>
+            <a:off x="548640" y="530352"/>
+            <a:ext cx="10515600" cy="411480"/>
+          </a:xfrm>
+          <a:prstGeom prst="rect">
+            <a:avLst/>
+          </a:prstGeom>
+          <a:noFill/>
+          <a:ln/>
+        </p:spPr>
+        <p:txBody>
+          <a:bodyPr wrap="square" rtlCol="0" anchor="ctr"/>
+          <a:lstStyle/>
+          <a:p>
+            <a:pPr indent="0" marL="0">
+              <a:buNone/>
+            </a:pPr>
+            <a:r>
+              <a:rPr lang="en-US" sz="1400" b="1" spc="50" kern="0" dirty="0">
+                <a:solidFill>
+                  <a:srgbClr val="718096"/>
+                </a:solidFill>
+                <a:latin typeface="Noto Sans KR" pitchFamily="34" charset="0"/>
+                <a:ea typeface="Noto Sans KR" pitchFamily="34" charset="-122"/>
+                <a:cs typeface="Noto Sans KR" pitchFamily="34" charset="-120"/>
+              </a:rPr>
+              <a:t>DAY 1 · CLAUDE.md</a:t>
+            </a:r>
+            <a:endParaRPr lang="en-US" sz="1400" dirty="0"/>
+          </a:p>
+        </p:txBody>
+      </p:sp>
+      <p:sp>
+        <p:nvSpPr>
+          <p:cNvPr id="4" name="Text 2"/>
+          <p:cNvSpPr/>
+          <p:nvPr/>
+        </p:nvSpPr>
+        <p:spPr>
+          <a:xfrm>
+            <a:off x="548640" y="960120"/>
+            <a:ext cx="10515600" cy="292608"/>
+          </a:xfrm>
+          <a:prstGeom prst="rect">
+            <a:avLst/>
+          </a:prstGeom>
+          <a:noFill/>
+          <a:ln/>
+        </p:spPr>
+        <p:txBody>
+          <a:bodyPr wrap="square" rtlCol="0" anchor="ctr"/>
+          <a:lstStyle/>
+          <a:p>
+            <a:pPr indent="0" marL="0">
+              <a:buNone/>
+            </a:pPr>
+            <a:r>
+              <a:rPr lang="en-US" sz="1100" b="1" spc="150" kern="0" dirty="0">
+                <a:solidFill>
+                  <a:srgbClr val="4A7BF7"/>
+                </a:solidFill>
+                <a:latin typeface="Noto Sans KR" pitchFamily="34" charset="0"/>
+                <a:ea typeface="Noto Sans KR" pitchFamily="34" charset="-122"/>
+                <a:cs typeface="Noto Sans KR" pitchFamily="34" charset="-120"/>
+              </a:rPr>
+              <a:t>오늘 만든 결과물</a:t>
+            </a:r>
+            <a:endParaRPr lang="en-US" sz="1100" dirty="0"/>
+          </a:p>
+        </p:txBody>
+      </p:sp>
+      <p:sp>
+        <p:nvSpPr>
+          <p:cNvPr id="5" name="Text 3"/>
+          <p:cNvSpPr/>
+          <p:nvPr/>
+        </p:nvSpPr>
+        <p:spPr>
+          <a:xfrm>
+            <a:off x="548640" y="1417320"/>
+            <a:ext cx="11091672" cy="640080"/>
+          </a:xfrm>
+          <a:prstGeom prst="rect">
+            <a:avLst/>
+          </a:prstGeom>
+          <a:noFill/>
+          <a:ln/>
+        </p:spPr>
+        <p:txBody>
+          <a:bodyPr wrap="square" rtlCol="0" anchor="t"/>
+          <a:lstStyle/>
+          <a:p>
+            <a:pPr indent="0" marL="0">
+              <a:buNone/>
+            </a:pPr>
+            <a:r>
+              <a:rPr lang="en-US" sz="2800" b="1" spc="-30" kern="0" dirty="0">
+                <a:solidFill>
+                  <a:srgbClr val="1A1F36"/>
+                </a:solidFill>
+                <a:latin typeface="Noto Sans KR" pitchFamily="34" charset="0"/>
+                <a:ea typeface="Noto Sans KR" pitchFamily="34" charset="-122"/>
+                <a:cs typeface="Noto Sans KR" pitchFamily="34" charset="-120"/>
+              </a:rPr>
+              <a:t>CLAUDE.md 예시 — 그대로 복사해서 쓰세요</a:t>
+            </a:r>
+            <a:endParaRPr lang="en-US" sz="2800" dirty="0"/>
+          </a:p>
+        </p:txBody>
+      </p:sp>
+      <p:pic>
+        <p:nvPicPr>
+          <p:cNvPr id="6" name="Image 0" descr="/Users/sujinpark/b2b-lecture-note/20260512_inflearn_B2G_dataanalysis/assets/screenshots/day1/claude_md_example.png">    </p:cNvPr>
+          <p:cNvPicPr>
+            <a:picLocks noChangeAspect="1"/>
+          </p:cNvPicPr>
+          <p:nvPr/>
+        </p:nvPicPr>
+        <p:blipFill>
+          <a:blip r:embed="rId1"/>
+          <a:srcRect l="0" r="0" t="0" b="0"/>
+          <a:stretch/>
+        </p:blipFill>
+        <p:spPr>
+          <a:xfrm>
+            <a:off x="2194560" y="2240280"/>
+            <a:ext cx="7772400" cy="3657600"/>
+          </a:xfrm>
+          <a:prstGeom prst="rect">
+            <a:avLst/>
+          </a:prstGeom>
+        </p:spPr>
+      </p:pic>
+      <p:sp>
+        <p:nvSpPr>
+          <p:cNvPr id="7" name="Text 4"/>
+          <p:cNvSpPr/>
+          <p:nvPr/>
+        </p:nvSpPr>
+        <p:spPr>
+          <a:xfrm>
+            <a:off x="548640" y="5989320"/>
+            <a:ext cx="11091672" cy="411480"/>
+          </a:xfrm>
+          <a:prstGeom prst="rect">
+            <a:avLst/>
+          </a:prstGeom>
+          <a:noFill/>
+          <a:ln/>
+        </p:spPr>
+        <p:txBody>
+          <a:bodyPr wrap="square" rtlCol="0" anchor="ctr"/>
+          <a:lstStyle/>
+          <a:p>
+            <a:pPr algn="ctr" indent="0" marL="0">
+              <a:buNone/>
+            </a:pPr>
+            <a:r>
+              <a:rPr lang="en-US" sz="1200" i="1" dirty="0">
+                <a:solidFill>
+                  <a:srgbClr val="718096"/>
+                </a:solidFill>
+                <a:latin typeface="Noto Sans KR" pitchFamily="34" charset="0"/>
+                <a:ea typeface="Noto Sans KR" pitchFamily="34" charset="-122"/>
+                <a:cs typeface="Noto Sans KR" pitchFamily="34" charset="-120"/>
+              </a:rPr>
+              <a:t>이 CLAUDE.md를 그대로 두면 다음 분석부터 같은 결과가 재현됩니다</a:t>
+            </a:r>
+            <a:endParaRPr lang="en-US" sz="1200" dirty="0"/>
+          </a:p>
+        </p:txBody>
+      </p:sp>
+      <p:sp>
+        <p:nvSpPr>
+          <p:cNvPr id="8" name="Text 5"/>
+          <p:cNvSpPr/>
+          <p:nvPr/>
+        </p:nvSpPr>
+        <p:spPr>
+          <a:xfrm>
+            <a:off x="10972800" y="6446520"/>
+            <a:ext cx="1005840" cy="256032"/>
+          </a:xfrm>
+          <a:prstGeom prst="rect">
+            <a:avLst/>
+          </a:prstGeom>
+          <a:noFill/>
+          <a:ln/>
+        </p:spPr>
+        <p:txBody>
+          <a:bodyPr wrap="square" rtlCol="0" anchor="ctr"/>
+          <a:lstStyle/>
+          <a:p>
+            <a:pPr algn="r" indent="0" marL="0">
+              <a:buNone/>
+            </a:pPr>
+            <a:r>
+              <a:rPr lang="en-US" sz="900" dirty="0">
+                <a:solidFill>
+                  <a:srgbClr val="718096"/>
+                </a:solidFill>
+                <a:latin typeface="Noto Sans KR" pitchFamily="34" charset="0"/>
+                <a:ea typeface="Noto Sans KR" pitchFamily="34" charset="-122"/>
+                <a:cs typeface="Noto Sans KR" pitchFamily="34" charset="-120"/>
+              </a:rPr>
+              <a:t>31 / 34</a:t>
+            </a:r>
+            <a:endParaRPr lang="en-US" sz="900" dirty="0"/>
+          </a:p>
+        </p:txBody>
+      </p:sp>
+    </p:spTree>
+  </p:cSld>
+  <p:clrMapOvr>
+    <a:masterClrMapping/>
+  </p:clrMapOvr>
+</p:sld>
+</file>
+
+<file path=ppt/slides/slide32.xml><?xml version="1.0" encoding="utf-8"?>
+<p:sld xmlns:a="http://schemas.openxmlformats.org/drawingml/2006/main" xmlns:r="http://schemas.openxmlformats.org/officeDocument/2006/relationships" xmlns:p="http://schemas.openxmlformats.org/presentationml/2006/main">
+  <p:cSld name="Slide 32">
+    <p:spTree>
+      <p:nvGrpSpPr>
+        <p:cNvPr id="1" name=""/>
+        <p:cNvGrpSpPr/>
+        <p:nvPr/>
+      </p:nvGrpSpPr>
+      <p:grpSpPr>
+        <a:xfrm>
+          <a:off x="0" y="0"/>
+          <a:ext cx="0" cy="0"/>
+          <a:chOff x="0" y="0"/>
+          <a:chExt cx="0" cy="0"/>
+        </a:xfrm>
+      </p:grpSpPr>
+      <p:sp>
+        <p:nvSpPr>
+          <p:cNvPr id="2" name="Shape 0"/>
+          <p:cNvSpPr/>
+          <p:nvPr/>
+        </p:nvSpPr>
+        <p:spPr>
+          <a:xfrm>
+            <a:off x="548640" y="384048"/>
+            <a:ext cx="914400" cy="54864"/>
+          </a:xfrm>
+          <a:prstGeom prst="rect">
+            <a:avLst/>
+          </a:prstGeom>
+          <a:solidFill>
+            <a:srgbClr val="4A7BF7"/>
+          </a:solidFill>
+          <a:ln/>
+        </p:spPr>
+      </p:sp>
+      <p:sp>
+        <p:nvSpPr>
+          <p:cNvPr id="3" name="Text 1"/>
+          <p:cNvSpPr/>
+          <p:nvPr/>
+        </p:nvSpPr>
+        <p:spPr>
+          <a:xfrm>
+            <a:off x="548640" y="530352"/>
+            <a:ext cx="10515600" cy="411480"/>
+          </a:xfrm>
+          <a:prstGeom prst="rect">
+            <a:avLst/>
+          </a:prstGeom>
+          <a:noFill/>
+          <a:ln/>
+        </p:spPr>
+        <p:txBody>
+          <a:bodyPr wrap="square" rtlCol="0" anchor="ctr"/>
+          <a:lstStyle/>
+          <a:p>
+            <a:pPr indent="0" marL="0">
+              <a:buNone/>
+            </a:pPr>
+            <a:r>
+              <a:rPr lang="en-US" sz="1400" b="1" spc="50" kern="0" dirty="0">
+                <a:solidFill>
+                  <a:srgbClr val="718096"/>
+                </a:solidFill>
+                <a:latin typeface="Noto Sans KR" pitchFamily="34" charset="0"/>
+                <a:ea typeface="Noto Sans KR" pitchFamily="34" charset="-122"/>
+                <a:cs typeface="Noto Sans KR" pitchFamily="34" charset="-120"/>
+              </a:rPr>
+              <a:t>파트 3. 데이터 다운로드 + 첫 분석 + CLAUDE.md</a:t>
+            </a:r>
+            <a:endParaRPr lang="en-US" sz="1400" dirty="0"/>
+          </a:p>
+        </p:txBody>
+      </p:sp>
+      <p:sp>
+        <p:nvSpPr>
+          <p:cNvPr id="4" name="Text 2"/>
+          <p:cNvSpPr/>
+          <p:nvPr/>
+        </p:nvSpPr>
+        <p:spPr>
+          <a:xfrm>
+            <a:off x="548640" y="960120"/>
+            <a:ext cx="10515600" cy="292608"/>
+          </a:xfrm>
+          <a:prstGeom prst="rect">
+            <a:avLst/>
+          </a:prstGeom>
+          <a:noFill/>
+          <a:ln/>
+        </p:spPr>
+        <p:txBody>
+          <a:bodyPr wrap="square" rtlCol="0" anchor="ctr"/>
+          <a:lstStyle/>
+          <a:p>
+            <a:pPr indent="0" marL="0">
+              <a:buNone/>
+            </a:pPr>
+            <a:r>
+              <a:rPr lang="en-US" sz="1100" b="1" spc="150" kern="0" dirty="0">
+                <a:solidFill>
+                  <a:srgbClr val="4A7BF7"/>
+                </a:solidFill>
+                <a:latin typeface="Noto Sans KR" pitchFamily="34" charset="0"/>
+                <a:ea typeface="Noto Sans KR" pitchFamily="34" charset="-122"/>
+                <a:cs typeface="Noto Sans KR" pitchFamily="34" charset="-120"/>
+              </a:rPr>
+              <a:t>섹션 4 / 4</a:t>
+            </a:r>
+            <a:endParaRPr lang="en-US" sz="1100" dirty="0"/>
+          </a:p>
+        </p:txBody>
+      </p:sp>
+      <p:sp>
+        <p:nvSpPr>
+          <p:cNvPr id="5" name="Text 3"/>
+          <p:cNvSpPr/>
+          <p:nvPr/>
+        </p:nvSpPr>
+        <p:spPr>
+          <a:xfrm>
+            <a:off x="548640" y="1508760"/>
+            <a:ext cx="11091672" cy="1371600"/>
+          </a:xfrm>
+          <a:prstGeom prst="rect">
+            <a:avLst/>
+          </a:prstGeom>
+          <a:noFill/>
+          <a:ln/>
+        </p:spPr>
+        <p:txBody>
+          <a:bodyPr wrap="square" rtlCol="0" anchor="t"/>
+          <a:lstStyle/>
+          <a:p>
+            <a:pPr indent="0" marL="0">
+              <a:lnSpc>
+                <a:spcPct val="110000"/>
+              </a:lnSpc>
+              <a:buNone/>
+            </a:pPr>
+            <a:r>
+              <a:rPr lang="en-US" sz="4200" b="1" spc="-50" kern="0" dirty="0">
+                <a:solidFill>
+                  <a:srgbClr val="1A1F36"/>
+                </a:solidFill>
+                <a:latin typeface="Noto Sans KR" pitchFamily="34" charset="0"/>
+                <a:ea typeface="Noto Sans KR" pitchFamily="34" charset="-122"/>
+                <a:cs typeface="Noto Sans KR" pitchFamily="34" charset="-120"/>
+              </a:rPr>
+              <a:t>산출물 정리 + 운영 채널 업로드</a:t>
+            </a:r>
+            <a:endParaRPr lang="en-US" sz="4200" dirty="0"/>
+          </a:p>
+        </p:txBody>
+      </p:sp>
+      <p:sp>
+        <p:nvSpPr>
+          <p:cNvPr id="6" name="Shape 4"/>
+          <p:cNvSpPr/>
+          <p:nvPr/>
+        </p:nvSpPr>
+        <p:spPr>
+          <a:xfrm>
+            <a:off x="548640" y="2971800"/>
+            <a:ext cx="1828800" cy="0"/>
+          </a:xfrm>
+          <a:prstGeom prst="line">
+            <a:avLst/>
+          </a:prstGeom>
+          <a:noFill/>
+          <a:ln w="25400">
+            <a:solidFill>
+              <a:srgbClr val="4A7BF7"/>
+            </a:solidFill>
+            <a:prstDash val="solid"/>
+          </a:ln>
+        </p:spPr>
+      </p:sp>
+      <p:sp>
+        <p:nvSpPr>
+          <p:cNvPr id="7" name="Text 5"/>
+          <p:cNvSpPr/>
+          <p:nvPr/>
+        </p:nvSpPr>
+        <p:spPr>
+          <a:xfrm>
+            <a:off x="548640" y="3200400"/>
+            <a:ext cx="11091672" cy="2788920"/>
+          </a:xfrm>
+          <a:prstGeom prst="rect">
+            <a:avLst/>
+          </a:prstGeom>
+          <a:noFill/>
+          <a:ln/>
+        </p:spPr>
+        <p:txBody>
+          <a:bodyPr wrap="square" rtlCol="0" anchor="t"/>
+          <a:lstStyle/>
+          <a:p>
+            <a:pPr indent="0" marL="0">
+              <a:lnSpc>
+                <a:spcPct val="155000"/>
+              </a:lnSpc>
+              <a:buNone/>
+            </a:pPr>
+            <a:r>
+              <a:rPr lang="en-US" sz="1700" dirty="0">
+                <a:solidFill>
+                  <a:srgbClr val="4A5568"/>
+                </a:solidFill>
+                <a:latin typeface="Noto Sans KR" pitchFamily="34" charset="0"/>
+                <a:ea typeface="Noto Sans KR" pitchFamily="34" charset="-122"/>
+                <a:cs typeface="Noto Sans KR" pitchFamily="34" charset="-120"/>
+              </a:rPr>
+              <a:t>inflearn_ccd_challenge/</a:t>
+            </a:r>
+            <a:endParaRPr lang="en-US" sz="1700" dirty="0"/>
+          </a:p>
+          <a:p>
+            <a:pPr indent="0" marL="0">
+              <a:lnSpc>
+                <a:spcPct val="155000"/>
+              </a:lnSpc>
+              <a:buNone/>
+            </a:pPr>
+            <a:r>
+              <a:rPr lang="en-US" sz="1700" dirty="0">
+                <a:solidFill>
+                  <a:srgbClr val="4A5568"/>
+                </a:solidFill>
+                <a:latin typeface="Noto Sans KR" pitchFamily="34" charset="0"/>
+                <a:ea typeface="Noto Sans KR" pitchFamily="34" charset="-122"/>
+                <a:cs typeface="Noto Sans KR" pitchFamily="34" charset="-120"/>
+              </a:rPr>
+              <a:t>├── CLAUDE.md</a:t>
+            </a:r>
+            <a:endParaRPr lang="en-US" sz="1700" dirty="0"/>
+          </a:p>
+          <a:p>
+            <a:pPr indent="0" marL="0">
+              <a:lnSpc>
+                <a:spcPct val="155000"/>
+              </a:lnSpc>
+              <a:buNone/>
+            </a:pPr>
+            <a:r>
+              <a:rPr lang="en-US" sz="1700" dirty="0">
+                <a:solidFill>
+                  <a:srgbClr val="4A5568"/>
+                </a:solidFill>
+                <a:latin typeface="Noto Sans KR" pitchFamily="34" charset="0"/>
+                <a:ea typeface="Noto Sans KR" pitchFamily="34" charset="-122"/>
+                <a:cs typeface="Noto Sans KR" pitchFamily="34" charset="-120"/>
+              </a:rPr>
+              <a:t>├── 기간별_일평균_대기환경_정보_2024년.csv</a:t>
+            </a:r>
+            <a:endParaRPr lang="en-US" sz="1700" dirty="0"/>
+          </a:p>
+          <a:p>
+            <a:pPr indent="0" marL="0">
+              <a:lnSpc>
+                <a:spcPct val="155000"/>
+              </a:lnSpc>
+              <a:buNone/>
+            </a:pPr>
+            <a:r>
+              <a:rPr lang="en-US" sz="1700" dirty="0">
+                <a:solidFill>
+                  <a:srgbClr val="4A5568"/>
+                </a:solidFill>
+                <a:latin typeface="Noto Sans KR" pitchFamily="34" charset="0"/>
+                <a:ea typeface="Noto Sans KR" pitchFamily="34" charset="-122"/>
+                <a:cs typeface="Noto Sans KR" pitchFamily="34" charset="-120"/>
+              </a:rPr>
+              <a:t>├── 기간별_일평균_대기환경_정보_2025년.csv</a:t>
+            </a:r>
+            <a:endParaRPr lang="en-US" sz="1700" dirty="0"/>
+          </a:p>
+          <a:p>
+            <a:pPr indent="0" marL="0">
+              <a:lnSpc>
+                <a:spcPct val="155000"/>
+              </a:lnSpc>
+              <a:buNone/>
+            </a:pPr>
+            <a:r>
+              <a:rPr lang="en-US" sz="1700" dirty="0">
+                <a:solidFill>
+                  <a:srgbClr val="4A5568"/>
+                </a:solidFill>
+                <a:latin typeface="Noto Sans KR" pitchFamily="34" charset="0"/>
+                <a:ea typeface="Noto Sans KR" pitchFamily="34" charset="-122"/>
+                <a:cs typeface="Noto Sans KR" pitchFamily="34" charset="-120"/>
+              </a:rPr>
+              <a:t>└── outputs/</a:t>
+            </a:r>
+            <a:endParaRPr lang="en-US" sz="1700" dirty="0"/>
+          </a:p>
+          <a:p>
+            <a:pPr indent="0" marL="0">
+              <a:lnSpc>
+                <a:spcPct val="155000"/>
+              </a:lnSpc>
+              <a:buNone/>
+            </a:pPr>
+            <a:r>
+              <a:rPr lang="en-US" sz="1700" dirty="0">
+                <a:solidFill>
+                  <a:srgbClr val="4A5568"/>
+                </a:solidFill>
+                <a:latin typeface="Noto Sans KR" pitchFamily="34" charset="0"/>
+                <a:ea typeface="Noto Sans KR" pitchFamily="34" charset="-122"/>
+                <a:cs typeface="Noto Sans KR" pitchFamily="34" charset="-120"/>
+              </a:rPr>
+              <a:t>    ├── yoy_district_pm25.png</a:t>
+            </a:r>
+            <a:endParaRPr lang="en-US" sz="1700" dirty="0"/>
+          </a:p>
+          <a:p>
+            <a:pPr indent="0" marL="0">
+              <a:lnSpc>
+                <a:spcPct val="155000"/>
+              </a:lnSpc>
+              <a:buNone/>
+            </a:pPr>
+            <a:r>
+              <a:rPr lang="en-US" sz="1700" dirty="0">
+                <a:solidFill>
+                  <a:srgbClr val="4A5568"/>
+                </a:solidFill>
+                <a:latin typeface="Noto Sans KR" pitchFamily="34" charset="0"/>
+                <a:ea typeface="Noto Sans KR" pitchFamily="34" charset="-122"/>
+                <a:cs typeface="Noto Sans KR" pitchFamily="34" charset="-120"/>
+              </a:rPr>
+              <a:t>    └── yoy_monthly_pm25.png</a:t>
+            </a:r>
+            <a:endParaRPr lang="en-US" sz="1700" dirty="0"/>
+          </a:p>
+          <a:p>
+            <a:pPr indent="0" marL="0">
+              <a:lnSpc>
+                <a:spcPct val="155000"/>
+              </a:lnSpc>
+              <a:buNone/>
+            </a:pPr>
+            <a:endParaRPr lang="en-US" sz="1700" dirty="0"/>
+          </a:p>
+          <a:p>
+            <a:pPr indent="0" marL="0">
+              <a:lnSpc>
+                <a:spcPct val="155000"/>
+              </a:lnSpc>
+              <a:buNone/>
+            </a:pPr>
+            <a:r>
+              <a:rPr lang="en-US" sz="1700" dirty="0">
+                <a:solidFill>
+                  <a:srgbClr val="4A5568"/>
+                </a:solidFill>
+                <a:latin typeface="Noto Sans KR" pitchFamily="34" charset="0"/>
+                <a:ea typeface="Noto Sans KR" pitchFamily="34" charset="-122"/>
+                <a:cs typeface="Noto Sans KR" pitchFamily="34" charset="-120"/>
+              </a:rPr>
+              <a:t>→ outputs/ PNG · CLAUDE.md 를 인프런/운영 채널에 업로드</a:t>
+            </a:r>
+            <a:endParaRPr lang="en-US" sz="1700" dirty="0"/>
+          </a:p>
+        </p:txBody>
+      </p:sp>
+      <p:sp>
+        <p:nvSpPr>
+          <p:cNvPr id="8" name="Text 6"/>
+          <p:cNvSpPr/>
+          <p:nvPr/>
+        </p:nvSpPr>
+        <p:spPr>
+          <a:xfrm>
+            <a:off x="10972800" y="6446520"/>
+            <a:ext cx="1005840" cy="256032"/>
+          </a:xfrm>
+          <a:prstGeom prst="rect">
+            <a:avLst/>
+          </a:prstGeom>
+          <a:noFill/>
+          <a:ln/>
+        </p:spPr>
+        <p:txBody>
+          <a:bodyPr wrap="square" rtlCol="0" anchor="ctr"/>
+          <a:lstStyle/>
+          <a:p>
+            <a:pPr algn="r" indent="0" marL="0">
+              <a:buNone/>
+            </a:pPr>
+            <a:r>
+              <a:rPr lang="en-US" sz="900" dirty="0">
+                <a:solidFill>
+                  <a:srgbClr val="718096"/>
+                </a:solidFill>
+                <a:latin typeface="Noto Sans KR" pitchFamily="34" charset="0"/>
+                <a:ea typeface="Noto Sans KR" pitchFamily="34" charset="-122"/>
+                <a:cs typeface="Noto Sans KR" pitchFamily="34" charset="-120"/>
+              </a:rPr>
+              <a:t>32 / 34</a:t>
+            </a:r>
+            <a:endParaRPr lang="en-US" sz="900" dirty="0"/>
+          </a:p>
+        </p:txBody>
+      </p:sp>
+    </p:spTree>
+  </p:cSld>
+  <p:clrMapOvr>
+    <a:masterClrMapping/>
+  </p:clrMapOvr>
+</p:sld>
+</file>
+
+<file path=ppt/slides/slide33.xml><?xml version="1.0" encoding="utf-8"?>
+<p:sld xmlns:a="http://schemas.openxmlformats.org/drawingml/2006/main" xmlns:r="http://schemas.openxmlformats.org/officeDocument/2006/relationships" xmlns:p="http://schemas.openxmlformats.org/presentationml/2006/main">
+  <p:cSld name="Slide 33">
+    <p:spTree>
+      <p:nvGrpSpPr>
+        <p:cNvPr id="1" name=""/>
+        <p:cNvGrpSpPr/>
+        <p:nvPr/>
+      </p:nvGrpSpPr>
+      <p:grpSpPr>
+        <a:xfrm>
+          <a:off x="0" y="0"/>
+          <a:ext cx="0" cy="0"/>
+          <a:chOff x="0" y="0"/>
+          <a:chExt cx="0" cy="0"/>
+        </a:xfrm>
+      </p:grpSpPr>
+      <p:sp>
+        <p:nvSpPr>
+          <p:cNvPr id="2" name="Shape 0"/>
+          <p:cNvSpPr/>
+          <p:nvPr/>
+        </p:nvSpPr>
+        <p:spPr>
+          <a:xfrm>
+            <a:off x="548640" y="384048"/>
+            <a:ext cx="914400" cy="54864"/>
+          </a:xfrm>
+          <a:prstGeom prst="rect">
+            <a:avLst/>
+          </a:prstGeom>
+          <a:solidFill>
+            <a:srgbClr val="4A7BF7"/>
+          </a:solidFill>
+          <a:ln/>
+        </p:spPr>
+      </p:sp>
+      <p:sp>
+        <p:nvSpPr>
+          <p:cNvPr id="3" name="Text 1"/>
+          <p:cNvSpPr/>
+          <p:nvPr/>
+        </p:nvSpPr>
+        <p:spPr>
+          <a:xfrm>
+            <a:off x="548640" y="530352"/>
+            <a:ext cx="10515600" cy="502920"/>
+          </a:xfrm>
+          <a:prstGeom prst="rect">
+            <a:avLst/>
+          </a:prstGeom>
+          <a:noFill/>
+          <a:ln/>
+        </p:spPr>
+        <p:txBody>
+          <a:bodyPr wrap="square" rtlCol="0" anchor="ctr"/>
+          <a:lstStyle/>
+          <a:p>
+            <a:pPr indent="0" marL="0">
+              <a:buNone/>
+            </a:pPr>
+            <a:r>
+              <a:rPr lang="en-US" sz="2600" b="1" spc="-30" kern="0" dirty="0">
+                <a:solidFill>
+                  <a:srgbClr val="1A1F36"/>
+                </a:solidFill>
+                <a:latin typeface="Noto Sans KR" pitchFamily="34" charset="0"/>
+                <a:ea typeface="Noto Sans KR" pitchFamily="34" charset="-122"/>
+                <a:cs typeface="Noto Sans KR" pitchFamily="34" charset="-120"/>
+              </a:rPr>
+              <a:t>🎯 미션 1 — 첫 분석 + CLAUDE.md</a:t>
+            </a:r>
+            <a:endParaRPr lang="en-US" sz="2600" dirty="0"/>
+          </a:p>
+        </p:txBody>
+      </p:sp>
+      <p:sp>
+        <p:nvSpPr>
+          <p:cNvPr id="4" name="Text 2"/>
+          <p:cNvSpPr/>
+          <p:nvPr/>
+        </p:nvSpPr>
+        <p:spPr>
+          <a:xfrm>
+            <a:off x="548640" y="1051560"/>
+            <a:ext cx="10515600" cy="347472"/>
+          </a:xfrm>
+          <a:prstGeom prst="rect">
+            <a:avLst/>
+          </a:prstGeom>
+          <a:noFill/>
+          <a:ln/>
+        </p:spPr>
+        <p:txBody>
+          <a:bodyPr wrap="square" rtlCol="0" anchor="ctr"/>
+          <a:lstStyle/>
+          <a:p>
+            <a:pPr indent="0" marL="0">
+              <a:buNone/>
+            </a:pPr>
+            <a:r>
+              <a:rPr lang="en-US" sz="1400" dirty="0">
+                <a:solidFill>
+                  <a:srgbClr val="718096"/>
+                </a:solidFill>
+                <a:latin typeface="Noto Sans KR" pitchFamily="34" charset="0"/>
+                <a:ea typeface="Noto Sans KR" pitchFamily="34" charset="-122"/>
+                <a:cs typeface="Noto Sans KR" pitchFamily="34" charset="-120"/>
+              </a:rPr>
+              <a:t>미세먼지 데이터에 질문 3개 + 결과 캡처 + CLAUDE.md → 인프런/운영 채널 업로드</a:t>
+            </a:r>
+            <a:endParaRPr lang="en-US" sz="1400" dirty="0"/>
+          </a:p>
+        </p:txBody>
+      </p:sp>
+      <p:sp>
+        <p:nvSpPr>
+          <p:cNvPr id="5" name="Shape 3"/>
+          <p:cNvSpPr/>
+          <p:nvPr/>
+        </p:nvSpPr>
+        <p:spPr>
+          <a:xfrm>
+            <a:off x="548640" y="1554480"/>
+            <a:ext cx="5669280" cy="4572000"/>
+          </a:xfrm>
+          <a:prstGeom prst="roundRect">
+            <a:avLst>
+              <a:gd name="adj" fmla="val 2000"/>
+            </a:avLst>
+          </a:prstGeom>
+          <a:solidFill>
+            <a:srgbClr val="FFFFFF"/>
+          </a:solidFill>
+          <a:ln/>
+          <a:effectLst>
+            <a:outerShdw sx="100000" sy="100000" kx="0" ky="0" algn="bl" rotWithShape="0" blurRad="76200" dist="25400" dir="16200000">
+              <a:srgbClr val="000000">
+                <a:alpha val="8000"/>
+              </a:srgbClr>
+            </a:outerShdw>
+          </a:effectLst>
+        </p:spPr>
+      </p:sp>
+      <p:sp>
+        <p:nvSpPr>
+          <p:cNvPr id="6" name="Shape 4"/>
+          <p:cNvSpPr/>
+          <p:nvPr/>
+        </p:nvSpPr>
+        <p:spPr>
+          <a:xfrm>
+            <a:off x="548640" y="1554480"/>
+            <a:ext cx="5669280" cy="64008"/>
+          </a:xfrm>
+          <a:prstGeom prst="rect">
+            <a:avLst/>
+          </a:prstGeom>
+          <a:solidFill>
+            <a:srgbClr val="4A7BF7"/>
+          </a:solidFill>
+          <a:ln/>
+        </p:spPr>
+      </p:sp>
+      <p:sp>
+        <p:nvSpPr>
+          <p:cNvPr id="7" name="Text 5"/>
+          <p:cNvSpPr/>
+          <p:nvPr/>
+        </p:nvSpPr>
+        <p:spPr>
+          <a:xfrm>
+            <a:off x="777240" y="1691640"/>
+            <a:ext cx="5212080" cy="365760"/>
+          </a:xfrm>
+          <a:prstGeom prst="rect">
+            <a:avLst/>
+          </a:prstGeom>
+          <a:noFill/>
+          <a:ln/>
+        </p:spPr>
+        <p:txBody>
+          <a:bodyPr wrap="square" rtlCol="0" anchor="ctr"/>
+          <a:lstStyle/>
+          <a:p>
+            <a:pPr indent="0" marL="0">
+              <a:buNone/>
+            </a:pPr>
+            <a:r>
+              <a:rPr lang="en-US" sz="1500" b="1" dirty="0">
+                <a:solidFill>
+                  <a:srgbClr val="1A1F36"/>
+                </a:solidFill>
+                <a:latin typeface="Noto Sans KR" pitchFamily="34" charset="0"/>
+                <a:ea typeface="Noto Sans KR" pitchFamily="34" charset="-122"/>
+                <a:cs typeface="Noto Sans KR" pitchFamily="34" charset="-120"/>
+              </a:rPr>
+              <a:t>필수 제출</a:t>
+            </a:r>
+            <a:endParaRPr lang="en-US" sz="1500" dirty="0"/>
+          </a:p>
+        </p:txBody>
+      </p:sp>
+      <p:sp>
+        <p:nvSpPr>
+          <p:cNvPr id="8" name="Text 6"/>
+          <p:cNvSpPr/>
+          <p:nvPr/>
+        </p:nvSpPr>
+        <p:spPr>
+          <a:xfrm>
+            <a:off x="777240" y="2148840"/>
+            <a:ext cx="5212080" cy="3840480"/>
+          </a:xfrm>
+          <a:prstGeom prst="rect">
+            <a:avLst/>
+          </a:prstGeom>
+          <a:noFill/>
+          <a:ln/>
+        </p:spPr>
+        <p:txBody>
+          <a:bodyPr wrap="square" rtlCol="0" anchor="t"/>
+          <a:lstStyle/>
+          <a:p>
+            <a:pPr indent="0" marL="0">
+              <a:lnSpc>
+                <a:spcPct val="150000"/>
+              </a:lnSpc>
+              <a:spcAft>
+                <a:spcPts val="1000"/>
+              </a:spcAft>
+              <a:buNone/>
+            </a:pPr>
+            <a:r>
+              <a:rPr lang="en-US" sz="1300" dirty="0">
+                <a:solidFill>
+                  <a:srgbClr val="4A5568"/>
+                </a:solidFill>
+                <a:latin typeface="Noto Sans KR" pitchFamily="34" charset="0"/>
+                <a:ea typeface="Noto Sans KR" pitchFamily="34" charset="-122"/>
+                <a:cs typeface="Noto Sans KR" pitchFamily="34" charset="-120"/>
+              </a:rPr>
+              <a:t>✅ 질문 3개 + 결과 캡처 (PNG)</a:t>
+            </a:r>
+            <a:endParaRPr lang="en-US" sz="1300" dirty="0"/>
+          </a:p>
+          <a:p>
+            <a:pPr indent="0" marL="0">
+              <a:lnSpc>
+                <a:spcPct val="150000"/>
+              </a:lnSpc>
+              <a:spcAft>
+                <a:spcPts val="1000"/>
+              </a:spcAft>
+              <a:buNone/>
+            </a:pPr>
+            <a:r>
+              <a:rPr lang="en-US" sz="1300" dirty="0">
+                <a:solidFill>
+                  <a:srgbClr val="4A5568"/>
+                </a:solidFill>
+                <a:latin typeface="Noto Sans KR" pitchFamily="34" charset="0"/>
+                <a:ea typeface="Noto Sans KR" pitchFamily="34" charset="-122"/>
+                <a:cs typeface="Noto Sans KR" pitchFamily="34" charset="-120"/>
+              </a:rPr>
+              <a:t>✅ CLAUDE.md (분석 규칙 5개 이상)</a:t>
+            </a:r>
+            <a:endParaRPr lang="en-US" sz="1300" dirty="0"/>
+          </a:p>
+          <a:p>
+            <a:pPr indent="0" marL="0">
+              <a:lnSpc>
+                <a:spcPct val="150000"/>
+              </a:lnSpc>
+              <a:spcAft>
+                <a:spcPts val="1000"/>
+              </a:spcAft>
+              <a:buNone/>
+            </a:pPr>
+            <a:r>
+              <a:rPr lang="en-US" sz="1300" dirty="0">
+                <a:solidFill>
+                  <a:srgbClr val="4A5568"/>
+                </a:solidFill>
+                <a:latin typeface="Noto Sans KR" pitchFamily="34" charset="0"/>
+                <a:ea typeface="Noto Sans KR" pitchFamily="34" charset="-122"/>
+                <a:cs typeface="Noto Sans KR" pitchFamily="34" charset="-120"/>
+              </a:rPr>
+              <a:t>✅ 운영 채널 업로드 (PNG · CLAUDE.md)</a:t>
+            </a:r>
+            <a:endParaRPr lang="en-US" sz="1300" dirty="0"/>
+          </a:p>
+        </p:txBody>
+      </p:sp>
+      <p:sp>
+        <p:nvSpPr>
+          <p:cNvPr id="9" name="Shape 7"/>
+          <p:cNvSpPr/>
+          <p:nvPr/>
+        </p:nvSpPr>
+        <p:spPr>
+          <a:xfrm>
+            <a:off x="6400800" y="1554480"/>
+            <a:ext cx="5212080" cy="4572000"/>
+          </a:xfrm>
+          <a:prstGeom prst="roundRect">
+            <a:avLst>
+              <a:gd name="adj" fmla="val 2000"/>
+            </a:avLst>
+          </a:prstGeom>
+          <a:solidFill>
+            <a:srgbClr val="F5F7FA"/>
+          </a:solidFill>
+          <a:ln w="6350">
+            <a:solidFill>
+              <a:srgbClr val="E2E8F0"/>
+            </a:solidFill>
+            <a:prstDash val="solid"/>
+          </a:ln>
+        </p:spPr>
+      </p:sp>
+      <p:sp>
+        <p:nvSpPr>
+          <p:cNvPr id="10" name="Shape 8"/>
+          <p:cNvSpPr/>
+          <p:nvPr/>
+        </p:nvSpPr>
+        <p:spPr>
+          <a:xfrm>
+            <a:off x="6400800" y="1554480"/>
+            <a:ext cx="5212080" cy="64008"/>
+          </a:xfrm>
+          <a:prstGeom prst="rect">
+            <a:avLst/>
+          </a:prstGeom>
+          <a:solidFill>
+            <a:srgbClr val="4A7BF7"/>
+          </a:solidFill>
+          <a:ln/>
+        </p:spPr>
+      </p:sp>
+      <p:sp>
+        <p:nvSpPr>
+          <p:cNvPr id="11" name="Text 9"/>
+          <p:cNvSpPr/>
+          <p:nvPr/>
+        </p:nvSpPr>
+        <p:spPr>
+          <a:xfrm>
+            <a:off x="6629400" y="1691640"/>
+            <a:ext cx="4754880" cy="365760"/>
+          </a:xfrm>
+          <a:prstGeom prst="rect">
+            <a:avLst/>
+          </a:prstGeom>
+          <a:noFill/>
+          <a:ln/>
+        </p:spPr>
+        <p:txBody>
+          <a:bodyPr wrap="square" rtlCol="0" anchor="ctr"/>
+          <a:lstStyle/>
+          <a:p>
+            <a:pPr indent="0" marL="0">
+              <a:buNone/>
+            </a:pPr>
+            <a:r>
+              <a:rPr lang="en-US" sz="1500" b="1" dirty="0">
+                <a:solidFill>
+                  <a:srgbClr val="1A1F36"/>
+                </a:solidFill>
+                <a:latin typeface="Noto Sans KR" pitchFamily="34" charset="0"/>
+                <a:ea typeface="Noto Sans KR" pitchFamily="34" charset="-122"/>
+                <a:cs typeface="Noto Sans KR" pitchFamily="34" charset="-120"/>
+              </a:rPr>
+              <a:t>선택 (보너스)</a:t>
+            </a:r>
+            <a:endParaRPr lang="en-US" sz="1500" dirty="0"/>
+          </a:p>
+        </p:txBody>
+      </p:sp>
+      <p:sp>
+        <p:nvSpPr>
+          <p:cNvPr id="12" name="Text 10"/>
+          <p:cNvSpPr/>
+          <p:nvPr/>
+        </p:nvSpPr>
+        <p:spPr>
+          <a:xfrm>
+            <a:off x="6629400" y="2148840"/>
+            <a:ext cx="4754880" cy="3840480"/>
+          </a:xfrm>
+          <a:prstGeom prst="rect">
+            <a:avLst/>
+          </a:prstGeom>
+          <a:noFill/>
+          <a:ln/>
+        </p:spPr>
+        <p:txBody>
+          <a:bodyPr wrap="square" rtlCol="0" anchor="t"/>
+          <a:lstStyle/>
+          <a:p>
+            <a:pPr indent="0" marL="0">
+              <a:lnSpc>
+                <a:spcPct val="150000"/>
+              </a:lnSpc>
+              <a:spcAft>
+                <a:spcPts val="1000"/>
+              </a:spcAft>
+              <a:buNone/>
+            </a:pPr>
+            <a:r>
+              <a:rPr lang="en-US" sz="1300" dirty="0">
+                <a:solidFill>
+                  <a:srgbClr val="4A5568"/>
+                </a:solidFill>
+                <a:latin typeface="Noto Sans KR" pitchFamily="34" charset="0"/>
+                <a:ea typeface="Noto Sans KR" pitchFamily="34" charset="-122"/>
+                <a:cs typeface="Noto Sans KR" pitchFamily="34" charset="-120"/>
+              </a:rPr>
+              <a:t>⭐ "평소 같으면 얼마나 걸렸을까?" 한 줄 소감</a:t>
+            </a:r>
+            <a:endParaRPr lang="en-US" sz="1300" dirty="0"/>
+          </a:p>
+          <a:p>
+            <a:pPr indent="0" marL="0">
+              <a:lnSpc>
+                <a:spcPct val="150000"/>
+              </a:lnSpc>
+              <a:spcAft>
+                <a:spcPts val="1000"/>
+              </a:spcAft>
+              <a:buNone/>
+            </a:pPr>
+            <a:r>
+              <a:rPr lang="en-US" sz="1300" dirty="0">
+                <a:solidFill>
+                  <a:srgbClr val="4A5568"/>
+                </a:solidFill>
+                <a:latin typeface="Noto Sans KR" pitchFamily="34" charset="0"/>
+                <a:ea typeface="Noto Sans KR" pitchFamily="34" charset="-122"/>
+                <a:cs typeface="Noto Sans KR" pitchFamily="34" charset="-120"/>
+              </a:rPr>
+              <a:t>⭐ 본인 회사 데이터로 시도해본 결과</a:t>
+            </a:r>
+            <a:endParaRPr lang="en-US" sz="1300" dirty="0"/>
+          </a:p>
+        </p:txBody>
+      </p:sp>
+      <p:sp>
+        <p:nvSpPr>
+          <p:cNvPr id="13" name="Text 11"/>
+          <p:cNvSpPr/>
+          <p:nvPr/>
+        </p:nvSpPr>
+        <p:spPr>
+          <a:xfrm>
+            <a:off x="10972800" y="6446520"/>
+            <a:ext cx="1005840" cy="256032"/>
+          </a:xfrm>
+          <a:prstGeom prst="rect">
+            <a:avLst/>
+          </a:prstGeom>
+          <a:noFill/>
+          <a:ln/>
+        </p:spPr>
+        <p:txBody>
+          <a:bodyPr wrap="square" rtlCol="0" anchor="ctr"/>
+          <a:lstStyle/>
+          <a:p>
+            <a:pPr algn="r" indent="0" marL="0">
+              <a:buNone/>
+            </a:pPr>
+            <a:r>
+              <a:rPr lang="en-US" sz="900" dirty="0">
+                <a:solidFill>
+                  <a:srgbClr val="718096"/>
+                </a:solidFill>
+                <a:latin typeface="Noto Sans KR" pitchFamily="34" charset="0"/>
+                <a:ea typeface="Noto Sans KR" pitchFamily="34" charset="-122"/>
+                <a:cs typeface="Noto Sans KR" pitchFamily="34" charset="-120"/>
+              </a:rPr>
+              <a:t>33 / 34</a:t>
+            </a:r>
+            <a:endParaRPr lang="en-US" sz="900" dirty="0"/>
+          </a:p>
+        </p:txBody>
+      </p:sp>
+    </p:spTree>
+  </p:cSld>
+  <p:clrMapOvr>
+    <a:masterClrMapping/>
+  </p:clrMapOvr>
+</p:sld>
+</file>
+
+<file path=ppt/slides/slide34.xml><?xml version="1.0" encoding="utf-8"?>
+<p:sld xmlns:a="http://schemas.openxmlformats.org/drawingml/2006/main" xmlns:r="http://schemas.openxmlformats.org/officeDocument/2006/relationships" xmlns:p="http://schemas.openxmlformats.org/presentationml/2006/main">
+  <p:cSld name="Slide 34">
+    <p:spTree>
+      <p:nvGrpSpPr>
+        <p:cNvPr id="1" name=""/>
+        <p:cNvGrpSpPr/>
+        <p:nvPr/>
+      </p:nvGrpSpPr>
+      <p:grpSpPr>
+        <a:xfrm>
+          <a:off x="0" y="0"/>
+          <a:ext cx="0" cy="0"/>
+          <a:chOff x="0" y="0"/>
+          <a:chExt cx="0" cy="0"/>
+        </a:xfrm>
+      </p:grpSpPr>
+      <p:sp>
+        <p:nvSpPr>
+          <p:cNvPr id="2" name="Shape 0"/>
+          <p:cNvSpPr/>
+          <p:nvPr/>
+        </p:nvSpPr>
+        <p:spPr>
+          <a:xfrm>
             <a:off x="0" y="0"/>
             <a:ext cx="12192000" cy="6858000"/>
           </a:xfrm>
@@ -13008,7 +14142,7 @@
                 <a:ea typeface="Noto Sans KR" pitchFamily="34" charset="-122"/>
                 <a:cs typeface="Noto Sans KR" pitchFamily="34" charset="-120"/>
               </a:rPr>
-              <a:t>31 / 31</a:t>
+              <a:t>34 / 34</a:t>
             </a:r>
             <a:endParaRPr lang="en-US" sz="900" dirty="0"/>
           </a:p>
@@ -14126,7 +15260,7 @@
                 <a:ea typeface="Noto Sans KR" pitchFamily="34" charset="-122"/>
                 <a:cs typeface="Noto Sans KR" pitchFamily="34" charset="-120"/>
               </a:rPr>
-              <a:t>4 / 31</a:t>
+              <a:t>4 / 34</a:t>
             </a:r>
             <a:endParaRPr lang="en-US" sz="900" dirty="0"/>
           </a:p>
@@ -14165,8 +15299,28 @@
         </p:nvSpPr>
         <p:spPr>
           <a:xfrm>
-            <a:off x="548640" y="384048"/>
-            <a:ext cx="914400" cy="54864"/>
+            <a:off x="0" y="0"/>
+            <a:ext cx="12192000" cy="6858000"/>
+          </a:xfrm>
+          <a:prstGeom prst="rect">
+            <a:avLst/>
+          </a:prstGeom>
+          <a:solidFill>
+            <a:srgbClr val="1A1F36"/>
+          </a:solidFill>
+          <a:ln/>
+        </p:spPr>
+      </p:sp>
+      <p:sp>
+        <p:nvSpPr>
+          <p:cNvPr id="3" name="Shape 1"/>
+          <p:cNvSpPr/>
+          <p:nvPr/>
+        </p:nvSpPr>
+        <p:spPr>
+          <a:xfrm>
+            <a:off x="9875520" y="0"/>
+            <a:ext cx="2313432" cy="6858000"/>
           </a:xfrm>
           <a:prstGeom prst="rect">
             <a:avLst/>
@@ -14179,14 +15333,14 @@
       </p:sp>
       <p:sp>
         <p:nvSpPr>
-          <p:cNvPr id="3" name="Text 1"/>
-          <p:cNvSpPr/>
-          <p:nvPr/>
-        </p:nvSpPr>
-        <p:spPr>
-          <a:xfrm>
-            <a:off x="548640" y="530352"/>
-            <a:ext cx="10515600" cy="411480"/>
+          <p:cNvPr id="4" name="Text 2"/>
+          <p:cNvSpPr/>
+          <p:nvPr/>
+        </p:nvSpPr>
+        <p:spPr>
+          <a:xfrm>
+            <a:off x="731520" y="1828800"/>
+            <a:ext cx="10515600" cy="457200"/>
           </a:xfrm>
           <a:prstGeom prst="rect">
             <a:avLst/>
@@ -14202,15 +15356,15 @@
               <a:buNone/>
             </a:pPr>
             <a:r>
-              <a:rPr lang="en-US" sz="1400" b="1" spc="50" kern="0" dirty="0">
-                <a:solidFill>
-                  <a:srgbClr val="718096"/>
-                </a:solidFill>
-                <a:latin typeface="Noto Sans KR" pitchFamily="34" charset="0"/>
-                <a:ea typeface="Noto Sans KR" pitchFamily="34" charset="-122"/>
-                <a:cs typeface="Noto Sans KR" pitchFamily="34" charset="-120"/>
-              </a:rPr>
-              <a:t>파트 1. 오프닝 + Before/After 시연</a:t>
+              <a:rPr lang="en-US" sz="1400" b="1" spc="500" kern="0" dirty="0">
+                <a:solidFill>
+                  <a:srgbClr val="4A7BF7"/>
+                </a:solidFill>
+                <a:latin typeface="Noto Sans KR" pitchFamily="34" charset="0"/>
+                <a:ea typeface="Noto Sans KR" pitchFamily="34" charset="-122"/>
+                <a:cs typeface="Noto Sans KR" pitchFamily="34" charset="-120"/>
+              </a:rPr>
+              <a:t>PART 1</a:t>
             </a:r>
             <a:endParaRPr lang="en-US" sz="1400" dirty="0"/>
           </a:p>
@@ -14218,14 +15372,14 @@
       </p:sp>
       <p:sp>
         <p:nvSpPr>
-          <p:cNvPr id="4" name="Text 2"/>
-          <p:cNvSpPr/>
-          <p:nvPr/>
-        </p:nvSpPr>
-        <p:spPr>
-          <a:xfrm>
-            <a:off x="548640" y="960120"/>
-            <a:ext cx="10515600" cy="292608"/>
+          <p:cNvPr id="5" name="Text 3"/>
+          <p:cNvSpPr/>
+          <p:nvPr/>
+        </p:nvSpPr>
+        <p:spPr>
+          <a:xfrm>
+            <a:off x="731520" y="2468880"/>
+            <a:ext cx="10515600" cy="1645920"/>
           </a:xfrm>
           <a:prstGeom prst="rect">
             <a:avLst/>
@@ -14238,62 +15392,43 @@
           <a:lstStyle/>
           <a:p>
             <a:pPr indent="0" marL="0">
-              <a:buNone/>
-            </a:pPr>
-            <a:r>
-              <a:rPr lang="en-US" sz="1100" b="1" spc="150" kern="0" dirty="0">
-                <a:solidFill>
-                  <a:srgbClr val="4A7BF7"/>
-                </a:solidFill>
-                <a:latin typeface="Noto Sans KR" pitchFamily="34" charset="0"/>
-                <a:ea typeface="Noto Sans KR" pitchFamily="34" charset="-122"/>
-                <a:cs typeface="Noto Sans KR" pitchFamily="34" charset="-120"/>
-              </a:rPr>
-              <a:t>섹션 1 / 5</a:t>
-            </a:r>
-            <a:endParaRPr lang="en-US" sz="1100" dirty="0"/>
-          </a:p>
-        </p:txBody>
-      </p:sp>
-      <p:sp>
-        <p:nvSpPr>
-          <p:cNvPr id="5" name="Text 3"/>
-          <p:cNvSpPr/>
-          <p:nvPr/>
-        </p:nvSpPr>
-        <p:spPr>
-          <a:xfrm>
-            <a:off x="548640" y="1508760"/>
-            <a:ext cx="11091672" cy="1371600"/>
-          </a:xfrm>
-          <a:prstGeom prst="rect">
-            <a:avLst/>
-          </a:prstGeom>
-          <a:noFill/>
-          <a:ln/>
-        </p:spPr>
-        <p:txBody>
-          <a:bodyPr wrap="square" rtlCol="0" anchor="t"/>
-          <a:lstStyle/>
-          <a:p>
-            <a:pPr indent="0" marL="0">
               <a:lnSpc>
-                <a:spcPct val="110000"/>
+                <a:spcPct val="115000"/>
               </a:lnSpc>
               <a:buNone/>
             </a:pPr>
             <a:r>
-              <a:rPr lang="en-US" sz="4200" b="1" spc="-50" kern="0" dirty="0">
-                <a:solidFill>
-                  <a:srgbClr val="1A1F36"/>
-                </a:solidFill>
-                <a:latin typeface="Noto Sans KR" pitchFamily="34" charset="0"/>
-                <a:ea typeface="Noto Sans KR" pitchFamily="34" charset="-122"/>
-                <a:cs typeface="Noto Sans KR" pitchFamily="34" charset="-120"/>
-              </a:rPr>
-              <a:t>환영 + 4회차 흐름</a:t>
-            </a:r>
-            <a:endParaRPr lang="en-US" sz="4200" dirty="0"/>
+              <a:rPr lang="en-US" sz="5400" b="1" spc="-50" kern="0" dirty="0">
+                <a:solidFill>
+                  <a:srgbClr val="FFFFFF"/>
+                </a:solidFill>
+                <a:latin typeface="Noto Sans KR" pitchFamily="34" charset="0"/>
+                <a:ea typeface="Noto Sans KR" pitchFamily="34" charset="-122"/>
+                <a:cs typeface="Noto Sans KR" pitchFamily="34" charset="-120"/>
+              </a:rPr>
+              <a:t>오프닝 +</a:t>
+            </a:r>
+            <a:endParaRPr lang="en-US" sz="5400" dirty="0"/>
+          </a:p>
+          <a:p>
+            <a:pPr indent="0" marL="0">
+              <a:lnSpc>
+                <a:spcPct val="115000"/>
+              </a:lnSpc>
+              <a:buNone/>
+            </a:pPr>
+            <a:r>
+              <a:rPr lang="en-US" sz="5400" b="1" spc="-50" kern="0" dirty="0">
+                <a:solidFill>
+                  <a:srgbClr val="FFFFFF"/>
+                </a:solidFill>
+                <a:latin typeface="Noto Sans KR" pitchFamily="34" charset="0"/>
+                <a:ea typeface="Noto Sans KR" pitchFamily="34" charset="-122"/>
+                <a:cs typeface="Noto Sans KR" pitchFamily="34" charset="-120"/>
+              </a:rPr>
+              <a:t>Before/After 시연</a:t>
+            </a:r>
+            <a:endParaRPr lang="en-US" sz="5400" dirty="0"/>
           </a:p>
         </p:txBody>
       </p:sp>
@@ -14305,14 +15440,14 @@
         </p:nvSpPr>
         <p:spPr>
           <a:xfrm>
-            <a:off x="548640" y="2971800"/>
-            <a:ext cx="1828800" cy="0"/>
+            <a:off x="731520" y="4297680"/>
+            <a:ext cx="3200400" cy="0"/>
           </a:xfrm>
           <a:prstGeom prst="line">
             <a:avLst/>
           </a:prstGeom>
           <a:noFill/>
-          <a:ln w="25400">
+          <a:ln w="19050">
             <a:solidFill>
               <a:srgbClr val="4A7BF7"/>
             </a:solidFill>
@@ -14328,77 +15463,37 @@
         </p:nvSpPr>
         <p:spPr>
           <a:xfrm>
-            <a:off x="548640" y="3200400"/>
-            <a:ext cx="11091672" cy="2788920"/>
-          </a:xfrm>
-          <a:prstGeom prst="rect">
-            <a:avLst/>
-          </a:prstGeom>
-          <a:noFill/>
-          <a:ln/>
-        </p:spPr>
-        <p:txBody>
-          <a:bodyPr wrap="square" rtlCol="0" anchor="t"/>
+            <a:off x="731520" y="4526280"/>
+            <a:ext cx="10515600" cy="548640"/>
+          </a:xfrm>
+          <a:prstGeom prst="rect">
+            <a:avLst/>
+          </a:prstGeom>
+          <a:noFill/>
+          <a:ln/>
+        </p:spPr>
+        <p:txBody>
+          <a:bodyPr wrap="square" rtlCol="0" anchor="ctr"/>
           <a:lstStyle/>
           <a:p>
             <a:pPr indent="0" marL="0">
               <a:lnSpc>
-                <a:spcPct val="155000"/>
+                <a:spcPct val="150000"/>
               </a:lnSpc>
               <a:buNone/>
             </a:pPr>
             <a:r>
-              <a:rPr lang="en-US" sz="1700" dirty="0">
-                <a:solidFill>
-                  <a:srgbClr val="4A5568"/>
-                </a:solidFill>
-                <a:latin typeface="Noto Sans KR" pitchFamily="34" charset="0"/>
-                <a:ea typeface="Noto Sans KR" pitchFamily="34" charset="-122"/>
-                <a:cs typeface="Noto Sans KR" pitchFamily="34" charset="-120"/>
-              </a:rPr>
-              <a:t>· 4회차: 데이터 → EDA → 대시보드 → 의사결정</a:t>
-            </a:r>
-            <a:endParaRPr lang="en-US" sz="1700" dirty="0"/>
-          </a:p>
-          <a:p>
-            <a:pPr indent="0" marL="0">
-              <a:lnSpc>
-                <a:spcPct val="155000"/>
-              </a:lnSpc>
-              <a:buNone/>
-            </a:pPr>
-            <a:r>
-              <a:rPr lang="en-US" sz="1700" dirty="0">
-                <a:solidFill>
-                  <a:srgbClr val="4A5568"/>
-                </a:solidFill>
-                <a:latin typeface="Noto Sans KR" pitchFamily="34" charset="0"/>
-                <a:ea typeface="Noto Sans KR" pitchFamily="34" charset="-122"/>
-                <a:cs typeface="Noto Sans KR" pitchFamily="34" charset="-120"/>
-              </a:rPr>
-              <a:t>· 오늘 끝나면 "데이터 던지면 분석" 첫 경험</a:t>
-            </a:r>
-            <a:endParaRPr lang="en-US" sz="1700" dirty="0"/>
-          </a:p>
-          <a:p>
-            <a:pPr indent="0" marL="0">
-              <a:lnSpc>
-                <a:spcPct val="155000"/>
-              </a:lnSpc>
-              <a:buNone/>
-            </a:pPr>
-            <a:r>
-              <a:rPr lang="en-US" sz="1700" dirty="0">
-                <a:solidFill>
-                  <a:srgbClr val="4A5568"/>
-                </a:solidFill>
-                <a:latin typeface="Noto Sans KR" pitchFamily="34" charset="0"/>
-                <a:ea typeface="Noto Sans KR" pitchFamily="34" charset="-122"/>
-                <a:cs typeface="Noto Sans KR" pitchFamily="34" charset="-120"/>
-              </a:rPr>
-              <a:t>· 서울 미세먼지로 4회차를 끝까지 끌고 갑니다. (+추가 결합 데이터)</a:t>
-            </a:r>
-            <a:endParaRPr lang="en-US" sz="1700" dirty="0"/>
+              <a:rPr lang="en-US" sz="1600" dirty="0">
+                <a:solidFill>
+                  <a:srgbClr val="A0AEC0"/>
+                </a:solidFill>
+                <a:latin typeface="Noto Sans KR" pitchFamily="34" charset="0"/>
+                <a:ea typeface="Noto Sans KR" pitchFamily="34" charset="-122"/>
+                <a:cs typeface="Noto Sans KR" pitchFamily="34" charset="-120"/>
+              </a:rPr>
+              <a:t>한 문장이면 끝 — 강사가 시연해 보여드립니다</a:t>
+            </a:r>
+            <a:endParaRPr lang="en-US" sz="1600" dirty="0"/>
           </a:p>
         </p:txBody>
       </p:sp>
@@ -14435,7 +15530,7 @@
                 <a:ea typeface="Noto Sans KR" pitchFamily="34" charset="-122"/>
                 <a:cs typeface="Noto Sans KR" pitchFamily="34" charset="-120"/>
               </a:rPr>
-              <a:t>5 / 31</a:t>
+              <a:t>5 / 34</a:t>
             </a:r>
             <a:endParaRPr lang="en-US" sz="900" dirty="0"/>
           </a:p>
@@ -14558,7 +15653,7 @@
                 <a:ea typeface="Noto Sans KR" pitchFamily="34" charset="-122"/>
                 <a:cs typeface="Noto Sans KR" pitchFamily="34" charset="-120"/>
               </a:rPr>
-              <a:t>섹션 2 / 5</a:t>
+              <a:t>섹션 1 / 5</a:t>
             </a:r>
             <a:endParaRPr lang="en-US" sz="1100" dirty="0"/>
           </a:p>
@@ -14600,7 +15695,7 @@
                 <a:ea typeface="Noto Sans KR" pitchFamily="34" charset="-122"/>
                 <a:cs typeface="Noto Sans KR" pitchFamily="34" charset="-120"/>
               </a:rPr>
-              <a:t>자료 수집·미션 제출 방법</a:t>
+              <a:t>환영 + 4회차 흐름</a:t>
             </a:r>
             <a:endParaRPr lang="en-US" sz="4200" dirty="0"/>
           </a:p>
@@ -14665,7 +15760,7 @@
                 <a:ea typeface="Noto Sans KR" pitchFamily="34" charset="-122"/>
                 <a:cs typeface="Noto Sans KR" pitchFamily="34" charset="-120"/>
               </a:rPr>
-              <a:t>· 데이터 : 출처에서 직접 다운로드</a:t>
+              <a:t>· 4회차: 데이터 → EDA → 대시보드 → 의사결정</a:t>
             </a:r>
             <a:endParaRPr lang="en-US" sz="1700" dirty="0"/>
           </a:p>
@@ -14685,7 +15780,7 @@
                 <a:ea typeface="Noto Sans KR" pitchFamily="34" charset="-122"/>
                 <a:cs typeface="Noto Sans KR" pitchFamily="34" charset="-120"/>
               </a:rPr>
-              <a:t>  - 미세먼지·따릉이·지하철 → 서울 열린데이터광장</a:t>
+              <a:t>· 오늘 끝나면 "데이터 던지면 분석" 첫 경험</a:t>
             </a:r>
             <a:endParaRPr lang="en-US" sz="1700" dirty="0"/>
           </a:p>
@@ -14705,47 +15800,7 @@
                 <a:ea typeface="Noto Sans KR" pitchFamily="34" charset="-122"/>
                 <a:cs typeface="Noto Sans KR" pitchFamily="34" charset="-120"/>
               </a:rPr>
-              <a:t>  - 날씨 → 기상자료개방포털  ·  검색량 → 네이버 데이터랩·구글 트렌드</a:t>
-            </a:r>
-            <a:endParaRPr lang="en-US" sz="1700" dirty="0"/>
-          </a:p>
-          <a:p>
-            <a:pPr indent="0" marL="0">
-              <a:lnSpc>
-                <a:spcPct val="155000"/>
-              </a:lnSpc>
-              <a:buNone/>
-            </a:pPr>
-            <a:r>
-              <a:rPr lang="en-US" sz="1700" dirty="0">
-                <a:solidFill>
-                  <a:srgbClr val="4A5568"/>
-                </a:solidFill>
-                <a:latin typeface="Noto Sans KR" pitchFamily="34" charset="0"/>
-                <a:ea typeface="Noto Sans KR" pitchFamily="34" charset="-122"/>
-                <a:cs typeface="Noto Sans KR" pitchFamily="34" charset="-120"/>
-              </a:rPr>
-              <a:t>· 시연 프롬프트: PPT 코드 블록을 그대로 복사</a:t>
-            </a:r>
-            <a:endParaRPr lang="en-US" sz="1700" dirty="0"/>
-          </a:p>
-          <a:p>
-            <a:pPr indent="0" marL="0">
-              <a:lnSpc>
-                <a:spcPct val="155000"/>
-              </a:lnSpc>
-              <a:buNone/>
-            </a:pPr>
-            <a:r>
-              <a:rPr lang="en-US" sz="1700" dirty="0">
-                <a:solidFill>
-                  <a:srgbClr val="4A5568"/>
-                </a:solidFill>
-                <a:latin typeface="Noto Sans KR" pitchFamily="34" charset="0"/>
-                <a:ea typeface="Noto Sans KR" pitchFamily="34" charset="-122"/>
-                <a:cs typeface="Noto Sans KR" pitchFamily="34" charset="-120"/>
-              </a:rPr>
-              <a:t>· 미션 제출: 인프런/운영 채널에 결과(PNG · CLAUDE.md) 업로드</a:t>
+              <a:t>· 서울 미세먼지로 4회차를 끝까지 끌고 갑니다. (+추가 결합 데이터)</a:t>
             </a:r>
             <a:endParaRPr lang="en-US" sz="1700" dirty="0"/>
           </a:p>
@@ -14784,7 +15839,7 @@
                 <a:ea typeface="Noto Sans KR" pitchFamily="34" charset="-122"/>
                 <a:cs typeface="Noto Sans KR" pitchFamily="34" charset="-120"/>
               </a:rPr>
-              <a:t>6 / 31</a:t>
+              <a:t>6 / 34</a:t>
             </a:r>
             <a:endParaRPr lang="en-US" sz="900" dirty="0"/>
           </a:p>
@@ -14907,7 +15962,7 @@
                 <a:ea typeface="Noto Sans KR" pitchFamily="34" charset="-122"/>
                 <a:cs typeface="Noto Sans KR" pitchFamily="34" charset="-120"/>
               </a:rPr>
-              <a:t>섹션 3 / 5</a:t>
+              <a:t>섹션 2 / 5</a:t>
             </a:r>
             <a:endParaRPr lang="en-US" sz="1100" dirty="0"/>
           </a:p>
@@ -14949,7 +16004,7 @@
                 <a:ea typeface="Noto Sans KR" pitchFamily="34" charset="-122"/>
                 <a:cs typeface="Noto Sans KR" pitchFamily="34" charset="-120"/>
               </a:rPr>
-              <a:t>Before — ChatGPT에 복붙하던 시절</a:t>
+              <a:t>자료 수집·미션 제출 방법</a:t>
             </a:r>
             <a:endParaRPr lang="en-US" sz="4200" dirty="0"/>
           </a:p>
@@ -15014,7 +16069,7 @@
                 <a:ea typeface="Noto Sans KR" pitchFamily="34" charset="-122"/>
                 <a:cs typeface="Noto Sans KR" pitchFamily="34" charset="-120"/>
               </a:rPr>
-              <a:t>· 주피터에 CSV 로드 코드 직접 작성</a:t>
+              <a:t>· 데이터 : 출처에서 직접 다운로드</a:t>
             </a:r>
             <a:endParaRPr lang="en-US" sz="1700" dirty="0"/>
           </a:p>
@@ -15034,7 +16089,7 @@
                 <a:ea typeface="Noto Sans KR" pitchFamily="34" charset="-122"/>
                 <a:cs typeface="Noto Sans KR" pitchFamily="34" charset="-120"/>
               </a:rPr>
-              <a:t>· "CP949 인코딩" 질문 → 답 받기 → 복붙 → 실행</a:t>
+              <a:t>  - 미세먼지·따릉이·지하철 → 서울 열린데이터광장</a:t>
             </a:r>
             <a:endParaRPr lang="en-US" sz="1700" dirty="0"/>
           </a:p>
@@ -15054,7 +16109,7 @@
                 <a:ea typeface="Noto Sans KR" pitchFamily="34" charset="-122"/>
                 <a:cs typeface="Noto Sans KR" pitchFamily="34" charset="-120"/>
               </a:rPr>
-              <a:t>· 한글 폰트 깨짐 → 다시 질문 → 다시 복붙</a:t>
+              <a:t>  - 날씨 → 기상자료개방포털  ·  검색량 → 네이버 데이터랩·구글 트렌드</a:t>
             </a:r>
             <a:endParaRPr lang="en-US" sz="1700" dirty="0"/>
           </a:p>
@@ -15074,7 +16129,27 @@
                 <a:ea typeface="Noto Sans KR" pitchFamily="34" charset="-122"/>
                 <a:cs typeface="Noto Sans KR" pitchFamily="34" charset="-120"/>
               </a:rPr>
-              <a:t>· "매번 이렇게 삽질..." 의 반복</a:t>
+              <a:t>· 시연 프롬프트: PPT 코드 블록을 그대로 복사</a:t>
+            </a:r>
+            <a:endParaRPr lang="en-US" sz="1700" dirty="0"/>
+          </a:p>
+          <a:p>
+            <a:pPr indent="0" marL="0">
+              <a:lnSpc>
+                <a:spcPct val="155000"/>
+              </a:lnSpc>
+              <a:buNone/>
+            </a:pPr>
+            <a:r>
+              <a:rPr lang="en-US" sz="1700" dirty="0">
+                <a:solidFill>
+                  <a:srgbClr val="4A5568"/>
+                </a:solidFill>
+                <a:latin typeface="Noto Sans KR" pitchFamily="34" charset="0"/>
+                <a:ea typeface="Noto Sans KR" pitchFamily="34" charset="-122"/>
+                <a:cs typeface="Noto Sans KR" pitchFamily="34" charset="-120"/>
+              </a:rPr>
+              <a:t>· 미션 제출: 인프런/운영 채널에 결과(PNG · CLAUDE.md) 업로드</a:t>
             </a:r>
             <a:endParaRPr lang="en-US" sz="1700" dirty="0"/>
           </a:p>
@@ -15113,7 +16188,7 @@
                 <a:ea typeface="Noto Sans KR" pitchFamily="34" charset="-122"/>
                 <a:cs typeface="Noto Sans KR" pitchFamily="34" charset="-120"/>
               </a:rPr>
-              <a:t>7 / 31</a:t>
+              <a:t>7 / 34</a:t>
             </a:r>
             <a:endParaRPr lang="en-US" sz="900" dirty="0"/>
           </a:p>
@@ -15236,7 +16311,7 @@
                 <a:ea typeface="Noto Sans KR" pitchFamily="34" charset="-122"/>
                 <a:cs typeface="Noto Sans KR" pitchFamily="34" charset="-120"/>
               </a:rPr>
-              <a:t>섹션 4 / 5</a:t>
+              <a:t>섹션 3 / 5</a:t>
             </a:r>
             <a:endParaRPr lang="en-US" sz="1100" dirty="0"/>
           </a:p>
@@ -15278,7 +16353,7 @@
                 <a:ea typeface="Noto Sans KR" pitchFamily="34" charset="-122"/>
                 <a:cs typeface="Noto Sans KR" pitchFamily="34" charset="-120"/>
               </a:rPr>
-              <a:t>After — Claude Code, 한 문장이면 끝</a:t>
+              <a:t>Before — ChatGPT에 복붙하던 시절</a:t>
             </a:r>
             <a:endParaRPr lang="en-US" sz="4200" dirty="0"/>
           </a:p>
@@ -15343,7 +16418,7 @@
                 <a:ea typeface="Noto Sans KR" pitchFamily="34" charset="-122"/>
                 <a:cs typeface="Noto Sans KR" pitchFamily="34" charset="-120"/>
               </a:rPr>
-              <a:t>· 한 문장이면 인코딩·폰트·집계·차트까지 자동</a:t>
+              <a:t>· 주피터에 CSV 로드 코드 직접 작성</a:t>
             </a:r>
             <a:endParaRPr lang="en-US" sz="1700" dirty="0"/>
           </a:p>
@@ -15363,7 +16438,7 @@
                 <a:ea typeface="Noto Sans KR" pitchFamily="34" charset="-122"/>
                 <a:cs typeface="Noto Sans KR" pitchFamily="34" charset="-120"/>
               </a:rPr>
-              <a:t>· 일부러 오타를 내도 "다시 해줘" 한마디로 복구</a:t>
+              <a:t>· "CP949 인코딩" 질문 → 답 받기 → 복붙 → 실행</a:t>
             </a:r>
             <a:endParaRPr lang="en-US" sz="1700" dirty="0"/>
           </a:p>
@@ -15383,7 +16458,27 @@
                 <a:ea typeface="Noto Sans KR" pitchFamily="34" charset="-122"/>
                 <a:cs typeface="Noto Sans KR" pitchFamily="34" charset="-120"/>
               </a:rPr>
-              <a:t>· "에러 나면 어떡하지?" 걱정 일단 내려놓으세요</a:t>
+              <a:t>· 한글 폰트 깨짐 → 다시 질문 → 다시 복붙</a:t>
+            </a:r>
+            <a:endParaRPr lang="en-US" sz="1700" dirty="0"/>
+          </a:p>
+          <a:p>
+            <a:pPr indent="0" marL="0">
+              <a:lnSpc>
+                <a:spcPct val="155000"/>
+              </a:lnSpc>
+              <a:buNone/>
+            </a:pPr>
+            <a:r>
+              <a:rPr lang="en-US" sz="1700" dirty="0">
+                <a:solidFill>
+                  <a:srgbClr val="4A5568"/>
+                </a:solidFill>
+                <a:latin typeface="Noto Sans KR" pitchFamily="34" charset="0"/>
+                <a:ea typeface="Noto Sans KR" pitchFamily="34" charset="-122"/>
+                <a:cs typeface="Noto Sans KR" pitchFamily="34" charset="-120"/>
+              </a:rPr>
+              <a:t>· "매번 이렇게 삽질..." 의 반복</a:t>
             </a:r>
             <a:endParaRPr lang="en-US" sz="1700" dirty="0"/>
           </a:p>
@@ -15422,7 +16517,7 @@
                 <a:ea typeface="Noto Sans KR" pitchFamily="34" charset="-122"/>
                 <a:cs typeface="Noto Sans KR" pitchFamily="34" charset="-120"/>
               </a:rPr>
-              <a:t>8 / 31</a:t>
+              <a:t>8 / 34</a:t>
             </a:r>
             <a:endParaRPr lang="en-US" sz="900" dirty="0"/>
           </a:p>
@@ -15521,7 +16616,7 @@
         <p:spPr>
           <a:xfrm>
             <a:off x="548640" y="960120"/>
-            <a:ext cx="11091672" cy="292608"/>
+            <a:ext cx="10515600" cy="292608"/>
           </a:xfrm>
           <a:prstGeom prst="rect">
             <a:avLst/>
@@ -15537,7 +16632,7 @@
               <a:buNone/>
             </a:pPr>
             <a:r>
-              <a:rPr lang="en-US" sz="1100" b="1" spc="50" kern="0" dirty="0">
+              <a:rPr lang="en-US" sz="1100" b="1" spc="150" kern="0" dirty="0">
                 <a:solidFill>
                   <a:srgbClr val="4A7BF7"/>
                 </a:solidFill>
@@ -15545,7 +16640,7 @@
                 <a:ea typeface="Noto Sans KR" pitchFamily="34" charset="-122"/>
                 <a:cs typeface="Noto Sans KR" pitchFamily="34" charset="-120"/>
               </a:rPr>
-              <a:t>💬 함께 볼 시연 프롬프트 — 안 따라쳐도 OK (보기만 해도 됩니다)</a:t>
+              <a:t>섹션 4 / 5</a:t>
             </a:r>
             <a:endParaRPr lang="en-US" sz="1100" dirty="0"/>
           </a:p>
@@ -15560,7 +16655,7 @@
         <p:spPr>
           <a:xfrm>
             <a:off x="548640" y="1508760"/>
-            <a:ext cx="11091672" cy="1005840"/>
+            <a:ext cx="11091672" cy="1371600"/>
           </a:xfrm>
           <a:prstGeom prst="rect">
             <a:avLst/>
@@ -15574,12 +16669,12 @@
           <a:p>
             <a:pPr indent="0" marL="0">
               <a:lnSpc>
-                <a:spcPct val="115000"/>
+                <a:spcPct val="110000"/>
               </a:lnSpc>
               <a:buNone/>
             </a:pPr>
             <a:r>
-              <a:rPr lang="en-US" sz="3400" b="1" spc="-50" kern="0" dirty="0">
+              <a:rPr lang="en-US" sz="4200" b="1" spc="-50" kern="0" dirty="0">
                 <a:solidFill>
                   <a:srgbClr val="1A1F36"/>
                 </a:solidFill>
@@ -15587,9 +16682,9 @@
                 <a:ea typeface="Noto Sans KR" pitchFamily="34" charset="-122"/>
                 <a:cs typeface="Noto Sans KR" pitchFamily="34" charset="-120"/>
               </a:rPr>
-              <a:t>두 해 통합 PM2.5 자치구별 비교를 한 문장으로</a:t>
-            </a:r>
-            <a:endParaRPr lang="en-US" sz="3400" dirty="0"/>
+              <a:t>After — Claude Code, 한 문장이면 끝</a:t>
+            </a:r>
+            <a:endParaRPr lang="en-US" sz="4200" dirty="0"/>
           </a:p>
         </p:txBody>
       </p:sp>
@@ -15601,7 +16696,7 @@
         </p:nvSpPr>
         <p:spPr>
           <a:xfrm>
-            <a:off x="548640" y="2606040"/>
+            <a:off x="548640" y="2971800"/>
             <a:ext cx="1828800" cy="0"/>
           </a:xfrm>
           <a:prstGeom prst="line">
@@ -15618,116 +16713,89 @@
       </p:sp>
       <p:sp>
         <p:nvSpPr>
-          <p:cNvPr id="7" name="Shape 5"/>
-          <p:cNvSpPr/>
-          <p:nvPr/>
-        </p:nvSpPr>
-        <p:spPr>
-          <a:xfrm>
-            <a:off x="548640" y="2926080"/>
-            <a:ext cx="11091672" cy="3200400"/>
-          </a:xfrm>
-          <a:prstGeom prst="roundRect">
-            <a:avLst>
-              <a:gd name="adj" fmla="val 1714"/>
-            </a:avLst>
-          </a:prstGeom>
-          <a:solidFill>
-            <a:srgbClr val="F1F5F9"/>
-          </a:solidFill>
-          <a:ln w="6350">
-            <a:solidFill>
-              <a:srgbClr val="E2E8F0"/>
-            </a:solidFill>
-            <a:prstDash val="solid"/>
-          </a:ln>
-        </p:spPr>
+          <p:cNvPr id="7" name="Text 5"/>
+          <p:cNvSpPr/>
+          <p:nvPr/>
+        </p:nvSpPr>
+        <p:spPr>
+          <a:xfrm>
+            <a:off x="548640" y="3200400"/>
+            <a:ext cx="11091672" cy="2788920"/>
+          </a:xfrm>
+          <a:prstGeom prst="rect">
+            <a:avLst/>
+          </a:prstGeom>
+          <a:noFill/>
+          <a:ln/>
+        </p:spPr>
+        <p:txBody>
+          <a:bodyPr wrap="square" rtlCol="0" anchor="t"/>
+          <a:lstStyle/>
+          <a:p>
+            <a:pPr indent="0" marL="0">
+              <a:lnSpc>
+                <a:spcPct val="155000"/>
+              </a:lnSpc>
+              <a:buNone/>
+            </a:pPr>
+            <a:r>
+              <a:rPr lang="en-US" sz="1700" dirty="0">
+                <a:solidFill>
+                  <a:srgbClr val="4A5568"/>
+                </a:solidFill>
+                <a:latin typeface="Noto Sans KR" pitchFamily="34" charset="0"/>
+                <a:ea typeface="Noto Sans KR" pitchFamily="34" charset="-122"/>
+                <a:cs typeface="Noto Sans KR" pitchFamily="34" charset="-120"/>
+              </a:rPr>
+              <a:t>· 한 문장이면 인코딩·폰트·집계·차트까지 자동</a:t>
+            </a:r>
+            <a:endParaRPr lang="en-US" sz="1700" dirty="0"/>
+          </a:p>
+          <a:p>
+            <a:pPr indent="0" marL="0">
+              <a:lnSpc>
+                <a:spcPct val="155000"/>
+              </a:lnSpc>
+              <a:buNone/>
+            </a:pPr>
+            <a:r>
+              <a:rPr lang="en-US" sz="1700" dirty="0">
+                <a:solidFill>
+                  <a:srgbClr val="4A5568"/>
+                </a:solidFill>
+                <a:latin typeface="Noto Sans KR" pitchFamily="34" charset="0"/>
+                <a:ea typeface="Noto Sans KR" pitchFamily="34" charset="-122"/>
+                <a:cs typeface="Noto Sans KR" pitchFamily="34" charset="-120"/>
+              </a:rPr>
+              <a:t>· 일부러 오타를 내도 "다시 해줘" 한마디로 복구</a:t>
+            </a:r>
+            <a:endParaRPr lang="en-US" sz="1700" dirty="0"/>
+          </a:p>
+          <a:p>
+            <a:pPr indent="0" marL="0">
+              <a:lnSpc>
+                <a:spcPct val="155000"/>
+              </a:lnSpc>
+              <a:buNone/>
+            </a:pPr>
+            <a:r>
+              <a:rPr lang="en-US" sz="1700" dirty="0">
+                <a:solidFill>
+                  <a:srgbClr val="4A5568"/>
+                </a:solidFill>
+                <a:latin typeface="Noto Sans KR" pitchFamily="34" charset="0"/>
+                <a:ea typeface="Noto Sans KR" pitchFamily="34" charset="-122"/>
+                <a:cs typeface="Noto Sans KR" pitchFamily="34" charset="-120"/>
+              </a:rPr>
+              <a:t>· "에러 나면 어떡하지?" 걱정 일단 내려놓으세요</a:t>
+            </a:r>
+            <a:endParaRPr lang="en-US" sz="1700" dirty="0"/>
+          </a:p>
+        </p:txBody>
       </p:sp>
       <p:sp>
         <p:nvSpPr>
           <p:cNvPr id="8" name="Text 6"/>
-          <p:cNvSpPr/>
-          <p:nvPr/>
-        </p:nvSpPr>
-        <p:spPr>
-          <a:xfrm>
-            <a:off x="713232" y="3035808"/>
-            <a:ext cx="10762488" cy="2980944"/>
-          </a:xfrm>
-          <a:prstGeom prst="rect">
-            <a:avLst/>
-          </a:prstGeom>
-          <a:noFill/>
-          <a:ln/>
-        </p:spPr>
-        <p:txBody>
-          <a:bodyPr wrap="square" rtlCol="0" anchor="t"/>
-          <a:lstStyle/>
-          <a:p>
-            <a:pPr indent="0" marL="0">
-              <a:lnSpc>
-                <a:spcPct val="140000"/>
-              </a:lnSpc>
-              <a:buNone/>
-            </a:pPr>
-            <a:r>
-              <a:rPr lang="en-US" sz="1150" dirty="0">
-                <a:solidFill>
-                  <a:srgbClr val="1A1F36"/>
-                </a:solidFill>
-                <a:latin typeface="Roboto Mono" pitchFamily="34" charset="0"/>
-                <a:ea typeface="Roboto Mono" pitchFamily="34" charset="-122"/>
-                <a:cs typeface="Roboto Mono" pitchFamily="34" charset="-120"/>
-              </a:rPr>
-              <a:t>이 폴더에 기간별_일평균_대기환경_정보_2024년.csv + 기간별_일평균_대기환경_정보_2025년.csv 있어.</a:t>
-            </a:r>
-            <a:endParaRPr lang="en-US" sz="1150" dirty="0"/>
-          </a:p>
-          <a:p>
-            <a:pPr indent="0" marL="0">
-              <a:lnSpc>
-                <a:spcPct val="140000"/>
-              </a:lnSpc>
-              <a:buNone/>
-            </a:pPr>
-            <a:r>
-              <a:rPr lang="en-US" sz="1150" dirty="0">
-                <a:solidFill>
-                  <a:srgbClr val="1A1F36"/>
-                </a:solidFill>
-                <a:latin typeface="Roboto Mono" pitchFamily="34" charset="0"/>
-                <a:ea typeface="Roboto Mono" pitchFamily="34" charset="-122"/>
-                <a:cs typeface="Roboto Mono" pitchFamily="34" charset="-120"/>
-              </a:rPr>
-              <a:t>두 파일 모두 인코딩은 CP949(EUC-KR 호환)야. 통합해서 자치구별 PM2.5 연평균을</a:t>
-            </a:r>
-            <a:endParaRPr lang="en-US" sz="1150" dirty="0"/>
-          </a:p>
-          <a:p>
-            <a:pPr indent="0" marL="0">
-              <a:lnSpc>
-                <a:spcPct val="140000"/>
-              </a:lnSpc>
-              <a:buNone/>
-            </a:pPr>
-            <a:r>
-              <a:rPr lang="en-US" sz="1150" dirty="0">
-                <a:solidFill>
-                  <a:srgbClr val="1A1F36"/>
-                </a:solidFill>
-                <a:latin typeface="Roboto Mono" pitchFamily="34" charset="0"/>
-                <a:ea typeface="Roboto Mono" pitchFamily="34" charset="-122"/>
-                <a:cs typeface="Roboto Mono" pitchFamily="34" charset="-120"/>
-              </a:rPr>
-              <a:t>2024 vs 2025 비교 막대그래프로, 한글 폰트 깨지지 않게 그려줘.</a:t>
-            </a:r>
-            <a:endParaRPr lang="en-US" sz="1150" dirty="0"/>
-          </a:p>
-        </p:txBody>
-      </p:sp>
-      <p:sp>
-        <p:nvSpPr>
-          <p:cNvPr id="9" name="Text 7"/>
           <p:cNvSpPr/>
           <p:nvPr/>
         </p:nvSpPr>
@@ -15758,7 +16826,7 @@
                 <a:ea typeface="Noto Sans KR" pitchFamily="34" charset="-122"/>
                 <a:cs typeface="Noto Sans KR" pitchFamily="34" charset="-120"/>
               </a:rPr>
-              <a:t>9 / 31</a:t>
+              <a:t>9 / 34</a:t>
             </a:r>
             <a:endParaRPr lang="en-US" sz="900" dirty="0"/>
           </a:p>

--- a/ppt/b2g_day1_setup.pptx
+++ b/ppt/b2g_day1_setup.pptx
@@ -12640,7 +12640,7 @@
                 <a:ea typeface="Noto Sans KR" pitchFamily="34" charset="-122"/>
                 <a:cs typeface="Noto Sans KR" pitchFamily="34" charset="-120"/>
               </a:rPr>
-              <a:t>· 버전 구분(v1/v2) 안 함 — 폴더(day1/, day2/)로 히스토리 관리</a:t>
+              <a:t>· 4회차 내내 같은 CLAUDE.md 한 파일을 누적해서 사용</a:t>
             </a:r>
             <a:endParaRPr lang="en-US" sz="1700" dirty="0"/>
           </a:p>
@@ -16069,7 +16069,7 @@
                 <a:ea typeface="Noto Sans KR" pitchFamily="34" charset="-122"/>
                 <a:cs typeface="Noto Sans KR" pitchFamily="34" charset="-120"/>
               </a:rPr>
-              <a:t>· 데이터 : 출처에서 직접 다운로드</a:t>
+              <a:t>· 오늘 쓸 데이터 — 서울 미세먼지 (출처에서 직접 다운로드)</a:t>
             </a:r>
             <a:endParaRPr lang="en-US" sz="1700" dirty="0"/>
           </a:p>
@@ -16089,7 +16089,7 @@
                 <a:ea typeface="Noto Sans KR" pitchFamily="34" charset="-122"/>
                 <a:cs typeface="Noto Sans KR" pitchFamily="34" charset="-120"/>
               </a:rPr>
-              <a:t>  - 미세먼지·따릉이·지하철 → 서울 열린데이터광장</a:t>
+              <a:t>  서울 열린데이터광장 OA-2218 (일별 평균 대기환경 정보)</a:t>
             </a:r>
             <a:endParaRPr lang="en-US" sz="1700" dirty="0"/>
           </a:p>
@@ -16109,7 +16109,7 @@
                 <a:ea typeface="Noto Sans KR" pitchFamily="34" charset="-122"/>
                 <a:cs typeface="Noto Sans KR" pitchFamily="34" charset="-120"/>
               </a:rPr>
-              <a:t>  - 날씨 → 기상자료개방포털  ·  검색량 → 네이버 데이터랩·구글 트렌드</a:t>
+              <a:t>  https://data.seoul.go.kr/dataList/OA-2218/S/1/datasetView.do</a:t>
             </a:r>
             <a:endParaRPr lang="en-US" sz="1700" dirty="0"/>
           </a:p>
@@ -16129,7 +16129,7 @@
                 <a:ea typeface="Noto Sans KR" pitchFamily="34" charset="-122"/>
                 <a:cs typeface="Noto Sans KR" pitchFamily="34" charset="-120"/>
               </a:rPr>
-              <a:t>· 시연 프롬프트: PPT 코드 블록을 그대로 복사</a:t>
+              <a:t>  "파일" 탭 → 2024년·2025년 각각 [다운로드]</a:t>
             </a:r>
             <a:endParaRPr lang="en-US" sz="1700" dirty="0"/>
           </a:p>
@@ -16149,7 +16149,76 @@
                 <a:ea typeface="Noto Sans KR" pitchFamily="34" charset="-122"/>
                 <a:cs typeface="Noto Sans KR" pitchFamily="34" charset="-120"/>
               </a:rPr>
-              <a:t>· 미션 제출: 인프런/운영 채널에 결과(PNG · CLAUDE.md) 업로드</a:t>
+              <a:t>  받아지는 파일명: 기간별_일평균_대기환경_정보_YYYY년.csv</a:t>
+            </a:r>
+            <a:endParaRPr lang="en-US" sz="1700" dirty="0"/>
+          </a:p>
+          <a:p>
+            <a:pPr indent="0" marL="0">
+              <a:lnSpc>
+                <a:spcPct val="155000"/>
+              </a:lnSpc>
+              <a:buNone/>
+            </a:pPr>
+            <a:endParaRPr lang="en-US" sz="1700" dirty="0"/>
+          </a:p>
+          <a:p>
+            <a:pPr indent="0" marL="0">
+              <a:lnSpc>
+                <a:spcPct val="155000"/>
+              </a:lnSpc>
+              <a:buNone/>
+            </a:pPr>
+            <a:r>
+              <a:rPr lang="en-US" sz="1700" dirty="0">
+                <a:solidFill>
+                  <a:srgbClr val="4A5568"/>
+                </a:solidFill>
+                <a:latin typeface="Noto Sans KR" pitchFamily="34" charset="0"/>
+                <a:ea typeface="Noto Sans KR" pitchFamily="34" charset="-122"/>
+                <a:cs typeface="Noto Sans KR" pitchFamily="34" charset="-120"/>
+              </a:rPr>
+              <a:t>· 추가 결합 데이터(따릉이·지하철·날씨·언급량)는 Day2에서 같이</a:t>
+            </a:r>
+            <a:endParaRPr lang="en-US" sz="1700" dirty="0"/>
+          </a:p>
+          <a:p>
+            <a:pPr indent="0" marL="0">
+              <a:lnSpc>
+                <a:spcPct val="155000"/>
+              </a:lnSpc>
+              <a:buNone/>
+            </a:pPr>
+            <a:r>
+              <a:rPr lang="en-US" sz="1700" dirty="0">
+                <a:solidFill>
+                  <a:srgbClr val="4A5568"/>
+                </a:solidFill>
+                <a:latin typeface="Noto Sans KR" pitchFamily="34" charset="0"/>
+                <a:ea typeface="Noto Sans KR" pitchFamily="34" charset="-122"/>
+                <a:cs typeface="Noto Sans KR" pitchFamily="34" charset="-120"/>
+              </a:rPr>
+              <a:t>· 시연 프롬프트: PPT 코드 블록 그대로 복사</a:t>
+            </a:r>
+            <a:endParaRPr lang="en-US" sz="1700" dirty="0"/>
+          </a:p>
+          <a:p>
+            <a:pPr indent="0" marL="0">
+              <a:lnSpc>
+                <a:spcPct val="155000"/>
+              </a:lnSpc>
+              <a:buNone/>
+            </a:pPr>
+            <a:r>
+              <a:rPr lang="en-US" sz="1700" dirty="0">
+                <a:solidFill>
+                  <a:srgbClr val="4A5568"/>
+                </a:solidFill>
+                <a:latin typeface="Noto Sans KR" pitchFamily="34" charset="0"/>
+                <a:ea typeface="Noto Sans KR" pitchFamily="34" charset="-122"/>
+                <a:cs typeface="Noto Sans KR" pitchFamily="34" charset="-120"/>
+              </a:rPr>
+              <a:t>· 미션 제출: 인프런/운영 채널에 PNG · CLAUDE.md 업로드</a:t>
             </a:r>
             <a:endParaRPr lang="en-US" sz="1700" dirty="0"/>
           </a:p>
